--- a/examples/pitch-lingxi/灵犀会议机-天使轮路演.pptx
+++ b/examples/pitch-lingxi/灵犀会议机-天使轮路演.pptx
@@ -2340,6 +2340,254 @@
   <p:clrMapOvr>
     <a:masterClrMapping/>
   </p:clrMapOvr>
+  <p:transition spd="med">
+    <p:fade/>
+  </p:transition>
+  <p:timing>
+    <p:tnLst>
+      <p:par>
+        <p:cTn id="1" dur="indefinite" restart="never" nodeType="tmRoot">
+          <p:childTnLst>
+            <p:seq concurrent="1" nextAc="seek">
+              <p:cTn id="2" dur="indefinite" nodeType="mainSeq">
+                <p:childTnLst>
+                  <p:par>
+                    <p:cTn id="3" fill="hold">
+                      <p:stCondLst>
+                        <p:cond delay="indefinite"/>
+                        <p:cond evt="onBegin" delay="0">
+                          <p:tn val="2"/>
+                        </p:cond>
+                      </p:stCondLst>
+                      <p:childTnLst>
+                        <p:par>
+                          <p:cTn id="4" fill="hold">
+                            <p:stCondLst>
+                              <p:cond delay="0"/>
+                            </p:stCondLst>
+                            <p:childTnLst>
+                              <p:par>
+                                <p:cTn id="5" presetID="10" presetClass="entr" presetSubtype="0" fill="hold" grpId="0" nodeType="afterEffect">
+                                  <p:stCondLst>
+                                    <p:cond delay="0"/>
+                                  </p:stCondLst>
+                                  <p:childTnLst>
+                                    <p:set>
+                                      <p:cBhvr>
+                                        <p:cTn id="6" dur="1"/>
+                                        <p:tgtEl>
+                                          <p:spTgt spid="2"/>
+                                        </p:tgtEl>
+                                        <p:attrNameLst>
+                                          <p:attrName>style.visibility</p:attrName>
+                                        </p:attrNameLst>
+                                      </p:cBhvr>
+                                      <p:to>
+                                        <p:strVal val="visible"/>
+                                      </p:to>
+                                    </p:set>
+                                    <p:animEffect transition="in" filter="fade">
+                                      <p:cBhvr>
+                                        <p:cTn id="7" dur="500"/>
+                                        <p:tgtEl>
+                                          <p:spTgt spid="2"/>
+                                        </p:tgtEl>
+                                      </p:cBhvr>
+                                    </p:animEffect>
+                                  </p:childTnLst>
+                                </p:cTn>
+                              </p:par>
+                              <p:par>
+                                <p:cTn id="8" presetID="10" presetClass="entr" presetSubtype="0" fill="hold" grpId="0" nodeType="afterEffect">
+                                  <p:stCondLst>
+                                    <p:cond delay="700"/>
+                                  </p:stCondLst>
+                                  <p:childTnLst>
+                                    <p:set>
+                                      <p:cBhvr>
+                                        <p:cTn id="9" dur="1"/>
+                                        <p:tgtEl>
+                                          <p:spTgt spid="4"/>
+                                        </p:tgtEl>
+                                        <p:attrNameLst>
+                                          <p:attrName>style.visibility</p:attrName>
+                                        </p:attrNameLst>
+                                      </p:cBhvr>
+                                      <p:to>
+                                        <p:strVal val="visible"/>
+                                      </p:to>
+                                    </p:set>
+                                    <p:animEffect transition="in" filter="fade">
+                                      <p:cBhvr>
+                                        <p:cTn id="10" dur="500"/>
+                                        <p:tgtEl>
+                                          <p:spTgt spid="4"/>
+                                        </p:tgtEl>
+                                      </p:cBhvr>
+                                    </p:animEffect>
+                                  </p:childTnLst>
+                                </p:cTn>
+                              </p:par>
+                              <p:par>
+                                <p:cTn id="11" presetID="10" presetClass="entr" presetSubtype="0" fill="hold" grpId="0" nodeType="afterEffect">
+                                  <p:stCondLst>
+                                    <p:cond delay="1600"/>
+                                  </p:stCondLst>
+                                  <p:childTnLst>
+                                    <p:set>
+                                      <p:cBhvr>
+                                        <p:cTn id="12" dur="1"/>
+                                        <p:tgtEl>
+                                          <p:spTgt spid="5"/>
+                                        </p:tgtEl>
+                                        <p:attrNameLst>
+                                          <p:attrName>style.visibility</p:attrName>
+                                        </p:attrNameLst>
+                                      </p:cBhvr>
+                                      <p:to>
+                                        <p:strVal val="visible"/>
+                                      </p:to>
+                                    </p:set>
+                                    <p:animEffect transition="in" filter="fade">
+                                      <p:cBhvr>
+                                        <p:cTn id="13" dur="500"/>
+                                        <p:tgtEl>
+                                          <p:spTgt spid="5"/>
+                                        </p:tgtEl>
+                                      </p:cBhvr>
+                                    </p:animEffect>
+                                  </p:childTnLst>
+                                </p:cTn>
+                              </p:par>
+                              <p:par>
+                                <p:cTn id="14" presetID="10" presetClass="entr" presetSubtype="0" fill="hold" grpId="0" nodeType="afterEffect">
+                                  <p:stCondLst>
+                                    <p:cond delay="2700"/>
+                                  </p:stCondLst>
+                                  <p:childTnLst>
+                                    <p:set>
+                                      <p:cBhvr>
+                                        <p:cTn id="15" dur="1"/>
+                                        <p:tgtEl>
+                                          <p:spTgt spid="6"/>
+                                        </p:tgtEl>
+                                        <p:attrNameLst>
+                                          <p:attrName>style.visibility</p:attrName>
+                                        </p:attrNameLst>
+                                      </p:cBhvr>
+                                      <p:to>
+                                        <p:strVal val="visible"/>
+                                      </p:to>
+                                    </p:set>
+                                    <p:animEffect transition="in" filter="fade">
+                                      <p:cBhvr>
+                                        <p:cTn id="16" dur="500"/>
+                                        <p:tgtEl>
+                                          <p:spTgt spid="6"/>
+                                        </p:tgtEl>
+                                      </p:cBhvr>
+                                    </p:animEffect>
+                                  </p:childTnLst>
+                                </p:cTn>
+                              </p:par>
+                              <p:par>
+                                <p:cTn id="17" presetID="10" presetClass="entr" presetSubtype="0" fill="hold" grpId="0" nodeType="afterEffect">
+                                  <p:stCondLst>
+                                    <p:cond delay="4000"/>
+                                  </p:stCondLst>
+                                  <p:childTnLst>
+                                    <p:set>
+                                      <p:cBhvr>
+                                        <p:cTn id="18" dur="1"/>
+                                        <p:tgtEl>
+                                          <p:spTgt spid="3"/>
+                                        </p:tgtEl>
+                                        <p:attrNameLst>
+                                          <p:attrName>style.visibility</p:attrName>
+                                        </p:attrNameLst>
+                                      </p:cBhvr>
+                                      <p:to>
+                                        <p:strVal val="visible"/>
+                                      </p:to>
+                                    </p:set>
+                                    <p:animEffect transition="in" filter="fade">
+                                      <p:cBhvr>
+                                        <p:cTn id="19" dur="500"/>
+                                        <p:tgtEl>
+                                          <p:spTgt spid="3"/>
+                                        </p:tgtEl>
+                                      </p:cBhvr>
+                                    </p:animEffect>
+                                  </p:childTnLst>
+                                </p:cTn>
+                              </p:par>
+                              <p:par>
+                                <p:cTn id="20" presetID="10" presetClass="entr" presetSubtype="0" fill="hold" grpId="0" nodeType="afterEffect">
+                                  <p:stCondLst>
+                                    <p:cond delay="5500"/>
+                                  </p:stCondLst>
+                                  <p:childTnLst>
+                                    <p:set>
+                                      <p:cBhvr>
+                                        <p:cTn id="21" dur="1"/>
+                                        <p:tgtEl>
+                                          <p:spTgt spid="7"/>
+                                        </p:tgtEl>
+                                        <p:attrNameLst>
+                                          <p:attrName>style.visibility</p:attrName>
+                                        </p:attrNameLst>
+                                      </p:cBhvr>
+                                      <p:to>
+                                        <p:strVal val="visible"/>
+                                      </p:to>
+                                    </p:set>
+                                    <p:animEffect transition="in" filter="fade">
+                                      <p:cBhvr>
+                                        <p:cTn id="22" dur="500"/>
+                                        <p:tgtEl>
+                                          <p:spTgt spid="7"/>
+                                        </p:tgtEl>
+                                      </p:cBhvr>
+                                    </p:animEffect>
+                                  </p:childTnLst>
+                                </p:cTn>
+                              </p:par>
+                            </p:childTnLst>
+                          </p:cTn>
+                        </p:par>
+                      </p:childTnLst>
+                    </p:cTn>
+                  </p:par>
+                </p:childTnLst>
+              </p:cTn>
+              <p:prevCondLst>
+                <p:cond evt="onPrev" delay="0">
+                  <p:tgtEl>
+                    <p:sldTgt/>
+                  </p:tgtEl>
+                </p:cond>
+              </p:prevCondLst>
+              <p:nextCondLst>
+                <p:cond evt="onNext" delay="0">
+                  <p:tgtEl>
+                    <p:sldTgt/>
+                  </p:tgtEl>
+                </p:cond>
+              </p:nextCondLst>
+            </p:seq>
+          </p:childTnLst>
+        </p:cTn>
+      </p:par>
+    </p:tnLst>
+    <p:bldLst>
+      <p:bldP spid="2" grpId="0"/>
+      <p:bldP spid="4" grpId="0"/>
+      <p:bldP spid="5" grpId="0"/>
+      <p:bldP spid="6" grpId="0"/>
+      <p:bldP spid="3" grpId="0"/>
+      <p:bldP spid="7" grpId="0"/>
+    </p:bldLst>
+  </p:timing>
 </p:sld>
 </file>
 
@@ -3099,6 +3347,1532 @@
   <p:clrMapOvr>
     <a:masterClrMapping/>
   </p:clrMapOvr>
+  <p:transition spd="med">
+    <p:fade/>
+  </p:transition>
+  <p:timing>
+    <p:tnLst>
+      <p:par>
+        <p:cTn id="1" dur="indefinite" restart="never" nodeType="tmRoot">
+          <p:childTnLst>
+            <p:seq concurrent="1" nextAc="seek">
+              <p:cTn id="2" dur="indefinite" nodeType="mainSeq">
+                <p:childTnLst>
+                  <p:par>
+                    <p:cTn id="3" fill="hold">
+                      <p:stCondLst>
+                        <p:cond delay="indefinite"/>
+                        <p:cond evt="onBegin" delay="0">
+                          <p:tn val="2"/>
+                        </p:cond>
+                      </p:stCondLst>
+                      <p:childTnLst>
+                        <p:par>
+                          <p:cTn id="4" fill="hold">
+                            <p:stCondLst>
+                              <p:cond delay="0"/>
+                            </p:stCondLst>
+                            <p:childTnLst>
+                              <p:par>
+                                <p:cTn id="5" presetID="2" presetClass="entr" presetSubtype="8" fill="hold" grpId="0" nodeType="afterEffect">
+                                  <p:stCondLst>
+                                    <p:cond delay="0"/>
+                                  </p:stCondLst>
+                                  <p:childTnLst>
+                                    <p:set>
+                                      <p:cBhvr>
+                                        <p:cTn id="6" dur="1"/>
+                                        <p:tgtEl>
+                                          <p:spTgt spid="2"/>
+                                        </p:tgtEl>
+                                        <p:attrNameLst>
+                                          <p:attrName>style.visibility</p:attrName>
+                                        </p:attrNameLst>
+                                      </p:cBhvr>
+                                      <p:to>
+                                        <p:strVal val="visible"/>
+                                      </p:to>
+                                    </p:set>
+                                    <p:anim calcmode="lin" valueType="num">
+                                      <p:cBhvr additive="base">
+                                        <p:cTn id="7" dur="400"/>
+                                        <p:tgtEl>
+                                          <p:spTgt spid="2"/>
+                                        </p:tgtEl>
+                                        <p:attrNameLst>
+                                          <p:attrName>ppt_y</p:attrName>
+                                        </p:attrNameLst>
+                                      </p:cBhvr>
+                                      <p:tavLst>
+                                        <p:tav tm="0">
+                                          <p:val>
+                                            <p:strVal val="#ppt_y"/>
+                                          </p:val>
+                                        </p:tav>
+                                        <p:tav tm="100000">
+                                          <p:val>
+                                            <p:strVal val="#ppt_y"/>
+                                          </p:val>
+                                        </p:tav>
+                                      </p:tavLst>
+                                    </p:anim>
+                                    <p:anim calcmode="lin" valueType="num">
+                                      <p:cBhvr additive="base">
+                                        <p:cTn id="8" dur="400"/>
+                                        <p:tgtEl>
+                                          <p:spTgt spid="2"/>
+                                        </p:tgtEl>
+                                        <p:attrNameLst>
+                                          <p:attrName>ppt_x</p:attrName>
+                                        </p:attrNameLst>
+                                      </p:cBhvr>
+                                      <p:tavLst>
+                                        <p:tav tm="0">
+                                          <p:val>
+                                            <p:strVal val="0-#ppt_w/2"/>
+                                          </p:val>
+                                        </p:tav>
+                                        <p:tav tm="100000">
+                                          <p:val>
+                                            <p:strVal val="#ppt_x"/>
+                                          </p:val>
+                                        </p:tav>
+                                      </p:tavLst>
+                                    </p:anim>
+                                  </p:childTnLst>
+                                </p:cTn>
+                              </p:par>
+                              <p:par>
+                                <p:cTn id="9" presetID="2" presetClass="entr" presetSubtype="8" fill="hold" grpId="0" nodeType="afterEffect">
+                                  <p:stCondLst>
+                                    <p:cond delay="520"/>
+                                  </p:stCondLst>
+                                  <p:childTnLst>
+                                    <p:set>
+                                      <p:cBhvr>
+                                        <p:cTn id="10" dur="1"/>
+                                        <p:tgtEl>
+                                          <p:spTgt spid="3"/>
+                                        </p:tgtEl>
+                                        <p:attrNameLst>
+                                          <p:attrName>style.visibility</p:attrName>
+                                        </p:attrNameLst>
+                                      </p:cBhvr>
+                                      <p:to>
+                                        <p:strVal val="visible"/>
+                                      </p:to>
+                                    </p:set>
+                                    <p:anim calcmode="lin" valueType="num">
+                                      <p:cBhvr additive="base">
+                                        <p:cTn id="11" dur="400"/>
+                                        <p:tgtEl>
+                                          <p:spTgt spid="3"/>
+                                        </p:tgtEl>
+                                        <p:attrNameLst>
+                                          <p:attrName>ppt_y</p:attrName>
+                                        </p:attrNameLst>
+                                      </p:cBhvr>
+                                      <p:tavLst>
+                                        <p:tav tm="0">
+                                          <p:val>
+                                            <p:strVal val="#ppt_y"/>
+                                          </p:val>
+                                        </p:tav>
+                                        <p:tav tm="100000">
+                                          <p:val>
+                                            <p:strVal val="#ppt_y"/>
+                                          </p:val>
+                                        </p:tav>
+                                      </p:tavLst>
+                                    </p:anim>
+                                    <p:anim calcmode="lin" valueType="num">
+                                      <p:cBhvr additive="base">
+                                        <p:cTn id="12" dur="400"/>
+                                        <p:tgtEl>
+                                          <p:spTgt spid="3"/>
+                                        </p:tgtEl>
+                                        <p:attrNameLst>
+                                          <p:attrName>ppt_x</p:attrName>
+                                        </p:attrNameLst>
+                                      </p:cBhvr>
+                                      <p:tavLst>
+                                        <p:tav tm="0">
+                                          <p:val>
+                                            <p:strVal val="0-#ppt_w/2"/>
+                                          </p:val>
+                                        </p:tav>
+                                        <p:tav tm="100000">
+                                          <p:val>
+                                            <p:strVal val="#ppt_x"/>
+                                          </p:val>
+                                        </p:tav>
+                                      </p:tavLst>
+                                    </p:anim>
+                                  </p:childTnLst>
+                                </p:cTn>
+                              </p:par>
+                              <p:par>
+                                <p:cTn id="13" presetID="2" presetClass="entr" presetSubtype="8" fill="hold" grpId="0" nodeType="afterEffect">
+                                  <p:stCondLst>
+                                    <p:cond delay="1160"/>
+                                  </p:stCondLst>
+                                  <p:childTnLst>
+                                    <p:set>
+                                      <p:cBhvr>
+                                        <p:cTn id="14" dur="1"/>
+                                        <p:tgtEl>
+                                          <p:spTgt spid="7"/>
+                                        </p:tgtEl>
+                                        <p:attrNameLst>
+                                          <p:attrName>style.visibility</p:attrName>
+                                        </p:attrNameLst>
+                                      </p:cBhvr>
+                                      <p:to>
+                                        <p:strVal val="visible"/>
+                                      </p:to>
+                                    </p:set>
+                                    <p:anim calcmode="lin" valueType="num">
+                                      <p:cBhvr additive="base">
+                                        <p:cTn id="15" dur="400"/>
+                                        <p:tgtEl>
+                                          <p:spTgt spid="7"/>
+                                        </p:tgtEl>
+                                        <p:attrNameLst>
+                                          <p:attrName>ppt_y</p:attrName>
+                                        </p:attrNameLst>
+                                      </p:cBhvr>
+                                      <p:tavLst>
+                                        <p:tav tm="0">
+                                          <p:val>
+                                            <p:strVal val="#ppt_y"/>
+                                          </p:val>
+                                        </p:tav>
+                                        <p:tav tm="100000">
+                                          <p:val>
+                                            <p:strVal val="#ppt_y"/>
+                                          </p:val>
+                                        </p:tav>
+                                      </p:tavLst>
+                                    </p:anim>
+                                    <p:anim calcmode="lin" valueType="num">
+                                      <p:cBhvr additive="base">
+                                        <p:cTn id="16" dur="400"/>
+                                        <p:tgtEl>
+                                          <p:spTgt spid="7"/>
+                                        </p:tgtEl>
+                                        <p:attrNameLst>
+                                          <p:attrName>ppt_x</p:attrName>
+                                        </p:attrNameLst>
+                                      </p:cBhvr>
+                                      <p:tavLst>
+                                        <p:tav tm="0">
+                                          <p:val>
+                                            <p:strVal val="0-#ppt_w/2"/>
+                                          </p:val>
+                                        </p:tav>
+                                        <p:tav tm="100000">
+                                          <p:val>
+                                            <p:strVal val="#ppt_x"/>
+                                          </p:val>
+                                        </p:tav>
+                                      </p:tavLst>
+                                    </p:anim>
+                                  </p:childTnLst>
+                                </p:cTn>
+                              </p:par>
+                              <p:par>
+                                <p:cTn id="17" presetID="2" presetClass="entr" presetSubtype="8" fill="hold" grpId="0" nodeType="afterEffect">
+                                  <p:stCondLst>
+                                    <p:cond delay="1920"/>
+                                  </p:stCondLst>
+                                  <p:childTnLst>
+                                    <p:set>
+                                      <p:cBhvr>
+                                        <p:cTn id="18" dur="1"/>
+                                        <p:tgtEl>
+                                          <p:spTgt spid="11"/>
+                                        </p:tgtEl>
+                                        <p:attrNameLst>
+                                          <p:attrName>style.visibility</p:attrName>
+                                        </p:attrNameLst>
+                                      </p:cBhvr>
+                                      <p:to>
+                                        <p:strVal val="visible"/>
+                                      </p:to>
+                                    </p:set>
+                                    <p:anim calcmode="lin" valueType="num">
+                                      <p:cBhvr additive="base">
+                                        <p:cTn id="19" dur="400"/>
+                                        <p:tgtEl>
+                                          <p:spTgt spid="11"/>
+                                        </p:tgtEl>
+                                        <p:attrNameLst>
+                                          <p:attrName>ppt_y</p:attrName>
+                                        </p:attrNameLst>
+                                      </p:cBhvr>
+                                      <p:tavLst>
+                                        <p:tav tm="0">
+                                          <p:val>
+                                            <p:strVal val="#ppt_y"/>
+                                          </p:val>
+                                        </p:tav>
+                                        <p:tav tm="100000">
+                                          <p:val>
+                                            <p:strVal val="#ppt_y"/>
+                                          </p:val>
+                                        </p:tav>
+                                      </p:tavLst>
+                                    </p:anim>
+                                    <p:anim calcmode="lin" valueType="num">
+                                      <p:cBhvr additive="base">
+                                        <p:cTn id="20" dur="400"/>
+                                        <p:tgtEl>
+                                          <p:spTgt spid="11"/>
+                                        </p:tgtEl>
+                                        <p:attrNameLst>
+                                          <p:attrName>ppt_x</p:attrName>
+                                        </p:attrNameLst>
+                                      </p:cBhvr>
+                                      <p:tavLst>
+                                        <p:tav tm="0">
+                                          <p:val>
+                                            <p:strVal val="0-#ppt_w/2"/>
+                                          </p:val>
+                                        </p:tav>
+                                        <p:tav tm="100000">
+                                          <p:val>
+                                            <p:strVal val="#ppt_x"/>
+                                          </p:val>
+                                        </p:tav>
+                                      </p:tavLst>
+                                    </p:anim>
+                                  </p:childTnLst>
+                                </p:cTn>
+                              </p:par>
+                              <p:par>
+                                <p:cTn id="21" presetID="2" presetClass="entr" presetSubtype="8" fill="hold" grpId="0" nodeType="afterEffect">
+                                  <p:stCondLst>
+                                    <p:cond delay="2800"/>
+                                  </p:stCondLst>
+                                  <p:childTnLst>
+                                    <p:set>
+                                      <p:cBhvr>
+                                        <p:cTn id="22" dur="1"/>
+                                        <p:tgtEl>
+                                          <p:spTgt spid="15"/>
+                                        </p:tgtEl>
+                                        <p:attrNameLst>
+                                          <p:attrName>style.visibility</p:attrName>
+                                        </p:attrNameLst>
+                                      </p:cBhvr>
+                                      <p:to>
+                                        <p:strVal val="visible"/>
+                                      </p:to>
+                                    </p:set>
+                                    <p:anim calcmode="lin" valueType="num">
+                                      <p:cBhvr additive="base">
+                                        <p:cTn id="23" dur="400"/>
+                                        <p:tgtEl>
+                                          <p:spTgt spid="15"/>
+                                        </p:tgtEl>
+                                        <p:attrNameLst>
+                                          <p:attrName>ppt_y</p:attrName>
+                                        </p:attrNameLst>
+                                      </p:cBhvr>
+                                      <p:tavLst>
+                                        <p:tav tm="0">
+                                          <p:val>
+                                            <p:strVal val="#ppt_y"/>
+                                          </p:val>
+                                        </p:tav>
+                                        <p:tav tm="100000">
+                                          <p:val>
+                                            <p:strVal val="#ppt_y"/>
+                                          </p:val>
+                                        </p:tav>
+                                      </p:tavLst>
+                                    </p:anim>
+                                    <p:anim calcmode="lin" valueType="num">
+                                      <p:cBhvr additive="base">
+                                        <p:cTn id="24" dur="400"/>
+                                        <p:tgtEl>
+                                          <p:spTgt spid="15"/>
+                                        </p:tgtEl>
+                                        <p:attrNameLst>
+                                          <p:attrName>ppt_x</p:attrName>
+                                        </p:attrNameLst>
+                                      </p:cBhvr>
+                                      <p:tavLst>
+                                        <p:tav tm="0">
+                                          <p:val>
+                                            <p:strVal val="0-#ppt_w/2"/>
+                                          </p:val>
+                                        </p:tav>
+                                        <p:tav tm="100000">
+                                          <p:val>
+                                            <p:strVal val="#ppt_x"/>
+                                          </p:val>
+                                        </p:tav>
+                                      </p:tavLst>
+                                    </p:anim>
+                                  </p:childTnLst>
+                                </p:cTn>
+                              </p:par>
+                              <p:par>
+                                <p:cTn id="25" presetID="2" presetClass="entr" presetSubtype="8" fill="hold" grpId="0" nodeType="afterEffect">
+                                  <p:stCondLst>
+                                    <p:cond delay="3800"/>
+                                  </p:stCondLst>
+                                  <p:childTnLst>
+                                    <p:set>
+                                      <p:cBhvr>
+                                        <p:cTn id="26" dur="1"/>
+                                        <p:tgtEl>
+                                          <p:spTgt spid="19"/>
+                                        </p:tgtEl>
+                                        <p:attrNameLst>
+                                          <p:attrName>style.visibility</p:attrName>
+                                        </p:attrNameLst>
+                                      </p:cBhvr>
+                                      <p:to>
+                                        <p:strVal val="visible"/>
+                                      </p:to>
+                                    </p:set>
+                                    <p:anim calcmode="lin" valueType="num">
+                                      <p:cBhvr additive="base">
+                                        <p:cTn id="27" dur="400"/>
+                                        <p:tgtEl>
+                                          <p:spTgt spid="19"/>
+                                        </p:tgtEl>
+                                        <p:attrNameLst>
+                                          <p:attrName>ppt_y</p:attrName>
+                                        </p:attrNameLst>
+                                      </p:cBhvr>
+                                      <p:tavLst>
+                                        <p:tav tm="0">
+                                          <p:val>
+                                            <p:strVal val="#ppt_y"/>
+                                          </p:val>
+                                        </p:tav>
+                                        <p:tav tm="100000">
+                                          <p:val>
+                                            <p:strVal val="#ppt_y"/>
+                                          </p:val>
+                                        </p:tav>
+                                      </p:tavLst>
+                                    </p:anim>
+                                    <p:anim calcmode="lin" valueType="num">
+                                      <p:cBhvr additive="base">
+                                        <p:cTn id="28" dur="400"/>
+                                        <p:tgtEl>
+                                          <p:spTgt spid="19"/>
+                                        </p:tgtEl>
+                                        <p:attrNameLst>
+                                          <p:attrName>ppt_x</p:attrName>
+                                        </p:attrNameLst>
+                                      </p:cBhvr>
+                                      <p:tavLst>
+                                        <p:tav tm="0">
+                                          <p:val>
+                                            <p:strVal val="0-#ppt_w/2"/>
+                                          </p:val>
+                                        </p:tav>
+                                        <p:tav tm="100000">
+                                          <p:val>
+                                            <p:strVal val="#ppt_x"/>
+                                          </p:val>
+                                        </p:tav>
+                                      </p:tavLst>
+                                    </p:anim>
+                                  </p:childTnLst>
+                                </p:cTn>
+                              </p:par>
+                              <p:par>
+                                <p:cTn id="29" presetID="2" presetClass="entr" presetSubtype="8" fill="hold" grpId="0" nodeType="afterEffect">
+                                  <p:stCondLst>
+                                    <p:cond delay="4920"/>
+                                  </p:stCondLst>
+                                  <p:childTnLst>
+                                    <p:set>
+                                      <p:cBhvr>
+                                        <p:cTn id="30" dur="1"/>
+                                        <p:tgtEl>
+                                          <p:spTgt spid="6"/>
+                                        </p:tgtEl>
+                                        <p:attrNameLst>
+                                          <p:attrName>style.visibility</p:attrName>
+                                        </p:attrNameLst>
+                                      </p:cBhvr>
+                                      <p:to>
+                                        <p:strVal val="visible"/>
+                                      </p:to>
+                                    </p:set>
+                                    <p:anim calcmode="lin" valueType="num">
+                                      <p:cBhvr additive="base">
+                                        <p:cTn id="31" dur="400"/>
+                                        <p:tgtEl>
+                                          <p:spTgt spid="6"/>
+                                        </p:tgtEl>
+                                        <p:attrNameLst>
+                                          <p:attrName>ppt_y</p:attrName>
+                                        </p:attrNameLst>
+                                      </p:cBhvr>
+                                      <p:tavLst>
+                                        <p:tav tm="0">
+                                          <p:val>
+                                            <p:strVal val="#ppt_y"/>
+                                          </p:val>
+                                        </p:tav>
+                                        <p:tav tm="100000">
+                                          <p:val>
+                                            <p:strVal val="#ppt_y"/>
+                                          </p:val>
+                                        </p:tav>
+                                      </p:tavLst>
+                                    </p:anim>
+                                    <p:anim calcmode="lin" valueType="num">
+                                      <p:cBhvr additive="base">
+                                        <p:cTn id="32" dur="400"/>
+                                        <p:tgtEl>
+                                          <p:spTgt spid="6"/>
+                                        </p:tgtEl>
+                                        <p:attrNameLst>
+                                          <p:attrName>ppt_x</p:attrName>
+                                        </p:attrNameLst>
+                                      </p:cBhvr>
+                                      <p:tavLst>
+                                        <p:tav tm="0">
+                                          <p:val>
+                                            <p:strVal val="0-#ppt_w/2"/>
+                                          </p:val>
+                                        </p:tav>
+                                        <p:tav tm="100000">
+                                          <p:val>
+                                            <p:strVal val="#ppt_x"/>
+                                          </p:val>
+                                        </p:tav>
+                                      </p:tavLst>
+                                    </p:anim>
+                                  </p:childTnLst>
+                                </p:cTn>
+                              </p:par>
+                              <p:par>
+                                <p:cTn id="33" presetID="2" presetClass="entr" presetSubtype="8" fill="hold" grpId="0" nodeType="afterEffect">
+                                  <p:stCondLst>
+                                    <p:cond delay="6160"/>
+                                  </p:stCondLst>
+                                  <p:childTnLst>
+                                    <p:set>
+                                      <p:cBhvr>
+                                        <p:cTn id="34" dur="1"/>
+                                        <p:tgtEl>
+                                          <p:spTgt spid="10"/>
+                                        </p:tgtEl>
+                                        <p:attrNameLst>
+                                          <p:attrName>style.visibility</p:attrName>
+                                        </p:attrNameLst>
+                                      </p:cBhvr>
+                                      <p:to>
+                                        <p:strVal val="visible"/>
+                                      </p:to>
+                                    </p:set>
+                                    <p:anim calcmode="lin" valueType="num">
+                                      <p:cBhvr additive="base">
+                                        <p:cTn id="35" dur="400"/>
+                                        <p:tgtEl>
+                                          <p:spTgt spid="10"/>
+                                        </p:tgtEl>
+                                        <p:attrNameLst>
+                                          <p:attrName>ppt_y</p:attrName>
+                                        </p:attrNameLst>
+                                      </p:cBhvr>
+                                      <p:tavLst>
+                                        <p:tav tm="0">
+                                          <p:val>
+                                            <p:strVal val="#ppt_y"/>
+                                          </p:val>
+                                        </p:tav>
+                                        <p:tav tm="100000">
+                                          <p:val>
+                                            <p:strVal val="#ppt_y"/>
+                                          </p:val>
+                                        </p:tav>
+                                      </p:tavLst>
+                                    </p:anim>
+                                    <p:anim calcmode="lin" valueType="num">
+                                      <p:cBhvr additive="base">
+                                        <p:cTn id="36" dur="400"/>
+                                        <p:tgtEl>
+                                          <p:spTgt spid="10"/>
+                                        </p:tgtEl>
+                                        <p:attrNameLst>
+                                          <p:attrName>ppt_x</p:attrName>
+                                        </p:attrNameLst>
+                                      </p:cBhvr>
+                                      <p:tavLst>
+                                        <p:tav tm="0">
+                                          <p:val>
+                                            <p:strVal val="0-#ppt_w/2"/>
+                                          </p:val>
+                                        </p:tav>
+                                        <p:tav tm="100000">
+                                          <p:val>
+                                            <p:strVal val="#ppt_x"/>
+                                          </p:val>
+                                        </p:tav>
+                                      </p:tavLst>
+                                    </p:anim>
+                                  </p:childTnLst>
+                                </p:cTn>
+                              </p:par>
+                              <p:par>
+                                <p:cTn id="37" presetID="2" presetClass="entr" presetSubtype="8" fill="hold" grpId="0" nodeType="afterEffect">
+                                  <p:stCondLst>
+                                    <p:cond delay="7520"/>
+                                  </p:stCondLst>
+                                  <p:childTnLst>
+                                    <p:set>
+                                      <p:cBhvr>
+                                        <p:cTn id="38" dur="1"/>
+                                        <p:tgtEl>
+                                          <p:spTgt spid="14"/>
+                                        </p:tgtEl>
+                                        <p:attrNameLst>
+                                          <p:attrName>style.visibility</p:attrName>
+                                        </p:attrNameLst>
+                                      </p:cBhvr>
+                                      <p:to>
+                                        <p:strVal val="visible"/>
+                                      </p:to>
+                                    </p:set>
+                                    <p:anim calcmode="lin" valueType="num">
+                                      <p:cBhvr additive="base">
+                                        <p:cTn id="39" dur="400"/>
+                                        <p:tgtEl>
+                                          <p:spTgt spid="14"/>
+                                        </p:tgtEl>
+                                        <p:attrNameLst>
+                                          <p:attrName>ppt_y</p:attrName>
+                                        </p:attrNameLst>
+                                      </p:cBhvr>
+                                      <p:tavLst>
+                                        <p:tav tm="0">
+                                          <p:val>
+                                            <p:strVal val="#ppt_y"/>
+                                          </p:val>
+                                        </p:tav>
+                                        <p:tav tm="100000">
+                                          <p:val>
+                                            <p:strVal val="#ppt_y"/>
+                                          </p:val>
+                                        </p:tav>
+                                      </p:tavLst>
+                                    </p:anim>
+                                    <p:anim calcmode="lin" valueType="num">
+                                      <p:cBhvr additive="base">
+                                        <p:cTn id="40" dur="400"/>
+                                        <p:tgtEl>
+                                          <p:spTgt spid="14"/>
+                                        </p:tgtEl>
+                                        <p:attrNameLst>
+                                          <p:attrName>ppt_x</p:attrName>
+                                        </p:attrNameLst>
+                                      </p:cBhvr>
+                                      <p:tavLst>
+                                        <p:tav tm="0">
+                                          <p:val>
+                                            <p:strVal val="0-#ppt_w/2"/>
+                                          </p:val>
+                                        </p:tav>
+                                        <p:tav tm="100000">
+                                          <p:val>
+                                            <p:strVal val="#ppt_x"/>
+                                          </p:val>
+                                        </p:tav>
+                                      </p:tavLst>
+                                    </p:anim>
+                                  </p:childTnLst>
+                                </p:cTn>
+                              </p:par>
+                              <p:par>
+                                <p:cTn id="41" presetID="2" presetClass="entr" presetSubtype="8" fill="hold" grpId="0" nodeType="afterEffect">
+                                  <p:stCondLst>
+                                    <p:cond delay="9000"/>
+                                  </p:stCondLst>
+                                  <p:childTnLst>
+                                    <p:set>
+                                      <p:cBhvr>
+                                        <p:cTn id="42" dur="1"/>
+                                        <p:tgtEl>
+                                          <p:spTgt spid="18"/>
+                                        </p:tgtEl>
+                                        <p:attrNameLst>
+                                          <p:attrName>style.visibility</p:attrName>
+                                        </p:attrNameLst>
+                                      </p:cBhvr>
+                                      <p:to>
+                                        <p:strVal val="visible"/>
+                                      </p:to>
+                                    </p:set>
+                                    <p:anim calcmode="lin" valueType="num">
+                                      <p:cBhvr additive="base">
+                                        <p:cTn id="43" dur="400"/>
+                                        <p:tgtEl>
+                                          <p:spTgt spid="18"/>
+                                        </p:tgtEl>
+                                        <p:attrNameLst>
+                                          <p:attrName>ppt_y</p:attrName>
+                                        </p:attrNameLst>
+                                      </p:cBhvr>
+                                      <p:tavLst>
+                                        <p:tav tm="0">
+                                          <p:val>
+                                            <p:strVal val="#ppt_y"/>
+                                          </p:val>
+                                        </p:tav>
+                                        <p:tav tm="100000">
+                                          <p:val>
+                                            <p:strVal val="#ppt_y"/>
+                                          </p:val>
+                                        </p:tav>
+                                      </p:tavLst>
+                                    </p:anim>
+                                    <p:anim calcmode="lin" valueType="num">
+                                      <p:cBhvr additive="base">
+                                        <p:cTn id="44" dur="400"/>
+                                        <p:tgtEl>
+                                          <p:spTgt spid="18"/>
+                                        </p:tgtEl>
+                                        <p:attrNameLst>
+                                          <p:attrName>ppt_x</p:attrName>
+                                        </p:attrNameLst>
+                                      </p:cBhvr>
+                                      <p:tavLst>
+                                        <p:tav tm="0">
+                                          <p:val>
+                                            <p:strVal val="0-#ppt_w/2"/>
+                                          </p:val>
+                                        </p:tav>
+                                        <p:tav tm="100000">
+                                          <p:val>
+                                            <p:strVal val="#ppt_x"/>
+                                          </p:val>
+                                        </p:tav>
+                                      </p:tavLst>
+                                    </p:anim>
+                                  </p:childTnLst>
+                                </p:cTn>
+                              </p:par>
+                              <p:par>
+                                <p:cTn id="45" presetID="2" presetClass="entr" presetSubtype="8" fill="hold" grpId="0" nodeType="afterEffect">
+                                  <p:stCondLst>
+                                    <p:cond delay="10600"/>
+                                  </p:stCondLst>
+                                  <p:childTnLst>
+                                    <p:set>
+                                      <p:cBhvr>
+                                        <p:cTn id="46" dur="1"/>
+                                        <p:tgtEl>
+                                          <p:spTgt spid="5"/>
+                                        </p:tgtEl>
+                                        <p:attrNameLst>
+                                          <p:attrName>style.visibility</p:attrName>
+                                        </p:attrNameLst>
+                                      </p:cBhvr>
+                                      <p:to>
+                                        <p:strVal val="visible"/>
+                                      </p:to>
+                                    </p:set>
+                                    <p:anim calcmode="lin" valueType="num">
+                                      <p:cBhvr additive="base">
+                                        <p:cTn id="47" dur="400"/>
+                                        <p:tgtEl>
+                                          <p:spTgt spid="5"/>
+                                        </p:tgtEl>
+                                        <p:attrNameLst>
+                                          <p:attrName>ppt_y</p:attrName>
+                                        </p:attrNameLst>
+                                      </p:cBhvr>
+                                      <p:tavLst>
+                                        <p:tav tm="0">
+                                          <p:val>
+                                            <p:strVal val="#ppt_y"/>
+                                          </p:val>
+                                        </p:tav>
+                                        <p:tav tm="100000">
+                                          <p:val>
+                                            <p:strVal val="#ppt_y"/>
+                                          </p:val>
+                                        </p:tav>
+                                      </p:tavLst>
+                                    </p:anim>
+                                    <p:anim calcmode="lin" valueType="num">
+                                      <p:cBhvr additive="base">
+                                        <p:cTn id="48" dur="400"/>
+                                        <p:tgtEl>
+                                          <p:spTgt spid="5"/>
+                                        </p:tgtEl>
+                                        <p:attrNameLst>
+                                          <p:attrName>ppt_x</p:attrName>
+                                        </p:attrNameLst>
+                                      </p:cBhvr>
+                                      <p:tavLst>
+                                        <p:tav tm="0">
+                                          <p:val>
+                                            <p:strVal val="0-#ppt_w/2"/>
+                                          </p:val>
+                                        </p:tav>
+                                        <p:tav tm="100000">
+                                          <p:val>
+                                            <p:strVal val="#ppt_x"/>
+                                          </p:val>
+                                        </p:tav>
+                                      </p:tavLst>
+                                    </p:anim>
+                                  </p:childTnLst>
+                                </p:cTn>
+                              </p:par>
+                              <p:par>
+                                <p:cTn id="49" presetID="2" presetClass="entr" presetSubtype="8" fill="hold" grpId="0" nodeType="afterEffect">
+                                  <p:stCondLst>
+                                    <p:cond delay="12320"/>
+                                  </p:stCondLst>
+                                  <p:childTnLst>
+                                    <p:set>
+                                      <p:cBhvr>
+                                        <p:cTn id="50" dur="1"/>
+                                        <p:tgtEl>
+                                          <p:spTgt spid="8"/>
+                                        </p:tgtEl>
+                                        <p:attrNameLst>
+                                          <p:attrName>style.visibility</p:attrName>
+                                        </p:attrNameLst>
+                                      </p:cBhvr>
+                                      <p:to>
+                                        <p:strVal val="visible"/>
+                                      </p:to>
+                                    </p:set>
+                                    <p:anim calcmode="lin" valueType="num">
+                                      <p:cBhvr additive="base">
+                                        <p:cTn id="51" dur="400"/>
+                                        <p:tgtEl>
+                                          <p:spTgt spid="8"/>
+                                        </p:tgtEl>
+                                        <p:attrNameLst>
+                                          <p:attrName>ppt_y</p:attrName>
+                                        </p:attrNameLst>
+                                      </p:cBhvr>
+                                      <p:tavLst>
+                                        <p:tav tm="0">
+                                          <p:val>
+                                            <p:strVal val="#ppt_y"/>
+                                          </p:val>
+                                        </p:tav>
+                                        <p:tav tm="100000">
+                                          <p:val>
+                                            <p:strVal val="#ppt_y"/>
+                                          </p:val>
+                                        </p:tav>
+                                      </p:tavLst>
+                                    </p:anim>
+                                    <p:anim calcmode="lin" valueType="num">
+                                      <p:cBhvr additive="base">
+                                        <p:cTn id="52" dur="400"/>
+                                        <p:tgtEl>
+                                          <p:spTgt spid="8"/>
+                                        </p:tgtEl>
+                                        <p:attrNameLst>
+                                          <p:attrName>ppt_x</p:attrName>
+                                        </p:attrNameLst>
+                                      </p:cBhvr>
+                                      <p:tavLst>
+                                        <p:tav tm="0">
+                                          <p:val>
+                                            <p:strVal val="0-#ppt_w/2"/>
+                                          </p:val>
+                                        </p:tav>
+                                        <p:tav tm="100000">
+                                          <p:val>
+                                            <p:strVal val="#ppt_x"/>
+                                          </p:val>
+                                        </p:tav>
+                                      </p:tavLst>
+                                    </p:anim>
+                                  </p:childTnLst>
+                                </p:cTn>
+                              </p:par>
+                              <p:par>
+                                <p:cTn id="53" presetID="2" presetClass="entr" presetSubtype="8" fill="hold" grpId="0" nodeType="afterEffect">
+                                  <p:stCondLst>
+                                    <p:cond delay="14160"/>
+                                  </p:stCondLst>
+                                  <p:childTnLst>
+                                    <p:set>
+                                      <p:cBhvr>
+                                        <p:cTn id="54" dur="1"/>
+                                        <p:tgtEl>
+                                          <p:spTgt spid="12"/>
+                                        </p:tgtEl>
+                                        <p:attrNameLst>
+                                          <p:attrName>style.visibility</p:attrName>
+                                        </p:attrNameLst>
+                                      </p:cBhvr>
+                                      <p:to>
+                                        <p:strVal val="visible"/>
+                                      </p:to>
+                                    </p:set>
+                                    <p:anim calcmode="lin" valueType="num">
+                                      <p:cBhvr additive="base">
+                                        <p:cTn id="55" dur="400"/>
+                                        <p:tgtEl>
+                                          <p:spTgt spid="12"/>
+                                        </p:tgtEl>
+                                        <p:attrNameLst>
+                                          <p:attrName>ppt_y</p:attrName>
+                                        </p:attrNameLst>
+                                      </p:cBhvr>
+                                      <p:tavLst>
+                                        <p:tav tm="0">
+                                          <p:val>
+                                            <p:strVal val="#ppt_y"/>
+                                          </p:val>
+                                        </p:tav>
+                                        <p:tav tm="100000">
+                                          <p:val>
+                                            <p:strVal val="#ppt_y"/>
+                                          </p:val>
+                                        </p:tav>
+                                      </p:tavLst>
+                                    </p:anim>
+                                    <p:anim calcmode="lin" valueType="num">
+                                      <p:cBhvr additive="base">
+                                        <p:cTn id="56" dur="400"/>
+                                        <p:tgtEl>
+                                          <p:spTgt spid="12"/>
+                                        </p:tgtEl>
+                                        <p:attrNameLst>
+                                          <p:attrName>ppt_x</p:attrName>
+                                        </p:attrNameLst>
+                                      </p:cBhvr>
+                                      <p:tavLst>
+                                        <p:tav tm="0">
+                                          <p:val>
+                                            <p:strVal val="0-#ppt_w/2"/>
+                                          </p:val>
+                                        </p:tav>
+                                        <p:tav tm="100000">
+                                          <p:val>
+                                            <p:strVal val="#ppt_x"/>
+                                          </p:val>
+                                        </p:tav>
+                                      </p:tavLst>
+                                    </p:anim>
+                                  </p:childTnLst>
+                                </p:cTn>
+                              </p:par>
+                              <p:par>
+                                <p:cTn id="57" presetID="2" presetClass="entr" presetSubtype="8" fill="hold" grpId="0" nodeType="afterEffect">
+                                  <p:stCondLst>
+                                    <p:cond delay="16120"/>
+                                  </p:stCondLst>
+                                  <p:childTnLst>
+                                    <p:set>
+                                      <p:cBhvr>
+                                        <p:cTn id="58" dur="1"/>
+                                        <p:tgtEl>
+                                          <p:spTgt spid="16"/>
+                                        </p:tgtEl>
+                                        <p:attrNameLst>
+                                          <p:attrName>style.visibility</p:attrName>
+                                        </p:attrNameLst>
+                                      </p:cBhvr>
+                                      <p:to>
+                                        <p:strVal val="visible"/>
+                                      </p:to>
+                                    </p:set>
+                                    <p:anim calcmode="lin" valueType="num">
+                                      <p:cBhvr additive="base">
+                                        <p:cTn id="59" dur="400"/>
+                                        <p:tgtEl>
+                                          <p:spTgt spid="16"/>
+                                        </p:tgtEl>
+                                        <p:attrNameLst>
+                                          <p:attrName>ppt_y</p:attrName>
+                                        </p:attrNameLst>
+                                      </p:cBhvr>
+                                      <p:tavLst>
+                                        <p:tav tm="0">
+                                          <p:val>
+                                            <p:strVal val="#ppt_y"/>
+                                          </p:val>
+                                        </p:tav>
+                                        <p:tav tm="100000">
+                                          <p:val>
+                                            <p:strVal val="#ppt_y"/>
+                                          </p:val>
+                                        </p:tav>
+                                      </p:tavLst>
+                                    </p:anim>
+                                    <p:anim calcmode="lin" valueType="num">
+                                      <p:cBhvr additive="base">
+                                        <p:cTn id="60" dur="400"/>
+                                        <p:tgtEl>
+                                          <p:spTgt spid="16"/>
+                                        </p:tgtEl>
+                                        <p:attrNameLst>
+                                          <p:attrName>ppt_x</p:attrName>
+                                        </p:attrNameLst>
+                                      </p:cBhvr>
+                                      <p:tavLst>
+                                        <p:tav tm="0">
+                                          <p:val>
+                                            <p:strVal val="0-#ppt_w/2"/>
+                                          </p:val>
+                                        </p:tav>
+                                        <p:tav tm="100000">
+                                          <p:val>
+                                            <p:strVal val="#ppt_x"/>
+                                          </p:val>
+                                        </p:tav>
+                                      </p:tavLst>
+                                    </p:anim>
+                                  </p:childTnLst>
+                                </p:cTn>
+                              </p:par>
+                              <p:par>
+                                <p:cTn id="61" presetID="2" presetClass="entr" presetSubtype="8" fill="hold" grpId="0" nodeType="afterEffect">
+                                  <p:stCondLst>
+                                    <p:cond delay="18200"/>
+                                  </p:stCondLst>
+                                  <p:childTnLst>
+                                    <p:set>
+                                      <p:cBhvr>
+                                        <p:cTn id="62" dur="1"/>
+                                        <p:tgtEl>
+                                          <p:spTgt spid="20"/>
+                                        </p:tgtEl>
+                                        <p:attrNameLst>
+                                          <p:attrName>style.visibility</p:attrName>
+                                        </p:attrNameLst>
+                                      </p:cBhvr>
+                                      <p:to>
+                                        <p:strVal val="visible"/>
+                                      </p:to>
+                                    </p:set>
+                                    <p:anim calcmode="lin" valueType="num">
+                                      <p:cBhvr additive="base">
+                                        <p:cTn id="63" dur="400"/>
+                                        <p:tgtEl>
+                                          <p:spTgt spid="20"/>
+                                        </p:tgtEl>
+                                        <p:attrNameLst>
+                                          <p:attrName>ppt_y</p:attrName>
+                                        </p:attrNameLst>
+                                      </p:cBhvr>
+                                      <p:tavLst>
+                                        <p:tav tm="0">
+                                          <p:val>
+                                            <p:strVal val="#ppt_y"/>
+                                          </p:val>
+                                        </p:tav>
+                                        <p:tav tm="100000">
+                                          <p:val>
+                                            <p:strVal val="#ppt_y"/>
+                                          </p:val>
+                                        </p:tav>
+                                      </p:tavLst>
+                                    </p:anim>
+                                    <p:anim calcmode="lin" valueType="num">
+                                      <p:cBhvr additive="base">
+                                        <p:cTn id="64" dur="400"/>
+                                        <p:tgtEl>
+                                          <p:spTgt spid="20"/>
+                                        </p:tgtEl>
+                                        <p:attrNameLst>
+                                          <p:attrName>ppt_x</p:attrName>
+                                        </p:attrNameLst>
+                                      </p:cBhvr>
+                                      <p:tavLst>
+                                        <p:tav tm="0">
+                                          <p:val>
+                                            <p:strVal val="0-#ppt_w/2"/>
+                                          </p:val>
+                                        </p:tav>
+                                        <p:tav tm="100000">
+                                          <p:val>
+                                            <p:strVal val="#ppt_x"/>
+                                          </p:val>
+                                        </p:tav>
+                                      </p:tavLst>
+                                    </p:anim>
+                                  </p:childTnLst>
+                                </p:cTn>
+                              </p:par>
+                              <p:par>
+                                <p:cTn id="65" presetID="2" presetClass="entr" presetSubtype="8" fill="hold" grpId="0" nodeType="afterEffect">
+                                  <p:stCondLst>
+                                    <p:cond delay="20400"/>
+                                  </p:stCondLst>
+                                  <p:childTnLst>
+                                    <p:set>
+                                      <p:cBhvr>
+                                        <p:cTn id="66" dur="1"/>
+                                        <p:tgtEl>
+                                          <p:spTgt spid="9"/>
+                                        </p:tgtEl>
+                                        <p:attrNameLst>
+                                          <p:attrName>style.visibility</p:attrName>
+                                        </p:attrNameLst>
+                                      </p:cBhvr>
+                                      <p:to>
+                                        <p:strVal val="visible"/>
+                                      </p:to>
+                                    </p:set>
+                                    <p:anim calcmode="lin" valueType="num">
+                                      <p:cBhvr additive="base">
+                                        <p:cTn id="67" dur="400"/>
+                                        <p:tgtEl>
+                                          <p:spTgt spid="9"/>
+                                        </p:tgtEl>
+                                        <p:attrNameLst>
+                                          <p:attrName>ppt_y</p:attrName>
+                                        </p:attrNameLst>
+                                      </p:cBhvr>
+                                      <p:tavLst>
+                                        <p:tav tm="0">
+                                          <p:val>
+                                            <p:strVal val="#ppt_y"/>
+                                          </p:val>
+                                        </p:tav>
+                                        <p:tav tm="100000">
+                                          <p:val>
+                                            <p:strVal val="#ppt_y"/>
+                                          </p:val>
+                                        </p:tav>
+                                      </p:tavLst>
+                                    </p:anim>
+                                    <p:anim calcmode="lin" valueType="num">
+                                      <p:cBhvr additive="base">
+                                        <p:cTn id="68" dur="400"/>
+                                        <p:tgtEl>
+                                          <p:spTgt spid="9"/>
+                                        </p:tgtEl>
+                                        <p:attrNameLst>
+                                          <p:attrName>ppt_x</p:attrName>
+                                        </p:attrNameLst>
+                                      </p:cBhvr>
+                                      <p:tavLst>
+                                        <p:tav tm="0">
+                                          <p:val>
+                                            <p:strVal val="0-#ppt_w/2"/>
+                                          </p:val>
+                                        </p:tav>
+                                        <p:tav tm="100000">
+                                          <p:val>
+                                            <p:strVal val="#ppt_x"/>
+                                          </p:val>
+                                        </p:tav>
+                                      </p:tavLst>
+                                    </p:anim>
+                                  </p:childTnLst>
+                                </p:cTn>
+                              </p:par>
+                              <p:par>
+                                <p:cTn id="69" presetID="2" presetClass="entr" presetSubtype="8" fill="hold" grpId="0" nodeType="afterEffect">
+                                  <p:stCondLst>
+                                    <p:cond delay="22720"/>
+                                  </p:stCondLst>
+                                  <p:childTnLst>
+                                    <p:set>
+                                      <p:cBhvr>
+                                        <p:cTn id="70" dur="1"/>
+                                        <p:tgtEl>
+                                          <p:spTgt spid="13"/>
+                                        </p:tgtEl>
+                                        <p:attrNameLst>
+                                          <p:attrName>style.visibility</p:attrName>
+                                        </p:attrNameLst>
+                                      </p:cBhvr>
+                                      <p:to>
+                                        <p:strVal val="visible"/>
+                                      </p:to>
+                                    </p:set>
+                                    <p:anim calcmode="lin" valueType="num">
+                                      <p:cBhvr additive="base">
+                                        <p:cTn id="71" dur="400"/>
+                                        <p:tgtEl>
+                                          <p:spTgt spid="13"/>
+                                        </p:tgtEl>
+                                        <p:attrNameLst>
+                                          <p:attrName>ppt_y</p:attrName>
+                                        </p:attrNameLst>
+                                      </p:cBhvr>
+                                      <p:tavLst>
+                                        <p:tav tm="0">
+                                          <p:val>
+                                            <p:strVal val="#ppt_y"/>
+                                          </p:val>
+                                        </p:tav>
+                                        <p:tav tm="100000">
+                                          <p:val>
+                                            <p:strVal val="#ppt_y"/>
+                                          </p:val>
+                                        </p:tav>
+                                      </p:tavLst>
+                                    </p:anim>
+                                    <p:anim calcmode="lin" valueType="num">
+                                      <p:cBhvr additive="base">
+                                        <p:cTn id="72" dur="400"/>
+                                        <p:tgtEl>
+                                          <p:spTgt spid="13"/>
+                                        </p:tgtEl>
+                                        <p:attrNameLst>
+                                          <p:attrName>ppt_x</p:attrName>
+                                        </p:attrNameLst>
+                                      </p:cBhvr>
+                                      <p:tavLst>
+                                        <p:tav tm="0">
+                                          <p:val>
+                                            <p:strVal val="0-#ppt_w/2"/>
+                                          </p:val>
+                                        </p:tav>
+                                        <p:tav tm="100000">
+                                          <p:val>
+                                            <p:strVal val="#ppt_x"/>
+                                          </p:val>
+                                        </p:tav>
+                                      </p:tavLst>
+                                    </p:anim>
+                                  </p:childTnLst>
+                                </p:cTn>
+                              </p:par>
+                              <p:par>
+                                <p:cTn id="73" presetID="2" presetClass="entr" presetSubtype="8" fill="hold" grpId="0" nodeType="afterEffect">
+                                  <p:stCondLst>
+                                    <p:cond delay="25160"/>
+                                  </p:stCondLst>
+                                  <p:childTnLst>
+                                    <p:set>
+                                      <p:cBhvr>
+                                        <p:cTn id="74" dur="1"/>
+                                        <p:tgtEl>
+                                          <p:spTgt spid="17"/>
+                                        </p:tgtEl>
+                                        <p:attrNameLst>
+                                          <p:attrName>style.visibility</p:attrName>
+                                        </p:attrNameLst>
+                                      </p:cBhvr>
+                                      <p:to>
+                                        <p:strVal val="visible"/>
+                                      </p:to>
+                                    </p:set>
+                                    <p:anim calcmode="lin" valueType="num">
+                                      <p:cBhvr additive="base">
+                                        <p:cTn id="75" dur="400"/>
+                                        <p:tgtEl>
+                                          <p:spTgt spid="17"/>
+                                        </p:tgtEl>
+                                        <p:attrNameLst>
+                                          <p:attrName>ppt_y</p:attrName>
+                                        </p:attrNameLst>
+                                      </p:cBhvr>
+                                      <p:tavLst>
+                                        <p:tav tm="0">
+                                          <p:val>
+                                            <p:strVal val="#ppt_y"/>
+                                          </p:val>
+                                        </p:tav>
+                                        <p:tav tm="100000">
+                                          <p:val>
+                                            <p:strVal val="#ppt_y"/>
+                                          </p:val>
+                                        </p:tav>
+                                      </p:tavLst>
+                                    </p:anim>
+                                    <p:anim calcmode="lin" valueType="num">
+                                      <p:cBhvr additive="base">
+                                        <p:cTn id="76" dur="400"/>
+                                        <p:tgtEl>
+                                          <p:spTgt spid="17"/>
+                                        </p:tgtEl>
+                                        <p:attrNameLst>
+                                          <p:attrName>ppt_x</p:attrName>
+                                        </p:attrNameLst>
+                                      </p:cBhvr>
+                                      <p:tavLst>
+                                        <p:tav tm="0">
+                                          <p:val>
+                                            <p:strVal val="0-#ppt_w/2"/>
+                                          </p:val>
+                                        </p:tav>
+                                        <p:tav tm="100000">
+                                          <p:val>
+                                            <p:strVal val="#ppt_x"/>
+                                          </p:val>
+                                        </p:tav>
+                                      </p:tavLst>
+                                    </p:anim>
+                                  </p:childTnLst>
+                                </p:cTn>
+                              </p:par>
+                              <p:par>
+                                <p:cTn id="77" presetID="2" presetClass="entr" presetSubtype="8" fill="hold" grpId="0" nodeType="afterEffect">
+                                  <p:stCondLst>
+                                    <p:cond delay="27720"/>
+                                  </p:stCondLst>
+                                  <p:childTnLst>
+                                    <p:set>
+                                      <p:cBhvr>
+                                        <p:cTn id="78" dur="1"/>
+                                        <p:tgtEl>
+                                          <p:spTgt spid="21"/>
+                                        </p:tgtEl>
+                                        <p:attrNameLst>
+                                          <p:attrName>style.visibility</p:attrName>
+                                        </p:attrNameLst>
+                                      </p:cBhvr>
+                                      <p:to>
+                                        <p:strVal val="visible"/>
+                                      </p:to>
+                                    </p:set>
+                                    <p:anim calcmode="lin" valueType="num">
+                                      <p:cBhvr additive="base">
+                                        <p:cTn id="79" dur="400"/>
+                                        <p:tgtEl>
+                                          <p:spTgt spid="21"/>
+                                        </p:tgtEl>
+                                        <p:attrNameLst>
+                                          <p:attrName>ppt_y</p:attrName>
+                                        </p:attrNameLst>
+                                      </p:cBhvr>
+                                      <p:tavLst>
+                                        <p:tav tm="0">
+                                          <p:val>
+                                            <p:strVal val="#ppt_y"/>
+                                          </p:val>
+                                        </p:tav>
+                                        <p:tav tm="100000">
+                                          <p:val>
+                                            <p:strVal val="#ppt_y"/>
+                                          </p:val>
+                                        </p:tav>
+                                      </p:tavLst>
+                                    </p:anim>
+                                    <p:anim calcmode="lin" valueType="num">
+                                      <p:cBhvr additive="base">
+                                        <p:cTn id="80" dur="400"/>
+                                        <p:tgtEl>
+                                          <p:spTgt spid="21"/>
+                                        </p:tgtEl>
+                                        <p:attrNameLst>
+                                          <p:attrName>ppt_x</p:attrName>
+                                        </p:attrNameLst>
+                                      </p:cBhvr>
+                                      <p:tavLst>
+                                        <p:tav tm="0">
+                                          <p:val>
+                                            <p:strVal val="0-#ppt_w/2"/>
+                                          </p:val>
+                                        </p:tav>
+                                        <p:tav tm="100000">
+                                          <p:val>
+                                            <p:strVal val="#ppt_x"/>
+                                          </p:val>
+                                        </p:tav>
+                                      </p:tavLst>
+                                    </p:anim>
+                                  </p:childTnLst>
+                                </p:cTn>
+                              </p:par>
+                              <p:par>
+                                <p:cTn id="81" presetID="2" presetClass="entr" presetSubtype="8" fill="hold" grpId="0" nodeType="afterEffect">
+                                  <p:stCondLst>
+                                    <p:cond delay="30400"/>
+                                  </p:stCondLst>
+                                  <p:childTnLst>
+                                    <p:set>
+                                      <p:cBhvr>
+                                        <p:cTn id="82" dur="1"/>
+                                        <p:tgtEl>
+                                          <p:spTgt spid="22"/>
+                                        </p:tgtEl>
+                                        <p:attrNameLst>
+                                          <p:attrName>style.visibility</p:attrName>
+                                        </p:attrNameLst>
+                                      </p:cBhvr>
+                                      <p:to>
+                                        <p:strVal val="visible"/>
+                                      </p:to>
+                                    </p:set>
+                                    <p:anim calcmode="lin" valueType="num">
+                                      <p:cBhvr additive="base">
+                                        <p:cTn id="83" dur="400"/>
+                                        <p:tgtEl>
+                                          <p:spTgt spid="22"/>
+                                        </p:tgtEl>
+                                        <p:attrNameLst>
+                                          <p:attrName>ppt_y</p:attrName>
+                                        </p:attrNameLst>
+                                      </p:cBhvr>
+                                      <p:tavLst>
+                                        <p:tav tm="0">
+                                          <p:val>
+                                            <p:strVal val="#ppt_y"/>
+                                          </p:val>
+                                        </p:tav>
+                                        <p:tav tm="100000">
+                                          <p:val>
+                                            <p:strVal val="#ppt_y"/>
+                                          </p:val>
+                                        </p:tav>
+                                      </p:tavLst>
+                                    </p:anim>
+                                    <p:anim calcmode="lin" valueType="num">
+                                      <p:cBhvr additive="base">
+                                        <p:cTn id="84" dur="400"/>
+                                        <p:tgtEl>
+                                          <p:spTgt spid="22"/>
+                                        </p:tgtEl>
+                                        <p:attrNameLst>
+                                          <p:attrName>ppt_x</p:attrName>
+                                        </p:attrNameLst>
+                                      </p:cBhvr>
+                                      <p:tavLst>
+                                        <p:tav tm="0">
+                                          <p:val>
+                                            <p:strVal val="0-#ppt_w/2"/>
+                                          </p:val>
+                                        </p:tav>
+                                        <p:tav tm="100000">
+                                          <p:val>
+                                            <p:strVal val="#ppt_x"/>
+                                          </p:val>
+                                        </p:tav>
+                                      </p:tavLst>
+                                    </p:anim>
+                                  </p:childTnLst>
+                                </p:cTn>
+                              </p:par>
+                              <p:par>
+                                <p:cTn id="85" presetID="2" presetClass="entr" presetSubtype="8" fill="hold" grpId="0" nodeType="afterEffect">
+                                  <p:stCondLst>
+                                    <p:cond delay="33200"/>
+                                  </p:stCondLst>
+                                  <p:childTnLst>
+                                    <p:set>
+                                      <p:cBhvr>
+                                        <p:cTn id="86" dur="1"/>
+                                        <p:tgtEl>
+                                          <p:spTgt spid="23"/>
+                                        </p:tgtEl>
+                                        <p:attrNameLst>
+                                          <p:attrName>style.visibility</p:attrName>
+                                        </p:attrNameLst>
+                                      </p:cBhvr>
+                                      <p:to>
+                                        <p:strVal val="visible"/>
+                                      </p:to>
+                                    </p:set>
+                                    <p:anim calcmode="lin" valueType="num">
+                                      <p:cBhvr additive="base">
+                                        <p:cTn id="87" dur="400"/>
+                                        <p:tgtEl>
+                                          <p:spTgt spid="23"/>
+                                        </p:tgtEl>
+                                        <p:attrNameLst>
+                                          <p:attrName>ppt_y</p:attrName>
+                                        </p:attrNameLst>
+                                      </p:cBhvr>
+                                      <p:tavLst>
+                                        <p:tav tm="0">
+                                          <p:val>
+                                            <p:strVal val="#ppt_y"/>
+                                          </p:val>
+                                        </p:tav>
+                                        <p:tav tm="100000">
+                                          <p:val>
+                                            <p:strVal val="#ppt_y"/>
+                                          </p:val>
+                                        </p:tav>
+                                      </p:tavLst>
+                                    </p:anim>
+                                    <p:anim calcmode="lin" valueType="num">
+                                      <p:cBhvr additive="base">
+                                        <p:cTn id="88" dur="400"/>
+                                        <p:tgtEl>
+                                          <p:spTgt spid="23"/>
+                                        </p:tgtEl>
+                                        <p:attrNameLst>
+                                          <p:attrName>ppt_x</p:attrName>
+                                        </p:attrNameLst>
+                                      </p:cBhvr>
+                                      <p:tavLst>
+                                        <p:tav tm="0">
+                                          <p:val>
+                                            <p:strVal val="0-#ppt_w/2"/>
+                                          </p:val>
+                                        </p:tav>
+                                        <p:tav tm="100000">
+                                          <p:val>
+                                            <p:strVal val="#ppt_x"/>
+                                          </p:val>
+                                        </p:tav>
+                                      </p:tavLst>
+                                    </p:anim>
+                                  </p:childTnLst>
+                                </p:cTn>
+                              </p:par>
+                            </p:childTnLst>
+                          </p:cTn>
+                        </p:par>
+                      </p:childTnLst>
+                    </p:cTn>
+                  </p:par>
+                </p:childTnLst>
+              </p:cTn>
+              <p:prevCondLst>
+                <p:cond evt="onPrev" delay="0">
+                  <p:tgtEl>
+                    <p:sldTgt/>
+                  </p:tgtEl>
+                </p:cond>
+              </p:prevCondLst>
+              <p:nextCondLst>
+                <p:cond evt="onNext" delay="0">
+                  <p:tgtEl>
+                    <p:sldTgt/>
+                  </p:tgtEl>
+                </p:cond>
+              </p:nextCondLst>
+            </p:seq>
+          </p:childTnLst>
+        </p:cTn>
+      </p:par>
+    </p:tnLst>
+    <p:bldLst>
+      <p:bldP spid="2" grpId="0"/>
+      <p:bldP spid="3" grpId="0"/>
+      <p:bldP spid="7" grpId="0"/>
+      <p:bldP spid="11" grpId="0"/>
+      <p:bldP spid="15" grpId="0"/>
+      <p:bldP spid="19" grpId="0"/>
+      <p:bldP spid="6" grpId="0"/>
+      <p:bldP spid="10" grpId="0"/>
+      <p:bldP spid="14" grpId="0"/>
+      <p:bldP spid="18" grpId="0"/>
+      <p:bldP spid="5" grpId="0"/>
+      <p:bldP spid="8" grpId="0"/>
+      <p:bldP spid="12" grpId="0"/>
+      <p:bldP spid="16" grpId="0"/>
+      <p:bldP spid="20" grpId="0"/>
+      <p:bldP spid="9" grpId="0"/>
+      <p:bldP spid="13" grpId="0"/>
+      <p:bldP spid="17" grpId="0"/>
+      <p:bldP spid="21" grpId="0"/>
+      <p:bldP spid="22" grpId="0"/>
+      <p:bldP spid="23" grpId="0"/>
+    </p:bldLst>
+  </p:timing>
 </p:sld>
 </file>
 
@@ -3420,6 +5194,320 @@
   <p:clrMapOvr>
     <a:masterClrMapping/>
   </p:clrMapOvr>
+  <p:transition spd="med">
+    <p:fade/>
+  </p:transition>
+  <p:timing>
+    <p:tnLst>
+      <p:par>
+        <p:cTn id="1" dur="indefinite" restart="never" nodeType="tmRoot">
+          <p:childTnLst>
+            <p:seq concurrent="1" nextAc="seek">
+              <p:cTn id="2" dur="indefinite" nodeType="mainSeq">
+                <p:childTnLst>
+                  <p:par>
+                    <p:cTn id="3" fill="hold">
+                      <p:stCondLst>
+                        <p:cond delay="indefinite"/>
+                        <p:cond evt="onBegin" delay="0">
+                          <p:tn val="2"/>
+                        </p:cond>
+                      </p:stCondLst>
+                      <p:childTnLst>
+                        <p:par>
+                          <p:cTn id="4" fill="hold">
+                            <p:stCondLst>
+                              <p:cond delay="0"/>
+                            </p:stCondLst>
+                            <p:childTnLst>
+                              <p:par>
+                                <p:cTn id="5" presetID="10" presetClass="entr" presetSubtype="0" fill="hold" grpId="0" nodeType="afterEffect">
+                                  <p:stCondLst>
+                                    <p:cond delay="0"/>
+                                  </p:stCondLst>
+                                  <p:childTnLst>
+                                    <p:set>
+                                      <p:cBhvr>
+                                        <p:cTn id="6" dur="1"/>
+                                        <p:tgtEl>
+                                          <p:spTgt spid="8"/>
+                                        </p:tgtEl>
+                                        <p:attrNameLst>
+                                          <p:attrName>style.visibility</p:attrName>
+                                        </p:attrNameLst>
+                                      </p:cBhvr>
+                                      <p:to>
+                                        <p:strVal val="visible"/>
+                                      </p:to>
+                                    </p:set>
+                                    <p:animEffect transition="in" filter="fade">
+                                      <p:cBhvr>
+                                        <p:cTn id="7" dur="450"/>
+                                        <p:tgtEl>
+                                          <p:spTgt spid="8"/>
+                                        </p:tgtEl>
+                                      </p:cBhvr>
+                                    </p:animEffect>
+                                  </p:childTnLst>
+                                </p:cTn>
+                              </p:par>
+                              <p:par>
+                                <p:cTn id="8" presetID="10" presetClass="entr" presetSubtype="0" fill="hold" grpId="0" nodeType="afterEffect">
+                                  <p:stCondLst>
+                                    <p:cond delay="600"/>
+                                  </p:stCondLst>
+                                  <p:childTnLst>
+                                    <p:set>
+                                      <p:cBhvr>
+                                        <p:cTn id="9" dur="1"/>
+                                        <p:tgtEl>
+                                          <p:spTgt spid="2"/>
+                                        </p:tgtEl>
+                                        <p:attrNameLst>
+                                          <p:attrName>style.visibility</p:attrName>
+                                        </p:attrNameLst>
+                                      </p:cBhvr>
+                                      <p:to>
+                                        <p:strVal val="visible"/>
+                                      </p:to>
+                                    </p:set>
+                                    <p:animEffect transition="in" filter="fade">
+                                      <p:cBhvr>
+                                        <p:cTn id="10" dur="450"/>
+                                        <p:tgtEl>
+                                          <p:spTgt spid="2"/>
+                                        </p:tgtEl>
+                                      </p:cBhvr>
+                                    </p:animEffect>
+                                  </p:childTnLst>
+                                </p:cTn>
+                              </p:par>
+                              <p:par>
+                                <p:cTn id="11" presetID="10" presetClass="entr" presetSubtype="0" fill="hold" grpId="0" nodeType="afterEffect">
+                                  <p:stCondLst>
+                                    <p:cond delay="1350"/>
+                                  </p:stCondLst>
+                                  <p:childTnLst>
+                                    <p:set>
+                                      <p:cBhvr>
+                                        <p:cTn id="12" dur="1"/>
+                                        <p:tgtEl>
+                                          <p:spTgt spid="3"/>
+                                        </p:tgtEl>
+                                        <p:attrNameLst>
+                                          <p:attrName>style.visibility</p:attrName>
+                                        </p:attrNameLst>
+                                      </p:cBhvr>
+                                      <p:to>
+                                        <p:strVal val="visible"/>
+                                      </p:to>
+                                    </p:set>
+                                    <p:animEffect transition="in" filter="fade">
+                                      <p:cBhvr>
+                                        <p:cTn id="13" dur="450"/>
+                                        <p:tgtEl>
+                                          <p:spTgt spid="3"/>
+                                        </p:tgtEl>
+                                      </p:cBhvr>
+                                    </p:animEffect>
+                                  </p:childTnLst>
+                                </p:cTn>
+                              </p:par>
+                              <p:par>
+                                <p:cTn id="14" presetID="10" presetClass="entr" presetSubtype="0" fill="hold" grpId="0" nodeType="afterEffect">
+                                  <p:stCondLst>
+                                    <p:cond delay="2250"/>
+                                  </p:stCondLst>
+                                  <p:childTnLst>
+                                    <p:set>
+                                      <p:cBhvr>
+                                        <p:cTn id="15" dur="1"/>
+                                        <p:tgtEl>
+                                          <p:spTgt spid="5"/>
+                                        </p:tgtEl>
+                                        <p:attrNameLst>
+                                          <p:attrName>style.visibility</p:attrName>
+                                        </p:attrNameLst>
+                                      </p:cBhvr>
+                                      <p:to>
+                                        <p:strVal val="visible"/>
+                                      </p:to>
+                                    </p:set>
+                                    <p:animEffect transition="in" filter="fade">
+                                      <p:cBhvr>
+                                        <p:cTn id="16" dur="450"/>
+                                        <p:tgtEl>
+                                          <p:spTgt spid="5"/>
+                                        </p:tgtEl>
+                                      </p:cBhvr>
+                                    </p:animEffect>
+                                  </p:childTnLst>
+                                </p:cTn>
+                              </p:par>
+                              <p:par>
+                                <p:cTn id="17" presetID="10" presetClass="entr" presetSubtype="0" fill="hold" grpId="0" nodeType="afterEffect">
+                                  <p:stCondLst>
+                                    <p:cond delay="3300"/>
+                                  </p:stCondLst>
+                                  <p:childTnLst>
+                                    <p:set>
+                                      <p:cBhvr>
+                                        <p:cTn id="18" dur="1"/>
+                                        <p:tgtEl>
+                                          <p:spTgt spid="6"/>
+                                        </p:tgtEl>
+                                        <p:attrNameLst>
+                                          <p:attrName>style.visibility</p:attrName>
+                                        </p:attrNameLst>
+                                      </p:cBhvr>
+                                      <p:to>
+                                        <p:strVal val="visible"/>
+                                      </p:to>
+                                    </p:set>
+                                    <p:animEffect transition="in" filter="fade">
+                                      <p:cBhvr>
+                                        <p:cTn id="19" dur="450"/>
+                                        <p:tgtEl>
+                                          <p:spTgt spid="6"/>
+                                        </p:tgtEl>
+                                      </p:cBhvr>
+                                    </p:animEffect>
+                                  </p:childTnLst>
+                                </p:cTn>
+                              </p:par>
+                              <p:par>
+                                <p:cTn id="20" presetID="10" presetClass="entr" presetSubtype="0" fill="hold" grpId="0" nodeType="afterEffect">
+                                  <p:stCondLst>
+                                    <p:cond delay="4500"/>
+                                  </p:stCondLst>
+                                  <p:childTnLst>
+                                    <p:set>
+                                      <p:cBhvr>
+                                        <p:cTn id="21" dur="1"/>
+                                        <p:tgtEl>
+                                          <p:spTgt spid="7"/>
+                                        </p:tgtEl>
+                                        <p:attrNameLst>
+                                          <p:attrName>style.visibility</p:attrName>
+                                        </p:attrNameLst>
+                                      </p:cBhvr>
+                                      <p:to>
+                                        <p:strVal val="visible"/>
+                                      </p:to>
+                                    </p:set>
+                                    <p:animEffect transition="in" filter="fade">
+                                      <p:cBhvr>
+                                        <p:cTn id="22" dur="450"/>
+                                        <p:tgtEl>
+                                          <p:spTgt spid="7"/>
+                                        </p:tgtEl>
+                                      </p:cBhvr>
+                                    </p:animEffect>
+                                  </p:childTnLst>
+                                </p:cTn>
+                              </p:par>
+                              <p:par>
+                                <p:cTn id="23" presetID="10" presetClass="entr" presetSubtype="0" fill="hold" grpId="0" nodeType="afterEffect">
+                                  <p:stCondLst>
+                                    <p:cond delay="5850"/>
+                                  </p:stCondLst>
+                                  <p:childTnLst>
+                                    <p:set>
+                                      <p:cBhvr>
+                                        <p:cTn id="24" dur="1"/>
+                                        <p:tgtEl>
+                                          <p:spTgt spid="9"/>
+                                        </p:tgtEl>
+                                        <p:attrNameLst>
+                                          <p:attrName>style.visibility</p:attrName>
+                                        </p:attrNameLst>
+                                      </p:cBhvr>
+                                      <p:to>
+                                        <p:strVal val="visible"/>
+                                      </p:to>
+                                    </p:set>
+                                    <p:animEffect transition="in" filter="fade">
+                                      <p:cBhvr>
+                                        <p:cTn id="25" dur="450"/>
+                                        <p:tgtEl>
+                                          <p:spTgt spid="9"/>
+                                        </p:tgtEl>
+                                      </p:cBhvr>
+                                    </p:animEffect>
+                                  </p:childTnLst>
+                                </p:cTn>
+                              </p:par>
+                              <p:par>
+                                <p:cTn id="26" presetID="10" presetClass="entr" presetSubtype="0" fill="hold" grpId="0" nodeType="afterEffect">
+                                  <p:stCondLst>
+                                    <p:cond delay="7350"/>
+                                  </p:stCondLst>
+                                  <p:childTnLst>
+                                    <p:set>
+                                      <p:cBhvr>
+                                        <p:cTn id="27" dur="1"/>
+                                        <p:tgtEl>
+                                          <p:spTgt spid="10"/>
+                                        </p:tgtEl>
+                                        <p:attrNameLst>
+                                          <p:attrName>style.visibility</p:attrName>
+                                        </p:attrNameLst>
+                                      </p:cBhvr>
+                                      <p:to>
+                                        <p:strVal val="visible"/>
+                                      </p:to>
+                                    </p:set>
+                                    <p:animEffect transition="in" filter="fade">
+                                      <p:cBhvr>
+                                        <p:cTn id="28" dur="450"/>
+                                        <p:tgtEl>
+                                          <p:spTgt spid="10"/>
+                                        </p:tgtEl>
+                                      </p:cBhvr>
+                                    </p:animEffect>
+                                  </p:childTnLst>
+                                </p:cTn>
+                              </p:par>
+                            </p:childTnLst>
+                          </p:cTn>
+                        </p:par>
+                      </p:childTnLst>
+                    </p:cTn>
+                  </p:par>
+                </p:childTnLst>
+              </p:cTn>
+              <p:prevCondLst>
+                <p:cond evt="onPrev" delay="0">
+                  <p:tgtEl>
+                    <p:sldTgt/>
+                  </p:tgtEl>
+                </p:cond>
+              </p:prevCondLst>
+              <p:nextCondLst>
+                <p:cond evt="onNext" delay="0">
+                  <p:tgtEl>
+                    <p:sldTgt/>
+                  </p:tgtEl>
+                </p:cond>
+              </p:nextCondLst>
+            </p:seq>
+          </p:childTnLst>
+        </p:cTn>
+      </p:par>
+    </p:tnLst>
+    <p:bldLst>
+      <p:bldGraphic spid="8" grpId="0">
+        <p:bldAsOne/>
+      </p:bldGraphic>
+      <p:bldP spid="2" grpId="0"/>
+      <p:bldP spid="3" grpId="0"/>
+      <p:bldP spid="5" grpId="0"/>
+      <p:bldP spid="6" grpId="0"/>
+      <p:bldP spid="7" grpId="0"/>
+      <p:bldP spid="9" grpId="0"/>
+      <p:bldP spid="10" grpId="0"/>
+    </p:bldLst>
+  </p:timing>
 </p:sld>
 </file>
 
@@ -3557,6 +5645,9 @@
   <p:clrMapOvr>
     <a:masterClrMapping/>
   </p:clrMapOvr>
+  <p:transition spd="med">
+    <p:fade/>
+  </p:transition>
 </p:sld>
 </file>
 
@@ -4064,6 +6155,972 @@
   <p:clrMapOvr>
     <a:masterClrMapping/>
   </p:clrMapOvr>
+  <p:transition spd="med">
+    <p:fade/>
+  </p:transition>
+  <p:timing>
+    <p:tnLst>
+      <p:par>
+        <p:cTn id="1" dur="indefinite" restart="never" nodeType="tmRoot">
+          <p:childTnLst>
+            <p:seq concurrent="1" nextAc="seek">
+              <p:cTn id="2" dur="indefinite" nodeType="mainSeq">
+                <p:childTnLst>
+                  <p:par>
+                    <p:cTn id="3" fill="hold">
+                      <p:stCondLst>
+                        <p:cond delay="indefinite"/>
+                        <p:cond evt="onBegin" delay="0">
+                          <p:tn val="2"/>
+                        </p:cond>
+                      </p:stCondLst>
+                      <p:childTnLst>
+                        <p:par>
+                          <p:cTn id="4" fill="hold">
+                            <p:stCondLst>
+                              <p:cond delay="0"/>
+                            </p:stCondLst>
+                            <p:childTnLst>
+                              <p:par>
+                                <p:cTn id="5" presetID="2" presetClass="entr" presetSubtype="8" fill="hold" grpId="0" nodeType="afterEffect">
+                                  <p:stCondLst>
+                                    <p:cond delay="0"/>
+                                  </p:stCondLst>
+                                  <p:childTnLst>
+                                    <p:set>
+                                      <p:cBhvr>
+                                        <p:cTn id="6" dur="1"/>
+                                        <p:tgtEl>
+                                          <p:spTgt spid="2"/>
+                                        </p:tgtEl>
+                                        <p:attrNameLst>
+                                          <p:attrName>style.visibility</p:attrName>
+                                        </p:attrNameLst>
+                                      </p:cBhvr>
+                                      <p:to>
+                                        <p:strVal val="visible"/>
+                                      </p:to>
+                                    </p:set>
+                                    <p:anim calcmode="lin" valueType="num">
+                                      <p:cBhvr additive="base">
+                                        <p:cTn id="7" dur="400"/>
+                                        <p:tgtEl>
+                                          <p:spTgt spid="2"/>
+                                        </p:tgtEl>
+                                        <p:attrNameLst>
+                                          <p:attrName>ppt_y</p:attrName>
+                                        </p:attrNameLst>
+                                      </p:cBhvr>
+                                      <p:tavLst>
+                                        <p:tav tm="0">
+                                          <p:val>
+                                            <p:strVal val="#ppt_y"/>
+                                          </p:val>
+                                        </p:tav>
+                                        <p:tav tm="100000">
+                                          <p:val>
+                                            <p:strVal val="#ppt_y"/>
+                                          </p:val>
+                                        </p:tav>
+                                      </p:tavLst>
+                                    </p:anim>
+                                    <p:anim calcmode="lin" valueType="num">
+                                      <p:cBhvr additive="base">
+                                        <p:cTn id="8" dur="400"/>
+                                        <p:tgtEl>
+                                          <p:spTgt spid="2"/>
+                                        </p:tgtEl>
+                                        <p:attrNameLst>
+                                          <p:attrName>ppt_x</p:attrName>
+                                        </p:attrNameLst>
+                                      </p:cBhvr>
+                                      <p:tavLst>
+                                        <p:tav tm="0">
+                                          <p:val>
+                                            <p:strVal val="0-#ppt_w/2"/>
+                                          </p:val>
+                                        </p:tav>
+                                        <p:tav tm="100000">
+                                          <p:val>
+                                            <p:strVal val="#ppt_x"/>
+                                          </p:val>
+                                        </p:tav>
+                                      </p:tavLst>
+                                    </p:anim>
+                                  </p:childTnLst>
+                                </p:cTn>
+                              </p:par>
+                              <p:par>
+                                <p:cTn id="9" presetID="2" presetClass="entr" presetSubtype="8" fill="hold" grpId="0" nodeType="afterEffect">
+                                  <p:stCondLst>
+                                    <p:cond delay="550"/>
+                                  </p:stCondLst>
+                                  <p:childTnLst>
+                                    <p:set>
+                                      <p:cBhvr>
+                                        <p:cTn id="10" dur="1"/>
+                                        <p:tgtEl>
+                                          <p:spTgt spid="3"/>
+                                        </p:tgtEl>
+                                        <p:attrNameLst>
+                                          <p:attrName>style.visibility</p:attrName>
+                                        </p:attrNameLst>
+                                      </p:cBhvr>
+                                      <p:to>
+                                        <p:strVal val="visible"/>
+                                      </p:to>
+                                    </p:set>
+                                    <p:anim calcmode="lin" valueType="num">
+                                      <p:cBhvr additive="base">
+                                        <p:cTn id="11" dur="400"/>
+                                        <p:tgtEl>
+                                          <p:spTgt spid="3"/>
+                                        </p:tgtEl>
+                                        <p:attrNameLst>
+                                          <p:attrName>ppt_y</p:attrName>
+                                        </p:attrNameLst>
+                                      </p:cBhvr>
+                                      <p:tavLst>
+                                        <p:tav tm="0">
+                                          <p:val>
+                                            <p:strVal val="#ppt_y"/>
+                                          </p:val>
+                                        </p:tav>
+                                        <p:tav tm="100000">
+                                          <p:val>
+                                            <p:strVal val="#ppt_y"/>
+                                          </p:val>
+                                        </p:tav>
+                                      </p:tavLst>
+                                    </p:anim>
+                                    <p:anim calcmode="lin" valueType="num">
+                                      <p:cBhvr additive="base">
+                                        <p:cTn id="12" dur="400"/>
+                                        <p:tgtEl>
+                                          <p:spTgt spid="3"/>
+                                        </p:tgtEl>
+                                        <p:attrNameLst>
+                                          <p:attrName>ppt_x</p:attrName>
+                                        </p:attrNameLst>
+                                      </p:cBhvr>
+                                      <p:tavLst>
+                                        <p:tav tm="0">
+                                          <p:val>
+                                            <p:strVal val="0-#ppt_w/2"/>
+                                          </p:val>
+                                        </p:tav>
+                                        <p:tav tm="100000">
+                                          <p:val>
+                                            <p:strVal val="#ppt_x"/>
+                                          </p:val>
+                                        </p:tav>
+                                      </p:tavLst>
+                                    </p:anim>
+                                  </p:childTnLst>
+                                </p:cTn>
+                              </p:par>
+                              <p:par>
+                                <p:cTn id="13" presetID="2" presetClass="entr" presetSubtype="8" fill="hold" grpId="0" nodeType="afterEffect">
+                                  <p:stCondLst>
+                                    <p:cond delay="1250"/>
+                                  </p:stCondLst>
+                                  <p:childTnLst>
+                                    <p:set>
+                                      <p:cBhvr>
+                                        <p:cTn id="14" dur="1"/>
+                                        <p:tgtEl>
+                                          <p:spTgt spid="5"/>
+                                        </p:tgtEl>
+                                        <p:attrNameLst>
+                                          <p:attrName>style.visibility</p:attrName>
+                                        </p:attrNameLst>
+                                      </p:cBhvr>
+                                      <p:to>
+                                        <p:strVal val="visible"/>
+                                      </p:to>
+                                    </p:set>
+                                    <p:anim calcmode="lin" valueType="num">
+                                      <p:cBhvr additive="base">
+                                        <p:cTn id="15" dur="400"/>
+                                        <p:tgtEl>
+                                          <p:spTgt spid="5"/>
+                                        </p:tgtEl>
+                                        <p:attrNameLst>
+                                          <p:attrName>ppt_y</p:attrName>
+                                        </p:attrNameLst>
+                                      </p:cBhvr>
+                                      <p:tavLst>
+                                        <p:tav tm="0">
+                                          <p:val>
+                                            <p:strVal val="#ppt_y"/>
+                                          </p:val>
+                                        </p:tav>
+                                        <p:tav tm="100000">
+                                          <p:val>
+                                            <p:strVal val="#ppt_y"/>
+                                          </p:val>
+                                        </p:tav>
+                                      </p:tavLst>
+                                    </p:anim>
+                                    <p:anim calcmode="lin" valueType="num">
+                                      <p:cBhvr additive="base">
+                                        <p:cTn id="16" dur="400"/>
+                                        <p:tgtEl>
+                                          <p:spTgt spid="5"/>
+                                        </p:tgtEl>
+                                        <p:attrNameLst>
+                                          <p:attrName>ppt_x</p:attrName>
+                                        </p:attrNameLst>
+                                      </p:cBhvr>
+                                      <p:tavLst>
+                                        <p:tav tm="0">
+                                          <p:val>
+                                            <p:strVal val="0-#ppt_w/2"/>
+                                          </p:val>
+                                        </p:tav>
+                                        <p:tav tm="100000">
+                                          <p:val>
+                                            <p:strVal val="#ppt_x"/>
+                                          </p:val>
+                                        </p:tav>
+                                      </p:tavLst>
+                                    </p:anim>
+                                  </p:childTnLst>
+                                </p:cTn>
+                              </p:par>
+                              <p:par>
+                                <p:cTn id="17" presetID="2" presetClass="entr" presetSubtype="8" fill="hold" grpId="0" nodeType="afterEffect">
+                                  <p:stCondLst>
+                                    <p:cond delay="2100"/>
+                                  </p:stCondLst>
+                                  <p:childTnLst>
+                                    <p:set>
+                                      <p:cBhvr>
+                                        <p:cTn id="18" dur="1"/>
+                                        <p:tgtEl>
+                                          <p:spTgt spid="8"/>
+                                        </p:tgtEl>
+                                        <p:attrNameLst>
+                                          <p:attrName>style.visibility</p:attrName>
+                                        </p:attrNameLst>
+                                      </p:cBhvr>
+                                      <p:to>
+                                        <p:strVal val="visible"/>
+                                      </p:to>
+                                    </p:set>
+                                    <p:anim calcmode="lin" valueType="num">
+                                      <p:cBhvr additive="base">
+                                        <p:cTn id="19" dur="400"/>
+                                        <p:tgtEl>
+                                          <p:spTgt spid="8"/>
+                                        </p:tgtEl>
+                                        <p:attrNameLst>
+                                          <p:attrName>ppt_y</p:attrName>
+                                        </p:attrNameLst>
+                                      </p:cBhvr>
+                                      <p:tavLst>
+                                        <p:tav tm="0">
+                                          <p:val>
+                                            <p:strVal val="#ppt_y"/>
+                                          </p:val>
+                                        </p:tav>
+                                        <p:tav tm="100000">
+                                          <p:val>
+                                            <p:strVal val="#ppt_y"/>
+                                          </p:val>
+                                        </p:tav>
+                                      </p:tavLst>
+                                    </p:anim>
+                                    <p:anim calcmode="lin" valueType="num">
+                                      <p:cBhvr additive="base">
+                                        <p:cTn id="20" dur="400"/>
+                                        <p:tgtEl>
+                                          <p:spTgt spid="8"/>
+                                        </p:tgtEl>
+                                        <p:attrNameLst>
+                                          <p:attrName>ppt_x</p:attrName>
+                                        </p:attrNameLst>
+                                      </p:cBhvr>
+                                      <p:tavLst>
+                                        <p:tav tm="0">
+                                          <p:val>
+                                            <p:strVal val="0-#ppt_w/2"/>
+                                          </p:val>
+                                        </p:tav>
+                                        <p:tav tm="100000">
+                                          <p:val>
+                                            <p:strVal val="#ppt_x"/>
+                                          </p:val>
+                                        </p:tav>
+                                      </p:tavLst>
+                                    </p:anim>
+                                  </p:childTnLst>
+                                </p:cTn>
+                              </p:par>
+                              <p:par>
+                                <p:cTn id="21" presetID="2" presetClass="entr" presetSubtype="8" fill="hold" grpId="0" nodeType="afterEffect">
+                                  <p:stCondLst>
+                                    <p:cond delay="3100"/>
+                                  </p:stCondLst>
+                                  <p:childTnLst>
+                                    <p:set>
+                                      <p:cBhvr>
+                                        <p:cTn id="22" dur="1"/>
+                                        <p:tgtEl>
+                                          <p:spTgt spid="11"/>
+                                        </p:tgtEl>
+                                        <p:attrNameLst>
+                                          <p:attrName>style.visibility</p:attrName>
+                                        </p:attrNameLst>
+                                      </p:cBhvr>
+                                      <p:to>
+                                        <p:strVal val="visible"/>
+                                      </p:to>
+                                    </p:set>
+                                    <p:anim calcmode="lin" valueType="num">
+                                      <p:cBhvr additive="base">
+                                        <p:cTn id="23" dur="400"/>
+                                        <p:tgtEl>
+                                          <p:spTgt spid="11"/>
+                                        </p:tgtEl>
+                                        <p:attrNameLst>
+                                          <p:attrName>ppt_y</p:attrName>
+                                        </p:attrNameLst>
+                                      </p:cBhvr>
+                                      <p:tavLst>
+                                        <p:tav tm="0">
+                                          <p:val>
+                                            <p:strVal val="#ppt_y"/>
+                                          </p:val>
+                                        </p:tav>
+                                        <p:tav tm="100000">
+                                          <p:val>
+                                            <p:strVal val="#ppt_y"/>
+                                          </p:val>
+                                        </p:tav>
+                                      </p:tavLst>
+                                    </p:anim>
+                                    <p:anim calcmode="lin" valueType="num">
+                                      <p:cBhvr additive="base">
+                                        <p:cTn id="24" dur="400"/>
+                                        <p:tgtEl>
+                                          <p:spTgt spid="11"/>
+                                        </p:tgtEl>
+                                        <p:attrNameLst>
+                                          <p:attrName>ppt_x</p:attrName>
+                                        </p:attrNameLst>
+                                      </p:cBhvr>
+                                      <p:tavLst>
+                                        <p:tav tm="0">
+                                          <p:val>
+                                            <p:strVal val="0-#ppt_w/2"/>
+                                          </p:val>
+                                        </p:tav>
+                                        <p:tav tm="100000">
+                                          <p:val>
+                                            <p:strVal val="#ppt_x"/>
+                                          </p:val>
+                                        </p:tav>
+                                      </p:tavLst>
+                                    </p:anim>
+                                  </p:childTnLst>
+                                </p:cTn>
+                              </p:par>
+                              <p:par>
+                                <p:cTn id="25" presetID="2" presetClass="entr" presetSubtype="8" fill="hold" grpId="0" nodeType="afterEffect">
+                                  <p:stCondLst>
+                                    <p:cond delay="4250"/>
+                                  </p:stCondLst>
+                                  <p:childTnLst>
+                                    <p:set>
+                                      <p:cBhvr>
+                                        <p:cTn id="26" dur="1"/>
+                                        <p:tgtEl>
+                                          <p:spTgt spid="7"/>
+                                        </p:tgtEl>
+                                        <p:attrNameLst>
+                                          <p:attrName>style.visibility</p:attrName>
+                                        </p:attrNameLst>
+                                      </p:cBhvr>
+                                      <p:to>
+                                        <p:strVal val="visible"/>
+                                      </p:to>
+                                    </p:set>
+                                    <p:anim calcmode="lin" valueType="num">
+                                      <p:cBhvr additive="base">
+                                        <p:cTn id="27" dur="400"/>
+                                        <p:tgtEl>
+                                          <p:spTgt spid="7"/>
+                                        </p:tgtEl>
+                                        <p:attrNameLst>
+                                          <p:attrName>ppt_y</p:attrName>
+                                        </p:attrNameLst>
+                                      </p:cBhvr>
+                                      <p:tavLst>
+                                        <p:tav tm="0">
+                                          <p:val>
+                                            <p:strVal val="#ppt_y"/>
+                                          </p:val>
+                                        </p:tav>
+                                        <p:tav tm="100000">
+                                          <p:val>
+                                            <p:strVal val="#ppt_y"/>
+                                          </p:val>
+                                        </p:tav>
+                                      </p:tavLst>
+                                    </p:anim>
+                                    <p:anim calcmode="lin" valueType="num">
+                                      <p:cBhvr additive="base">
+                                        <p:cTn id="28" dur="400"/>
+                                        <p:tgtEl>
+                                          <p:spTgt spid="7"/>
+                                        </p:tgtEl>
+                                        <p:attrNameLst>
+                                          <p:attrName>ppt_x</p:attrName>
+                                        </p:attrNameLst>
+                                      </p:cBhvr>
+                                      <p:tavLst>
+                                        <p:tav tm="0">
+                                          <p:val>
+                                            <p:strVal val="0-#ppt_w/2"/>
+                                          </p:val>
+                                        </p:tav>
+                                        <p:tav tm="100000">
+                                          <p:val>
+                                            <p:strVal val="#ppt_x"/>
+                                          </p:val>
+                                        </p:tav>
+                                      </p:tavLst>
+                                    </p:anim>
+                                  </p:childTnLst>
+                                </p:cTn>
+                              </p:par>
+                              <p:par>
+                                <p:cTn id="29" presetID="2" presetClass="entr" presetSubtype="8" fill="hold" grpId="0" nodeType="afterEffect">
+                                  <p:stCondLst>
+                                    <p:cond delay="5550"/>
+                                  </p:stCondLst>
+                                  <p:childTnLst>
+                                    <p:set>
+                                      <p:cBhvr>
+                                        <p:cTn id="30" dur="1"/>
+                                        <p:tgtEl>
+                                          <p:spTgt spid="10"/>
+                                        </p:tgtEl>
+                                        <p:attrNameLst>
+                                          <p:attrName>style.visibility</p:attrName>
+                                        </p:attrNameLst>
+                                      </p:cBhvr>
+                                      <p:to>
+                                        <p:strVal val="visible"/>
+                                      </p:to>
+                                    </p:set>
+                                    <p:anim calcmode="lin" valueType="num">
+                                      <p:cBhvr additive="base">
+                                        <p:cTn id="31" dur="400"/>
+                                        <p:tgtEl>
+                                          <p:spTgt spid="10"/>
+                                        </p:tgtEl>
+                                        <p:attrNameLst>
+                                          <p:attrName>ppt_y</p:attrName>
+                                        </p:attrNameLst>
+                                      </p:cBhvr>
+                                      <p:tavLst>
+                                        <p:tav tm="0">
+                                          <p:val>
+                                            <p:strVal val="#ppt_y"/>
+                                          </p:val>
+                                        </p:tav>
+                                        <p:tav tm="100000">
+                                          <p:val>
+                                            <p:strVal val="#ppt_y"/>
+                                          </p:val>
+                                        </p:tav>
+                                      </p:tavLst>
+                                    </p:anim>
+                                    <p:anim calcmode="lin" valueType="num">
+                                      <p:cBhvr additive="base">
+                                        <p:cTn id="32" dur="400"/>
+                                        <p:tgtEl>
+                                          <p:spTgt spid="10"/>
+                                        </p:tgtEl>
+                                        <p:attrNameLst>
+                                          <p:attrName>ppt_x</p:attrName>
+                                        </p:attrNameLst>
+                                      </p:cBhvr>
+                                      <p:tavLst>
+                                        <p:tav tm="0">
+                                          <p:val>
+                                            <p:strVal val="0-#ppt_w/2"/>
+                                          </p:val>
+                                        </p:tav>
+                                        <p:tav tm="100000">
+                                          <p:val>
+                                            <p:strVal val="#ppt_x"/>
+                                          </p:val>
+                                        </p:tav>
+                                      </p:tavLst>
+                                    </p:anim>
+                                  </p:childTnLst>
+                                </p:cTn>
+                              </p:par>
+                              <p:par>
+                                <p:cTn id="33" presetID="2" presetClass="entr" presetSubtype="8" fill="hold" grpId="0" nodeType="afterEffect">
+                                  <p:stCondLst>
+                                    <p:cond delay="7000"/>
+                                  </p:stCondLst>
+                                  <p:childTnLst>
+                                    <p:set>
+                                      <p:cBhvr>
+                                        <p:cTn id="34" dur="1"/>
+                                        <p:tgtEl>
+                                          <p:spTgt spid="6"/>
+                                        </p:tgtEl>
+                                        <p:attrNameLst>
+                                          <p:attrName>style.visibility</p:attrName>
+                                        </p:attrNameLst>
+                                      </p:cBhvr>
+                                      <p:to>
+                                        <p:strVal val="visible"/>
+                                      </p:to>
+                                    </p:set>
+                                    <p:anim calcmode="lin" valueType="num">
+                                      <p:cBhvr additive="base">
+                                        <p:cTn id="35" dur="400"/>
+                                        <p:tgtEl>
+                                          <p:spTgt spid="6"/>
+                                        </p:tgtEl>
+                                        <p:attrNameLst>
+                                          <p:attrName>ppt_y</p:attrName>
+                                        </p:attrNameLst>
+                                      </p:cBhvr>
+                                      <p:tavLst>
+                                        <p:tav tm="0">
+                                          <p:val>
+                                            <p:strVal val="#ppt_y"/>
+                                          </p:val>
+                                        </p:tav>
+                                        <p:tav tm="100000">
+                                          <p:val>
+                                            <p:strVal val="#ppt_y"/>
+                                          </p:val>
+                                        </p:tav>
+                                      </p:tavLst>
+                                    </p:anim>
+                                    <p:anim calcmode="lin" valueType="num">
+                                      <p:cBhvr additive="base">
+                                        <p:cTn id="36" dur="400"/>
+                                        <p:tgtEl>
+                                          <p:spTgt spid="6"/>
+                                        </p:tgtEl>
+                                        <p:attrNameLst>
+                                          <p:attrName>ppt_x</p:attrName>
+                                        </p:attrNameLst>
+                                      </p:cBhvr>
+                                      <p:tavLst>
+                                        <p:tav tm="0">
+                                          <p:val>
+                                            <p:strVal val="0-#ppt_w/2"/>
+                                          </p:val>
+                                        </p:tav>
+                                        <p:tav tm="100000">
+                                          <p:val>
+                                            <p:strVal val="#ppt_x"/>
+                                          </p:val>
+                                        </p:tav>
+                                      </p:tavLst>
+                                    </p:anim>
+                                  </p:childTnLst>
+                                </p:cTn>
+                              </p:par>
+                              <p:par>
+                                <p:cTn id="37" presetID="2" presetClass="entr" presetSubtype="8" fill="hold" grpId="0" nodeType="afterEffect">
+                                  <p:stCondLst>
+                                    <p:cond delay="8600"/>
+                                  </p:stCondLst>
+                                  <p:childTnLst>
+                                    <p:set>
+                                      <p:cBhvr>
+                                        <p:cTn id="38" dur="1"/>
+                                        <p:tgtEl>
+                                          <p:spTgt spid="9"/>
+                                        </p:tgtEl>
+                                        <p:attrNameLst>
+                                          <p:attrName>style.visibility</p:attrName>
+                                        </p:attrNameLst>
+                                      </p:cBhvr>
+                                      <p:to>
+                                        <p:strVal val="visible"/>
+                                      </p:to>
+                                    </p:set>
+                                    <p:anim calcmode="lin" valueType="num">
+                                      <p:cBhvr additive="base">
+                                        <p:cTn id="39" dur="400"/>
+                                        <p:tgtEl>
+                                          <p:spTgt spid="9"/>
+                                        </p:tgtEl>
+                                        <p:attrNameLst>
+                                          <p:attrName>ppt_y</p:attrName>
+                                        </p:attrNameLst>
+                                      </p:cBhvr>
+                                      <p:tavLst>
+                                        <p:tav tm="0">
+                                          <p:val>
+                                            <p:strVal val="#ppt_y"/>
+                                          </p:val>
+                                        </p:tav>
+                                        <p:tav tm="100000">
+                                          <p:val>
+                                            <p:strVal val="#ppt_y"/>
+                                          </p:val>
+                                        </p:tav>
+                                      </p:tavLst>
+                                    </p:anim>
+                                    <p:anim calcmode="lin" valueType="num">
+                                      <p:cBhvr additive="base">
+                                        <p:cTn id="40" dur="400"/>
+                                        <p:tgtEl>
+                                          <p:spTgt spid="9"/>
+                                        </p:tgtEl>
+                                        <p:attrNameLst>
+                                          <p:attrName>ppt_x</p:attrName>
+                                        </p:attrNameLst>
+                                      </p:cBhvr>
+                                      <p:tavLst>
+                                        <p:tav tm="0">
+                                          <p:val>
+                                            <p:strVal val="0-#ppt_w/2"/>
+                                          </p:val>
+                                        </p:tav>
+                                        <p:tav tm="100000">
+                                          <p:val>
+                                            <p:strVal val="#ppt_x"/>
+                                          </p:val>
+                                        </p:tav>
+                                      </p:tavLst>
+                                    </p:anim>
+                                  </p:childTnLst>
+                                </p:cTn>
+                              </p:par>
+                              <p:par>
+                                <p:cTn id="41" presetID="2" presetClass="entr" presetSubtype="8" fill="hold" grpId="0" nodeType="afterEffect">
+                                  <p:stCondLst>
+                                    <p:cond delay="10350"/>
+                                  </p:stCondLst>
+                                  <p:childTnLst>
+                                    <p:set>
+                                      <p:cBhvr>
+                                        <p:cTn id="42" dur="1"/>
+                                        <p:tgtEl>
+                                          <p:spTgt spid="12"/>
+                                        </p:tgtEl>
+                                        <p:attrNameLst>
+                                          <p:attrName>style.visibility</p:attrName>
+                                        </p:attrNameLst>
+                                      </p:cBhvr>
+                                      <p:to>
+                                        <p:strVal val="visible"/>
+                                      </p:to>
+                                    </p:set>
+                                    <p:anim calcmode="lin" valueType="num">
+                                      <p:cBhvr additive="base">
+                                        <p:cTn id="43" dur="400"/>
+                                        <p:tgtEl>
+                                          <p:spTgt spid="12"/>
+                                        </p:tgtEl>
+                                        <p:attrNameLst>
+                                          <p:attrName>ppt_y</p:attrName>
+                                        </p:attrNameLst>
+                                      </p:cBhvr>
+                                      <p:tavLst>
+                                        <p:tav tm="0">
+                                          <p:val>
+                                            <p:strVal val="#ppt_y"/>
+                                          </p:val>
+                                        </p:tav>
+                                        <p:tav tm="100000">
+                                          <p:val>
+                                            <p:strVal val="#ppt_y"/>
+                                          </p:val>
+                                        </p:tav>
+                                      </p:tavLst>
+                                    </p:anim>
+                                    <p:anim calcmode="lin" valueType="num">
+                                      <p:cBhvr additive="base">
+                                        <p:cTn id="44" dur="400"/>
+                                        <p:tgtEl>
+                                          <p:spTgt spid="12"/>
+                                        </p:tgtEl>
+                                        <p:attrNameLst>
+                                          <p:attrName>ppt_x</p:attrName>
+                                        </p:attrNameLst>
+                                      </p:cBhvr>
+                                      <p:tavLst>
+                                        <p:tav tm="0">
+                                          <p:val>
+                                            <p:strVal val="0-#ppt_w/2"/>
+                                          </p:val>
+                                        </p:tav>
+                                        <p:tav tm="100000">
+                                          <p:val>
+                                            <p:strVal val="#ppt_x"/>
+                                          </p:val>
+                                        </p:tav>
+                                      </p:tavLst>
+                                    </p:anim>
+                                  </p:childTnLst>
+                                </p:cTn>
+                              </p:par>
+                              <p:par>
+                                <p:cTn id="45" presetID="2" presetClass="entr" presetSubtype="8" fill="hold" grpId="0" nodeType="afterEffect">
+                                  <p:stCondLst>
+                                    <p:cond delay="12250"/>
+                                  </p:stCondLst>
+                                  <p:childTnLst>
+                                    <p:set>
+                                      <p:cBhvr>
+                                        <p:cTn id="46" dur="1"/>
+                                        <p:tgtEl>
+                                          <p:spTgt spid="13"/>
+                                        </p:tgtEl>
+                                        <p:attrNameLst>
+                                          <p:attrName>style.visibility</p:attrName>
+                                        </p:attrNameLst>
+                                      </p:cBhvr>
+                                      <p:to>
+                                        <p:strVal val="visible"/>
+                                      </p:to>
+                                    </p:set>
+                                    <p:anim calcmode="lin" valueType="num">
+                                      <p:cBhvr additive="base">
+                                        <p:cTn id="47" dur="400"/>
+                                        <p:tgtEl>
+                                          <p:spTgt spid="13"/>
+                                        </p:tgtEl>
+                                        <p:attrNameLst>
+                                          <p:attrName>ppt_y</p:attrName>
+                                        </p:attrNameLst>
+                                      </p:cBhvr>
+                                      <p:tavLst>
+                                        <p:tav tm="0">
+                                          <p:val>
+                                            <p:strVal val="#ppt_y"/>
+                                          </p:val>
+                                        </p:tav>
+                                        <p:tav tm="100000">
+                                          <p:val>
+                                            <p:strVal val="#ppt_y"/>
+                                          </p:val>
+                                        </p:tav>
+                                      </p:tavLst>
+                                    </p:anim>
+                                    <p:anim calcmode="lin" valueType="num">
+                                      <p:cBhvr additive="base">
+                                        <p:cTn id="48" dur="400"/>
+                                        <p:tgtEl>
+                                          <p:spTgt spid="13"/>
+                                        </p:tgtEl>
+                                        <p:attrNameLst>
+                                          <p:attrName>ppt_x</p:attrName>
+                                        </p:attrNameLst>
+                                      </p:cBhvr>
+                                      <p:tavLst>
+                                        <p:tav tm="0">
+                                          <p:val>
+                                            <p:strVal val="0-#ppt_w/2"/>
+                                          </p:val>
+                                        </p:tav>
+                                        <p:tav tm="100000">
+                                          <p:val>
+                                            <p:strVal val="#ppt_x"/>
+                                          </p:val>
+                                        </p:tav>
+                                      </p:tavLst>
+                                    </p:anim>
+                                  </p:childTnLst>
+                                </p:cTn>
+                              </p:par>
+                              <p:par>
+                                <p:cTn id="49" presetID="2" presetClass="entr" presetSubtype="8" fill="hold" grpId="0" nodeType="afterEffect">
+                                  <p:stCondLst>
+                                    <p:cond delay="14300"/>
+                                  </p:stCondLst>
+                                  <p:childTnLst>
+                                    <p:set>
+                                      <p:cBhvr>
+                                        <p:cTn id="50" dur="1"/>
+                                        <p:tgtEl>
+                                          <p:spTgt spid="14"/>
+                                        </p:tgtEl>
+                                        <p:attrNameLst>
+                                          <p:attrName>style.visibility</p:attrName>
+                                        </p:attrNameLst>
+                                      </p:cBhvr>
+                                      <p:to>
+                                        <p:strVal val="visible"/>
+                                      </p:to>
+                                    </p:set>
+                                    <p:anim calcmode="lin" valueType="num">
+                                      <p:cBhvr additive="base">
+                                        <p:cTn id="51" dur="400"/>
+                                        <p:tgtEl>
+                                          <p:spTgt spid="14"/>
+                                        </p:tgtEl>
+                                        <p:attrNameLst>
+                                          <p:attrName>ppt_y</p:attrName>
+                                        </p:attrNameLst>
+                                      </p:cBhvr>
+                                      <p:tavLst>
+                                        <p:tav tm="0">
+                                          <p:val>
+                                            <p:strVal val="#ppt_y"/>
+                                          </p:val>
+                                        </p:tav>
+                                        <p:tav tm="100000">
+                                          <p:val>
+                                            <p:strVal val="#ppt_y"/>
+                                          </p:val>
+                                        </p:tav>
+                                      </p:tavLst>
+                                    </p:anim>
+                                    <p:anim calcmode="lin" valueType="num">
+                                      <p:cBhvr additive="base">
+                                        <p:cTn id="52" dur="400"/>
+                                        <p:tgtEl>
+                                          <p:spTgt spid="14"/>
+                                        </p:tgtEl>
+                                        <p:attrNameLst>
+                                          <p:attrName>ppt_x</p:attrName>
+                                        </p:attrNameLst>
+                                      </p:cBhvr>
+                                      <p:tavLst>
+                                        <p:tav tm="0">
+                                          <p:val>
+                                            <p:strVal val="0-#ppt_w/2"/>
+                                          </p:val>
+                                        </p:tav>
+                                        <p:tav tm="100000">
+                                          <p:val>
+                                            <p:strVal val="#ppt_x"/>
+                                          </p:val>
+                                        </p:tav>
+                                      </p:tavLst>
+                                    </p:anim>
+                                  </p:childTnLst>
+                                </p:cTn>
+                              </p:par>
+                              <p:par>
+                                <p:cTn id="53" presetID="2" presetClass="entr" presetSubtype="8" fill="hold" grpId="0" nodeType="afterEffect">
+                                  <p:stCondLst>
+                                    <p:cond delay="16500"/>
+                                  </p:stCondLst>
+                                  <p:childTnLst>
+                                    <p:set>
+                                      <p:cBhvr>
+                                        <p:cTn id="54" dur="1"/>
+                                        <p:tgtEl>
+                                          <p:spTgt spid="15"/>
+                                        </p:tgtEl>
+                                        <p:attrNameLst>
+                                          <p:attrName>style.visibility</p:attrName>
+                                        </p:attrNameLst>
+                                      </p:cBhvr>
+                                      <p:to>
+                                        <p:strVal val="visible"/>
+                                      </p:to>
+                                    </p:set>
+                                    <p:anim calcmode="lin" valueType="num">
+                                      <p:cBhvr additive="base">
+                                        <p:cTn id="55" dur="400"/>
+                                        <p:tgtEl>
+                                          <p:spTgt spid="15"/>
+                                        </p:tgtEl>
+                                        <p:attrNameLst>
+                                          <p:attrName>ppt_y</p:attrName>
+                                        </p:attrNameLst>
+                                      </p:cBhvr>
+                                      <p:tavLst>
+                                        <p:tav tm="0">
+                                          <p:val>
+                                            <p:strVal val="#ppt_y"/>
+                                          </p:val>
+                                        </p:tav>
+                                        <p:tav tm="100000">
+                                          <p:val>
+                                            <p:strVal val="#ppt_y"/>
+                                          </p:val>
+                                        </p:tav>
+                                      </p:tavLst>
+                                    </p:anim>
+                                    <p:anim calcmode="lin" valueType="num">
+                                      <p:cBhvr additive="base">
+                                        <p:cTn id="56" dur="400"/>
+                                        <p:tgtEl>
+                                          <p:spTgt spid="15"/>
+                                        </p:tgtEl>
+                                        <p:attrNameLst>
+                                          <p:attrName>ppt_x</p:attrName>
+                                        </p:attrNameLst>
+                                      </p:cBhvr>
+                                      <p:tavLst>
+                                        <p:tav tm="0">
+                                          <p:val>
+                                            <p:strVal val="0-#ppt_w/2"/>
+                                          </p:val>
+                                        </p:tav>
+                                        <p:tav tm="100000">
+                                          <p:val>
+                                            <p:strVal val="#ppt_x"/>
+                                          </p:val>
+                                        </p:tav>
+                                      </p:tavLst>
+                                    </p:anim>
+                                  </p:childTnLst>
+                                </p:cTn>
+                              </p:par>
+                            </p:childTnLst>
+                          </p:cTn>
+                        </p:par>
+                      </p:childTnLst>
+                    </p:cTn>
+                  </p:par>
+                </p:childTnLst>
+              </p:cTn>
+              <p:prevCondLst>
+                <p:cond evt="onPrev" delay="0">
+                  <p:tgtEl>
+                    <p:sldTgt/>
+                  </p:tgtEl>
+                </p:cond>
+              </p:prevCondLst>
+              <p:nextCondLst>
+                <p:cond evt="onNext" delay="0">
+                  <p:tgtEl>
+                    <p:sldTgt/>
+                  </p:tgtEl>
+                </p:cond>
+              </p:nextCondLst>
+            </p:seq>
+          </p:childTnLst>
+        </p:cTn>
+      </p:par>
+    </p:tnLst>
+    <p:bldLst>
+      <p:bldP spid="2" grpId="0"/>
+      <p:bldP spid="3" grpId="0"/>
+      <p:bldP spid="5" grpId="0"/>
+      <p:bldP spid="8" grpId="0"/>
+      <p:bldP spid="11" grpId="0"/>
+      <p:bldP spid="7" grpId="0"/>
+      <p:bldP spid="10" grpId="0"/>
+      <p:bldP spid="6" grpId="0"/>
+      <p:bldP spid="9" grpId="0"/>
+      <p:bldP spid="12" grpId="0"/>
+      <p:bldP spid="13" grpId="0"/>
+      <p:bldP spid="14" grpId="0"/>
+      <p:bldP spid="15" grpId="0"/>
+    </p:bldLst>
+  </p:timing>
 </p:sld>
 </file>
 
@@ -4984,6 +8041,1742 @@
   <p:clrMapOvr>
     <a:masterClrMapping/>
   </p:clrMapOvr>
+  <p:transition spd="med">
+    <p:fade/>
+  </p:transition>
+  <p:timing>
+    <p:tnLst>
+      <p:par>
+        <p:cTn id="1" dur="indefinite" restart="never" nodeType="tmRoot">
+          <p:childTnLst>
+            <p:seq concurrent="1" nextAc="seek">
+              <p:cTn id="2" dur="indefinite" nodeType="mainSeq">
+                <p:childTnLst>
+                  <p:par>
+                    <p:cTn id="3" fill="hold">
+                      <p:stCondLst>
+                        <p:cond delay="indefinite"/>
+                        <p:cond evt="onBegin" delay="0">
+                          <p:tn val="2"/>
+                        </p:cond>
+                      </p:stCondLst>
+                      <p:childTnLst>
+                        <p:par>
+                          <p:cTn id="4" fill="hold">
+                            <p:stCondLst>
+                              <p:cond delay="0"/>
+                            </p:stCondLst>
+                            <p:childTnLst>
+                              <p:par>
+                                <p:cTn id="5" presetID="2" presetClass="entr" presetSubtype="8" fill="hold" grpId="0" nodeType="afterEffect">
+                                  <p:stCondLst>
+                                    <p:cond delay="0"/>
+                                  </p:stCondLst>
+                                  <p:childTnLst>
+                                    <p:set>
+                                      <p:cBhvr>
+                                        <p:cTn id="6" dur="1"/>
+                                        <p:tgtEl>
+                                          <p:spTgt spid="2"/>
+                                        </p:tgtEl>
+                                        <p:attrNameLst>
+                                          <p:attrName>style.visibility</p:attrName>
+                                        </p:attrNameLst>
+                                      </p:cBhvr>
+                                      <p:to>
+                                        <p:strVal val="visible"/>
+                                      </p:to>
+                                    </p:set>
+                                    <p:anim calcmode="lin" valueType="num">
+                                      <p:cBhvr additive="base">
+                                        <p:cTn id="7" dur="400"/>
+                                        <p:tgtEl>
+                                          <p:spTgt spid="2"/>
+                                        </p:tgtEl>
+                                        <p:attrNameLst>
+                                          <p:attrName>ppt_y</p:attrName>
+                                        </p:attrNameLst>
+                                      </p:cBhvr>
+                                      <p:tavLst>
+                                        <p:tav tm="0">
+                                          <p:val>
+                                            <p:strVal val="#ppt_y"/>
+                                          </p:val>
+                                        </p:tav>
+                                        <p:tav tm="100000">
+                                          <p:val>
+                                            <p:strVal val="#ppt_y"/>
+                                          </p:val>
+                                        </p:tav>
+                                      </p:tavLst>
+                                    </p:anim>
+                                    <p:anim calcmode="lin" valueType="num">
+                                      <p:cBhvr additive="base">
+                                        <p:cTn id="8" dur="400"/>
+                                        <p:tgtEl>
+                                          <p:spTgt spid="2"/>
+                                        </p:tgtEl>
+                                        <p:attrNameLst>
+                                          <p:attrName>ppt_x</p:attrName>
+                                        </p:attrNameLst>
+                                      </p:cBhvr>
+                                      <p:tavLst>
+                                        <p:tav tm="0">
+                                          <p:val>
+                                            <p:strVal val="0-#ppt_w/2"/>
+                                          </p:val>
+                                        </p:tav>
+                                        <p:tav tm="100000">
+                                          <p:val>
+                                            <p:strVal val="#ppt_x"/>
+                                          </p:val>
+                                        </p:tav>
+                                      </p:tavLst>
+                                    </p:anim>
+                                  </p:childTnLst>
+                                </p:cTn>
+                              </p:par>
+                              <p:par>
+                                <p:cTn id="9" presetID="2" presetClass="entr" presetSubtype="8" fill="hold" grpId="0" nodeType="afterEffect">
+                                  <p:stCondLst>
+                                    <p:cond delay="520"/>
+                                  </p:stCondLst>
+                                  <p:childTnLst>
+                                    <p:set>
+                                      <p:cBhvr>
+                                        <p:cTn id="10" dur="1"/>
+                                        <p:tgtEl>
+                                          <p:spTgt spid="3"/>
+                                        </p:tgtEl>
+                                        <p:attrNameLst>
+                                          <p:attrName>style.visibility</p:attrName>
+                                        </p:attrNameLst>
+                                      </p:cBhvr>
+                                      <p:to>
+                                        <p:strVal val="visible"/>
+                                      </p:to>
+                                    </p:set>
+                                    <p:anim calcmode="lin" valueType="num">
+                                      <p:cBhvr additive="base">
+                                        <p:cTn id="11" dur="400"/>
+                                        <p:tgtEl>
+                                          <p:spTgt spid="3"/>
+                                        </p:tgtEl>
+                                        <p:attrNameLst>
+                                          <p:attrName>ppt_y</p:attrName>
+                                        </p:attrNameLst>
+                                      </p:cBhvr>
+                                      <p:tavLst>
+                                        <p:tav tm="0">
+                                          <p:val>
+                                            <p:strVal val="#ppt_y"/>
+                                          </p:val>
+                                        </p:tav>
+                                        <p:tav tm="100000">
+                                          <p:val>
+                                            <p:strVal val="#ppt_y"/>
+                                          </p:val>
+                                        </p:tav>
+                                      </p:tavLst>
+                                    </p:anim>
+                                    <p:anim calcmode="lin" valueType="num">
+                                      <p:cBhvr additive="base">
+                                        <p:cTn id="12" dur="400"/>
+                                        <p:tgtEl>
+                                          <p:spTgt spid="3"/>
+                                        </p:tgtEl>
+                                        <p:attrNameLst>
+                                          <p:attrName>ppt_x</p:attrName>
+                                        </p:attrNameLst>
+                                      </p:cBhvr>
+                                      <p:tavLst>
+                                        <p:tav tm="0">
+                                          <p:val>
+                                            <p:strVal val="0-#ppt_w/2"/>
+                                          </p:val>
+                                        </p:tav>
+                                        <p:tav tm="100000">
+                                          <p:val>
+                                            <p:strVal val="#ppt_x"/>
+                                          </p:val>
+                                        </p:tav>
+                                      </p:tavLst>
+                                    </p:anim>
+                                  </p:childTnLst>
+                                </p:cTn>
+                              </p:par>
+                              <p:par>
+                                <p:cTn id="13" presetID="2" presetClass="entr" presetSubtype="8" fill="hold" grpId="0" nodeType="afterEffect">
+                                  <p:stCondLst>
+                                    <p:cond delay="1160"/>
+                                  </p:stCondLst>
+                                  <p:childTnLst>
+                                    <p:set>
+                                      <p:cBhvr>
+                                        <p:cTn id="14" dur="1"/>
+                                        <p:tgtEl>
+                                          <p:spTgt spid="5"/>
+                                        </p:tgtEl>
+                                        <p:attrNameLst>
+                                          <p:attrName>style.visibility</p:attrName>
+                                        </p:attrNameLst>
+                                      </p:cBhvr>
+                                      <p:to>
+                                        <p:strVal val="visible"/>
+                                      </p:to>
+                                    </p:set>
+                                    <p:anim calcmode="lin" valueType="num">
+                                      <p:cBhvr additive="base">
+                                        <p:cTn id="15" dur="400"/>
+                                        <p:tgtEl>
+                                          <p:spTgt spid="5"/>
+                                        </p:tgtEl>
+                                        <p:attrNameLst>
+                                          <p:attrName>ppt_y</p:attrName>
+                                        </p:attrNameLst>
+                                      </p:cBhvr>
+                                      <p:tavLst>
+                                        <p:tav tm="0">
+                                          <p:val>
+                                            <p:strVal val="#ppt_y"/>
+                                          </p:val>
+                                        </p:tav>
+                                        <p:tav tm="100000">
+                                          <p:val>
+                                            <p:strVal val="#ppt_y"/>
+                                          </p:val>
+                                        </p:tav>
+                                      </p:tavLst>
+                                    </p:anim>
+                                    <p:anim calcmode="lin" valueType="num">
+                                      <p:cBhvr additive="base">
+                                        <p:cTn id="16" dur="400"/>
+                                        <p:tgtEl>
+                                          <p:spTgt spid="5"/>
+                                        </p:tgtEl>
+                                        <p:attrNameLst>
+                                          <p:attrName>ppt_x</p:attrName>
+                                        </p:attrNameLst>
+                                      </p:cBhvr>
+                                      <p:tavLst>
+                                        <p:tav tm="0">
+                                          <p:val>
+                                            <p:strVal val="0-#ppt_w/2"/>
+                                          </p:val>
+                                        </p:tav>
+                                        <p:tav tm="100000">
+                                          <p:val>
+                                            <p:strVal val="#ppt_x"/>
+                                          </p:val>
+                                        </p:tav>
+                                      </p:tavLst>
+                                    </p:anim>
+                                  </p:childTnLst>
+                                </p:cTn>
+                              </p:par>
+                              <p:par>
+                                <p:cTn id="17" presetID="2" presetClass="entr" presetSubtype="8" fill="hold" grpId="0" nodeType="afterEffect">
+                                  <p:stCondLst>
+                                    <p:cond delay="1920"/>
+                                  </p:stCondLst>
+                                  <p:childTnLst>
+                                    <p:set>
+                                      <p:cBhvr>
+                                        <p:cTn id="18" dur="1"/>
+                                        <p:tgtEl>
+                                          <p:spTgt spid="10"/>
+                                        </p:tgtEl>
+                                        <p:attrNameLst>
+                                          <p:attrName>style.visibility</p:attrName>
+                                        </p:attrNameLst>
+                                      </p:cBhvr>
+                                      <p:to>
+                                        <p:strVal val="visible"/>
+                                      </p:to>
+                                    </p:set>
+                                    <p:anim calcmode="lin" valueType="num">
+                                      <p:cBhvr additive="base">
+                                        <p:cTn id="19" dur="400"/>
+                                        <p:tgtEl>
+                                          <p:spTgt spid="10"/>
+                                        </p:tgtEl>
+                                        <p:attrNameLst>
+                                          <p:attrName>ppt_y</p:attrName>
+                                        </p:attrNameLst>
+                                      </p:cBhvr>
+                                      <p:tavLst>
+                                        <p:tav tm="0">
+                                          <p:val>
+                                            <p:strVal val="#ppt_y"/>
+                                          </p:val>
+                                        </p:tav>
+                                        <p:tav tm="100000">
+                                          <p:val>
+                                            <p:strVal val="#ppt_y"/>
+                                          </p:val>
+                                        </p:tav>
+                                      </p:tavLst>
+                                    </p:anim>
+                                    <p:anim calcmode="lin" valueType="num">
+                                      <p:cBhvr additive="base">
+                                        <p:cTn id="20" dur="400"/>
+                                        <p:tgtEl>
+                                          <p:spTgt spid="10"/>
+                                        </p:tgtEl>
+                                        <p:attrNameLst>
+                                          <p:attrName>ppt_x</p:attrName>
+                                        </p:attrNameLst>
+                                      </p:cBhvr>
+                                      <p:tavLst>
+                                        <p:tav tm="0">
+                                          <p:val>
+                                            <p:strVal val="0-#ppt_w/2"/>
+                                          </p:val>
+                                        </p:tav>
+                                        <p:tav tm="100000">
+                                          <p:val>
+                                            <p:strVal val="#ppt_x"/>
+                                          </p:val>
+                                        </p:tav>
+                                      </p:tavLst>
+                                    </p:anim>
+                                  </p:childTnLst>
+                                </p:cTn>
+                              </p:par>
+                              <p:par>
+                                <p:cTn id="21" presetID="2" presetClass="entr" presetSubtype="8" fill="hold" grpId="0" nodeType="afterEffect">
+                                  <p:stCondLst>
+                                    <p:cond delay="2800"/>
+                                  </p:stCondLst>
+                                  <p:childTnLst>
+                                    <p:set>
+                                      <p:cBhvr>
+                                        <p:cTn id="22" dur="1"/>
+                                        <p:tgtEl>
+                                          <p:spTgt spid="15"/>
+                                        </p:tgtEl>
+                                        <p:attrNameLst>
+                                          <p:attrName>style.visibility</p:attrName>
+                                        </p:attrNameLst>
+                                      </p:cBhvr>
+                                      <p:to>
+                                        <p:strVal val="visible"/>
+                                      </p:to>
+                                    </p:set>
+                                    <p:anim calcmode="lin" valueType="num">
+                                      <p:cBhvr additive="base">
+                                        <p:cTn id="23" dur="400"/>
+                                        <p:tgtEl>
+                                          <p:spTgt spid="15"/>
+                                        </p:tgtEl>
+                                        <p:attrNameLst>
+                                          <p:attrName>ppt_y</p:attrName>
+                                        </p:attrNameLst>
+                                      </p:cBhvr>
+                                      <p:tavLst>
+                                        <p:tav tm="0">
+                                          <p:val>
+                                            <p:strVal val="#ppt_y"/>
+                                          </p:val>
+                                        </p:tav>
+                                        <p:tav tm="100000">
+                                          <p:val>
+                                            <p:strVal val="#ppt_y"/>
+                                          </p:val>
+                                        </p:tav>
+                                      </p:tavLst>
+                                    </p:anim>
+                                    <p:anim calcmode="lin" valueType="num">
+                                      <p:cBhvr additive="base">
+                                        <p:cTn id="24" dur="400"/>
+                                        <p:tgtEl>
+                                          <p:spTgt spid="15"/>
+                                        </p:tgtEl>
+                                        <p:attrNameLst>
+                                          <p:attrName>ppt_x</p:attrName>
+                                        </p:attrNameLst>
+                                      </p:cBhvr>
+                                      <p:tavLst>
+                                        <p:tav tm="0">
+                                          <p:val>
+                                            <p:strVal val="0-#ppt_w/2"/>
+                                          </p:val>
+                                        </p:tav>
+                                        <p:tav tm="100000">
+                                          <p:val>
+                                            <p:strVal val="#ppt_x"/>
+                                          </p:val>
+                                        </p:tav>
+                                      </p:tavLst>
+                                    </p:anim>
+                                  </p:childTnLst>
+                                </p:cTn>
+                              </p:par>
+                              <p:par>
+                                <p:cTn id="25" presetID="2" presetClass="entr" presetSubtype="8" fill="hold" grpId="0" nodeType="afterEffect">
+                                  <p:stCondLst>
+                                    <p:cond delay="3800"/>
+                                  </p:stCondLst>
+                                  <p:childTnLst>
+                                    <p:set>
+                                      <p:cBhvr>
+                                        <p:cTn id="26" dur="1"/>
+                                        <p:tgtEl>
+                                          <p:spTgt spid="20"/>
+                                        </p:tgtEl>
+                                        <p:attrNameLst>
+                                          <p:attrName>style.visibility</p:attrName>
+                                        </p:attrNameLst>
+                                      </p:cBhvr>
+                                      <p:to>
+                                        <p:strVal val="visible"/>
+                                      </p:to>
+                                    </p:set>
+                                    <p:anim calcmode="lin" valueType="num">
+                                      <p:cBhvr additive="base">
+                                        <p:cTn id="27" dur="400"/>
+                                        <p:tgtEl>
+                                          <p:spTgt spid="20"/>
+                                        </p:tgtEl>
+                                        <p:attrNameLst>
+                                          <p:attrName>ppt_y</p:attrName>
+                                        </p:attrNameLst>
+                                      </p:cBhvr>
+                                      <p:tavLst>
+                                        <p:tav tm="0">
+                                          <p:val>
+                                            <p:strVal val="#ppt_y"/>
+                                          </p:val>
+                                        </p:tav>
+                                        <p:tav tm="100000">
+                                          <p:val>
+                                            <p:strVal val="#ppt_y"/>
+                                          </p:val>
+                                        </p:tav>
+                                      </p:tavLst>
+                                    </p:anim>
+                                    <p:anim calcmode="lin" valueType="num">
+                                      <p:cBhvr additive="base">
+                                        <p:cTn id="28" dur="400"/>
+                                        <p:tgtEl>
+                                          <p:spTgt spid="20"/>
+                                        </p:tgtEl>
+                                        <p:attrNameLst>
+                                          <p:attrName>ppt_x</p:attrName>
+                                        </p:attrNameLst>
+                                      </p:cBhvr>
+                                      <p:tavLst>
+                                        <p:tav tm="0">
+                                          <p:val>
+                                            <p:strVal val="0-#ppt_w/2"/>
+                                          </p:val>
+                                        </p:tav>
+                                        <p:tav tm="100000">
+                                          <p:val>
+                                            <p:strVal val="#ppt_x"/>
+                                          </p:val>
+                                        </p:tav>
+                                      </p:tavLst>
+                                    </p:anim>
+                                  </p:childTnLst>
+                                </p:cTn>
+                              </p:par>
+                              <p:par>
+                                <p:cTn id="29" presetID="2" presetClass="entr" presetSubtype="8" fill="hold" grpId="0" nodeType="afterEffect">
+                                  <p:stCondLst>
+                                    <p:cond delay="4920"/>
+                                  </p:stCondLst>
+                                  <p:childTnLst>
+                                    <p:set>
+                                      <p:cBhvr>
+                                        <p:cTn id="30" dur="1"/>
+                                        <p:tgtEl>
+                                          <p:spTgt spid="6"/>
+                                        </p:tgtEl>
+                                        <p:attrNameLst>
+                                          <p:attrName>style.visibility</p:attrName>
+                                        </p:attrNameLst>
+                                      </p:cBhvr>
+                                      <p:to>
+                                        <p:strVal val="visible"/>
+                                      </p:to>
+                                    </p:set>
+                                    <p:anim calcmode="lin" valueType="num">
+                                      <p:cBhvr additive="base">
+                                        <p:cTn id="31" dur="400"/>
+                                        <p:tgtEl>
+                                          <p:spTgt spid="6"/>
+                                        </p:tgtEl>
+                                        <p:attrNameLst>
+                                          <p:attrName>ppt_y</p:attrName>
+                                        </p:attrNameLst>
+                                      </p:cBhvr>
+                                      <p:tavLst>
+                                        <p:tav tm="0">
+                                          <p:val>
+                                            <p:strVal val="#ppt_y"/>
+                                          </p:val>
+                                        </p:tav>
+                                        <p:tav tm="100000">
+                                          <p:val>
+                                            <p:strVal val="#ppt_y"/>
+                                          </p:val>
+                                        </p:tav>
+                                      </p:tavLst>
+                                    </p:anim>
+                                    <p:anim calcmode="lin" valueType="num">
+                                      <p:cBhvr additive="base">
+                                        <p:cTn id="32" dur="400"/>
+                                        <p:tgtEl>
+                                          <p:spTgt spid="6"/>
+                                        </p:tgtEl>
+                                        <p:attrNameLst>
+                                          <p:attrName>ppt_x</p:attrName>
+                                        </p:attrNameLst>
+                                      </p:cBhvr>
+                                      <p:tavLst>
+                                        <p:tav tm="0">
+                                          <p:val>
+                                            <p:strVal val="0-#ppt_w/2"/>
+                                          </p:val>
+                                        </p:tav>
+                                        <p:tav tm="100000">
+                                          <p:val>
+                                            <p:strVal val="#ppt_x"/>
+                                          </p:val>
+                                        </p:tav>
+                                      </p:tavLst>
+                                    </p:anim>
+                                  </p:childTnLst>
+                                </p:cTn>
+                              </p:par>
+                              <p:par>
+                                <p:cTn id="33" presetID="2" presetClass="entr" presetSubtype="8" fill="hold" grpId="0" nodeType="afterEffect">
+                                  <p:stCondLst>
+                                    <p:cond delay="6160"/>
+                                  </p:stCondLst>
+                                  <p:childTnLst>
+                                    <p:set>
+                                      <p:cBhvr>
+                                        <p:cTn id="34" dur="1"/>
+                                        <p:tgtEl>
+                                          <p:spTgt spid="11"/>
+                                        </p:tgtEl>
+                                        <p:attrNameLst>
+                                          <p:attrName>style.visibility</p:attrName>
+                                        </p:attrNameLst>
+                                      </p:cBhvr>
+                                      <p:to>
+                                        <p:strVal val="visible"/>
+                                      </p:to>
+                                    </p:set>
+                                    <p:anim calcmode="lin" valueType="num">
+                                      <p:cBhvr additive="base">
+                                        <p:cTn id="35" dur="400"/>
+                                        <p:tgtEl>
+                                          <p:spTgt spid="11"/>
+                                        </p:tgtEl>
+                                        <p:attrNameLst>
+                                          <p:attrName>ppt_y</p:attrName>
+                                        </p:attrNameLst>
+                                      </p:cBhvr>
+                                      <p:tavLst>
+                                        <p:tav tm="0">
+                                          <p:val>
+                                            <p:strVal val="#ppt_y"/>
+                                          </p:val>
+                                        </p:tav>
+                                        <p:tav tm="100000">
+                                          <p:val>
+                                            <p:strVal val="#ppt_y"/>
+                                          </p:val>
+                                        </p:tav>
+                                      </p:tavLst>
+                                    </p:anim>
+                                    <p:anim calcmode="lin" valueType="num">
+                                      <p:cBhvr additive="base">
+                                        <p:cTn id="36" dur="400"/>
+                                        <p:tgtEl>
+                                          <p:spTgt spid="11"/>
+                                        </p:tgtEl>
+                                        <p:attrNameLst>
+                                          <p:attrName>ppt_x</p:attrName>
+                                        </p:attrNameLst>
+                                      </p:cBhvr>
+                                      <p:tavLst>
+                                        <p:tav tm="0">
+                                          <p:val>
+                                            <p:strVal val="0-#ppt_w/2"/>
+                                          </p:val>
+                                        </p:tav>
+                                        <p:tav tm="100000">
+                                          <p:val>
+                                            <p:strVal val="#ppt_x"/>
+                                          </p:val>
+                                        </p:tav>
+                                      </p:tavLst>
+                                    </p:anim>
+                                  </p:childTnLst>
+                                </p:cTn>
+                              </p:par>
+                              <p:par>
+                                <p:cTn id="37" presetID="2" presetClass="entr" presetSubtype="8" fill="hold" grpId="0" nodeType="afterEffect">
+                                  <p:stCondLst>
+                                    <p:cond delay="7520"/>
+                                  </p:stCondLst>
+                                  <p:childTnLst>
+                                    <p:set>
+                                      <p:cBhvr>
+                                        <p:cTn id="38" dur="1"/>
+                                        <p:tgtEl>
+                                          <p:spTgt spid="16"/>
+                                        </p:tgtEl>
+                                        <p:attrNameLst>
+                                          <p:attrName>style.visibility</p:attrName>
+                                        </p:attrNameLst>
+                                      </p:cBhvr>
+                                      <p:to>
+                                        <p:strVal val="visible"/>
+                                      </p:to>
+                                    </p:set>
+                                    <p:anim calcmode="lin" valueType="num">
+                                      <p:cBhvr additive="base">
+                                        <p:cTn id="39" dur="400"/>
+                                        <p:tgtEl>
+                                          <p:spTgt spid="16"/>
+                                        </p:tgtEl>
+                                        <p:attrNameLst>
+                                          <p:attrName>ppt_y</p:attrName>
+                                        </p:attrNameLst>
+                                      </p:cBhvr>
+                                      <p:tavLst>
+                                        <p:tav tm="0">
+                                          <p:val>
+                                            <p:strVal val="#ppt_y"/>
+                                          </p:val>
+                                        </p:tav>
+                                        <p:tav tm="100000">
+                                          <p:val>
+                                            <p:strVal val="#ppt_y"/>
+                                          </p:val>
+                                        </p:tav>
+                                      </p:tavLst>
+                                    </p:anim>
+                                    <p:anim calcmode="lin" valueType="num">
+                                      <p:cBhvr additive="base">
+                                        <p:cTn id="40" dur="400"/>
+                                        <p:tgtEl>
+                                          <p:spTgt spid="16"/>
+                                        </p:tgtEl>
+                                        <p:attrNameLst>
+                                          <p:attrName>ppt_x</p:attrName>
+                                        </p:attrNameLst>
+                                      </p:cBhvr>
+                                      <p:tavLst>
+                                        <p:tav tm="0">
+                                          <p:val>
+                                            <p:strVal val="0-#ppt_w/2"/>
+                                          </p:val>
+                                        </p:tav>
+                                        <p:tav tm="100000">
+                                          <p:val>
+                                            <p:strVal val="#ppt_x"/>
+                                          </p:val>
+                                        </p:tav>
+                                      </p:tavLst>
+                                    </p:anim>
+                                  </p:childTnLst>
+                                </p:cTn>
+                              </p:par>
+                              <p:par>
+                                <p:cTn id="41" presetID="2" presetClass="entr" presetSubtype="8" fill="hold" grpId="0" nodeType="afterEffect">
+                                  <p:stCondLst>
+                                    <p:cond delay="9000"/>
+                                  </p:stCondLst>
+                                  <p:childTnLst>
+                                    <p:set>
+                                      <p:cBhvr>
+                                        <p:cTn id="42" dur="1"/>
+                                        <p:tgtEl>
+                                          <p:spTgt spid="21"/>
+                                        </p:tgtEl>
+                                        <p:attrNameLst>
+                                          <p:attrName>style.visibility</p:attrName>
+                                        </p:attrNameLst>
+                                      </p:cBhvr>
+                                      <p:to>
+                                        <p:strVal val="visible"/>
+                                      </p:to>
+                                    </p:set>
+                                    <p:anim calcmode="lin" valueType="num">
+                                      <p:cBhvr additive="base">
+                                        <p:cTn id="43" dur="400"/>
+                                        <p:tgtEl>
+                                          <p:spTgt spid="21"/>
+                                        </p:tgtEl>
+                                        <p:attrNameLst>
+                                          <p:attrName>ppt_y</p:attrName>
+                                        </p:attrNameLst>
+                                      </p:cBhvr>
+                                      <p:tavLst>
+                                        <p:tav tm="0">
+                                          <p:val>
+                                            <p:strVal val="#ppt_y"/>
+                                          </p:val>
+                                        </p:tav>
+                                        <p:tav tm="100000">
+                                          <p:val>
+                                            <p:strVal val="#ppt_y"/>
+                                          </p:val>
+                                        </p:tav>
+                                      </p:tavLst>
+                                    </p:anim>
+                                    <p:anim calcmode="lin" valueType="num">
+                                      <p:cBhvr additive="base">
+                                        <p:cTn id="44" dur="400"/>
+                                        <p:tgtEl>
+                                          <p:spTgt spid="21"/>
+                                        </p:tgtEl>
+                                        <p:attrNameLst>
+                                          <p:attrName>ppt_x</p:attrName>
+                                        </p:attrNameLst>
+                                      </p:cBhvr>
+                                      <p:tavLst>
+                                        <p:tav tm="0">
+                                          <p:val>
+                                            <p:strVal val="0-#ppt_w/2"/>
+                                          </p:val>
+                                        </p:tav>
+                                        <p:tav tm="100000">
+                                          <p:val>
+                                            <p:strVal val="#ppt_x"/>
+                                          </p:val>
+                                        </p:tav>
+                                      </p:tavLst>
+                                    </p:anim>
+                                  </p:childTnLst>
+                                </p:cTn>
+                              </p:par>
+                              <p:par>
+                                <p:cTn id="45" presetID="2" presetClass="entr" presetSubtype="8" fill="hold" grpId="0" nodeType="afterEffect">
+                                  <p:stCondLst>
+                                    <p:cond delay="10600"/>
+                                  </p:stCondLst>
+                                  <p:childTnLst>
+                                    <p:set>
+                                      <p:cBhvr>
+                                        <p:cTn id="46" dur="1"/>
+                                        <p:tgtEl>
+                                          <p:spTgt spid="7"/>
+                                        </p:tgtEl>
+                                        <p:attrNameLst>
+                                          <p:attrName>style.visibility</p:attrName>
+                                        </p:attrNameLst>
+                                      </p:cBhvr>
+                                      <p:to>
+                                        <p:strVal val="visible"/>
+                                      </p:to>
+                                    </p:set>
+                                    <p:anim calcmode="lin" valueType="num">
+                                      <p:cBhvr additive="base">
+                                        <p:cTn id="47" dur="400"/>
+                                        <p:tgtEl>
+                                          <p:spTgt spid="7"/>
+                                        </p:tgtEl>
+                                        <p:attrNameLst>
+                                          <p:attrName>ppt_y</p:attrName>
+                                        </p:attrNameLst>
+                                      </p:cBhvr>
+                                      <p:tavLst>
+                                        <p:tav tm="0">
+                                          <p:val>
+                                            <p:strVal val="#ppt_y"/>
+                                          </p:val>
+                                        </p:tav>
+                                        <p:tav tm="100000">
+                                          <p:val>
+                                            <p:strVal val="#ppt_y"/>
+                                          </p:val>
+                                        </p:tav>
+                                      </p:tavLst>
+                                    </p:anim>
+                                    <p:anim calcmode="lin" valueType="num">
+                                      <p:cBhvr additive="base">
+                                        <p:cTn id="48" dur="400"/>
+                                        <p:tgtEl>
+                                          <p:spTgt spid="7"/>
+                                        </p:tgtEl>
+                                        <p:attrNameLst>
+                                          <p:attrName>ppt_x</p:attrName>
+                                        </p:attrNameLst>
+                                      </p:cBhvr>
+                                      <p:tavLst>
+                                        <p:tav tm="0">
+                                          <p:val>
+                                            <p:strVal val="0-#ppt_w/2"/>
+                                          </p:val>
+                                        </p:tav>
+                                        <p:tav tm="100000">
+                                          <p:val>
+                                            <p:strVal val="#ppt_x"/>
+                                          </p:val>
+                                        </p:tav>
+                                      </p:tavLst>
+                                    </p:anim>
+                                  </p:childTnLst>
+                                </p:cTn>
+                              </p:par>
+                              <p:par>
+                                <p:cTn id="49" presetID="2" presetClass="entr" presetSubtype="8" fill="hold" grpId="0" nodeType="afterEffect">
+                                  <p:stCondLst>
+                                    <p:cond delay="12320"/>
+                                  </p:stCondLst>
+                                  <p:childTnLst>
+                                    <p:set>
+                                      <p:cBhvr>
+                                        <p:cTn id="50" dur="1"/>
+                                        <p:tgtEl>
+                                          <p:spTgt spid="12"/>
+                                        </p:tgtEl>
+                                        <p:attrNameLst>
+                                          <p:attrName>style.visibility</p:attrName>
+                                        </p:attrNameLst>
+                                      </p:cBhvr>
+                                      <p:to>
+                                        <p:strVal val="visible"/>
+                                      </p:to>
+                                    </p:set>
+                                    <p:anim calcmode="lin" valueType="num">
+                                      <p:cBhvr additive="base">
+                                        <p:cTn id="51" dur="400"/>
+                                        <p:tgtEl>
+                                          <p:spTgt spid="12"/>
+                                        </p:tgtEl>
+                                        <p:attrNameLst>
+                                          <p:attrName>ppt_y</p:attrName>
+                                        </p:attrNameLst>
+                                      </p:cBhvr>
+                                      <p:tavLst>
+                                        <p:tav tm="0">
+                                          <p:val>
+                                            <p:strVal val="#ppt_y"/>
+                                          </p:val>
+                                        </p:tav>
+                                        <p:tav tm="100000">
+                                          <p:val>
+                                            <p:strVal val="#ppt_y"/>
+                                          </p:val>
+                                        </p:tav>
+                                      </p:tavLst>
+                                    </p:anim>
+                                    <p:anim calcmode="lin" valueType="num">
+                                      <p:cBhvr additive="base">
+                                        <p:cTn id="52" dur="400"/>
+                                        <p:tgtEl>
+                                          <p:spTgt spid="12"/>
+                                        </p:tgtEl>
+                                        <p:attrNameLst>
+                                          <p:attrName>ppt_x</p:attrName>
+                                        </p:attrNameLst>
+                                      </p:cBhvr>
+                                      <p:tavLst>
+                                        <p:tav tm="0">
+                                          <p:val>
+                                            <p:strVal val="0-#ppt_w/2"/>
+                                          </p:val>
+                                        </p:tav>
+                                        <p:tav tm="100000">
+                                          <p:val>
+                                            <p:strVal val="#ppt_x"/>
+                                          </p:val>
+                                        </p:tav>
+                                      </p:tavLst>
+                                    </p:anim>
+                                  </p:childTnLst>
+                                </p:cTn>
+                              </p:par>
+                              <p:par>
+                                <p:cTn id="53" presetID="2" presetClass="entr" presetSubtype="8" fill="hold" grpId="0" nodeType="afterEffect">
+                                  <p:stCondLst>
+                                    <p:cond delay="14160"/>
+                                  </p:stCondLst>
+                                  <p:childTnLst>
+                                    <p:set>
+                                      <p:cBhvr>
+                                        <p:cTn id="54" dur="1"/>
+                                        <p:tgtEl>
+                                          <p:spTgt spid="17"/>
+                                        </p:tgtEl>
+                                        <p:attrNameLst>
+                                          <p:attrName>style.visibility</p:attrName>
+                                        </p:attrNameLst>
+                                      </p:cBhvr>
+                                      <p:to>
+                                        <p:strVal val="visible"/>
+                                      </p:to>
+                                    </p:set>
+                                    <p:anim calcmode="lin" valueType="num">
+                                      <p:cBhvr additive="base">
+                                        <p:cTn id="55" dur="400"/>
+                                        <p:tgtEl>
+                                          <p:spTgt spid="17"/>
+                                        </p:tgtEl>
+                                        <p:attrNameLst>
+                                          <p:attrName>ppt_y</p:attrName>
+                                        </p:attrNameLst>
+                                      </p:cBhvr>
+                                      <p:tavLst>
+                                        <p:tav tm="0">
+                                          <p:val>
+                                            <p:strVal val="#ppt_y"/>
+                                          </p:val>
+                                        </p:tav>
+                                        <p:tav tm="100000">
+                                          <p:val>
+                                            <p:strVal val="#ppt_y"/>
+                                          </p:val>
+                                        </p:tav>
+                                      </p:tavLst>
+                                    </p:anim>
+                                    <p:anim calcmode="lin" valueType="num">
+                                      <p:cBhvr additive="base">
+                                        <p:cTn id="56" dur="400"/>
+                                        <p:tgtEl>
+                                          <p:spTgt spid="17"/>
+                                        </p:tgtEl>
+                                        <p:attrNameLst>
+                                          <p:attrName>ppt_x</p:attrName>
+                                        </p:attrNameLst>
+                                      </p:cBhvr>
+                                      <p:tavLst>
+                                        <p:tav tm="0">
+                                          <p:val>
+                                            <p:strVal val="0-#ppt_w/2"/>
+                                          </p:val>
+                                        </p:tav>
+                                        <p:tav tm="100000">
+                                          <p:val>
+                                            <p:strVal val="#ppt_x"/>
+                                          </p:val>
+                                        </p:tav>
+                                      </p:tavLst>
+                                    </p:anim>
+                                  </p:childTnLst>
+                                </p:cTn>
+                              </p:par>
+                              <p:par>
+                                <p:cTn id="57" presetID="2" presetClass="entr" presetSubtype="8" fill="hold" grpId="0" nodeType="afterEffect">
+                                  <p:stCondLst>
+                                    <p:cond delay="16120"/>
+                                  </p:stCondLst>
+                                  <p:childTnLst>
+                                    <p:set>
+                                      <p:cBhvr>
+                                        <p:cTn id="58" dur="1"/>
+                                        <p:tgtEl>
+                                          <p:spTgt spid="22"/>
+                                        </p:tgtEl>
+                                        <p:attrNameLst>
+                                          <p:attrName>style.visibility</p:attrName>
+                                        </p:attrNameLst>
+                                      </p:cBhvr>
+                                      <p:to>
+                                        <p:strVal val="visible"/>
+                                      </p:to>
+                                    </p:set>
+                                    <p:anim calcmode="lin" valueType="num">
+                                      <p:cBhvr additive="base">
+                                        <p:cTn id="59" dur="400"/>
+                                        <p:tgtEl>
+                                          <p:spTgt spid="22"/>
+                                        </p:tgtEl>
+                                        <p:attrNameLst>
+                                          <p:attrName>ppt_y</p:attrName>
+                                        </p:attrNameLst>
+                                      </p:cBhvr>
+                                      <p:tavLst>
+                                        <p:tav tm="0">
+                                          <p:val>
+                                            <p:strVal val="#ppt_y"/>
+                                          </p:val>
+                                        </p:tav>
+                                        <p:tav tm="100000">
+                                          <p:val>
+                                            <p:strVal val="#ppt_y"/>
+                                          </p:val>
+                                        </p:tav>
+                                      </p:tavLst>
+                                    </p:anim>
+                                    <p:anim calcmode="lin" valueType="num">
+                                      <p:cBhvr additive="base">
+                                        <p:cTn id="60" dur="400"/>
+                                        <p:tgtEl>
+                                          <p:spTgt spid="22"/>
+                                        </p:tgtEl>
+                                        <p:attrNameLst>
+                                          <p:attrName>ppt_x</p:attrName>
+                                        </p:attrNameLst>
+                                      </p:cBhvr>
+                                      <p:tavLst>
+                                        <p:tav tm="0">
+                                          <p:val>
+                                            <p:strVal val="0-#ppt_w/2"/>
+                                          </p:val>
+                                        </p:tav>
+                                        <p:tav tm="100000">
+                                          <p:val>
+                                            <p:strVal val="#ppt_x"/>
+                                          </p:val>
+                                        </p:tav>
+                                      </p:tavLst>
+                                    </p:anim>
+                                  </p:childTnLst>
+                                </p:cTn>
+                              </p:par>
+                              <p:par>
+                                <p:cTn id="61" presetID="2" presetClass="entr" presetSubtype="8" fill="hold" grpId="0" nodeType="afterEffect">
+                                  <p:stCondLst>
+                                    <p:cond delay="18200"/>
+                                  </p:stCondLst>
+                                  <p:childTnLst>
+                                    <p:set>
+                                      <p:cBhvr>
+                                        <p:cTn id="62" dur="1"/>
+                                        <p:tgtEl>
+                                          <p:spTgt spid="9"/>
+                                        </p:tgtEl>
+                                        <p:attrNameLst>
+                                          <p:attrName>style.visibility</p:attrName>
+                                        </p:attrNameLst>
+                                      </p:cBhvr>
+                                      <p:to>
+                                        <p:strVal val="visible"/>
+                                      </p:to>
+                                    </p:set>
+                                    <p:anim calcmode="lin" valueType="num">
+                                      <p:cBhvr additive="base">
+                                        <p:cTn id="63" dur="400"/>
+                                        <p:tgtEl>
+                                          <p:spTgt spid="9"/>
+                                        </p:tgtEl>
+                                        <p:attrNameLst>
+                                          <p:attrName>ppt_y</p:attrName>
+                                        </p:attrNameLst>
+                                      </p:cBhvr>
+                                      <p:tavLst>
+                                        <p:tav tm="0">
+                                          <p:val>
+                                            <p:strVal val="#ppt_y"/>
+                                          </p:val>
+                                        </p:tav>
+                                        <p:tav tm="100000">
+                                          <p:val>
+                                            <p:strVal val="#ppt_y"/>
+                                          </p:val>
+                                        </p:tav>
+                                      </p:tavLst>
+                                    </p:anim>
+                                    <p:anim calcmode="lin" valueType="num">
+                                      <p:cBhvr additive="base">
+                                        <p:cTn id="64" dur="400"/>
+                                        <p:tgtEl>
+                                          <p:spTgt spid="9"/>
+                                        </p:tgtEl>
+                                        <p:attrNameLst>
+                                          <p:attrName>ppt_x</p:attrName>
+                                        </p:attrNameLst>
+                                      </p:cBhvr>
+                                      <p:tavLst>
+                                        <p:tav tm="0">
+                                          <p:val>
+                                            <p:strVal val="0-#ppt_w/2"/>
+                                          </p:val>
+                                        </p:tav>
+                                        <p:tav tm="100000">
+                                          <p:val>
+                                            <p:strVal val="#ppt_x"/>
+                                          </p:val>
+                                        </p:tav>
+                                      </p:tavLst>
+                                    </p:anim>
+                                  </p:childTnLst>
+                                </p:cTn>
+                              </p:par>
+                              <p:par>
+                                <p:cTn id="65" presetID="2" presetClass="entr" presetSubtype="8" fill="hold" grpId="0" nodeType="afterEffect">
+                                  <p:stCondLst>
+                                    <p:cond delay="20400"/>
+                                  </p:stCondLst>
+                                  <p:childTnLst>
+                                    <p:set>
+                                      <p:cBhvr>
+                                        <p:cTn id="66" dur="1"/>
+                                        <p:tgtEl>
+                                          <p:spTgt spid="14"/>
+                                        </p:tgtEl>
+                                        <p:attrNameLst>
+                                          <p:attrName>style.visibility</p:attrName>
+                                        </p:attrNameLst>
+                                      </p:cBhvr>
+                                      <p:to>
+                                        <p:strVal val="visible"/>
+                                      </p:to>
+                                    </p:set>
+                                    <p:anim calcmode="lin" valueType="num">
+                                      <p:cBhvr additive="base">
+                                        <p:cTn id="67" dur="400"/>
+                                        <p:tgtEl>
+                                          <p:spTgt spid="14"/>
+                                        </p:tgtEl>
+                                        <p:attrNameLst>
+                                          <p:attrName>ppt_y</p:attrName>
+                                        </p:attrNameLst>
+                                      </p:cBhvr>
+                                      <p:tavLst>
+                                        <p:tav tm="0">
+                                          <p:val>
+                                            <p:strVal val="#ppt_y"/>
+                                          </p:val>
+                                        </p:tav>
+                                        <p:tav tm="100000">
+                                          <p:val>
+                                            <p:strVal val="#ppt_y"/>
+                                          </p:val>
+                                        </p:tav>
+                                      </p:tavLst>
+                                    </p:anim>
+                                    <p:anim calcmode="lin" valueType="num">
+                                      <p:cBhvr additive="base">
+                                        <p:cTn id="68" dur="400"/>
+                                        <p:tgtEl>
+                                          <p:spTgt spid="14"/>
+                                        </p:tgtEl>
+                                        <p:attrNameLst>
+                                          <p:attrName>ppt_x</p:attrName>
+                                        </p:attrNameLst>
+                                      </p:cBhvr>
+                                      <p:tavLst>
+                                        <p:tav tm="0">
+                                          <p:val>
+                                            <p:strVal val="0-#ppt_w/2"/>
+                                          </p:val>
+                                        </p:tav>
+                                        <p:tav tm="100000">
+                                          <p:val>
+                                            <p:strVal val="#ppt_x"/>
+                                          </p:val>
+                                        </p:tav>
+                                      </p:tavLst>
+                                    </p:anim>
+                                  </p:childTnLst>
+                                </p:cTn>
+                              </p:par>
+                              <p:par>
+                                <p:cTn id="69" presetID="2" presetClass="entr" presetSubtype="8" fill="hold" grpId="0" nodeType="afterEffect">
+                                  <p:stCondLst>
+                                    <p:cond delay="22720"/>
+                                  </p:stCondLst>
+                                  <p:childTnLst>
+                                    <p:set>
+                                      <p:cBhvr>
+                                        <p:cTn id="70" dur="1"/>
+                                        <p:tgtEl>
+                                          <p:spTgt spid="19"/>
+                                        </p:tgtEl>
+                                        <p:attrNameLst>
+                                          <p:attrName>style.visibility</p:attrName>
+                                        </p:attrNameLst>
+                                      </p:cBhvr>
+                                      <p:to>
+                                        <p:strVal val="visible"/>
+                                      </p:to>
+                                    </p:set>
+                                    <p:anim calcmode="lin" valueType="num">
+                                      <p:cBhvr additive="base">
+                                        <p:cTn id="71" dur="400"/>
+                                        <p:tgtEl>
+                                          <p:spTgt spid="19"/>
+                                        </p:tgtEl>
+                                        <p:attrNameLst>
+                                          <p:attrName>ppt_y</p:attrName>
+                                        </p:attrNameLst>
+                                      </p:cBhvr>
+                                      <p:tavLst>
+                                        <p:tav tm="0">
+                                          <p:val>
+                                            <p:strVal val="#ppt_y"/>
+                                          </p:val>
+                                        </p:tav>
+                                        <p:tav tm="100000">
+                                          <p:val>
+                                            <p:strVal val="#ppt_y"/>
+                                          </p:val>
+                                        </p:tav>
+                                      </p:tavLst>
+                                    </p:anim>
+                                    <p:anim calcmode="lin" valueType="num">
+                                      <p:cBhvr additive="base">
+                                        <p:cTn id="72" dur="400"/>
+                                        <p:tgtEl>
+                                          <p:spTgt spid="19"/>
+                                        </p:tgtEl>
+                                        <p:attrNameLst>
+                                          <p:attrName>ppt_x</p:attrName>
+                                        </p:attrNameLst>
+                                      </p:cBhvr>
+                                      <p:tavLst>
+                                        <p:tav tm="0">
+                                          <p:val>
+                                            <p:strVal val="0-#ppt_w/2"/>
+                                          </p:val>
+                                        </p:tav>
+                                        <p:tav tm="100000">
+                                          <p:val>
+                                            <p:strVal val="#ppt_x"/>
+                                          </p:val>
+                                        </p:tav>
+                                      </p:tavLst>
+                                    </p:anim>
+                                  </p:childTnLst>
+                                </p:cTn>
+                              </p:par>
+                              <p:par>
+                                <p:cTn id="73" presetID="2" presetClass="entr" presetSubtype="8" fill="hold" grpId="0" nodeType="afterEffect">
+                                  <p:stCondLst>
+                                    <p:cond delay="25160"/>
+                                  </p:stCondLst>
+                                  <p:childTnLst>
+                                    <p:set>
+                                      <p:cBhvr>
+                                        <p:cTn id="74" dur="1"/>
+                                        <p:tgtEl>
+                                          <p:spTgt spid="8"/>
+                                        </p:tgtEl>
+                                        <p:attrNameLst>
+                                          <p:attrName>style.visibility</p:attrName>
+                                        </p:attrNameLst>
+                                      </p:cBhvr>
+                                      <p:to>
+                                        <p:strVal val="visible"/>
+                                      </p:to>
+                                    </p:set>
+                                    <p:anim calcmode="lin" valueType="num">
+                                      <p:cBhvr additive="base">
+                                        <p:cTn id="75" dur="400"/>
+                                        <p:tgtEl>
+                                          <p:spTgt spid="8"/>
+                                        </p:tgtEl>
+                                        <p:attrNameLst>
+                                          <p:attrName>ppt_y</p:attrName>
+                                        </p:attrNameLst>
+                                      </p:cBhvr>
+                                      <p:tavLst>
+                                        <p:tav tm="0">
+                                          <p:val>
+                                            <p:strVal val="#ppt_y"/>
+                                          </p:val>
+                                        </p:tav>
+                                        <p:tav tm="100000">
+                                          <p:val>
+                                            <p:strVal val="#ppt_y"/>
+                                          </p:val>
+                                        </p:tav>
+                                      </p:tavLst>
+                                    </p:anim>
+                                    <p:anim calcmode="lin" valueType="num">
+                                      <p:cBhvr additive="base">
+                                        <p:cTn id="76" dur="400"/>
+                                        <p:tgtEl>
+                                          <p:spTgt spid="8"/>
+                                        </p:tgtEl>
+                                        <p:attrNameLst>
+                                          <p:attrName>ppt_x</p:attrName>
+                                        </p:attrNameLst>
+                                      </p:cBhvr>
+                                      <p:tavLst>
+                                        <p:tav tm="0">
+                                          <p:val>
+                                            <p:strVal val="0-#ppt_w/2"/>
+                                          </p:val>
+                                        </p:tav>
+                                        <p:tav tm="100000">
+                                          <p:val>
+                                            <p:strVal val="#ppt_x"/>
+                                          </p:val>
+                                        </p:tav>
+                                      </p:tavLst>
+                                    </p:anim>
+                                  </p:childTnLst>
+                                </p:cTn>
+                              </p:par>
+                              <p:par>
+                                <p:cTn id="77" presetID="2" presetClass="entr" presetSubtype="8" fill="hold" grpId="0" nodeType="afterEffect">
+                                  <p:stCondLst>
+                                    <p:cond delay="27720"/>
+                                  </p:stCondLst>
+                                  <p:childTnLst>
+                                    <p:set>
+                                      <p:cBhvr>
+                                        <p:cTn id="78" dur="1"/>
+                                        <p:tgtEl>
+                                          <p:spTgt spid="13"/>
+                                        </p:tgtEl>
+                                        <p:attrNameLst>
+                                          <p:attrName>style.visibility</p:attrName>
+                                        </p:attrNameLst>
+                                      </p:cBhvr>
+                                      <p:to>
+                                        <p:strVal val="visible"/>
+                                      </p:to>
+                                    </p:set>
+                                    <p:anim calcmode="lin" valueType="num">
+                                      <p:cBhvr additive="base">
+                                        <p:cTn id="79" dur="400"/>
+                                        <p:tgtEl>
+                                          <p:spTgt spid="13"/>
+                                        </p:tgtEl>
+                                        <p:attrNameLst>
+                                          <p:attrName>ppt_y</p:attrName>
+                                        </p:attrNameLst>
+                                      </p:cBhvr>
+                                      <p:tavLst>
+                                        <p:tav tm="0">
+                                          <p:val>
+                                            <p:strVal val="#ppt_y"/>
+                                          </p:val>
+                                        </p:tav>
+                                        <p:tav tm="100000">
+                                          <p:val>
+                                            <p:strVal val="#ppt_y"/>
+                                          </p:val>
+                                        </p:tav>
+                                      </p:tavLst>
+                                    </p:anim>
+                                    <p:anim calcmode="lin" valueType="num">
+                                      <p:cBhvr additive="base">
+                                        <p:cTn id="80" dur="400"/>
+                                        <p:tgtEl>
+                                          <p:spTgt spid="13"/>
+                                        </p:tgtEl>
+                                        <p:attrNameLst>
+                                          <p:attrName>ppt_x</p:attrName>
+                                        </p:attrNameLst>
+                                      </p:cBhvr>
+                                      <p:tavLst>
+                                        <p:tav tm="0">
+                                          <p:val>
+                                            <p:strVal val="0-#ppt_w/2"/>
+                                          </p:val>
+                                        </p:tav>
+                                        <p:tav tm="100000">
+                                          <p:val>
+                                            <p:strVal val="#ppt_x"/>
+                                          </p:val>
+                                        </p:tav>
+                                      </p:tavLst>
+                                    </p:anim>
+                                  </p:childTnLst>
+                                </p:cTn>
+                              </p:par>
+                              <p:par>
+                                <p:cTn id="81" presetID="2" presetClass="entr" presetSubtype="8" fill="hold" grpId="0" nodeType="afterEffect">
+                                  <p:stCondLst>
+                                    <p:cond delay="30400"/>
+                                  </p:stCondLst>
+                                  <p:childTnLst>
+                                    <p:set>
+                                      <p:cBhvr>
+                                        <p:cTn id="82" dur="1"/>
+                                        <p:tgtEl>
+                                          <p:spTgt spid="18"/>
+                                        </p:tgtEl>
+                                        <p:attrNameLst>
+                                          <p:attrName>style.visibility</p:attrName>
+                                        </p:attrNameLst>
+                                      </p:cBhvr>
+                                      <p:to>
+                                        <p:strVal val="visible"/>
+                                      </p:to>
+                                    </p:set>
+                                    <p:anim calcmode="lin" valueType="num">
+                                      <p:cBhvr additive="base">
+                                        <p:cTn id="83" dur="400"/>
+                                        <p:tgtEl>
+                                          <p:spTgt spid="18"/>
+                                        </p:tgtEl>
+                                        <p:attrNameLst>
+                                          <p:attrName>ppt_y</p:attrName>
+                                        </p:attrNameLst>
+                                      </p:cBhvr>
+                                      <p:tavLst>
+                                        <p:tav tm="0">
+                                          <p:val>
+                                            <p:strVal val="#ppt_y"/>
+                                          </p:val>
+                                        </p:tav>
+                                        <p:tav tm="100000">
+                                          <p:val>
+                                            <p:strVal val="#ppt_y"/>
+                                          </p:val>
+                                        </p:tav>
+                                      </p:tavLst>
+                                    </p:anim>
+                                    <p:anim calcmode="lin" valueType="num">
+                                      <p:cBhvr additive="base">
+                                        <p:cTn id="84" dur="400"/>
+                                        <p:tgtEl>
+                                          <p:spTgt spid="18"/>
+                                        </p:tgtEl>
+                                        <p:attrNameLst>
+                                          <p:attrName>ppt_x</p:attrName>
+                                        </p:attrNameLst>
+                                      </p:cBhvr>
+                                      <p:tavLst>
+                                        <p:tav tm="0">
+                                          <p:val>
+                                            <p:strVal val="0-#ppt_w/2"/>
+                                          </p:val>
+                                        </p:tav>
+                                        <p:tav tm="100000">
+                                          <p:val>
+                                            <p:strVal val="#ppt_x"/>
+                                          </p:val>
+                                        </p:tav>
+                                      </p:tavLst>
+                                    </p:anim>
+                                  </p:childTnLst>
+                                </p:cTn>
+                              </p:par>
+                              <p:par>
+                                <p:cTn id="85" presetID="2" presetClass="entr" presetSubtype="8" fill="hold" grpId="0" nodeType="afterEffect">
+                                  <p:stCondLst>
+                                    <p:cond delay="33200"/>
+                                  </p:stCondLst>
+                                  <p:childTnLst>
+                                    <p:set>
+                                      <p:cBhvr>
+                                        <p:cTn id="86" dur="1"/>
+                                        <p:tgtEl>
+                                          <p:spTgt spid="23"/>
+                                        </p:tgtEl>
+                                        <p:attrNameLst>
+                                          <p:attrName>style.visibility</p:attrName>
+                                        </p:attrNameLst>
+                                      </p:cBhvr>
+                                      <p:to>
+                                        <p:strVal val="visible"/>
+                                      </p:to>
+                                    </p:set>
+                                    <p:anim calcmode="lin" valueType="num">
+                                      <p:cBhvr additive="base">
+                                        <p:cTn id="87" dur="400"/>
+                                        <p:tgtEl>
+                                          <p:spTgt spid="23"/>
+                                        </p:tgtEl>
+                                        <p:attrNameLst>
+                                          <p:attrName>ppt_y</p:attrName>
+                                        </p:attrNameLst>
+                                      </p:cBhvr>
+                                      <p:tavLst>
+                                        <p:tav tm="0">
+                                          <p:val>
+                                            <p:strVal val="#ppt_y"/>
+                                          </p:val>
+                                        </p:tav>
+                                        <p:tav tm="100000">
+                                          <p:val>
+                                            <p:strVal val="#ppt_y"/>
+                                          </p:val>
+                                        </p:tav>
+                                      </p:tavLst>
+                                    </p:anim>
+                                    <p:anim calcmode="lin" valueType="num">
+                                      <p:cBhvr additive="base">
+                                        <p:cTn id="88" dur="400"/>
+                                        <p:tgtEl>
+                                          <p:spTgt spid="23"/>
+                                        </p:tgtEl>
+                                        <p:attrNameLst>
+                                          <p:attrName>ppt_x</p:attrName>
+                                        </p:attrNameLst>
+                                      </p:cBhvr>
+                                      <p:tavLst>
+                                        <p:tav tm="0">
+                                          <p:val>
+                                            <p:strVal val="0-#ppt_w/2"/>
+                                          </p:val>
+                                        </p:tav>
+                                        <p:tav tm="100000">
+                                          <p:val>
+                                            <p:strVal val="#ppt_x"/>
+                                          </p:val>
+                                        </p:tav>
+                                      </p:tavLst>
+                                    </p:anim>
+                                  </p:childTnLst>
+                                </p:cTn>
+                              </p:par>
+                              <p:par>
+                                <p:cTn id="89" presetID="2" presetClass="entr" presetSubtype="8" fill="hold" grpId="0" nodeType="afterEffect">
+                                  <p:stCondLst>
+                                    <p:cond delay="36120"/>
+                                  </p:stCondLst>
+                                  <p:childTnLst>
+                                    <p:set>
+                                      <p:cBhvr>
+                                        <p:cTn id="90" dur="1"/>
+                                        <p:tgtEl>
+                                          <p:spTgt spid="24"/>
+                                        </p:tgtEl>
+                                        <p:attrNameLst>
+                                          <p:attrName>style.visibility</p:attrName>
+                                        </p:attrNameLst>
+                                      </p:cBhvr>
+                                      <p:to>
+                                        <p:strVal val="visible"/>
+                                      </p:to>
+                                    </p:set>
+                                    <p:anim calcmode="lin" valueType="num">
+                                      <p:cBhvr additive="base">
+                                        <p:cTn id="91" dur="400"/>
+                                        <p:tgtEl>
+                                          <p:spTgt spid="24"/>
+                                        </p:tgtEl>
+                                        <p:attrNameLst>
+                                          <p:attrName>ppt_y</p:attrName>
+                                        </p:attrNameLst>
+                                      </p:cBhvr>
+                                      <p:tavLst>
+                                        <p:tav tm="0">
+                                          <p:val>
+                                            <p:strVal val="#ppt_y"/>
+                                          </p:val>
+                                        </p:tav>
+                                        <p:tav tm="100000">
+                                          <p:val>
+                                            <p:strVal val="#ppt_y"/>
+                                          </p:val>
+                                        </p:tav>
+                                      </p:tavLst>
+                                    </p:anim>
+                                    <p:anim calcmode="lin" valueType="num">
+                                      <p:cBhvr additive="base">
+                                        <p:cTn id="92" dur="400"/>
+                                        <p:tgtEl>
+                                          <p:spTgt spid="24"/>
+                                        </p:tgtEl>
+                                        <p:attrNameLst>
+                                          <p:attrName>ppt_x</p:attrName>
+                                        </p:attrNameLst>
+                                      </p:cBhvr>
+                                      <p:tavLst>
+                                        <p:tav tm="0">
+                                          <p:val>
+                                            <p:strVal val="0-#ppt_w/2"/>
+                                          </p:val>
+                                        </p:tav>
+                                        <p:tav tm="100000">
+                                          <p:val>
+                                            <p:strVal val="#ppt_x"/>
+                                          </p:val>
+                                        </p:tav>
+                                      </p:tavLst>
+                                    </p:anim>
+                                  </p:childTnLst>
+                                </p:cTn>
+                              </p:par>
+                              <p:par>
+                                <p:cTn id="93" presetID="2" presetClass="entr" presetSubtype="8" fill="hold" grpId="0" nodeType="afterEffect">
+                                  <p:stCondLst>
+                                    <p:cond delay="39160"/>
+                                  </p:stCondLst>
+                                  <p:childTnLst>
+                                    <p:set>
+                                      <p:cBhvr>
+                                        <p:cTn id="94" dur="1"/>
+                                        <p:tgtEl>
+                                          <p:spTgt spid="25"/>
+                                        </p:tgtEl>
+                                        <p:attrNameLst>
+                                          <p:attrName>style.visibility</p:attrName>
+                                        </p:attrNameLst>
+                                      </p:cBhvr>
+                                      <p:to>
+                                        <p:strVal val="visible"/>
+                                      </p:to>
+                                    </p:set>
+                                    <p:anim calcmode="lin" valueType="num">
+                                      <p:cBhvr additive="base">
+                                        <p:cTn id="95" dur="400"/>
+                                        <p:tgtEl>
+                                          <p:spTgt spid="25"/>
+                                        </p:tgtEl>
+                                        <p:attrNameLst>
+                                          <p:attrName>ppt_y</p:attrName>
+                                        </p:attrNameLst>
+                                      </p:cBhvr>
+                                      <p:tavLst>
+                                        <p:tav tm="0">
+                                          <p:val>
+                                            <p:strVal val="#ppt_y"/>
+                                          </p:val>
+                                        </p:tav>
+                                        <p:tav tm="100000">
+                                          <p:val>
+                                            <p:strVal val="#ppt_y"/>
+                                          </p:val>
+                                        </p:tav>
+                                      </p:tavLst>
+                                    </p:anim>
+                                    <p:anim calcmode="lin" valueType="num">
+                                      <p:cBhvr additive="base">
+                                        <p:cTn id="96" dur="400"/>
+                                        <p:tgtEl>
+                                          <p:spTgt spid="25"/>
+                                        </p:tgtEl>
+                                        <p:attrNameLst>
+                                          <p:attrName>ppt_x</p:attrName>
+                                        </p:attrNameLst>
+                                      </p:cBhvr>
+                                      <p:tavLst>
+                                        <p:tav tm="0">
+                                          <p:val>
+                                            <p:strVal val="0-#ppt_w/2"/>
+                                          </p:val>
+                                        </p:tav>
+                                        <p:tav tm="100000">
+                                          <p:val>
+                                            <p:strVal val="#ppt_x"/>
+                                          </p:val>
+                                        </p:tav>
+                                      </p:tavLst>
+                                    </p:anim>
+                                  </p:childTnLst>
+                                </p:cTn>
+                              </p:par>
+                              <p:par>
+                                <p:cTn id="97" presetID="2" presetClass="entr" presetSubtype="8" fill="hold" grpId="0" nodeType="afterEffect">
+                                  <p:stCondLst>
+                                    <p:cond delay="42320"/>
+                                  </p:stCondLst>
+                                  <p:childTnLst>
+                                    <p:set>
+                                      <p:cBhvr>
+                                        <p:cTn id="98" dur="1"/>
+                                        <p:tgtEl>
+                                          <p:spTgt spid="26"/>
+                                        </p:tgtEl>
+                                        <p:attrNameLst>
+                                          <p:attrName>style.visibility</p:attrName>
+                                        </p:attrNameLst>
+                                      </p:cBhvr>
+                                      <p:to>
+                                        <p:strVal val="visible"/>
+                                      </p:to>
+                                    </p:set>
+                                    <p:anim calcmode="lin" valueType="num">
+                                      <p:cBhvr additive="base">
+                                        <p:cTn id="99" dur="400"/>
+                                        <p:tgtEl>
+                                          <p:spTgt spid="26"/>
+                                        </p:tgtEl>
+                                        <p:attrNameLst>
+                                          <p:attrName>ppt_y</p:attrName>
+                                        </p:attrNameLst>
+                                      </p:cBhvr>
+                                      <p:tavLst>
+                                        <p:tav tm="0">
+                                          <p:val>
+                                            <p:strVal val="#ppt_y"/>
+                                          </p:val>
+                                        </p:tav>
+                                        <p:tav tm="100000">
+                                          <p:val>
+                                            <p:strVal val="#ppt_y"/>
+                                          </p:val>
+                                        </p:tav>
+                                      </p:tavLst>
+                                    </p:anim>
+                                    <p:anim calcmode="lin" valueType="num">
+                                      <p:cBhvr additive="base">
+                                        <p:cTn id="100" dur="400"/>
+                                        <p:tgtEl>
+                                          <p:spTgt spid="26"/>
+                                        </p:tgtEl>
+                                        <p:attrNameLst>
+                                          <p:attrName>ppt_x</p:attrName>
+                                        </p:attrNameLst>
+                                      </p:cBhvr>
+                                      <p:tavLst>
+                                        <p:tav tm="0">
+                                          <p:val>
+                                            <p:strVal val="0-#ppt_w/2"/>
+                                          </p:val>
+                                        </p:tav>
+                                        <p:tav tm="100000">
+                                          <p:val>
+                                            <p:strVal val="#ppt_x"/>
+                                          </p:val>
+                                        </p:tav>
+                                      </p:tavLst>
+                                    </p:anim>
+                                  </p:childTnLst>
+                                </p:cTn>
+                              </p:par>
+                            </p:childTnLst>
+                          </p:cTn>
+                        </p:par>
+                      </p:childTnLst>
+                    </p:cTn>
+                  </p:par>
+                </p:childTnLst>
+              </p:cTn>
+              <p:prevCondLst>
+                <p:cond evt="onPrev" delay="0">
+                  <p:tgtEl>
+                    <p:sldTgt/>
+                  </p:tgtEl>
+                </p:cond>
+              </p:prevCondLst>
+              <p:nextCondLst>
+                <p:cond evt="onNext" delay="0">
+                  <p:tgtEl>
+                    <p:sldTgt/>
+                  </p:tgtEl>
+                </p:cond>
+              </p:nextCondLst>
+            </p:seq>
+          </p:childTnLst>
+        </p:cTn>
+      </p:par>
+    </p:tnLst>
+    <p:bldLst>
+      <p:bldP spid="2" grpId="0"/>
+      <p:bldP spid="3" grpId="0"/>
+      <p:bldP spid="5" grpId="0"/>
+      <p:bldP spid="10" grpId="0"/>
+      <p:bldP spid="15" grpId="0"/>
+      <p:bldP spid="20" grpId="0"/>
+      <p:bldP spid="6" grpId="0"/>
+      <p:bldP spid="11" grpId="0"/>
+      <p:bldP spid="16" grpId="0"/>
+      <p:bldP spid="21" grpId="0"/>
+      <p:bldP spid="7" grpId="0"/>
+      <p:bldP spid="12" grpId="0"/>
+      <p:bldP spid="17" grpId="0"/>
+      <p:bldP spid="22" grpId="0"/>
+      <p:bldP spid="9" grpId="0"/>
+      <p:bldP spid="14" grpId="0"/>
+      <p:bldP spid="19" grpId="0"/>
+      <p:bldP spid="8" grpId="0"/>
+      <p:bldP spid="13" grpId="0"/>
+      <p:bldP spid="18" grpId="0"/>
+      <p:bldP spid="23" grpId="0"/>
+      <p:bldP spid="24" grpId="0"/>
+      <p:bldP spid="25" grpId="0"/>
+      <p:bldP spid="26" grpId="0"/>
+    </p:bldLst>
+  </p:timing>
 </p:sld>
 </file>
 
@@ -5672,6 +10465,670 @@
   <p:clrMapOvr>
     <a:masterClrMapping/>
   </p:clrMapOvr>
+  <p:transition spd="med">
+    <p:fade/>
+  </p:transition>
+  <p:timing>
+    <p:tnLst>
+      <p:par>
+        <p:cTn id="1" dur="indefinite" restart="never" nodeType="tmRoot">
+          <p:childTnLst>
+            <p:seq concurrent="1" nextAc="seek">
+              <p:cTn id="2" dur="indefinite" nodeType="mainSeq">
+                <p:childTnLst>
+                  <p:par>
+                    <p:cTn id="3" fill="hold">
+                      <p:stCondLst>
+                        <p:cond delay="indefinite"/>
+                        <p:cond evt="onBegin" delay="0">
+                          <p:tn val="2"/>
+                        </p:cond>
+                      </p:stCondLst>
+                      <p:childTnLst>
+                        <p:par>
+                          <p:cTn id="4" fill="hold">
+                            <p:stCondLst>
+                              <p:cond delay="0"/>
+                            </p:stCondLst>
+                            <p:childTnLst>
+                              <p:par>
+                                <p:cTn id="5" presetID="22" presetClass="entr" presetSubtype="1" fill="hold" grpId="0" nodeType="afterEffect">
+                                  <p:stCondLst>
+                                    <p:cond delay="0"/>
+                                  </p:stCondLst>
+                                  <p:childTnLst>
+                                    <p:set>
+                                      <p:cBhvr>
+                                        <p:cTn id="6" dur="1"/>
+                                        <p:tgtEl>
+                                          <p:spTgt spid="2"/>
+                                        </p:tgtEl>
+                                        <p:attrNameLst>
+                                          <p:attrName>style.visibility</p:attrName>
+                                        </p:attrNameLst>
+                                      </p:cBhvr>
+                                      <p:to>
+                                        <p:strVal val="visible"/>
+                                      </p:to>
+                                    </p:set>
+                                    <p:animEffect transition="in" filter="wipe(down)">
+                                      <p:cBhvr>
+                                        <p:cTn id="7" dur="500"/>
+                                        <p:tgtEl>
+                                          <p:spTgt spid="2"/>
+                                        </p:tgtEl>
+                                      </p:cBhvr>
+                                    </p:animEffect>
+                                  </p:childTnLst>
+                                </p:cTn>
+                              </p:par>
+                              <p:par>
+                                <p:cTn id="8" presetID="22" presetClass="entr" presetSubtype="1" fill="hold" grpId="0" nodeType="afterEffect">
+                                  <p:stCondLst>
+                                    <p:cond delay="650"/>
+                                  </p:stCondLst>
+                                  <p:childTnLst>
+                                    <p:set>
+                                      <p:cBhvr>
+                                        <p:cTn id="9" dur="1"/>
+                                        <p:tgtEl>
+                                          <p:spTgt spid="3"/>
+                                        </p:tgtEl>
+                                        <p:attrNameLst>
+                                          <p:attrName>style.visibility</p:attrName>
+                                        </p:attrNameLst>
+                                      </p:cBhvr>
+                                      <p:to>
+                                        <p:strVal val="visible"/>
+                                      </p:to>
+                                    </p:set>
+                                    <p:animEffect transition="in" filter="wipe(down)">
+                                      <p:cBhvr>
+                                        <p:cTn id="10" dur="500"/>
+                                        <p:tgtEl>
+                                          <p:spTgt spid="3"/>
+                                        </p:tgtEl>
+                                      </p:cBhvr>
+                                    </p:animEffect>
+                                  </p:childTnLst>
+                                </p:cTn>
+                              </p:par>
+                              <p:par>
+                                <p:cTn id="11" presetID="22" presetClass="entr" presetSubtype="1" fill="hold" grpId="0" nodeType="afterEffect">
+                                  <p:stCondLst>
+                                    <p:cond delay="1450"/>
+                                  </p:stCondLst>
+                                  <p:childTnLst>
+                                    <p:set>
+                                      <p:cBhvr>
+                                        <p:cTn id="12" dur="1"/>
+                                        <p:tgtEl>
+                                          <p:spTgt spid="5"/>
+                                        </p:tgtEl>
+                                        <p:attrNameLst>
+                                          <p:attrName>style.visibility</p:attrName>
+                                        </p:attrNameLst>
+                                      </p:cBhvr>
+                                      <p:to>
+                                        <p:strVal val="visible"/>
+                                      </p:to>
+                                    </p:set>
+                                    <p:animEffect transition="in" filter="wipe(down)">
+                                      <p:cBhvr>
+                                        <p:cTn id="13" dur="500"/>
+                                        <p:tgtEl>
+                                          <p:spTgt spid="5"/>
+                                        </p:tgtEl>
+                                      </p:cBhvr>
+                                    </p:animEffect>
+                                  </p:childTnLst>
+                                </p:cTn>
+                              </p:par>
+                              <p:par>
+                                <p:cTn id="14" presetID="22" presetClass="entr" presetSubtype="1" fill="hold" grpId="0" nodeType="afterEffect">
+                                  <p:stCondLst>
+                                    <p:cond delay="2400"/>
+                                  </p:stCondLst>
+                                  <p:childTnLst>
+                                    <p:set>
+                                      <p:cBhvr>
+                                        <p:cTn id="15" dur="1"/>
+                                        <p:tgtEl>
+                                          <p:spTgt spid="8"/>
+                                        </p:tgtEl>
+                                        <p:attrNameLst>
+                                          <p:attrName>style.visibility</p:attrName>
+                                        </p:attrNameLst>
+                                      </p:cBhvr>
+                                      <p:to>
+                                        <p:strVal val="visible"/>
+                                      </p:to>
+                                    </p:set>
+                                    <p:animEffect transition="in" filter="wipe(down)">
+                                      <p:cBhvr>
+                                        <p:cTn id="16" dur="500"/>
+                                        <p:tgtEl>
+                                          <p:spTgt spid="8"/>
+                                        </p:tgtEl>
+                                      </p:cBhvr>
+                                    </p:animEffect>
+                                  </p:childTnLst>
+                                </p:cTn>
+                              </p:par>
+                              <p:par>
+                                <p:cTn id="17" presetID="22" presetClass="entr" presetSubtype="1" fill="hold" grpId="0" nodeType="afterEffect">
+                                  <p:stCondLst>
+                                    <p:cond delay="3500"/>
+                                  </p:stCondLst>
+                                  <p:childTnLst>
+                                    <p:set>
+                                      <p:cBhvr>
+                                        <p:cTn id="18" dur="1"/>
+                                        <p:tgtEl>
+                                          <p:spTgt spid="12"/>
+                                        </p:tgtEl>
+                                        <p:attrNameLst>
+                                          <p:attrName>style.visibility</p:attrName>
+                                        </p:attrNameLst>
+                                      </p:cBhvr>
+                                      <p:to>
+                                        <p:strVal val="visible"/>
+                                      </p:to>
+                                    </p:set>
+                                    <p:animEffect transition="in" filter="wipe(down)">
+                                      <p:cBhvr>
+                                        <p:cTn id="19" dur="500"/>
+                                        <p:tgtEl>
+                                          <p:spTgt spid="12"/>
+                                        </p:tgtEl>
+                                      </p:cBhvr>
+                                    </p:animEffect>
+                                  </p:childTnLst>
+                                </p:cTn>
+                              </p:par>
+                              <p:par>
+                                <p:cTn id="20" presetID="22" presetClass="entr" presetSubtype="1" fill="hold" grpId="0" nodeType="afterEffect">
+                                  <p:stCondLst>
+                                    <p:cond delay="4750"/>
+                                  </p:stCondLst>
+                                  <p:childTnLst>
+                                    <p:set>
+                                      <p:cBhvr>
+                                        <p:cTn id="21" dur="1"/>
+                                        <p:tgtEl>
+                                          <p:spTgt spid="11"/>
+                                        </p:tgtEl>
+                                        <p:attrNameLst>
+                                          <p:attrName>style.visibility</p:attrName>
+                                        </p:attrNameLst>
+                                      </p:cBhvr>
+                                      <p:to>
+                                        <p:strVal val="visible"/>
+                                      </p:to>
+                                    </p:set>
+                                    <p:animEffect transition="in" filter="wipe(down)">
+                                      <p:cBhvr>
+                                        <p:cTn id="22" dur="500"/>
+                                        <p:tgtEl>
+                                          <p:spTgt spid="11"/>
+                                        </p:tgtEl>
+                                      </p:cBhvr>
+                                    </p:animEffect>
+                                  </p:childTnLst>
+                                </p:cTn>
+                              </p:par>
+                              <p:par>
+                                <p:cTn id="23" presetID="22" presetClass="entr" presetSubtype="1" fill="hold" grpId="0" nodeType="afterEffect">
+                                  <p:stCondLst>
+                                    <p:cond delay="6150"/>
+                                  </p:stCondLst>
+                                  <p:childTnLst>
+                                    <p:set>
+                                      <p:cBhvr>
+                                        <p:cTn id="24" dur="1"/>
+                                        <p:tgtEl>
+                                          <p:spTgt spid="13"/>
+                                        </p:tgtEl>
+                                        <p:attrNameLst>
+                                          <p:attrName>style.visibility</p:attrName>
+                                        </p:attrNameLst>
+                                      </p:cBhvr>
+                                      <p:to>
+                                        <p:strVal val="visible"/>
+                                      </p:to>
+                                    </p:set>
+                                    <p:animEffect transition="in" filter="wipe(down)">
+                                      <p:cBhvr>
+                                        <p:cTn id="25" dur="500"/>
+                                        <p:tgtEl>
+                                          <p:spTgt spid="13"/>
+                                        </p:tgtEl>
+                                      </p:cBhvr>
+                                    </p:animEffect>
+                                  </p:childTnLst>
+                                </p:cTn>
+                              </p:par>
+                              <p:par>
+                                <p:cTn id="26" presetID="22" presetClass="entr" presetSubtype="1" fill="hold" grpId="0" nodeType="afterEffect">
+                                  <p:stCondLst>
+                                    <p:cond delay="7700"/>
+                                  </p:stCondLst>
+                                  <p:childTnLst>
+                                    <p:set>
+                                      <p:cBhvr>
+                                        <p:cTn id="27" dur="1"/>
+                                        <p:tgtEl>
+                                          <p:spTgt spid="6"/>
+                                        </p:tgtEl>
+                                        <p:attrNameLst>
+                                          <p:attrName>style.visibility</p:attrName>
+                                        </p:attrNameLst>
+                                      </p:cBhvr>
+                                      <p:to>
+                                        <p:strVal val="visible"/>
+                                      </p:to>
+                                    </p:set>
+                                    <p:animEffect transition="in" filter="wipe(down)">
+                                      <p:cBhvr>
+                                        <p:cTn id="28" dur="500"/>
+                                        <p:tgtEl>
+                                          <p:spTgt spid="6"/>
+                                        </p:tgtEl>
+                                      </p:cBhvr>
+                                    </p:animEffect>
+                                  </p:childTnLst>
+                                </p:cTn>
+                              </p:par>
+                              <p:par>
+                                <p:cTn id="29" presetID="22" presetClass="entr" presetSubtype="1" fill="hold" grpId="0" nodeType="afterEffect">
+                                  <p:stCondLst>
+                                    <p:cond delay="9400"/>
+                                  </p:stCondLst>
+                                  <p:childTnLst>
+                                    <p:set>
+                                      <p:cBhvr>
+                                        <p:cTn id="30" dur="1"/>
+                                        <p:tgtEl>
+                                          <p:spTgt spid="9"/>
+                                        </p:tgtEl>
+                                        <p:attrNameLst>
+                                          <p:attrName>style.visibility</p:attrName>
+                                        </p:attrNameLst>
+                                      </p:cBhvr>
+                                      <p:to>
+                                        <p:strVal val="visible"/>
+                                      </p:to>
+                                    </p:set>
+                                    <p:animEffect transition="in" filter="wipe(down)">
+                                      <p:cBhvr>
+                                        <p:cTn id="31" dur="500"/>
+                                        <p:tgtEl>
+                                          <p:spTgt spid="9"/>
+                                        </p:tgtEl>
+                                      </p:cBhvr>
+                                    </p:animEffect>
+                                  </p:childTnLst>
+                                </p:cTn>
+                              </p:par>
+                              <p:par>
+                                <p:cTn id="32" presetID="22" presetClass="entr" presetSubtype="1" fill="hold" grpId="0" nodeType="afterEffect">
+                                  <p:stCondLst>
+                                    <p:cond delay="11250"/>
+                                  </p:stCondLst>
+                                  <p:childTnLst>
+                                    <p:set>
+                                      <p:cBhvr>
+                                        <p:cTn id="33" dur="1"/>
+                                        <p:tgtEl>
+                                          <p:spTgt spid="7"/>
+                                        </p:tgtEl>
+                                        <p:attrNameLst>
+                                          <p:attrName>style.visibility</p:attrName>
+                                        </p:attrNameLst>
+                                      </p:cBhvr>
+                                      <p:to>
+                                        <p:strVal val="visible"/>
+                                      </p:to>
+                                    </p:set>
+                                    <p:animEffect transition="in" filter="wipe(down)">
+                                      <p:cBhvr>
+                                        <p:cTn id="34" dur="500"/>
+                                        <p:tgtEl>
+                                          <p:spTgt spid="7"/>
+                                        </p:tgtEl>
+                                      </p:cBhvr>
+                                    </p:animEffect>
+                                  </p:childTnLst>
+                                </p:cTn>
+                              </p:par>
+                              <p:par>
+                                <p:cTn id="35" presetID="22" presetClass="entr" presetSubtype="1" fill="hold" grpId="0" nodeType="afterEffect">
+                                  <p:stCondLst>
+                                    <p:cond delay="13250"/>
+                                  </p:stCondLst>
+                                  <p:childTnLst>
+                                    <p:set>
+                                      <p:cBhvr>
+                                        <p:cTn id="36" dur="1"/>
+                                        <p:tgtEl>
+                                          <p:spTgt spid="10"/>
+                                        </p:tgtEl>
+                                        <p:attrNameLst>
+                                          <p:attrName>style.visibility</p:attrName>
+                                        </p:attrNameLst>
+                                      </p:cBhvr>
+                                      <p:to>
+                                        <p:strVal val="visible"/>
+                                      </p:to>
+                                    </p:set>
+                                    <p:animEffect transition="in" filter="wipe(down)">
+                                      <p:cBhvr>
+                                        <p:cTn id="37" dur="500"/>
+                                        <p:tgtEl>
+                                          <p:spTgt spid="10"/>
+                                        </p:tgtEl>
+                                      </p:cBhvr>
+                                    </p:animEffect>
+                                  </p:childTnLst>
+                                </p:cTn>
+                              </p:par>
+                              <p:par>
+                                <p:cTn id="38" presetID="22" presetClass="entr" presetSubtype="1" fill="hold" grpId="0" nodeType="afterEffect">
+                                  <p:stCondLst>
+                                    <p:cond delay="15400"/>
+                                  </p:stCondLst>
+                                  <p:childTnLst>
+                                    <p:set>
+                                      <p:cBhvr>
+                                        <p:cTn id="39" dur="1"/>
+                                        <p:tgtEl>
+                                          <p:spTgt spid="15"/>
+                                        </p:tgtEl>
+                                        <p:attrNameLst>
+                                          <p:attrName>style.visibility</p:attrName>
+                                        </p:attrNameLst>
+                                      </p:cBhvr>
+                                      <p:to>
+                                        <p:strVal val="visible"/>
+                                      </p:to>
+                                    </p:set>
+                                    <p:animEffect transition="in" filter="wipe(down)">
+                                      <p:cBhvr>
+                                        <p:cTn id="40" dur="500"/>
+                                        <p:tgtEl>
+                                          <p:spTgt spid="15"/>
+                                        </p:tgtEl>
+                                      </p:cBhvr>
+                                    </p:animEffect>
+                                  </p:childTnLst>
+                                </p:cTn>
+                              </p:par>
+                              <p:par>
+                                <p:cTn id="41" presetID="22" presetClass="entr" presetSubtype="1" fill="hold" grpId="0" nodeType="afterEffect">
+                                  <p:stCondLst>
+                                    <p:cond delay="17700"/>
+                                  </p:stCondLst>
+                                  <p:childTnLst>
+                                    <p:set>
+                                      <p:cBhvr>
+                                        <p:cTn id="42" dur="1"/>
+                                        <p:tgtEl>
+                                          <p:spTgt spid="14"/>
+                                        </p:tgtEl>
+                                        <p:attrNameLst>
+                                          <p:attrName>style.visibility</p:attrName>
+                                        </p:attrNameLst>
+                                      </p:cBhvr>
+                                      <p:to>
+                                        <p:strVal val="visible"/>
+                                      </p:to>
+                                    </p:set>
+                                    <p:animEffect transition="in" filter="wipe(down)">
+                                      <p:cBhvr>
+                                        <p:cTn id="43" dur="500"/>
+                                        <p:tgtEl>
+                                          <p:spTgt spid="14"/>
+                                        </p:tgtEl>
+                                      </p:cBhvr>
+                                    </p:animEffect>
+                                  </p:childTnLst>
+                                </p:cTn>
+                              </p:par>
+                              <p:par>
+                                <p:cTn id="44" presetID="22" presetClass="entr" presetSubtype="1" fill="hold" grpId="0" nodeType="afterEffect">
+                                  <p:stCondLst>
+                                    <p:cond delay="20150"/>
+                                  </p:stCondLst>
+                                  <p:childTnLst>
+                                    <p:set>
+                                      <p:cBhvr>
+                                        <p:cTn id="45" dur="1"/>
+                                        <p:tgtEl>
+                                          <p:spTgt spid="16"/>
+                                        </p:tgtEl>
+                                        <p:attrNameLst>
+                                          <p:attrName>style.visibility</p:attrName>
+                                        </p:attrNameLst>
+                                      </p:cBhvr>
+                                      <p:to>
+                                        <p:strVal val="visible"/>
+                                      </p:to>
+                                    </p:set>
+                                    <p:animEffect transition="in" filter="wipe(down)">
+                                      <p:cBhvr>
+                                        <p:cTn id="46" dur="500"/>
+                                        <p:tgtEl>
+                                          <p:spTgt spid="16"/>
+                                        </p:tgtEl>
+                                      </p:cBhvr>
+                                    </p:animEffect>
+                                  </p:childTnLst>
+                                </p:cTn>
+                              </p:par>
+                              <p:par>
+                                <p:cTn id="47" presetID="22" presetClass="entr" presetSubtype="1" fill="hold" grpId="0" nodeType="afterEffect">
+                                  <p:stCondLst>
+                                    <p:cond delay="22750"/>
+                                  </p:stCondLst>
+                                  <p:childTnLst>
+                                    <p:set>
+                                      <p:cBhvr>
+                                        <p:cTn id="48" dur="1"/>
+                                        <p:tgtEl>
+                                          <p:spTgt spid="18"/>
+                                        </p:tgtEl>
+                                        <p:attrNameLst>
+                                          <p:attrName>style.visibility</p:attrName>
+                                        </p:attrNameLst>
+                                      </p:cBhvr>
+                                      <p:to>
+                                        <p:strVal val="visible"/>
+                                      </p:to>
+                                    </p:set>
+                                    <p:animEffect transition="in" filter="wipe(down)">
+                                      <p:cBhvr>
+                                        <p:cTn id="49" dur="500"/>
+                                        <p:tgtEl>
+                                          <p:spTgt spid="18"/>
+                                        </p:tgtEl>
+                                      </p:cBhvr>
+                                    </p:animEffect>
+                                  </p:childTnLst>
+                                </p:cTn>
+                              </p:par>
+                              <p:par>
+                                <p:cTn id="50" presetID="22" presetClass="entr" presetSubtype="1" fill="hold" grpId="0" nodeType="afterEffect">
+                                  <p:stCondLst>
+                                    <p:cond delay="25500"/>
+                                  </p:stCondLst>
+                                  <p:childTnLst>
+                                    <p:set>
+                                      <p:cBhvr>
+                                        <p:cTn id="51" dur="1"/>
+                                        <p:tgtEl>
+                                          <p:spTgt spid="17"/>
+                                        </p:tgtEl>
+                                        <p:attrNameLst>
+                                          <p:attrName>style.visibility</p:attrName>
+                                        </p:attrNameLst>
+                                      </p:cBhvr>
+                                      <p:to>
+                                        <p:strVal val="visible"/>
+                                      </p:to>
+                                    </p:set>
+                                    <p:animEffect transition="in" filter="wipe(down)">
+                                      <p:cBhvr>
+                                        <p:cTn id="52" dur="500"/>
+                                        <p:tgtEl>
+                                          <p:spTgt spid="17"/>
+                                        </p:tgtEl>
+                                      </p:cBhvr>
+                                    </p:animEffect>
+                                  </p:childTnLst>
+                                </p:cTn>
+                              </p:par>
+                              <p:par>
+                                <p:cTn id="53" presetID="22" presetClass="entr" presetSubtype="1" fill="hold" grpId="0" nodeType="afterEffect">
+                                  <p:stCondLst>
+                                    <p:cond delay="28400"/>
+                                  </p:stCondLst>
+                                  <p:childTnLst>
+                                    <p:set>
+                                      <p:cBhvr>
+                                        <p:cTn id="54" dur="1"/>
+                                        <p:tgtEl>
+                                          <p:spTgt spid="19"/>
+                                        </p:tgtEl>
+                                        <p:attrNameLst>
+                                          <p:attrName>style.visibility</p:attrName>
+                                        </p:attrNameLst>
+                                      </p:cBhvr>
+                                      <p:to>
+                                        <p:strVal val="visible"/>
+                                      </p:to>
+                                    </p:set>
+                                    <p:animEffect transition="in" filter="wipe(down)">
+                                      <p:cBhvr>
+                                        <p:cTn id="55" dur="500"/>
+                                        <p:tgtEl>
+                                          <p:spTgt spid="19"/>
+                                        </p:tgtEl>
+                                      </p:cBhvr>
+                                    </p:animEffect>
+                                  </p:childTnLst>
+                                </p:cTn>
+                              </p:par>
+                              <p:par>
+                                <p:cTn id="56" presetID="22" presetClass="entr" presetSubtype="1" fill="hold" grpId="0" nodeType="afterEffect">
+                                  <p:stCondLst>
+                                    <p:cond delay="31450"/>
+                                  </p:stCondLst>
+                                  <p:childTnLst>
+                                    <p:set>
+                                      <p:cBhvr>
+                                        <p:cTn id="57" dur="1"/>
+                                        <p:tgtEl>
+                                          <p:spTgt spid="20"/>
+                                        </p:tgtEl>
+                                        <p:attrNameLst>
+                                          <p:attrName>style.visibility</p:attrName>
+                                        </p:attrNameLst>
+                                      </p:cBhvr>
+                                      <p:to>
+                                        <p:strVal val="visible"/>
+                                      </p:to>
+                                    </p:set>
+                                    <p:animEffect transition="in" filter="wipe(down)">
+                                      <p:cBhvr>
+                                        <p:cTn id="58" dur="500"/>
+                                        <p:tgtEl>
+                                          <p:spTgt spid="20"/>
+                                        </p:tgtEl>
+                                      </p:cBhvr>
+                                    </p:animEffect>
+                                  </p:childTnLst>
+                                </p:cTn>
+                              </p:par>
+                              <p:par>
+                                <p:cTn id="59" presetID="22" presetClass="entr" presetSubtype="1" fill="hold" grpId="0" nodeType="afterEffect">
+                                  <p:stCondLst>
+                                    <p:cond delay="34650"/>
+                                  </p:stCondLst>
+                                  <p:childTnLst>
+                                    <p:set>
+                                      <p:cBhvr>
+                                        <p:cTn id="60" dur="1"/>
+                                        <p:tgtEl>
+                                          <p:spTgt spid="21"/>
+                                        </p:tgtEl>
+                                        <p:attrNameLst>
+                                          <p:attrName>style.visibility</p:attrName>
+                                        </p:attrNameLst>
+                                      </p:cBhvr>
+                                      <p:to>
+                                        <p:strVal val="visible"/>
+                                      </p:to>
+                                    </p:set>
+                                    <p:animEffect transition="in" filter="wipe(down)">
+                                      <p:cBhvr>
+                                        <p:cTn id="61" dur="500"/>
+                                        <p:tgtEl>
+                                          <p:spTgt spid="21"/>
+                                        </p:tgtEl>
+                                      </p:cBhvr>
+                                    </p:animEffect>
+                                  </p:childTnLst>
+                                </p:cTn>
+                              </p:par>
+                            </p:childTnLst>
+                          </p:cTn>
+                        </p:par>
+                      </p:childTnLst>
+                    </p:cTn>
+                  </p:par>
+                </p:childTnLst>
+              </p:cTn>
+              <p:prevCondLst>
+                <p:cond evt="onPrev" delay="0">
+                  <p:tgtEl>
+                    <p:sldTgt/>
+                  </p:tgtEl>
+                </p:cond>
+              </p:prevCondLst>
+              <p:nextCondLst>
+                <p:cond evt="onNext" delay="0">
+                  <p:tgtEl>
+                    <p:sldTgt/>
+                  </p:tgtEl>
+                </p:cond>
+              </p:nextCondLst>
+            </p:seq>
+          </p:childTnLst>
+        </p:cTn>
+      </p:par>
+    </p:tnLst>
+    <p:bldLst>
+      <p:bldP spid="2" grpId="0"/>
+      <p:bldP spid="3" grpId="0"/>
+      <p:bldP spid="5" grpId="0"/>
+      <p:bldP spid="8" grpId="0"/>
+      <p:bldP spid="12" grpId="0"/>
+      <p:bldP spid="11" grpId="0"/>
+      <p:bldP spid="13" grpId="0"/>
+      <p:bldP spid="6" grpId="0"/>
+      <p:bldP spid="9" grpId="0"/>
+      <p:bldP spid="7" grpId="0"/>
+      <p:bldP spid="10" grpId="0"/>
+      <p:bldP spid="15" grpId="0"/>
+      <p:bldP spid="14" grpId="0"/>
+      <p:bldP spid="16" grpId="0"/>
+      <p:bldP spid="18" grpId="0"/>
+      <p:bldP spid="17" grpId="0"/>
+      <p:bldP spid="19" grpId="0"/>
+      <p:bldP spid="20" grpId="0"/>
+      <p:bldP spid="21" grpId="0"/>
+    </p:bldLst>
+  </p:timing>
 </p:sld>
 </file>
 
@@ -6187,6 +11644,478 @@
   <p:clrMapOvr>
     <a:masterClrMapping/>
   </p:clrMapOvr>
+  <p:transition spd="med">
+    <p:fade/>
+  </p:transition>
+  <p:timing>
+    <p:tnLst>
+      <p:par>
+        <p:cTn id="1" dur="indefinite" restart="never" nodeType="tmRoot">
+          <p:childTnLst>
+            <p:seq concurrent="1" nextAc="seek">
+              <p:cTn id="2" dur="indefinite" nodeType="mainSeq">
+                <p:childTnLst>
+                  <p:par>
+                    <p:cTn id="3" fill="hold">
+                      <p:stCondLst>
+                        <p:cond delay="indefinite"/>
+                        <p:cond evt="onBegin" delay="0">
+                          <p:tn val="2"/>
+                        </p:cond>
+                      </p:stCondLst>
+                      <p:childTnLst>
+                        <p:par>
+                          <p:cTn id="4" fill="hold">
+                            <p:stCondLst>
+                              <p:cond delay="0"/>
+                            </p:stCondLst>
+                            <p:childTnLst>
+                              <p:par>
+                                <p:cTn id="5" presetID="10" presetClass="entr" presetSubtype="0" fill="hold" grpId="0" nodeType="afterEffect">
+                                  <p:stCondLst>
+                                    <p:cond delay="0"/>
+                                  </p:stCondLst>
+                                  <p:childTnLst>
+                                    <p:set>
+                                      <p:cBhvr>
+                                        <p:cTn id="6" dur="1"/>
+                                        <p:tgtEl>
+                                          <p:spTgt spid="2"/>
+                                        </p:tgtEl>
+                                        <p:attrNameLst>
+                                          <p:attrName>style.visibility</p:attrName>
+                                        </p:attrNameLst>
+                                      </p:cBhvr>
+                                      <p:to>
+                                        <p:strVal val="visible"/>
+                                      </p:to>
+                                    </p:set>
+                                    <p:animEffect transition="in" filter="fade">
+                                      <p:cBhvr>
+                                        <p:cTn id="7" dur="400"/>
+                                        <p:tgtEl>
+                                          <p:spTgt spid="2"/>
+                                        </p:tgtEl>
+                                      </p:cBhvr>
+                                    </p:animEffect>
+                                  </p:childTnLst>
+                                </p:cTn>
+                              </p:par>
+                              <p:par>
+                                <p:cTn id="8" presetID="10" presetClass="entr" presetSubtype="0" fill="hold" grpId="0" nodeType="afterEffect">
+                                  <p:stCondLst>
+                                    <p:cond delay="550"/>
+                                  </p:stCondLst>
+                                  <p:childTnLst>
+                                    <p:set>
+                                      <p:cBhvr>
+                                        <p:cTn id="9" dur="1"/>
+                                        <p:tgtEl>
+                                          <p:spTgt spid="3"/>
+                                        </p:tgtEl>
+                                        <p:attrNameLst>
+                                          <p:attrName>style.visibility</p:attrName>
+                                        </p:attrNameLst>
+                                      </p:cBhvr>
+                                      <p:to>
+                                        <p:strVal val="visible"/>
+                                      </p:to>
+                                    </p:set>
+                                    <p:animEffect transition="in" filter="fade">
+                                      <p:cBhvr>
+                                        <p:cTn id="10" dur="400"/>
+                                        <p:tgtEl>
+                                          <p:spTgt spid="3"/>
+                                        </p:tgtEl>
+                                      </p:cBhvr>
+                                    </p:animEffect>
+                                  </p:childTnLst>
+                                </p:cTn>
+                              </p:par>
+                              <p:par>
+                                <p:cTn id="11" presetID="10" presetClass="entr" presetSubtype="0" fill="hold" grpId="0" nodeType="afterEffect">
+                                  <p:stCondLst>
+                                    <p:cond delay="1250"/>
+                                  </p:stCondLst>
+                                  <p:childTnLst>
+                                    <p:set>
+                                      <p:cBhvr>
+                                        <p:cTn id="12" dur="1"/>
+                                        <p:tgtEl>
+                                          <p:spTgt spid="5"/>
+                                        </p:tgtEl>
+                                        <p:attrNameLst>
+                                          <p:attrName>style.visibility</p:attrName>
+                                        </p:attrNameLst>
+                                      </p:cBhvr>
+                                      <p:to>
+                                        <p:strVal val="visible"/>
+                                      </p:to>
+                                    </p:set>
+                                    <p:animEffect transition="in" filter="fade">
+                                      <p:cBhvr>
+                                        <p:cTn id="13" dur="400"/>
+                                        <p:tgtEl>
+                                          <p:spTgt spid="5"/>
+                                        </p:tgtEl>
+                                      </p:cBhvr>
+                                    </p:animEffect>
+                                  </p:childTnLst>
+                                </p:cTn>
+                              </p:par>
+                              <p:par>
+                                <p:cTn id="14" presetID="10" presetClass="entr" presetSubtype="0" fill="hold" grpId="0" nodeType="afterEffect">
+                                  <p:stCondLst>
+                                    <p:cond delay="2100"/>
+                                  </p:stCondLst>
+                                  <p:childTnLst>
+                                    <p:set>
+                                      <p:cBhvr>
+                                        <p:cTn id="15" dur="1"/>
+                                        <p:tgtEl>
+                                          <p:spTgt spid="9"/>
+                                        </p:tgtEl>
+                                        <p:attrNameLst>
+                                          <p:attrName>style.visibility</p:attrName>
+                                        </p:attrNameLst>
+                                      </p:cBhvr>
+                                      <p:to>
+                                        <p:strVal val="visible"/>
+                                      </p:to>
+                                    </p:set>
+                                    <p:animEffect transition="in" filter="fade">
+                                      <p:cBhvr>
+                                        <p:cTn id="16" dur="400"/>
+                                        <p:tgtEl>
+                                          <p:spTgt spid="9"/>
+                                        </p:tgtEl>
+                                      </p:cBhvr>
+                                    </p:animEffect>
+                                  </p:childTnLst>
+                                </p:cTn>
+                              </p:par>
+                              <p:par>
+                                <p:cTn id="17" presetID="10" presetClass="entr" presetSubtype="0" fill="hold" grpId="0" nodeType="afterEffect">
+                                  <p:stCondLst>
+                                    <p:cond delay="3100"/>
+                                  </p:stCondLst>
+                                  <p:childTnLst>
+                                    <p:set>
+                                      <p:cBhvr>
+                                        <p:cTn id="18" dur="1"/>
+                                        <p:tgtEl>
+                                          <p:spTgt spid="6"/>
+                                        </p:tgtEl>
+                                        <p:attrNameLst>
+                                          <p:attrName>style.visibility</p:attrName>
+                                        </p:attrNameLst>
+                                      </p:cBhvr>
+                                      <p:to>
+                                        <p:strVal val="visible"/>
+                                      </p:to>
+                                    </p:set>
+                                    <p:animEffect transition="in" filter="fade">
+                                      <p:cBhvr>
+                                        <p:cTn id="19" dur="400"/>
+                                        <p:tgtEl>
+                                          <p:spTgt spid="6"/>
+                                        </p:tgtEl>
+                                      </p:cBhvr>
+                                    </p:animEffect>
+                                  </p:childTnLst>
+                                </p:cTn>
+                              </p:par>
+                              <p:par>
+                                <p:cTn id="20" presetID="10" presetClass="entr" presetSubtype="0" fill="hold" grpId="0" nodeType="afterEffect">
+                                  <p:stCondLst>
+                                    <p:cond delay="4250"/>
+                                  </p:stCondLst>
+                                  <p:childTnLst>
+                                    <p:set>
+                                      <p:cBhvr>
+                                        <p:cTn id="21" dur="1"/>
+                                        <p:tgtEl>
+                                          <p:spTgt spid="10"/>
+                                        </p:tgtEl>
+                                        <p:attrNameLst>
+                                          <p:attrName>style.visibility</p:attrName>
+                                        </p:attrNameLst>
+                                      </p:cBhvr>
+                                      <p:to>
+                                        <p:strVal val="visible"/>
+                                      </p:to>
+                                    </p:set>
+                                    <p:animEffect transition="in" filter="fade">
+                                      <p:cBhvr>
+                                        <p:cTn id="22" dur="400"/>
+                                        <p:tgtEl>
+                                          <p:spTgt spid="10"/>
+                                        </p:tgtEl>
+                                      </p:cBhvr>
+                                    </p:animEffect>
+                                  </p:childTnLst>
+                                </p:cTn>
+                              </p:par>
+                              <p:par>
+                                <p:cTn id="23" presetID="10" presetClass="entr" presetSubtype="0" fill="hold" grpId="0" nodeType="afterEffect">
+                                  <p:stCondLst>
+                                    <p:cond delay="5550"/>
+                                  </p:stCondLst>
+                                  <p:childTnLst>
+                                    <p:set>
+                                      <p:cBhvr>
+                                        <p:cTn id="24" dur="1"/>
+                                        <p:tgtEl>
+                                          <p:spTgt spid="7"/>
+                                        </p:tgtEl>
+                                        <p:attrNameLst>
+                                          <p:attrName>style.visibility</p:attrName>
+                                        </p:attrNameLst>
+                                      </p:cBhvr>
+                                      <p:to>
+                                        <p:strVal val="visible"/>
+                                      </p:to>
+                                    </p:set>
+                                    <p:animEffect transition="in" filter="fade">
+                                      <p:cBhvr>
+                                        <p:cTn id="25" dur="400"/>
+                                        <p:tgtEl>
+                                          <p:spTgt spid="7"/>
+                                        </p:tgtEl>
+                                      </p:cBhvr>
+                                    </p:animEffect>
+                                  </p:childTnLst>
+                                </p:cTn>
+                              </p:par>
+                              <p:par>
+                                <p:cTn id="26" presetID="10" presetClass="entr" presetSubtype="0" fill="hold" grpId="0" nodeType="afterEffect">
+                                  <p:stCondLst>
+                                    <p:cond delay="7000"/>
+                                  </p:stCondLst>
+                                  <p:childTnLst>
+                                    <p:set>
+                                      <p:cBhvr>
+                                        <p:cTn id="27" dur="1"/>
+                                        <p:tgtEl>
+                                          <p:spTgt spid="11"/>
+                                        </p:tgtEl>
+                                        <p:attrNameLst>
+                                          <p:attrName>style.visibility</p:attrName>
+                                        </p:attrNameLst>
+                                      </p:cBhvr>
+                                      <p:to>
+                                        <p:strVal val="visible"/>
+                                      </p:to>
+                                    </p:set>
+                                    <p:animEffect transition="in" filter="fade">
+                                      <p:cBhvr>
+                                        <p:cTn id="28" dur="400"/>
+                                        <p:tgtEl>
+                                          <p:spTgt spid="11"/>
+                                        </p:tgtEl>
+                                      </p:cBhvr>
+                                    </p:animEffect>
+                                  </p:childTnLst>
+                                </p:cTn>
+                              </p:par>
+                              <p:par>
+                                <p:cTn id="29" presetID="10" presetClass="entr" presetSubtype="0" fill="hold" grpId="0" nodeType="afterEffect">
+                                  <p:stCondLst>
+                                    <p:cond delay="8600"/>
+                                  </p:stCondLst>
+                                  <p:childTnLst>
+                                    <p:set>
+                                      <p:cBhvr>
+                                        <p:cTn id="30" dur="1"/>
+                                        <p:tgtEl>
+                                          <p:spTgt spid="8"/>
+                                        </p:tgtEl>
+                                        <p:attrNameLst>
+                                          <p:attrName>style.visibility</p:attrName>
+                                        </p:attrNameLst>
+                                      </p:cBhvr>
+                                      <p:to>
+                                        <p:strVal val="visible"/>
+                                      </p:to>
+                                    </p:set>
+                                    <p:animEffect transition="in" filter="fade">
+                                      <p:cBhvr>
+                                        <p:cTn id="31" dur="400"/>
+                                        <p:tgtEl>
+                                          <p:spTgt spid="8"/>
+                                        </p:tgtEl>
+                                      </p:cBhvr>
+                                    </p:animEffect>
+                                  </p:childTnLst>
+                                </p:cTn>
+                              </p:par>
+                              <p:par>
+                                <p:cTn id="32" presetID="10" presetClass="entr" presetSubtype="0" fill="hold" grpId="0" nodeType="afterEffect">
+                                  <p:stCondLst>
+                                    <p:cond delay="10350"/>
+                                  </p:stCondLst>
+                                  <p:childTnLst>
+                                    <p:set>
+                                      <p:cBhvr>
+                                        <p:cTn id="33" dur="1"/>
+                                        <p:tgtEl>
+                                          <p:spTgt spid="12"/>
+                                        </p:tgtEl>
+                                        <p:attrNameLst>
+                                          <p:attrName>style.visibility</p:attrName>
+                                        </p:attrNameLst>
+                                      </p:cBhvr>
+                                      <p:to>
+                                        <p:strVal val="visible"/>
+                                      </p:to>
+                                    </p:set>
+                                    <p:animEffect transition="in" filter="fade">
+                                      <p:cBhvr>
+                                        <p:cTn id="34" dur="400"/>
+                                        <p:tgtEl>
+                                          <p:spTgt spid="12"/>
+                                        </p:tgtEl>
+                                      </p:cBhvr>
+                                    </p:animEffect>
+                                  </p:childTnLst>
+                                </p:cTn>
+                              </p:par>
+                              <p:par>
+                                <p:cTn id="35" presetID="10" presetClass="entr" presetSubtype="0" fill="hold" grpId="0" nodeType="afterEffect">
+                                  <p:stCondLst>
+                                    <p:cond delay="12250"/>
+                                  </p:stCondLst>
+                                  <p:childTnLst>
+                                    <p:set>
+                                      <p:cBhvr>
+                                        <p:cTn id="36" dur="1"/>
+                                        <p:tgtEl>
+                                          <p:spTgt spid="13"/>
+                                        </p:tgtEl>
+                                        <p:attrNameLst>
+                                          <p:attrName>style.visibility</p:attrName>
+                                        </p:attrNameLst>
+                                      </p:cBhvr>
+                                      <p:to>
+                                        <p:strVal val="visible"/>
+                                      </p:to>
+                                    </p:set>
+                                    <p:animEffect transition="in" filter="fade">
+                                      <p:cBhvr>
+                                        <p:cTn id="37" dur="400"/>
+                                        <p:tgtEl>
+                                          <p:spTgt spid="13"/>
+                                        </p:tgtEl>
+                                      </p:cBhvr>
+                                    </p:animEffect>
+                                  </p:childTnLst>
+                                </p:cTn>
+                              </p:par>
+                              <p:par>
+                                <p:cTn id="38" presetID="10" presetClass="entr" presetSubtype="0" fill="hold" grpId="0" nodeType="afterEffect">
+                                  <p:stCondLst>
+                                    <p:cond delay="14300"/>
+                                  </p:stCondLst>
+                                  <p:childTnLst>
+                                    <p:set>
+                                      <p:cBhvr>
+                                        <p:cTn id="39" dur="1"/>
+                                        <p:tgtEl>
+                                          <p:spTgt spid="14"/>
+                                        </p:tgtEl>
+                                        <p:attrNameLst>
+                                          <p:attrName>style.visibility</p:attrName>
+                                        </p:attrNameLst>
+                                      </p:cBhvr>
+                                      <p:to>
+                                        <p:strVal val="visible"/>
+                                      </p:to>
+                                    </p:set>
+                                    <p:animEffect transition="in" filter="fade">
+                                      <p:cBhvr>
+                                        <p:cTn id="40" dur="400"/>
+                                        <p:tgtEl>
+                                          <p:spTgt spid="14"/>
+                                        </p:tgtEl>
+                                      </p:cBhvr>
+                                    </p:animEffect>
+                                  </p:childTnLst>
+                                </p:cTn>
+                              </p:par>
+                              <p:par>
+                                <p:cTn id="41" presetID="10" presetClass="entr" presetSubtype="0" fill="hold" grpId="0" nodeType="afterEffect">
+                                  <p:stCondLst>
+                                    <p:cond delay="16500"/>
+                                  </p:stCondLst>
+                                  <p:childTnLst>
+                                    <p:set>
+                                      <p:cBhvr>
+                                        <p:cTn id="42" dur="1"/>
+                                        <p:tgtEl>
+                                          <p:spTgt spid="15"/>
+                                        </p:tgtEl>
+                                        <p:attrNameLst>
+                                          <p:attrName>style.visibility</p:attrName>
+                                        </p:attrNameLst>
+                                      </p:cBhvr>
+                                      <p:to>
+                                        <p:strVal val="visible"/>
+                                      </p:to>
+                                    </p:set>
+                                    <p:animEffect transition="in" filter="fade">
+                                      <p:cBhvr>
+                                        <p:cTn id="43" dur="400"/>
+                                        <p:tgtEl>
+                                          <p:spTgt spid="15"/>
+                                        </p:tgtEl>
+                                      </p:cBhvr>
+                                    </p:animEffect>
+                                  </p:childTnLst>
+                                </p:cTn>
+                              </p:par>
+                            </p:childTnLst>
+                          </p:cTn>
+                        </p:par>
+                      </p:childTnLst>
+                    </p:cTn>
+                  </p:par>
+                </p:childTnLst>
+              </p:cTn>
+              <p:prevCondLst>
+                <p:cond evt="onPrev" delay="0">
+                  <p:tgtEl>
+                    <p:sldTgt/>
+                  </p:tgtEl>
+                </p:cond>
+              </p:prevCondLst>
+              <p:nextCondLst>
+                <p:cond evt="onNext" delay="0">
+                  <p:tgtEl>
+                    <p:sldTgt/>
+                  </p:tgtEl>
+                </p:cond>
+              </p:nextCondLst>
+            </p:seq>
+          </p:childTnLst>
+        </p:cTn>
+      </p:par>
+    </p:tnLst>
+    <p:bldLst>
+      <p:bldP spid="2" grpId="0"/>
+      <p:bldP spid="3" grpId="0"/>
+      <p:bldP spid="5" grpId="0"/>
+      <p:bldP spid="9" grpId="0"/>
+      <p:bldP spid="6" grpId="0"/>
+      <p:bldP spid="10" grpId="0"/>
+      <p:bldP spid="7" grpId="0"/>
+      <p:bldP spid="11" grpId="0"/>
+      <p:bldP spid="8" grpId="0"/>
+      <p:bldP spid="12" grpId="0"/>
+      <p:bldP spid="13" grpId="0"/>
+      <p:bldP spid="14" grpId="0"/>
+      <p:bldP spid="15" grpId="0"/>
+    </p:bldLst>
+  </p:timing>
 </p:sld>
 </file>
 
@@ -6821,6 +12750,574 @@
   <p:clrMapOvr>
     <a:masterClrMapping/>
   </p:clrMapOvr>
+  <p:transition spd="med">
+    <p:fade/>
+  </p:transition>
+  <p:timing>
+    <p:tnLst>
+      <p:par>
+        <p:cTn id="1" dur="indefinite" restart="never" nodeType="tmRoot">
+          <p:childTnLst>
+            <p:seq concurrent="1" nextAc="seek">
+              <p:cTn id="2" dur="indefinite" nodeType="mainSeq">
+                <p:childTnLst>
+                  <p:par>
+                    <p:cTn id="3" fill="hold">
+                      <p:stCondLst>
+                        <p:cond delay="indefinite"/>
+                        <p:cond evt="onBegin" delay="0">
+                          <p:tn val="2"/>
+                        </p:cond>
+                      </p:stCondLst>
+                      <p:childTnLst>
+                        <p:par>
+                          <p:cTn id="4" fill="hold">
+                            <p:stCondLst>
+                              <p:cond delay="0"/>
+                            </p:stCondLst>
+                            <p:childTnLst>
+                              <p:par>
+                                <p:cTn id="5" presetID="22" presetClass="entr" presetSubtype="8" fill="hold" grpId="0" nodeType="afterEffect">
+                                  <p:stCondLst>
+                                    <p:cond delay="0"/>
+                                  </p:stCondLst>
+                                  <p:childTnLst>
+                                    <p:set>
+                                      <p:cBhvr>
+                                        <p:cTn id="6" dur="1"/>
+                                        <p:tgtEl>
+                                          <p:spTgt spid="2"/>
+                                        </p:tgtEl>
+                                        <p:attrNameLst>
+                                          <p:attrName>style.visibility</p:attrName>
+                                        </p:attrNameLst>
+                                      </p:cBhvr>
+                                      <p:to>
+                                        <p:strVal val="visible"/>
+                                      </p:to>
+                                    </p:set>
+                                    <p:animEffect transition="in" filter="wipe(right)">
+                                      <p:cBhvr>
+                                        <p:cTn id="7" dur="450"/>
+                                        <p:tgtEl>
+                                          <p:spTgt spid="2"/>
+                                        </p:tgtEl>
+                                      </p:cBhvr>
+                                    </p:animEffect>
+                                  </p:childTnLst>
+                                </p:cTn>
+                              </p:par>
+                              <p:par>
+                                <p:cTn id="8" presetID="22" presetClass="entr" presetSubtype="8" fill="hold" grpId="0" nodeType="afterEffect">
+                                  <p:stCondLst>
+                                    <p:cond delay="570"/>
+                                  </p:stCondLst>
+                                  <p:childTnLst>
+                                    <p:set>
+                                      <p:cBhvr>
+                                        <p:cTn id="9" dur="1"/>
+                                        <p:tgtEl>
+                                          <p:spTgt spid="3"/>
+                                        </p:tgtEl>
+                                        <p:attrNameLst>
+                                          <p:attrName>style.visibility</p:attrName>
+                                        </p:attrNameLst>
+                                      </p:cBhvr>
+                                      <p:to>
+                                        <p:strVal val="visible"/>
+                                      </p:to>
+                                    </p:set>
+                                    <p:animEffect transition="in" filter="wipe(right)">
+                                      <p:cBhvr>
+                                        <p:cTn id="10" dur="450"/>
+                                        <p:tgtEl>
+                                          <p:spTgt spid="3"/>
+                                        </p:tgtEl>
+                                      </p:cBhvr>
+                                    </p:animEffect>
+                                  </p:childTnLst>
+                                </p:cTn>
+                              </p:par>
+                              <p:par>
+                                <p:cTn id="11" presetID="22" presetClass="entr" presetSubtype="8" fill="hold" grpId="0" nodeType="afterEffect">
+                                  <p:stCondLst>
+                                    <p:cond delay="1260"/>
+                                  </p:stCondLst>
+                                  <p:childTnLst>
+                                    <p:set>
+                                      <p:cBhvr>
+                                        <p:cTn id="12" dur="1"/>
+                                        <p:tgtEl>
+                                          <p:spTgt spid="5"/>
+                                        </p:tgtEl>
+                                        <p:attrNameLst>
+                                          <p:attrName>style.visibility</p:attrName>
+                                        </p:attrNameLst>
+                                      </p:cBhvr>
+                                      <p:to>
+                                        <p:strVal val="visible"/>
+                                      </p:to>
+                                    </p:set>
+                                    <p:animEffect transition="in" filter="wipe(right)">
+                                      <p:cBhvr>
+                                        <p:cTn id="13" dur="450"/>
+                                        <p:tgtEl>
+                                          <p:spTgt spid="5"/>
+                                        </p:tgtEl>
+                                      </p:cBhvr>
+                                    </p:animEffect>
+                                  </p:childTnLst>
+                                </p:cTn>
+                              </p:par>
+                              <p:par>
+                                <p:cTn id="14" presetID="22" presetClass="entr" presetSubtype="8" fill="hold" grpId="0" nodeType="afterEffect">
+                                  <p:stCondLst>
+                                    <p:cond delay="2070"/>
+                                  </p:stCondLst>
+                                  <p:childTnLst>
+                                    <p:set>
+                                      <p:cBhvr>
+                                        <p:cTn id="15" dur="1"/>
+                                        <p:tgtEl>
+                                          <p:spTgt spid="6"/>
+                                        </p:tgtEl>
+                                        <p:attrNameLst>
+                                          <p:attrName>style.visibility</p:attrName>
+                                        </p:attrNameLst>
+                                      </p:cBhvr>
+                                      <p:to>
+                                        <p:strVal val="visible"/>
+                                      </p:to>
+                                    </p:set>
+                                    <p:animEffect transition="in" filter="wipe(right)">
+                                      <p:cBhvr>
+                                        <p:cTn id="16" dur="450"/>
+                                        <p:tgtEl>
+                                          <p:spTgt spid="6"/>
+                                        </p:tgtEl>
+                                      </p:cBhvr>
+                                    </p:animEffect>
+                                  </p:childTnLst>
+                                </p:cTn>
+                              </p:par>
+                              <p:par>
+                                <p:cTn id="17" presetID="22" presetClass="entr" presetSubtype="8" fill="hold" grpId="0" nodeType="afterEffect">
+                                  <p:stCondLst>
+                                    <p:cond delay="3000"/>
+                                  </p:stCondLst>
+                                  <p:childTnLst>
+                                    <p:set>
+                                      <p:cBhvr>
+                                        <p:cTn id="18" dur="1"/>
+                                        <p:tgtEl>
+                                          <p:spTgt spid="7"/>
+                                        </p:tgtEl>
+                                        <p:attrNameLst>
+                                          <p:attrName>style.visibility</p:attrName>
+                                        </p:attrNameLst>
+                                      </p:cBhvr>
+                                      <p:to>
+                                        <p:strVal val="visible"/>
+                                      </p:to>
+                                    </p:set>
+                                    <p:animEffect transition="in" filter="wipe(right)">
+                                      <p:cBhvr>
+                                        <p:cTn id="19" dur="450"/>
+                                        <p:tgtEl>
+                                          <p:spTgt spid="7"/>
+                                        </p:tgtEl>
+                                      </p:cBhvr>
+                                    </p:animEffect>
+                                  </p:childTnLst>
+                                </p:cTn>
+                              </p:par>
+                              <p:par>
+                                <p:cTn id="20" presetID="22" presetClass="entr" presetSubtype="8" fill="hold" grpId="0" nodeType="afterEffect">
+                                  <p:stCondLst>
+                                    <p:cond delay="4050"/>
+                                  </p:stCondLst>
+                                  <p:childTnLst>
+                                    <p:set>
+                                      <p:cBhvr>
+                                        <p:cTn id="21" dur="1"/>
+                                        <p:tgtEl>
+                                          <p:spTgt spid="8"/>
+                                        </p:tgtEl>
+                                        <p:attrNameLst>
+                                          <p:attrName>style.visibility</p:attrName>
+                                        </p:attrNameLst>
+                                      </p:cBhvr>
+                                      <p:to>
+                                        <p:strVal val="visible"/>
+                                      </p:to>
+                                    </p:set>
+                                    <p:animEffect transition="in" filter="wipe(right)">
+                                      <p:cBhvr>
+                                        <p:cTn id="22" dur="450"/>
+                                        <p:tgtEl>
+                                          <p:spTgt spid="8"/>
+                                        </p:tgtEl>
+                                      </p:cBhvr>
+                                    </p:animEffect>
+                                  </p:childTnLst>
+                                </p:cTn>
+                              </p:par>
+                              <p:par>
+                                <p:cTn id="23" presetID="22" presetClass="entr" presetSubtype="8" fill="hold" grpId="0" nodeType="afterEffect">
+                                  <p:stCondLst>
+                                    <p:cond delay="5220"/>
+                                  </p:stCondLst>
+                                  <p:childTnLst>
+                                    <p:set>
+                                      <p:cBhvr>
+                                        <p:cTn id="24" dur="1"/>
+                                        <p:tgtEl>
+                                          <p:spTgt spid="9"/>
+                                        </p:tgtEl>
+                                        <p:attrNameLst>
+                                          <p:attrName>style.visibility</p:attrName>
+                                        </p:attrNameLst>
+                                      </p:cBhvr>
+                                      <p:to>
+                                        <p:strVal val="visible"/>
+                                      </p:to>
+                                    </p:set>
+                                    <p:animEffect transition="in" filter="wipe(right)">
+                                      <p:cBhvr>
+                                        <p:cTn id="25" dur="450"/>
+                                        <p:tgtEl>
+                                          <p:spTgt spid="9"/>
+                                        </p:tgtEl>
+                                      </p:cBhvr>
+                                    </p:animEffect>
+                                  </p:childTnLst>
+                                </p:cTn>
+                              </p:par>
+                              <p:par>
+                                <p:cTn id="26" presetID="22" presetClass="entr" presetSubtype="8" fill="hold" grpId="0" nodeType="afterEffect">
+                                  <p:stCondLst>
+                                    <p:cond delay="6510"/>
+                                  </p:stCondLst>
+                                  <p:childTnLst>
+                                    <p:set>
+                                      <p:cBhvr>
+                                        <p:cTn id="27" dur="1"/>
+                                        <p:tgtEl>
+                                          <p:spTgt spid="10"/>
+                                        </p:tgtEl>
+                                        <p:attrNameLst>
+                                          <p:attrName>style.visibility</p:attrName>
+                                        </p:attrNameLst>
+                                      </p:cBhvr>
+                                      <p:to>
+                                        <p:strVal val="visible"/>
+                                      </p:to>
+                                    </p:set>
+                                    <p:animEffect transition="in" filter="wipe(right)">
+                                      <p:cBhvr>
+                                        <p:cTn id="28" dur="450"/>
+                                        <p:tgtEl>
+                                          <p:spTgt spid="10"/>
+                                        </p:tgtEl>
+                                      </p:cBhvr>
+                                    </p:animEffect>
+                                  </p:childTnLst>
+                                </p:cTn>
+                              </p:par>
+                              <p:par>
+                                <p:cTn id="29" presetID="22" presetClass="entr" presetSubtype="8" fill="hold" grpId="0" nodeType="afterEffect">
+                                  <p:stCondLst>
+                                    <p:cond delay="7920"/>
+                                  </p:stCondLst>
+                                  <p:childTnLst>
+                                    <p:set>
+                                      <p:cBhvr>
+                                        <p:cTn id="30" dur="1"/>
+                                        <p:tgtEl>
+                                          <p:spTgt spid="11"/>
+                                        </p:tgtEl>
+                                        <p:attrNameLst>
+                                          <p:attrName>style.visibility</p:attrName>
+                                        </p:attrNameLst>
+                                      </p:cBhvr>
+                                      <p:to>
+                                        <p:strVal val="visible"/>
+                                      </p:to>
+                                    </p:set>
+                                    <p:animEffect transition="in" filter="wipe(right)">
+                                      <p:cBhvr>
+                                        <p:cTn id="31" dur="450"/>
+                                        <p:tgtEl>
+                                          <p:spTgt spid="11"/>
+                                        </p:tgtEl>
+                                      </p:cBhvr>
+                                    </p:animEffect>
+                                  </p:childTnLst>
+                                </p:cTn>
+                              </p:par>
+                              <p:par>
+                                <p:cTn id="32" presetID="22" presetClass="entr" presetSubtype="8" fill="hold" grpId="0" nodeType="afterEffect">
+                                  <p:stCondLst>
+                                    <p:cond delay="9450"/>
+                                  </p:stCondLst>
+                                  <p:childTnLst>
+                                    <p:set>
+                                      <p:cBhvr>
+                                        <p:cTn id="33" dur="1"/>
+                                        <p:tgtEl>
+                                          <p:spTgt spid="13"/>
+                                        </p:tgtEl>
+                                        <p:attrNameLst>
+                                          <p:attrName>style.visibility</p:attrName>
+                                        </p:attrNameLst>
+                                      </p:cBhvr>
+                                      <p:to>
+                                        <p:strVal val="visible"/>
+                                      </p:to>
+                                    </p:set>
+                                    <p:animEffect transition="in" filter="wipe(right)">
+                                      <p:cBhvr>
+                                        <p:cTn id="34" dur="450"/>
+                                        <p:tgtEl>
+                                          <p:spTgt spid="13"/>
+                                        </p:tgtEl>
+                                      </p:cBhvr>
+                                    </p:animEffect>
+                                  </p:childTnLst>
+                                </p:cTn>
+                              </p:par>
+                              <p:par>
+                                <p:cTn id="35" presetID="22" presetClass="entr" presetSubtype="8" fill="hold" grpId="0" nodeType="afterEffect">
+                                  <p:stCondLst>
+                                    <p:cond delay="11100"/>
+                                  </p:stCondLst>
+                                  <p:childTnLst>
+                                    <p:set>
+                                      <p:cBhvr>
+                                        <p:cTn id="36" dur="1"/>
+                                        <p:tgtEl>
+                                          <p:spTgt spid="15"/>
+                                        </p:tgtEl>
+                                        <p:attrNameLst>
+                                          <p:attrName>style.visibility</p:attrName>
+                                        </p:attrNameLst>
+                                      </p:cBhvr>
+                                      <p:to>
+                                        <p:strVal val="visible"/>
+                                      </p:to>
+                                    </p:set>
+                                    <p:animEffect transition="in" filter="wipe(right)">
+                                      <p:cBhvr>
+                                        <p:cTn id="37" dur="450"/>
+                                        <p:tgtEl>
+                                          <p:spTgt spid="15"/>
+                                        </p:tgtEl>
+                                      </p:cBhvr>
+                                    </p:animEffect>
+                                  </p:childTnLst>
+                                </p:cTn>
+                              </p:par>
+                              <p:par>
+                                <p:cTn id="38" presetID="22" presetClass="entr" presetSubtype="8" fill="hold" grpId="0" nodeType="afterEffect">
+                                  <p:stCondLst>
+                                    <p:cond delay="12870"/>
+                                  </p:stCondLst>
+                                  <p:childTnLst>
+                                    <p:set>
+                                      <p:cBhvr>
+                                        <p:cTn id="39" dur="1"/>
+                                        <p:tgtEl>
+                                          <p:spTgt spid="12"/>
+                                        </p:tgtEl>
+                                        <p:attrNameLst>
+                                          <p:attrName>style.visibility</p:attrName>
+                                        </p:attrNameLst>
+                                      </p:cBhvr>
+                                      <p:to>
+                                        <p:strVal val="visible"/>
+                                      </p:to>
+                                    </p:set>
+                                    <p:animEffect transition="in" filter="wipe(right)">
+                                      <p:cBhvr>
+                                        <p:cTn id="40" dur="450"/>
+                                        <p:tgtEl>
+                                          <p:spTgt spid="12"/>
+                                        </p:tgtEl>
+                                      </p:cBhvr>
+                                    </p:animEffect>
+                                  </p:childTnLst>
+                                </p:cTn>
+                              </p:par>
+                              <p:par>
+                                <p:cTn id="41" presetID="22" presetClass="entr" presetSubtype="8" fill="hold" grpId="0" nodeType="afterEffect">
+                                  <p:stCondLst>
+                                    <p:cond delay="14760"/>
+                                  </p:stCondLst>
+                                  <p:childTnLst>
+                                    <p:set>
+                                      <p:cBhvr>
+                                        <p:cTn id="42" dur="1"/>
+                                        <p:tgtEl>
+                                          <p:spTgt spid="14"/>
+                                        </p:tgtEl>
+                                        <p:attrNameLst>
+                                          <p:attrName>style.visibility</p:attrName>
+                                        </p:attrNameLst>
+                                      </p:cBhvr>
+                                      <p:to>
+                                        <p:strVal val="visible"/>
+                                      </p:to>
+                                    </p:set>
+                                    <p:animEffect transition="in" filter="wipe(right)">
+                                      <p:cBhvr>
+                                        <p:cTn id="43" dur="450"/>
+                                        <p:tgtEl>
+                                          <p:spTgt spid="14"/>
+                                        </p:tgtEl>
+                                      </p:cBhvr>
+                                    </p:animEffect>
+                                  </p:childTnLst>
+                                </p:cTn>
+                              </p:par>
+                              <p:par>
+                                <p:cTn id="44" presetID="22" presetClass="entr" presetSubtype="8" fill="hold" grpId="0" nodeType="afterEffect">
+                                  <p:stCondLst>
+                                    <p:cond delay="16770"/>
+                                  </p:stCondLst>
+                                  <p:childTnLst>
+                                    <p:set>
+                                      <p:cBhvr>
+                                        <p:cTn id="45" dur="1"/>
+                                        <p:tgtEl>
+                                          <p:spTgt spid="16"/>
+                                        </p:tgtEl>
+                                        <p:attrNameLst>
+                                          <p:attrName>style.visibility</p:attrName>
+                                        </p:attrNameLst>
+                                      </p:cBhvr>
+                                      <p:to>
+                                        <p:strVal val="visible"/>
+                                      </p:to>
+                                    </p:set>
+                                    <p:animEffect transition="in" filter="wipe(right)">
+                                      <p:cBhvr>
+                                        <p:cTn id="46" dur="450"/>
+                                        <p:tgtEl>
+                                          <p:spTgt spid="16"/>
+                                        </p:tgtEl>
+                                      </p:cBhvr>
+                                    </p:animEffect>
+                                  </p:childTnLst>
+                                </p:cTn>
+                              </p:par>
+                              <p:par>
+                                <p:cTn id="47" presetID="22" presetClass="entr" presetSubtype="8" fill="hold" grpId="0" nodeType="afterEffect">
+                                  <p:stCondLst>
+                                    <p:cond delay="18900"/>
+                                  </p:stCondLst>
+                                  <p:childTnLst>
+                                    <p:set>
+                                      <p:cBhvr>
+                                        <p:cTn id="48" dur="1"/>
+                                        <p:tgtEl>
+                                          <p:spTgt spid="17"/>
+                                        </p:tgtEl>
+                                        <p:attrNameLst>
+                                          <p:attrName>style.visibility</p:attrName>
+                                        </p:attrNameLst>
+                                      </p:cBhvr>
+                                      <p:to>
+                                        <p:strVal val="visible"/>
+                                      </p:to>
+                                    </p:set>
+                                    <p:animEffect transition="in" filter="wipe(right)">
+                                      <p:cBhvr>
+                                        <p:cTn id="49" dur="450"/>
+                                        <p:tgtEl>
+                                          <p:spTgt spid="17"/>
+                                        </p:tgtEl>
+                                      </p:cBhvr>
+                                    </p:animEffect>
+                                  </p:childTnLst>
+                                </p:cTn>
+                              </p:par>
+                              <p:par>
+                                <p:cTn id="50" presetID="22" presetClass="entr" presetSubtype="8" fill="hold" grpId="0" nodeType="afterEffect">
+                                  <p:stCondLst>
+                                    <p:cond delay="21150"/>
+                                  </p:stCondLst>
+                                  <p:childTnLst>
+                                    <p:set>
+                                      <p:cBhvr>
+                                        <p:cTn id="51" dur="1"/>
+                                        <p:tgtEl>
+                                          <p:spTgt spid="18"/>
+                                        </p:tgtEl>
+                                        <p:attrNameLst>
+                                          <p:attrName>style.visibility</p:attrName>
+                                        </p:attrNameLst>
+                                      </p:cBhvr>
+                                      <p:to>
+                                        <p:strVal val="visible"/>
+                                      </p:to>
+                                    </p:set>
+                                    <p:animEffect transition="in" filter="wipe(right)">
+                                      <p:cBhvr>
+                                        <p:cTn id="52" dur="450"/>
+                                        <p:tgtEl>
+                                          <p:spTgt spid="18"/>
+                                        </p:tgtEl>
+                                      </p:cBhvr>
+                                    </p:animEffect>
+                                  </p:childTnLst>
+                                </p:cTn>
+                              </p:par>
+                            </p:childTnLst>
+                          </p:cTn>
+                        </p:par>
+                      </p:childTnLst>
+                    </p:cTn>
+                  </p:par>
+                </p:childTnLst>
+              </p:cTn>
+              <p:prevCondLst>
+                <p:cond evt="onPrev" delay="0">
+                  <p:tgtEl>
+                    <p:sldTgt/>
+                  </p:tgtEl>
+                </p:cond>
+              </p:prevCondLst>
+              <p:nextCondLst>
+                <p:cond evt="onNext" delay="0">
+                  <p:tgtEl>
+                    <p:sldTgt/>
+                  </p:tgtEl>
+                </p:cond>
+              </p:nextCondLst>
+            </p:seq>
+          </p:childTnLst>
+        </p:cTn>
+      </p:par>
+    </p:tnLst>
+    <p:bldLst>
+      <p:bldP spid="2" grpId="0"/>
+      <p:bldP spid="3" grpId="0"/>
+      <p:bldP spid="5" grpId="0"/>
+      <p:bldP spid="6" grpId="0"/>
+      <p:bldP spid="7" grpId="0"/>
+      <p:bldP spid="8" grpId="0"/>
+      <p:bldP spid="9" grpId="0"/>
+      <p:bldP spid="10" grpId="0"/>
+      <p:bldP spid="11" grpId="0"/>
+      <p:bldP spid="13" grpId="0"/>
+      <p:bldP spid="15" grpId="0"/>
+      <p:bldP spid="12" grpId="0"/>
+      <p:bldP spid="14" grpId="0"/>
+      <p:bldP spid="16" grpId="0"/>
+      <p:bldP spid="17" grpId="0"/>
+      <p:bldP spid="18" grpId="0"/>
+    </p:bldLst>
+  </p:timing>
 </p:sld>
 </file>
 
@@ -8176,6 +14673,254 @@
   <p:clrMapOvr>
     <a:masterClrMapping/>
   </p:clrMapOvr>
+  <p:transition spd="med">
+    <p:fade/>
+  </p:transition>
+  <p:timing>
+    <p:tnLst>
+      <p:par>
+        <p:cTn id="1" dur="indefinite" restart="never" nodeType="tmRoot">
+          <p:childTnLst>
+            <p:seq concurrent="1" nextAc="seek">
+              <p:cTn id="2" dur="indefinite" nodeType="mainSeq">
+                <p:childTnLst>
+                  <p:par>
+                    <p:cTn id="3" fill="hold">
+                      <p:stCondLst>
+                        <p:cond delay="indefinite"/>
+                        <p:cond evt="onBegin" delay="0">
+                          <p:tn val="2"/>
+                        </p:cond>
+                      </p:stCondLst>
+                      <p:childTnLst>
+                        <p:par>
+                          <p:cTn id="4" fill="hold">
+                            <p:stCondLst>
+                              <p:cond delay="0"/>
+                            </p:stCondLst>
+                            <p:childTnLst>
+                              <p:par>
+                                <p:cTn id="5" presetID="10" presetClass="entr" presetSubtype="0" fill="hold" grpId="0" nodeType="afterEffect">
+                                  <p:stCondLst>
+                                    <p:cond delay="0"/>
+                                  </p:stCondLst>
+                                  <p:childTnLst>
+                                    <p:set>
+                                      <p:cBhvr>
+                                        <p:cTn id="6" dur="1"/>
+                                        <p:tgtEl>
+                                          <p:spTgt spid="8"/>
+                                        </p:tgtEl>
+                                        <p:attrNameLst>
+                                          <p:attrName>style.visibility</p:attrName>
+                                        </p:attrNameLst>
+                                      </p:cBhvr>
+                                      <p:to>
+                                        <p:strVal val="visible"/>
+                                      </p:to>
+                                    </p:set>
+                                    <p:animEffect transition="in" filter="fade">
+                                      <p:cBhvr>
+                                        <p:cTn id="7" dur="400"/>
+                                        <p:tgtEl>
+                                          <p:spTgt spid="8"/>
+                                        </p:tgtEl>
+                                      </p:cBhvr>
+                                    </p:animEffect>
+                                  </p:childTnLst>
+                                </p:cTn>
+                              </p:par>
+                              <p:par>
+                                <p:cTn id="8" presetID="10" presetClass="entr" presetSubtype="0" fill="hold" grpId="0" nodeType="afterEffect">
+                                  <p:stCondLst>
+                                    <p:cond delay="500"/>
+                                  </p:stCondLst>
+                                  <p:childTnLst>
+                                    <p:set>
+                                      <p:cBhvr>
+                                        <p:cTn id="9" dur="1"/>
+                                        <p:tgtEl>
+                                          <p:spTgt spid="2"/>
+                                        </p:tgtEl>
+                                        <p:attrNameLst>
+                                          <p:attrName>style.visibility</p:attrName>
+                                        </p:attrNameLst>
+                                      </p:cBhvr>
+                                      <p:to>
+                                        <p:strVal val="visible"/>
+                                      </p:to>
+                                    </p:set>
+                                    <p:animEffect transition="in" filter="fade">
+                                      <p:cBhvr>
+                                        <p:cTn id="10" dur="400"/>
+                                        <p:tgtEl>
+                                          <p:spTgt spid="2"/>
+                                        </p:tgtEl>
+                                      </p:cBhvr>
+                                    </p:animEffect>
+                                  </p:childTnLst>
+                                </p:cTn>
+                              </p:par>
+                              <p:par>
+                                <p:cTn id="11" presetID="10" presetClass="entr" presetSubtype="0" fill="hold" grpId="0" nodeType="afterEffect">
+                                  <p:stCondLst>
+                                    <p:cond delay="1100"/>
+                                  </p:stCondLst>
+                                  <p:childTnLst>
+                                    <p:set>
+                                      <p:cBhvr>
+                                        <p:cTn id="12" dur="1"/>
+                                        <p:tgtEl>
+                                          <p:spTgt spid="3"/>
+                                        </p:tgtEl>
+                                        <p:attrNameLst>
+                                          <p:attrName>style.visibility</p:attrName>
+                                        </p:attrNameLst>
+                                      </p:cBhvr>
+                                      <p:to>
+                                        <p:strVal val="visible"/>
+                                      </p:to>
+                                    </p:set>
+                                    <p:animEffect transition="in" filter="fade">
+                                      <p:cBhvr>
+                                        <p:cTn id="13" dur="400"/>
+                                        <p:tgtEl>
+                                          <p:spTgt spid="3"/>
+                                        </p:tgtEl>
+                                      </p:cBhvr>
+                                    </p:animEffect>
+                                  </p:childTnLst>
+                                </p:cTn>
+                              </p:par>
+                              <p:par>
+                                <p:cTn id="14" presetID="10" presetClass="entr" presetSubtype="0" fill="hold" grpId="0" nodeType="afterEffect">
+                                  <p:stCondLst>
+                                    <p:cond delay="1800"/>
+                                  </p:stCondLst>
+                                  <p:childTnLst>
+                                    <p:set>
+                                      <p:cBhvr>
+                                        <p:cTn id="15" dur="1"/>
+                                        <p:tgtEl>
+                                          <p:spTgt spid="6"/>
+                                        </p:tgtEl>
+                                        <p:attrNameLst>
+                                          <p:attrName>style.visibility</p:attrName>
+                                        </p:attrNameLst>
+                                      </p:cBhvr>
+                                      <p:to>
+                                        <p:strVal val="visible"/>
+                                      </p:to>
+                                    </p:set>
+                                    <p:animEffect transition="in" filter="fade">
+                                      <p:cBhvr>
+                                        <p:cTn id="16" dur="400"/>
+                                        <p:tgtEl>
+                                          <p:spTgt spid="6"/>
+                                        </p:tgtEl>
+                                      </p:cBhvr>
+                                    </p:animEffect>
+                                  </p:childTnLst>
+                                </p:cTn>
+                              </p:par>
+                              <p:par>
+                                <p:cTn id="17" presetID="10" presetClass="entr" presetSubtype="0" fill="hold" grpId="0" nodeType="afterEffect">
+                                  <p:stCondLst>
+                                    <p:cond delay="2600"/>
+                                  </p:stCondLst>
+                                  <p:childTnLst>
+                                    <p:set>
+                                      <p:cBhvr>
+                                        <p:cTn id="18" dur="1"/>
+                                        <p:tgtEl>
+                                          <p:spTgt spid="7"/>
+                                        </p:tgtEl>
+                                        <p:attrNameLst>
+                                          <p:attrName>style.visibility</p:attrName>
+                                        </p:attrNameLst>
+                                      </p:cBhvr>
+                                      <p:to>
+                                        <p:strVal val="visible"/>
+                                      </p:to>
+                                    </p:set>
+                                    <p:animEffect transition="in" filter="fade">
+                                      <p:cBhvr>
+                                        <p:cTn id="19" dur="400"/>
+                                        <p:tgtEl>
+                                          <p:spTgt spid="7"/>
+                                        </p:tgtEl>
+                                      </p:cBhvr>
+                                    </p:animEffect>
+                                  </p:childTnLst>
+                                </p:cTn>
+                              </p:par>
+                              <p:par>
+                                <p:cTn id="20" presetID="10" presetClass="entr" presetSubtype="0" fill="hold" grpId="0" nodeType="afterEffect">
+                                  <p:stCondLst>
+                                    <p:cond delay="3500"/>
+                                  </p:stCondLst>
+                                  <p:childTnLst>
+                                    <p:set>
+                                      <p:cBhvr>
+                                        <p:cTn id="21" dur="1"/>
+                                        <p:tgtEl>
+                                          <p:spTgt spid="8"/>
+                                        </p:tgtEl>
+                                        <p:attrNameLst>
+                                          <p:attrName>style.visibility</p:attrName>
+                                        </p:attrNameLst>
+                                      </p:cBhvr>
+                                      <p:to>
+                                        <p:strVal val="visible"/>
+                                      </p:to>
+                                    </p:set>
+                                    <p:animEffect transition="in" filter="fade">
+                                      <p:cBhvr>
+                                        <p:cTn id="22" dur="400"/>
+                                        <p:tgtEl>
+                                          <p:spTgt spid="8"/>
+                                        </p:tgtEl>
+                                      </p:cBhvr>
+                                    </p:animEffect>
+                                  </p:childTnLst>
+                                </p:cTn>
+                              </p:par>
+                            </p:childTnLst>
+                          </p:cTn>
+                        </p:par>
+                      </p:childTnLst>
+                    </p:cTn>
+                  </p:par>
+                </p:childTnLst>
+              </p:cTn>
+              <p:prevCondLst>
+                <p:cond evt="onPrev" delay="0">
+                  <p:tgtEl>
+                    <p:sldTgt/>
+                  </p:tgtEl>
+                </p:cond>
+              </p:prevCondLst>
+              <p:nextCondLst>
+                <p:cond evt="onNext" delay="0">
+                  <p:tgtEl>
+                    <p:sldTgt/>
+                  </p:tgtEl>
+                </p:cond>
+              </p:nextCondLst>
+            </p:seq>
+          </p:childTnLst>
+        </p:cTn>
+      </p:par>
+    </p:tnLst>
+    <p:bldLst>
+      <p:bldP spid="8" grpId="0"/>
+      <p:bldP spid="2" grpId="0"/>
+      <p:bldP spid="3" grpId="0"/>
+      <p:bldP spid="6" grpId="0"/>
+      <p:bldP spid="7" grpId="0"/>
+      <p:bldP spid="8" grpId="0"/>
+    </p:bldLst>
+  </p:timing>
 </p:sld>
 </file>
 
@@ -8796,6 +15541,574 @@
   <p:clrMapOvr>
     <a:masterClrMapping/>
   </p:clrMapOvr>
+  <p:transition spd="med">
+    <p:fade/>
+  </p:transition>
+  <p:timing>
+    <p:tnLst>
+      <p:par>
+        <p:cTn id="1" dur="indefinite" restart="never" nodeType="tmRoot">
+          <p:childTnLst>
+            <p:seq concurrent="1" nextAc="seek">
+              <p:cTn id="2" dur="indefinite" nodeType="mainSeq">
+                <p:childTnLst>
+                  <p:par>
+                    <p:cTn id="3" fill="hold">
+                      <p:stCondLst>
+                        <p:cond delay="indefinite"/>
+                        <p:cond evt="onBegin" delay="0">
+                          <p:tn val="2"/>
+                        </p:cond>
+                      </p:stCondLst>
+                      <p:childTnLst>
+                        <p:par>
+                          <p:cTn id="4" fill="hold">
+                            <p:stCondLst>
+                              <p:cond delay="0"/>
+                            </p:stCondLst>
+                            <p:childTnLst>
+                              <p:par>
+                                <p:cTn id="5" presetID="10" presetClass="entr" presetSubtype="0" fill="hold" grpId="0" nodeType="afterEffect">
+                                  <p:stCondLst>
+                                    <p:cond delay="0"/>
+                                  </p:stCondLst>
+                                  <p:childTnLst>
+                                    <p:set>
+                                      <p:cBhvr>
+                                        <p:cTn id="6" dur="1"/>
+                                        <p:tgtEl>
+                                          <p:spTgt spid="2"/>
+                                        </p:tgtEl>
+                                        <p:attrNameLst>
+                                          <p:attrName>style.visibility</p:attrName>
+                                        </p:attrNameLst>
+                                      </p:cBhvr>
+                                      <p:to>
+                                        <p:strVal val="visible"/>
+                                      </p:to>
+                                    </p:set>
+                                    <p:animEffect transition="in" filter="fade">
+                                      <p:cBhvr>
+                                        <p:cTn id="7" dur="400"/>
+                                        <p:tgtEl>
+                                          <p:spTgt spid="2"/>
+                                        </p:tgtEl>
+                                      </p:cBhvr>
+                                    </p:animEffect>
+                                  </p:childTnLst>
+                                </p:cTn>
+                              </p:par>
+                              <p:par>
+                                <p:cTn id="8" presetID="10" presetClass="entr" presetSubtype="0" fill="hold" grpId="0" nodeType="afterEffect">
+                                  <p:stCondLst>
+                                    <p:cond delay="520"/>
+                                  </p:stCondLst>
+                                  <p:childTnLst>
+                                    <p:set>
+                                      <p:cBhvr>
+                                        <p:cTn id="9" dur="1"/>
+                                        <p:tgtEl>
+                                          <p:spTgt spid="3"/>
+                                        </p:tgtEl>
+                                        <p:attrNameLst>
+                                          <p:attrName>style.visibility</p:attrName>
+                                        </p:attrNameLst>
+                                      </p:cBhvr>
+                                      <p:to>
+                                        <p:strVal val="visible"/>
+                                      </p:to>
+                                    </p:set>
+                                    <p:animEffect transition="in" filter="fade">
+                                      <p:cBhvr>
+                                        <p:cTn id="10" dur="400"/>
+                                        <p:tgtEl>
+                                          <p:spTgt spid="3"/>
+                                        </p:tgtEl>
+                                      </p:cBhvr>
+                                    </p:animEffect>
+                                  </p:childTnLst>
+                                </p:cTn>
+                              </p:par>
+                              <p:par>
+                                <p:cTn id="11" presetID="10" presetClass="entr" presetSubtype="0" fill="hold" grpId="0" nodeType="afterEffect">
+                                  <p:stCondLst>
+                                    <p:cond delay="1160"/>
+                                  </p:stCondLst>
+                                  <p:childTnLst>
+                                    <p:set>
+                                      <p:cBhvr>
+                                        <p:cTn id="12" dur="1"/>
+                                        <p:tgtEl>
+                                          <p:spTgt spid="5"/>
+                                        </p:tgtEl>
+                                        <p:attrNameLst>
+                                          <p:attrName>style.visibility</p:attrName>
+                                        </p:attrNameLst>
+                                      </p:cBhvr>
+                                      <p:to>
+                                        <p:strVal val="visible"/>
+                                      </p:to>
+                                    </p:set>
+                                    <p:animEffect transition="in" filter="fade">
+                                      <p:cBhvr>
+                                        <p:cTn id="13" dur="400"/>
+                                        <p:tgtEl>
+                                          <p:spTgt spid="5"/>
+                                        </p:tgtEl>
+                                      </p:cBhvr>
+                                    </p:animEffect>
+                                  </p:childTnLst>
+                                </p:cTn>
+                              </p:par>
+                              <p:par>
+                                <p:cTn id="14" presetID="10" presetClass="entr" presetSubtype="0" fill="hold" grpId="0" nodeType="afterEffect">
+                                  <p:stCondLst>
+                                    <p:cond delay="1920"/>
+                                  </p:stCondLst>
+                                  <p:childTnLst>
+                                    <p:set>
+                                      <p:cBhvr>
+                                        <p:cTn id="15" dur="1"/>
+                                        <p:tgtEl>
+                                          <p:spTgt spid="9"/>
+                                        </p:tgtEl>
+                                        <p:attrNameLst>
+                                          <p:attrName>style.visibility</p:attrName>
+                                        </p:attrNameLst>
+                                      </p:cBhvr>
+                                      <p:to>
+                                        <p:strVal val="visible"/>
+                                      </p:to>
+                                    </p:set>
+                                    <p:animEffect transition="in" filter="fade">
+                                      <p:cBhvr>
+                                        <p:cTn id="16" dur="400"/>
+                                        <p:tgtEl>
+                                          <p:spTgt spid="9"/>
+                                        </p:tgtEl>
+                                      </p:cBhvr>
+                                    </p:animEffect>
+                                  </p:childTnLst>
+                                </p:cTn>
+                              </p:par>
+                              <p:par>
+                                <p:cTn id="17" presetID="10" presetClass="entr" presetSubtype="0" fill="hold" grpId="0" nodeType="afterEffect">
+                                  <p:stCondLst>
+                                    <p:cond delay="2800"/>
+                                  </p:stCondLst>
+                                  <p:childTnLst>
+                                    <p:set>
+                                      <p:cBhvr>
+                                        <p:cTn id="18" dur="1"/>
+                                        <p:tgtEl>
+                                          <p:spTgt spid="13"/>
+                                        </p:tgtEl>
+                                        <p:attrNameLst>
+                                          <p:attrName>style.visibility</p:attrName>
+                                        </p:attrNameLst>
+                                      </p:cBhvr>
+                                      <p:to>
+                                        <p:strVal val="visible"/>
+                                      </p:to>
+                                    </p:set>
+                                    <p:animEffect transition="in" filter="fade">
+                                      <p:cBhvr>
+                                        <p:cTn id="19" dur="400"/>
+                                        <p:tgtEl>
+                                          <p:spTgt spid="13"/>
+                                        </p:tgtEl>
+                                      </p:cBhvr>
+                                    </p:animEffect>
+                                  </p:childTnLst>
+                                </p:cTn>
+                              </p:par>
+                              <p:par>
+                                <p:cTn id="20" presetID="10" presetClass="entr" presetSubtype="0" fill="hold" grpId="0" nodeType="afterEffect">
+                                  <p:stCondLst>
+                                    <p:cond delay="3800"/>
+                                  </p:stCondLst>
+                                  <p:childTnLst>
+                                    <p:set>
+                                      <p:cBhvr>
+                                        <p:cTn id="21" dur="1"/>
+                                        <p:tgtEl>
+                                          <p:spTgt spid="6"/>
+                                        </p:tgtEl>
+                                        <p:attrNameLst>
+                                          <p:attrName>style.visibility</p:attrName>
+                                        </p:attrNameLst>
+                                      </p:cBhvr>
+                                      <p:to>
+                                        <p:strVal val="visible"/>
+                                      </p:to>
+                                    </p:set>
+                                    <p:animEffect transition="in" filter="fade">
+                                      <p:cBhvr>
+                                        <p:cTn id="22" dur="400"/>
+                                        <p:tgtEl>
+                                          <p:spTgt spid="6"/>
+                                        </p:tgtEl>
+                                      </p:cBhvr>
+                                    </p:animEffect>
+                                  </p:childTnLst>
+                                </p:cTn>
+                              </p:par>
+                              <p:par>
+                                <p:cTn id="23" presetID="10" presetClass="entr" presetSubtype="0" fill="hold" grpId="0" nodeType="afterEffect">
+                                  <p:stCondLst>
+                                    <p:cond delay="4920"/>
+                                  </p:stCondLst>
+                                  <p:childTnLst>
+                                    <p:set>
+                                      <p:cBhvr>
+                                        <p:cTn id="24" dur="1"/>
+                                        <p:tgtEl>
+                                          <p:spTgt spid="10"/>
+                                        </p:tgtEl>
+                                        <p:attrNameLst>
+                                          <p:attrName>style.visibility</p:attrName>
+                                        </p:attrNameLst>
+                                      </p:cBhvr>
+                                      <p:to>
+                                        <p:strVal val="visible"/>
+                                      </p:to>
+                                    </p:set>
+                                    <p:animEffect transition="in" filter="fade">
+                                      <p:cBhvr>
+                                        <p:cTn id="25" dur="400"/>
+                                        <p:tgtEl>
+                                          <p:spTgt spid="10"/>
+                                        </p:tgtEl>
+                                      </p:cBhvr>
+                                    </p:animEffect>
+                                  </p:childTnLst>
+                                </p:cTn>
+                              </p:par>
+                              <p:par>
+                                <p:cTn id="26" presetID="10" presetClass="entr" presetSubtype="0" fill="hold" grpId="0" nodeType="afterEffect">
+                                  <p:stCondLst>
+                                    <p:cond delay="6160"/>
+                                  </p:stCondLst>
+                                  <p:childTnLst>
+                                    <p:set>
+                                      <p:cBhvr>
+                                        <p:cTn id="27" dur="1"/>
+                                        <p:tgtEl>
+                                          <p:spTgt spid="14"/>
+                                        </p:tgtEl>
+                                        <p:attrNameLst>
+                                          <p:attrName>style.visibility</p:attrName>
+                                        </p:attrNameLst>
+                                      </p:cBhvr>
+                                      <p:to>
+                                        <p:strVal val="visible"/>
+                                      </p:to>
+                                    </p:set>
+                                    <p:animEffect transition="in" filter="fade">
+                                      <p:cBhvr>
+                                        <p:cTn id="28" dur="400"/>
+                                        <p:tgtEl>
+                                          <p:spTgt spid="14"/>
+                                        </p:tgtEl>
+                                      </p:cBhvr>
+                                    </p:animEffect>
+                                  </p:childTnLst>
+                                </p:cTn>
+                              </p:par>
+                              <p:par>
+                                <p:cTn id="29" presetID="10" presetClass="entr" presetSubtype="0" fill="hold" grpId="0" nodeType="afterEffect">
+                                  <p:stCondLst>
+                                    <p:cond delay="7520"/>
+                                  </p:stCondLst>
+                                  <p:childTnLst>
+                                    <p:set>
+                                      <p:cBhvr>
+                                        <p:cTn id="30" dur="1"/>
+                                        <p:tgtEl>
+                                          <p:spTgt spid="7"/>
+                                        </p:tgtEl>
+                                        <p:attrNameLst>
+                                          <p:attrName>style.visibility</p:attrName>
+                                        </p:attrNameLst>
+                                      </p:cBhvr>
+                                      <p:to>
+                                        <p:strVal val="visible"/>
+                                      </p:to>
+                                    </p:set>
+                                    <p:animEffect transition="in" filter="fade">
+                                      <p:cBhvr>
+                                        <p:cTn id="31" dur="400"/>
+                                        <p:tgtEl>
+                                          <p:spTgt spid="7"/>
+                                        </p:tgtEl>
+                                      </p:cBhvr>
+                                    </p:animEffect>
+                                  </p:childTnLst>
+                                </p:cTn>
+                              </p:par>
+                              <p:par>
+                                <p:cTn id="32" presetID="10" presetClass="entr" presetSubtype="0" fill="hold" grpId="0" nodeType="afterEffect">
+                                  <p:stCondLst>
+                                    <p:cond delay="9000"/>
+                                  </p:stCondLst>
+                                  <p:childTnLst>
+                                    <p:set>
+                                      <p:cBhvr>
+                                        <p:cTn id="33" dur="1"/>
+                                        <p:tgtEl>
+                                          <p:spTgt spid="11"/>
+                                        </p:tgtEl>
+                                        <p:attrNameLst>
+                                          <p:attrName>style.visibility</p:attrName>
+                                        </p:attrNameLst>
+                                      </p:cBhvr>
+                                      <p:to>
+                                        <p:strVal val="visible"/>
+                                      </p:to>
+                                    </p:set>
+                                    <p:animEffect transition="in" filter="fade">
+                                      <p:cBhvr>
+                                        <p:cTn id="34" dur="400"/>
+                                        <p:tgtEl>
+                                          <p:spTgt spid="11"/>
+                                        </p:tgtEl>
+                                      </p:cBhvr>
+                                    </p:animEffect>
+                                  </p:childTnLst>
+                                </p:cTn>
+                              </p:par>
+                              <p:par>
+                                <p:cTn id="35" presetID="10" presetClass="entr" presetSubtype="0" fill="hold" grpId="0" nodeType="afterEffect">
+                                  <p:stCondLst>
+                                    <p:cond delay="10600"/>
+                                  </p:stCondLst>
+                                  <p:childTnLst>
+                                    <p:set>
+                                      <p:cBhvr>
+                                        <p:cTn id="36" dur="1"/>
+                                        <p:tgtEl>
+                                          <p:spTgt spid="15"/>
+                                        </p:tgtEl>
+                                        <p:attrNameLst>
+                                          <p:attrName>style.visibility</p:attrName>
+                                        </p:attrNameLst>
+                                      </p:cBhvr>
+                                      <p:to>
+                                        <p:strVal val="visible"/>
+                                      </p:to>
+                                    </p:set>
+                                    <p:animEffect transition="in" filter="fade">
+                                      <p:cBhvr>
+                                        <p:cTn id="37" dur="400"/>
+                                        <p:tgtEl>
+                                          <p:spTgt spid="15"/>
+                                        </p:tgtEl>
+                                      </p:cBhvr>
+                                    </p:animEffect>
+                                  </p:childTnLst>
+                                </p:cTn>
+                              </p:par>
+                              <p:par>
+                                <p:cTn id="38" presetID="10" presetClass="entr" presetSubtype="0" fill="hold" grpId="0" nodeType="afterEffect">
+                                  <p:stCondLst>
+                                    <p:cond delay="12320"/>
+                                  </p:stCondLst>
+                                  <p:childTnLst>
+                                    <p:set>
+                                      <p:cBhvr>
+                                        <p:cTn id="39" dur="1"/>
+                                        <p:tgtEl>
+                                          <p:spTgt spid="8"/>
+                                        </p:tgtEl>
+                                        <p:attrNameLst>
+                                          <p:attrName>style.visibility</p:attrName>
+                                        </p:attrNameLst>
+                                      </p:cBhvr>
+                                      <p:to>
+                                        <p:strVal val="visible"/>
+                                      </p:to>
+                                    </p:set>
+                                    <p:animEffect transition="in" filter="fade">
+                                      <p:cBhvr>
+                                        <p:cTn id="40" dur="400"/>
+                                        <p:tgtEl>
+                                          <p:spTgt spid="8"/>
+                                        </p:tgtEl>
+                                      </p:cBhvr>
+                                    </p:animEffect>
+                                  </p:childTnLst>
+                                </p:cTn>
+                              </p:par>
+                              <p:par>
+                                <p:cTn id="41" presetID="10" presetClass="entr" presetSubtype="0" fill="hold" grpId="0" nodeType="afterEffect">
+                                  <p:stCondLst>
+                                    <p:cond delay="14160"/>
+                                  </p:stCondLst>
+                                  <p:childTnLst>
+                                    <p:set>
+                                      <p:cBhvr>
+                                        <p:cTn id="42" dur="1"/>
+                                        <p:tgtEl>
+                                          <p:spTgt spid="12"/>
+                                        </p:tgtEl>
+                                        <p:attrNameLst>
+                                          <p:attrName>style.visibility</p:attrName>
+                                        </p:attrNameLst>
+                                      </p:cBhvr>
+                                      <p:to>
+                                        <p:strVal val="visible"/>
+                                      </p:to>
+                                    </p:set>
+                                    <p:animEffect transition="in" filter="fade">
+                                      <p:cBhvr>
+                                        <p:cTn id="43" dur="400"/>
+                                        <p:tgtEl>
+                                          <p:spTgt spid="12"/>
+                                        </p:tgtEl>
+                                      </p:cBhvr>
+                                    </p:animEffect>
+                                  </p:childTnLst>
+                                </p:cTn>
+                              </p:par>
+                              <p:par>
+                                <p:cTn id="44" presetID="10" presetClass="entr" presetSubtype="0" fill="hold" grpId="0" nodeType="afterEffect">
+                                  <p:stCondLst>
+                                    <p:cond delay="16120"/>
+                                  </p:stCondLst>
+                                  <p:childTnLst>
+                                    <p:set>
+                                      <p:cBhvr>
+                                        <p:cTn id="45" dur="1"/>
+                                        <p:tgtEl>
+                                          <p:spTgt spid="16"/>
+                                        </p:tgtEl>
+                                        <p:attrNameLst>
+                                          <p:attrName>style.visibility</p:attrName>
+                                        </p:attrNameLst>
+                                      </p:cBhvr>
+                                      <p:to>
+                                        <p:strVal val="visible"/>
+                                      </p:to>
+                                    </p:set>
+                                    <p:animEffect transition="in" filter="fade">
+                                      <p:cBhvr>
+                                        <p:cTn id="46" dur="400"/>
+                                        <p:tgtEl>
+                                          <p:spTgt spid="16"/>
+                                        </p:tgtEl>
+                                      </p:cBhvr>
+                                    </p:animEffect>
+                                  </p:childTnLst>
+                                </p:cTn>
+                              </p:par>
+                              <p:par>
+                                <p:cTn id="47" presetID="10" presetClass="entr" presetSubtype="0" fill="hold" grpId="0" nodeType="afterEffect">
+                                  <p:stCondLst>
+                                    <p:cond delay="18200"/>
+                                  </p:stCondLst>
+                                  <p:childTnLst>
+                                    <p:set>
+                                      <p:cBhvr>
+                                        <p:cTn id="48" dur="1"/>
+                                        <p:tgtEl>
+                                          <p:spTgt spid="17"/>
+                                        </p:tgtEl>
+                                        <p:attrNameLst>
+                                          <p:attrName>style.visibility</p:attrName>
+                                        </p:attrNameLst>
+                                      </p:cBhvr>
+                                      <p:to>
+                                        <p:strVal val="visible"/>
+                                      </p:to>
+                                    </p:set>
+                                    <p:animEffect transition="in" filter="fade">
+                                      <p:cBhvr>
+                                        <p:cTn id="49" dur="400"/>
+                                        <p:tgtEl>
+                                          <p:spTgt spid="17"/>
+                                        </p:tgtEl>
+                                      </p:cBhvr>
+                                    </p:animEffect>
+                                  </p:childTnLst>
+                                </p:cTn>
+                              </p:par>
+                              <p:par>
+                                <p:cTn id="50" presetID="10" presetClass="entr" presetSubtype="0" fill="hold" grpId="0" nodeType="afterEffect">
+                                  <p:stCondLst>
+                                    <p:cond delay="20400"/>
+                                  </p:stCondLst>
+                                  <p:childTnLst>
+                                    <p:set>
+                                      <p:cBhvr>
+                                        <p:cTn id="51" dur="1"/>
+                                        <p:tgtEl>
+                                          <p:spTgt spid="18"/>
+                                        </p:tgtEl>
+                                        <p:attrNameLst>
+                                          <p:attrName>style.visibility</p:attrName>
+                                        </p:attrNameLst>
+                                      </p:cBhvr>
+                                      <p:to>
+                                        <p:strVal val="visible"/>
+                                      </p:to>
+                                    </p:set>
+                                    <p:animEffect transition="in" filter="fade">
+                                      <p:cBhvr>
+                                        <p:cTn id="52" dur="400"/>
+                                        <p:tgtEl>
+                                          <p:spTgt spid="18"/>
+                                        </p:tgtEl>
+                                      </p:cBhvr>
+                                    </p:animEffect>
+                                  </p:childTnLst>
+                                </p:cTn>
+                              </p:par>
+                            </p:childTnLst>
+                          </p:cTn>
+                        </p:par>
+                      </p:childTnLst>
+                    </p:cTn>
+                  </p:par>
+                </p:childTnLst>
+              </p:cTn>
+              <p:prevCondLst>
+                <p:cond evt="onPrev" delay="0">
+                  <p:tgtEl>
+                    <p:sldTgt/>
+                  </p:tgtEl>
+                </p:cond>
+              </p:prevCondLst>
+              <p:nextCondLst>
+                <p:cond evt="onNext" delay="0">
+                  <p:tgtEl>
+                    <p:sldTgt/>
+                  </p:tgtEl>
+                </p:cond>
+              </p:nextCondLst>
+            </p:seq>
+          </p:childTnLst>
+        </p:cTn>
+      </p:par>
+    </p:tnLst>
+    <p:bldLst>
+      <p:bldP spid="2" grpId="0"/>
+      <p:bldP spid="3" grpId="0"/>
+      <p:bldP spid="5" grpId="0"/>
+      <p:bldP spid="9" grpId="0"/>
+      <p:bldP spid="13" grpId="0"/>
+      <p:bldP spid="6" grpId="0"/>
+      <p:bldP spid="10" grpId="0"/>
+      <p:bldP spid="14" grpId="0"/>
+      <p:bldP spid="7" grpId="0"/>
+      <p:bldP spid="11" grpId="0"/>
+      <p:bldP spid="15" grpId="0"/>
+      <p:bldP spid="8" grpId="0"/>
+      <p:bldP spid="12" grpId="0"/>
+      <p:bldP spid="16" grpId="0"/>
+      <p:bldP spid="17" grpId="0"/>
+      <p:bldP spid="18" grpId="0"/>
+    </p:bldLst>
+  </p:timing>
 </p:sld>
 </file>
 
@@ -9395,6 +16708,1182 @@
   <p:clrMapOvr>
     <a:masterClrMapping/>
   </p:clrMapOvr>
+  <p:transition spd="med">
+    <p:fade/>
+  </p:transition>
+  <p:timing>
+    <p:tnLst>
+      <p:par>
+        <p:cTn id="1" dur="indefinite" restart="never" nodeType="tmRoot">
+          <p:childTnLst>
+            <p:seq concurrent="1" nextAc="seek">
+              <p:cTn id="2" dur="indefinite" nodeType="mainSeq">
+                <p:childTnLst>
+                  <p:par>
+                    <p:cTn id="3" fill="hold">
+                      <p:stCondLst>
+                        <p:cond delay="indefinite"/>
+                        <p:cond evt="onBegin" delay="0">
+                          <p:tn val="2"/>
+                        </p:cond>
+                      </p:stCondLst>
+                      <p:childTnLst>
+                        <p:par>
+                          <p:cTn id="4" fill="hold">
+                            <p:stCondLst>
+                              <p:cond delay="0"/>
+                            </p:stCondLst>
+                            <p:childTnLst>
+                              <p:par>
+                                <p:cTn id="5" presetID="2" presetClass="entr" presetSubtype="4" fill="hold" grpId="0" nodeType="afterEffect">
+                                  <p:stCondLst>
+                                    <p:cond delay="0"/>
+                                  </p:stCondLst>
+                                  <p:childTnLst>
+                                    <p:set>
+                                      <p:cBhvr>
+                                        <p:cTn id="6" dur="1"/>
+                                        <p:tgtEl>
+                                          <p:spTgt spid="2"/>
+                                        </p:tgtEl>
+                                        <p:attrNameLst>
+                                          <p:attrName>style.visibility</p:attrName>
+                                        </p:attrNameLst>
+                                      </p:cBhvr>
+                                      <p:to>
+                                        <p:strVal val="visible"/>
+                                      </p:to>
+                                    </p:set>
+                                    <p:anim calcmode="lin" valueType="num">
+                                      <p:cBhvr additive="base">
+                                        <p:cTn id="7" dur="400"/>
+                                        <p:tgtEl>
+                                          <p:spTgt spid="2"/>
+                                        </p:tgtEl>
+                                        <p:attrNameLst>
+                                          <p:attrName>ppt_x</p:attrName>
+                                        </p:attrNameLst>
+                                      </p:cBhvr>
+                                      <p:tavLst>
+                                        <p:tav tm="0">
+                                          <p:val>
+                                            <p:strVal val="#ppt_x"/>
+                                          </p:val>
+                                        </p:tav>
+                                        <p:tav tm="100000">
+                                          <p:val>
+                                            <p:strVal val="#ppt_x"/>
+                                          </p:val>
+                                        </p:tav>
+                                      </p:tavLst>
+                                    </p:anim>
+                                    <p:anim calcmode="lin" valueType="num">
+                                      <p:cBhvr additive="base">
+                                        <p:cTn id="8" dur="400"/>
+                                        <p:tgtEl>
+                                          <p:spTgt spid="2"/>
+                                        </p:tgtEl>
+                                        <p:attrNameLst>
+                                          <p:attrName>ppt_y</p:attrName>
+                                        </p:attrNameLst>
+                                      </p:cBhvr>
+                                      <p:tavLst>
+                                        <p:tav tm="0">
+                                          <p:val>
+                                            <p:strVal val="1+#ppt_h/2"/>
+                                          </p:val>
+                                        </p:tav>
+                                        <p:tav tm="100000">
+                                          <p:val>
+                                            <p:strVal val="#ppt_y"/>
+                                          </p:val>
+                                        </p:tav>
+                                      </p:tavLst>
+                                    </p:anim>
+                                  </p:childTnLst>
+                                </p:cTn>
+                              </p:par>
+                              <p:par>
+                                <p:cTn id="9" presetID="2" presetClass="entr" presetSubtype="4" fill="hold" grpId="0" nodeType="afterEffect">
+                                  <p:stCondLst>
+                                    <p:cond delay="520"/>
+                                  </p:stCondLst>
+                                  <p:childTnLst>
+                                    <p:set>
+                                      <p:cBhvr>
+                                        <p:cTn id="10" dur="1"/>
+                                        <p:tgtEl>
+                                          <p:spTgt spid="3"/>
+                                        </p:tgtEl>
+                                        <p:attrNameLst>
+                                          <p:attrName>style.visibility</p:attrName>
+                                        </p:attrNameLst>
+                                      </p:cBhvr>
+                                      <p:to>
+                                        <p:strVal val="visible"/>
+                                      </p:to>
+                                    </p:set>
+                                    <p:anim calcmode="lin" valueType="num">
+                                      <p:cBhvr additive="base">
+                                        <p:cTn id="11" dur="400"/>
+                                        <p:tgtEl>
+                                          <p:spTgt spid="3"/>
+                                        </p:tgtEl>
+                                        <p:attrNameLst>
+                                          <p:attrName>ppt_x</p:attrName>
+                                        </p:attrNameLst>
+                                      </p:cBhvr>
+                                      <p:tavLst>
+                                        <p:tav tm="0">
+                                          <p:val>
+                                            <p:strVal val="#ppt_x"/>
+                                          </p:val>
+                                        </p:tav>
+                                        <p:tav tm="100000">
+                                          <p:val>
+                                            <p:strVal val="#ppt_x"/>
+                                          </p:val>
+                                        </p:tav>
+                                      </p:tavLst>
+                                    </p:anim>
+                                    <p:anim calcmode="lin" valueType="num">
+                                      <p:cBhvr additive="base">
+                                        <p:cTn id="12" dur="400"/>
+                                        <p:tgtEl>
+                                          <p:spTgt spid="3"/>
+                                        </p:tgtEl>
+                                        <p:attrNameLst>
+                                          <p:attrName>ppt_y</p:attrName>
+                                        </p:attrNameLst>
+                                      </p:cBhvr>
+                                      <p:tavLst>
+                                        <p:tav tm="0">
+                                          <p:val>
+                                            <p:strVal val="1+#ppt_h/2"/>
+                                          </p:val>
+                                        </p:tav>
+                                        <p:tav tm="100000">
+                                          <p:val>
+                                            <p:strVal val="#ppt_y"/>
+                                          </p:val>
+                                        </p:tav>
+                                      </p:tavLst>
+                                    </p:anim>
+                                  </p:childTnLst>
+                                </p:cTn>
+                              </p:par>
+                              <p:par>
+                                <p:cTn id="13" presetID="2" presetClass="entr" presetSubtype="4" fill="hold" grpId="0" nodeType="afterEffect">
+                                  <p:stCondLst>
+                                    <p:cond delay="1160"/>
+                                  </p:stCondLst>
+                                  <p:childTnLst>
+                                    <p:set>
+                                      <p:cBhvr>
+                                        <p:cTn id="14" dur="1"/>
+                                        <p:tgtEl>
+                                          <p:spTgt spid="5"/>
+                                        </p:tgtEl>
+                                        <p:attrNameLst>
+                                          <p:attrName>style.visibility</p:attrName>
+                                        </p:attrNameLst>
+                                      </p:cBhvr>
+                                      <p:to>
+                                        <p:strVal val="visible"/>
+                                      </p:to>
+                                    </p:set>
+                                    <p:anim calcmode="lin" valueType="num">
+                                      <p:cBhvr additive="base">
+                                        <p:cTn id="15" dur="400"/>
+                                        <p:tgtEl>
+                                          <p:spTgt spid="5"/>
+                                        </p:tgtEl>
+                                        <p:attrNameLst>
+                                          <p:attrName>ppt_x</p:attrName>
+                                        </p:attrNameLst>
+                                      </p:cBhvr>
+                                      <p:tavLst>
+                                        <p:tav tm="0">
+                                          <p:val>
+                                            <p:strVal val="#ppt_x"/>
+                                          </p:val>
+                                        </p:tav>
+                                        <p:tav tm="100000">
+                                          <p:val>
+                                            <p:strVal val="#ppt_x"/>
+                                          </p:val>
+                                        </p:tav>
+                                      </p:tavLst>
+                                    </p:anim>
+                                    <p:anim calcmode="lin" valueType="num">
+                                      <p:cBhvr additive="base">
+                                        <p:cTn id="16" dur="400"/>
+                                        <p:tgtEl>
+                                          <p:spTgt spid="5"/>
+                                        </p:tgtEl>
+                                        <p:attrNameLst>
+                                          <p:attrName>ppt_y</p:attrName>
+                                        </p:attrNameLst>
+                                      </p:cBhvr>
+                                      <p:tavLst>
+                                        <p:tav tm="0">
+                                          <p:val>
+                                            <p:strVal val="1+#ppt_h/2"/>
+                                          </p:val>
+                                        </p:tav>
+                                        <p:tav tm="100000">
+                                          <p:val>
+                                            <p:strVal val="#ppt_y"/>
+                                          </p:val>
+                                        </p:tav>
+                                      </p:tavLst>
+                                    </p:anim>
+                                  </p:childTnLst>
+                                </p:cTn>
+                              </p:par>
+                              <p:par>
+                                <p:cTn id="17" presetID="2" presetClass="entr" presetSubtype="4" fill="hold" grpId="0" nodeType="afterEffect">
+                                  <p:stCondLst>
+                                    <p:cond delay="1920"/>
+                                  </p:stCondLst>
+                                  <p:childTnLst>
+                                    <p:set>
+                                      <p:cBhvr>
+                                        <p:cTn id="18" dur="1"/>
+                                        <p:tgtEl>
+                                          <p:spTgt spid="6"/>
+                                        </p:tgtEl>
+                                        <p:attrNameLst>
+                                          <p:attrName>style.visibility</p:attrName>
+                                        </p:attrNameLst>
+                                      </p:cBhvr>
+                                      <p:to>
+                                        <p:strVal val="visible"/>
+                                      </p:to>
+                                    </p:set>
+                                    <p:anim calcmode="lin" valueType="num">
+                                      <p:cBhvr additive="base">
+                                        <p:cTn id="19" dur="400"/>
+                                        <p:tgtEl>
+                                          <p:spTgt spid="6"/>
+                                        </p:tgtEl>
+                                        <p:attrNameLst>
+                                          <p:attrName>ppt_x</p:attrName>
+                                        </p:attrNameLst>
+                                      </p:cBhvr>
+                                      <p:tavLst>
+                                        <p:tav tm="0">
+                                          <p:val>
+                                            <p:strVal val="#ppt_x"/>
+                                          </p:val>
+                                        </p:tav>
+                                        <p:tav tm="100000">
+                                          <p:val>
+                                            <p:strVal val="#ppt_x"/>
+                                          </p:val>
+                                        </p:tav>
+                                      </p:tavLst>
+                                    </p:anim>
+                                    <p:anim calcmode="lin" valueType="num">
+                                      <p:cBhvr additive="base">
+                                        <p:cTn id="20" dur="400"/>
+                                        <p:tgtEl>
+                                          <p:spTgt spid="6"/>
+                                        </p:tgtEl>
+                                        <p:attrNameLst>
+                                          <p:attrName>ppt_y</p:attrName>
+                                        </p:attrNameLst>
+                                      </p:cBhvr>
+                                      <p:tavLst>
+                                        <p:tav tm="0">
+                                          <p:val>
+                                            <p:strVal val="1+#ppt_h/2"/>
+                                          </p:val>
+                                        </p:tav>
+                                        <p:tav tm="100000">
+                                          <p:val>
+                                            <p:strVal val="#ppt_y"/>
+                                          </p:val>
+                                        </p:tav>
+                                      </p:tavLst>
+                                    </p:anim>
+                                  </p:childTnLst>
+                                </p:cTn>
+                              </p:par>
+                              <p:par>
+                                <p:cTn id="21" presetID="2" presetClass="entr" presetSubtype="4" fill="hold" grpId="0" nodeType="afterEffect">
+                                  <p:stCondLst>
+                                    <p:cond delay="2800"/>
+                                  </p:stCondLst>
+                                  <p:childTnLst>
+                                    <p:set>
+                                      <p:cBhvr>
+                                        <p:cTn id="22" dur="1"/>
+                                        <p:tgtEl>
+                                          <p:spTgt spid="9"/>
+                                        </p:tgtEl>
+                                        <p:attrNameLst>
+                                          <p:attrName>style.visibility</p:attrName>
+                                        </p:attrNameLst>
+                                      </p:cBhvr>
+                                      <p:to>
+                                        <p:strVal val="visible"/>
+                                      </p:to>
+                                    </p:set>
+                                    <p:anim calcmode="lin" valueType="num">
+                                      <p:cBhvr additive="base">
+                                        <p:cTn id="23" dur="400"/>
+                                        <p:tgtEl>
+                                          <p:spTgt spid="9"/>
+                                        </p:tgtEl>
+                                        <p:attrNameLst>
+                                          <p:attrName>ppt_x</p:attrName>
+                                        </p:attrNameLst>
+                                      </p:cBhvr>
+                                      <p:tavLst>
+                                        <p:tav tm="0">
+                                          <p:val>
+                                            <p:strVal val="#ppt_x"/>
+                                          </p:val>
+                                        </p:tav>
+                                        <p:tav tm="100000">
+                                          <p:val>
+                                            <p:strVal val="#ppt_x"/>
+                                          </p:val>
+                                        </p:tav>
+                                      </p:tavLst>
+                                    </p:anim>
+                                    <p:anim calcmode="lin" valueType="num">
+                                      <p:cBhvr additive="base">
+                                        <p:cTn id="24" dur="400"/>
+                                        <p:tgtEl>
+                                          <p:spTgt spid="9"/>
+                                        </p:tgtEl>
+                                        <p:attrNameLst>
+                                          <p:attrName>ppt_y</p:attrName>
+                                        </p:attrNameLst>
+                                      </p:cBhvr>
+                                      <p:tavLst>
+                                        <p:tav tm="0">
+                                          <p:val>
+                                            <p:strVal val="1+#ppt_h/2"/>
+                                          </p:val>
+                                        </p:tav>
+                                        <p:tav tm="100000">
+                                          <p:val>
+                                            <p:strVal val="#ppt_y"/>
+                                          </p:val>
+                                        </p:tav>
+                                      </p:tavLst>
+                                    </p:anim>
+                                  </p:childTnLst>
+                                </p:cTn>
+                              </p:par>
+                              <p:par>
+                                <p:cTn id="25" presetID="2" presetClass="entr" presetSubtype="4" fill="hold" grpId="0" nodeType="afterEffect">
+                                  <p:stCondLst>
+                                    <p:cond delay="3800"/>
+                                  </p:stCondLst>
+                                  <p:childTnLst>
+                                    <p:set>
+                                      <p:cBhvr>
+                                        <p:cTn id="26" dur="1"/>
+                                        <p:tgtEl>
+                                          <p:spTgt spid="10"/>
+                                        </p:tgtEl>
+                                        <p:attrNameLst>
+                                          <p:attrName>style.visibility</p:attrName>
+                                        </p:attrNameLst>
+                                      </p:cBhvr>
+                                      <p:to>
+                                        <p:strVal val="visible"/>
+                                      </p:to>
+                                    </p:set>
+                                    <p:anim calcmode="lin" valueType="num">
+                                      <p:cBhvr additive="base">
+                                        <p:cTn id="27" dur="400"/>
+                                        <p:tgtEl>
+                                          <p:spTgt spid="10"/>
+                                        </p:tgtEl>
+                                        <p:attrNameLst>
+                                          <p:attrName>ppt_x</p:attrName>
+                                        </p:attrNameLst>
+                                      </p:cBhvr>
+                                      <p:tavLst>
+                                        <p:tav tm="0">
+                                          <p:val>
+                                            <p:strVal val="#ppt_x"/>
+                                          </p:val>
+                                        </p:tav>
+                                        <p:tav tm="100000">
+                                          <p:val>
+                                            <p:strVal val="#ppt_x"/>
+                                          </p:val>
+                                        </p:tav>
+                                      </p:tavLst>
+                                    </p:anim>
+                                    <p:anim calcmode="lin" valueType="num">
+                                      <p:cBhvr additive="base">
+                                        <p:cTn id="28" dur="400"/>
+                                        <p:tgtEl>
+                                          <p:spTgt spid="10"/>
+                                        </p:tgtEl>
+                                        <p:attrNameLst>
+                                          <p:attrName>ppt_y</p:attrName>
+                                        </p:attrNameLst>
+                                      </p:cBhvr>
+                                      <p:tavLst>
+                                        <p:tav tm="0">
+                                          <p:val>
+                                            <p:strVal val="1+#ppt_h/2"/>
+                                          </p:val>
+                                        </p:tav>
+                                        <p:tav tm="100000">
+                                          <p:val>
+                                            <p:strVal val="#ppt_y"/>
+                                          </p:val>
+                                        </p:tav>
+                                      </p:tavLst>
+                                    </p:anim>
+                                  </p:childTnLst>
+                                </p:cTn>
+                              </p:par>
+                              <p:par>
+                                <p:cTn id="29" presetID="2" presetClass="entr" presetSubtype="4" fill="hold" grpId="0" nodeType="afterEffect">
+                                  <p:stCondLst>
+                                    <p:cond delay="4920"/>
+                                  </p:stCondLst>
+                                  <p:childTnLst>
+                                    <p:set>
+                                      <p:cBhvr>
+                                        <p:cTn id="30" dur="1"/>
+                                        <p:tgtEl>
+                                          <p:spTgt spid="13"/>
+                                        </p:tgtEl>
+                                        <p:attrNameLst>
+                                          <p:attrName>style.visibility</p:attrName>
+                                        </p:attrNameLst>
+                                      </p:cBhvr>
+                                      <p:to>
+                                        <p:strVal val="visible"/>
+                                      </p:to>
+                                    </p:set>
+                                    <p:anim calcmode="lin" valueType="num">
+                                      <p:cBhvr additive="base">
+                                        <p:cTn id="31" dur="400"/>
+                                        <p:tgtEl>
+                                          <p:spTgt spid="13"/>
+                                        </p:tgtEl>
+                                        <p:attrNameLst>
+                                          <p:attrName>ppt_x</p:attrName>
+                                        </p:attrNameLst>
+                                      </p:cBhvr>
+                                      <p:tavLst>
+                                        <p:tav tm="0">
+                                          <p:val>
+                                            <p:strVal val="#ppt_x"/>
+                                          </p:val>
+                                        </p:tav>
+                                        <p:tav tm="100000">
+                                          <p:val>
+                                            <p:strVal val="#ppt_x"/>
+                                          </p:val>
+                                        </p:tav>
+                                      </p:tavLst>
+                                    </p:anim>
+                                    <p:anim calcmode="lin" valueType="num">
+                                      <p:cBhvr additive="base">
+                                        <p:cTn id="32" dur="400"/>
+                                        <p:tgtEl>
+                                          <p:spTgt spid="13"/>
+                                        </p:tgtEl>
+                                        <p:attrNameLst>
+                                          <p:attrName>ppt_y</p:attrName>
+                                        </p:attrNameLst>
+                                      </p:cBhvr>
+                                      <p:tavLst>
+                                        <p:tav tm="0">
+                                          <p:val>
+                                            <p:strVal val="1+#ppt_h/2"/>
+                                          </p:val>
+                                        </p:tav>
+                                        <p:tav tm="100000">
+                                          <p:val>
+                                            <p:strVal val="#ppt_y"/>
+                                          </p:val>
+                                        </p:tav>
+                                      </p:tavLst>
+                                    </p:anim>
+                                  </p:childTnLst>
+                                </p:cTn>
+                              </p:par>
+                              <p:par>
+                                <p:cTn id="33" presetID="2" presetClass="entr" presetSubtype="4" fill="hold" grpId="0" nodeType="afterEffect">
+                                  <p:stCondLst>
+                                    <p:cond delay="6160"/>
+                                  </p:stCondLst>
+                                  <p:childTnLst>
+                                    <p:set>
+                                      <p:cBhvr>
+                                        <p:cTn id="34" dur="1"/>
+                                        <p:tgtEl>
+                                          <p:spTgt spid="14"/>
+                                        </p:tgtEl>
+                                        <p:attrNameLst>
+                                          <p:attrName>style.visibility</p:attrName>
+                                        </p:attrNameLst>
+                                      </p:cBhvr>
+                                      <p:to>
+                                        <p:strVal val="visible"/>
+                                      </p:to>
+                                    </p:set>
+                                    <p:anim calcmode="lin" valueType="num">
+                                      <p:cBhvr additive="base">
+                                        <p:cTn id="35" dur="400"/>
+                                        <p:tgtEl>
+                                          <p:spTgt spid="14"/>
+                                        </p:tgtEl>
+                                        <p:attrNameLst>
+                                          <p:attrName>ppt_x</p:attrName>
+                                        </p:attrNameLst>
+                                      </p:cBhvr>
+                                      <p:tavLst>
+                                        <p:tav tm="0">
+                                          <p:val>
+                                            <p:strVal val="#ppt_x"/>
+                                          </p:val>
+                                        </p:tav>
+                                        <p:tav tm="100000">
+                                          <p:val>
+                                            <p:strVal val="#ppt_x"/>
+                                          </p:val>
+                                        </p:tav>
+                                      </p:tavLst>
+                                    </p:anim>
+                                    <p:anim calcmode="lin" valueType="num">
+                                      <p:cBhvr additive="base">
+                                        <p:cTn id="36" dur="400"/>
+                                        <p:tgtEl>
+                                          <p:spTgt spid="14"/>
+                                        </p:tgtEl>
+                                        <p:attrNameLst>
+                                          <p:attrName>ppt_y</p:attrName>
+                                        </p:attrNameLst>
+                                      </p:cBhvr>
+                                      <p:tavLst>
+                                        <p:tav tm="0">
+                                          <p:val>
+                                            <p:strVal val="1+#ppt_h/2"/>
+                                          </p:val>
+                                        </p:tav>
+                                        <p:tav tm="100000">
+                                          <p:val>
+                                            <p:strVal val="#ppt_y"/>
+                                          </p:val>
+                                        </p:tav>
+                                      </p:tavLst>
+                                    </p:anim>
+                                  </p:childTnLst>
+                                </p:cTn>
+                              </p:par>
+                              <p:par>
+                                <p:cTn id="37" presetID="2" presetClass="entr" presetSubtype="4" fill="hold" grpId="0" nodeType="afterEffect">
+                                  <p:stCondLst>
+                                    <p:cond delay="7520"/>
+                                  </p:stCondLst>
+                                  <p:childTnLst>
+                                    <p:set>
+                                      <p:cBhvr>
+                                        <p:cTn id="38" dur="1"/>
+                                        <p:tgtEl>
+                                          <p:spTgt spid="7"/>
+                                        </p:tgtEl>
+                                        <p:attrNameLst>
+                                          <p:attrName>style.visibility</p:attrName>
+                                        </p:attrNameLst>
+                                      </p:cBhvr>
+                                      <p:to>
+                                        <p:strVal val="visible"/>
+                                      </p:to>
+                                    </p:set>
+                                    <p:anim calcmode="lin" valueType="num">
+                                      <p:cBhvr additive="base">
+                                        <p:cTn id="39" dur="400"/>
+                                        <p:tgtEl>
+                                          <p:spTgt spid="7"/>
+                                        </p:tgtEl>
+                                        <p:attrNameLst>
+                                          <p:attrName>ppt_x</p:attrName>
+                                        </p:attrNameLst>
+                                      </p:cBhvr>
+                                      <p:tavLst>
+                                        <p:tav tm="0">
+                                          <p:val>
+                                            <p:strVal val="#ppt_x"/>
+                                          </p:val>
+                                        </p:tav>
+                                        <p:tav tm="100000">
+                                          <p:val>
+                                            <p:strVal val="#ppt_x"/>
+                                          </p:val>
+                                        </p:tav>
+                                      </p:tavLst>
+                                    </p:anim>
+                                    <p:anim calcmode="lin" valueType="num">
+                                      <p:cBhvr additive="base">
+                                        <p:cTn id="40" dur="400"/>
+                                        <p:tgtEl>
+                                          <p:spTgt spid="7"/>
+                                        </p:tgtEl>
+                                        <p:attrNameLst>
+                                          <p:attrName>ppt_y</p:attrName>
+                                        </p:attrNameLst>
+                                      </p:cBhvr>
+                                      <p:tavLst>
+                                        <p:tav tm="0">
+                                          <p:val>
+                                            <p:strVal val="1+#ppt_h/2"/>
+                                          </p:val>
+                                        </p:tav>
+                                        <p:tav tm="100000">
+                                          <p:val>
+                                            <p:strVal val="#ppt_y"/>
+                                          </p:val>
+                                        </p:tav>
+                                      </p:tavLst>
+                                    </p:anim>
+                                  </p:childTnLst>
+                                </p:cTn>
+                              </p:par>
+                              <p:par>
+                                <p:cTn id="41" presetID="2" presetClass="entr" presetSubtype="4" fill="hold" grpId="0" nodeType="afterEffect">
+                                  <p:stCondLst>
+                                    <p:cond delay="9000"/>
+                                  </p:stCondLst>
+                                  <p:childTnLst>
+                                    <p:set>
+                                      <p:cBhvr>
+                                        <p:cTn id="42" dur="1"/>
+                                        <p:tgtEl>
+                                          <p:spTgt spid="11"/>
+                                        </p:tgtEl>
+                                        <p:attrNameLst>
+                                          <p:attrName>style.visibility</p:attrName>
+                                        </p:attrNameLst>
+                                      </p:cBhvr>
+                                      <p:to>
+                                        <p:strVal val="visible"/>
+                                      </p:to>
+                                    </p:set>
+                                    <p:anim calcmode="lin" valueType="num">
+                                      <p:cBhvr additive="base">
+                                        <p:cTn id="43" dur="400"/>
+                                        <p:tgtEl>
+                                          <p:spTgt spid="11"/>
+                                        </p:tgtEl>
+                                        <p:attrNameLst>
+                                          <p:attrName>ppt_x</p:attrName>
+                                        </p:attrNameLst>
+                                      </p:cBhvr>
+                                      <p:tavLst>
+                                        <p:tav tm="0">
+                                          <p:val>
+                                            <p:strVal val="#ppt_x"/>
+                                          </p:val>
+                                        </p:tav>
+                                        <p:tav tm="100000">
+                                          <p:val>
+                                            <p:strVal val="#ppt_x"/>
+                                          </p:val>
+                                        </p:tav>
+                                      </p:tavLst>
+                                    </p:anim>
+                                    <p:anim calcmode="lin" valueType="num">
+                                      <p:cBhvr additive="base">
+                                        <p:cTn id="44" dur="400"/>
+                                        <p:tgtEl>
+                                          <p:spTgt spid="11"/>
+                                        </p:tgtEl>
+                                        <p:attrNameLst>
+                                          <p:attrName>ppt_y</p:attrName>
+                                        </p:attrNameLst>
+                                      </p:cBhvr>
+                                      <p:tavLst>
+                                        <p:tav tm="0">
+                                          <p:val>
+                                            <p:strVal val="1+#ppt_h/2"/>
+                                          </p:val>
+                                        </p:tav>
+                                        <p:tav tm="100000">
+                                          <p:val>
+                                            <p:strVal val="#ppt_y"/>
+                                          </p:val>
+                                        </p:tav>
+                                      </p:tavLst>
+                                    </p:anim>
+                                  </p:childTnLst>
+                                </p:cTn>
+                              </p:par>
+                              <p:par>
+                                <p:cTn id="45" presetID="2" presetClass="entr" presetSubtype="4" fill="hold" grpId="0" nodeType="afterEffect">
+                                  <p:stCondLst>
+                                    <p:cond delay="10600"/>
+                                  </p:stCondLst>
+                                  <p:childTnLst>
+                                    <p:set>
+                                      <p:cBhvr>
+                                        <p:cTn id="46" dur="1"/>
+                                        <p:tgtEl>
+                                          <p:spTgt spid="15"/>
+                                        </p:tgtEl>
+                                        <p:attrNameLst>
+                                          <p:attrName>style.visibility</p:attrName>
+                                        </p:attrNameLst>
+                                      </p:cBhvr>
+                                      <p:to>
+                                        <p:strVal val="visible"/>
+                                      </p:to>
+                                    </p:set>
+                                    <p:anim calcmode="lin" valueType="num">
+                                      <p:cBhvr additive="base">
+                                        <p:cTn id="47" dur="400"/>
+                                        <p:tgtEl>
+                                          <p:spTgt spid="15"/>
+                                        </p:tgtEl>
+                                        <p:attrNameLst>
+                                          <p:attrName>ppt_x</p:attrName>
+                                        </p:attrNameLst>
+                                      </p:cBhvr>
+                                      <p:tavLst>
+                                        <p:tav tm="0">
+                                          <p:val>
+                                            <p:strVal val="#ppt_x"/>
+                                          </p:val>
+                                        </p:tav>
+                                        <p:tav tm="100000">
+                                          <p:val>
+                                            <p:strVal val="#ppt_x"/>
+                                          </p:val>
+                                        </p:tav>
+                                      </p:tavLst>
+                                    </p:anim>
+                                    <p:anim calcmode="lin" valueType="num">
+                                      <p:cBhvr additive="base">
+                                        <p:cTn id="48" dur="400"/>
+                                        <p:tgtEl>
+                                          <p:spTgt spid="15"/>
+                                        </p:tgtEl>
+                                        <p:attrNameLst>
+                                          <p:attrName>ppt_y</p:attrName>
+                                        </p:attrNameLst>
+                                      </p:cBhvr>
+                                      <p:tavLst>
+                                        <p:tav tm="0">
+                                          <p:val>
+                                            <p:strVal val="1+#ppt_h/2"/>
+                                          </p:val>
+                                        </p:tav>
+                                        <p:tav tm="100000">
+                                          <p:val>
+                                            <p:strVal val="#ppt_y"/>
+                                          </p:val>
+                                        </p:tav>
+                                      </p:tavLst>
+                                    </p:anim>
+                                  </p:childTnLst>
+                                </p:cTn>
+                              </p:par>
+                              <p:par>
+                                <p:cTn id="49" presetID="2" presetClass="entr" presetSubtype="4" fill="hold" grpId="0" nodeType="afterEffect">
+                                  <p:stCondLst>
+                                    <p:cond delay="12320"/>
+                                  </p:stCondLst>
+                                  <p:childTnLst>
+                                    <p:set>
+                                      <p:cBhvr>
+                                        <p:cTn id="50" dur="1"/>
+                                        <p:tgtEl>
+                                          <p:spTgt spid="8"/>
+                                        </p:tgtEl>
+                                        <p:attrNameLst>
+                                          <p:attrName>style.visibility</p:attrName>
+                                        </p:attrNameLst>
+                                      </p:cBhvr>
+                                      <p:to>
+                                        <p:strVal val="visible"/>
+                                      </p:to>
+                                    </p:set>
+                                    <p:anim calcmode="lin" valueType="num">
+                                      <p:cBhvr additive="base">
+                                        <p:cTn id="51" dur="400"/>
+                                        <p:tgtEl>
+                                          <p:spTgt spid="8"/>
+                                        </p:tgtEl>
+                                        <p:attrNameLst>
+                                          <p:attrName>ppt_x</p:attrName>
+                                        </p:attrNameLst>
+                                      </p:cBhvr>
+                                      <p:tavLst>
+                                        <p:tav tm="0">
+                                          <p:val>
+                                            <p:strVal val="#ppt_x"/>
+                                          </p:val>
+                                        </p:tav>
+                                        <p:tav tm="100000">
+                                          <p:val>
+                                            <p:strVal val="#ppt_x"/>
+                                          </p:val>
+                                        </p:tav>
+                                      </p:tavLst>
+                                    </p:anim>
+                                    <p:anim calcmode="lin" valueType="num">
+                                      <p:cBhvr additive="base">
+                                        <p:cTn id="52" dur="400"/>
+                                        <p:tgtEl>
+                                          <p:spTgt spid="8"/>
+                                        </p:tgtEl>
+                                        <p:attrNameLst>
+                                          <p:attrName>ppt_y</p:attrName>
+                                        </p:attrNameLst>
+                                      </p:cBhvr>
+                                      <p:tavLst>
+                                        <p:tav tm="0">
+                                          <p:val>
+                                            <p:strVal val="1+#ppt_h/2"/>
+                                          </p:val>
+                                        </p:tav>
+                                        <p:tav tm="100000">
+                                          <p:val>
+                                            <p:strVal val="#ppt_y"/>
+                                          </p:val>
+                                        </p:tav>
+                                      </p:tavLst>
+                                    </p:anim>
+                                  </p:childTnLst>
+                                </p:cTn>
+                              </p:par>
+                              <p:par>
+                                <p:cTn id="53" presetID="2" presetClass="entr" presetSubtype="4" fill="hold" grpId="0" nodeType="afterEffect">
+                                  <p:stCondLst>
+                                    <p:cond delay="14160"/>
+                                  </p:stCondLst>
+                                  <p:childTnLst>
+                                    <p:set>
+                                      <p:cBhvr>
+                                        <p:cTn id="54" dur="1"/>
+                                        <p:tgtEl>
+                                          <p:spTgt spid="12"/>
+                                        </p:tgtEl>
+                                        <p:attrNameLst>
+                                          <p:attrName>style.visibility</p:attrName>
+                                        </p:attrNameLst>
+                                      </p:cBhvr>
+                                      <p:to>
+                                        <p:strVal val="visible"/>
+                                      </p:to>
+                                    </p:set>
+                                    <p:anim calcmode="lin" valueType="num">
+                                      <p:cBhvr additive="base">
+                                        <p:cTn id="55" dur="400"/>
+                                        <p:tgtEl>
+                                          <p:spTgt spid="12"/>
+                                        </p:tgtEl>
+                                        <p:attrNameLst>
+                                          <p:attrName>ppt_x</p:attrName>
+                                        </p:attrNameLst>
+                                      </p:cBhvr>
+                                      <p:tavLst>
+                                        <p:tav tm="0">
+                                          <p:val>
+                                            <p:strVal val="#ppt_x"/>
+                                          </p:val>
+                                        </p:tav>
+                                        <p:tav tm="100000">
+                                          <p:val>
+                                            <p:strVal val="#ppt_x"/>
+                                          </p:val>
+                                        </p:tav>
+                                      </p:tavLst>
+                                    </p:anim>
+                                    <p:anim calcmode="lin" valueType="num">
+                                      <p:cBhvr additive="base">
+                                        <p:cTn id="56" dur="400"/>
+                                        <p:tgtEl>
+                                          <p:spTgt spid="12"/>
+                                        </p:tgtEl>
+                                        <p:attrNameLst>
+                                          <p:attrName>ppt_y</p:attrName>
+                                        </p:attrNameLst>
+                                      </p:cBhvr>
+                                      <p:tavLst>
+                                        <p:tav tm="0">
+                                          <p:val>
+                                            <p:strVal val="1+#ppt_h/2"/>
+                                          </p:val>
+                                        </p:tav>
+                                        <p:tav tm="100000">
+                                          <p:val>
+                                            <p:strVal val="#ppt_y"/>
+                                          </p:val>
+                                        </p:tav>
+                                      </p:tavLst>
+                                    </p:anim>
+                                  </p:childTnLst>
+                                </p:cTn>
+                              </p:par>
+                              <p:par>
+                                <p:cTn id="57" presetID="2" presetClass="entr" presetSubtype="4" fill="hold" grpId="0" nodeType="afterEffect">
+                                  <p:stCondLst>
+                                    <p:cond delay="16120"/>
+                                  </p:stCondLst>
+                                  <p:childTnLst>
+                                    <p:set>
+                                      <p:cBhvr>
+                                        <p:cTn id="58" dur="1"/>
+                                        <p:tgtEl>
+                                          <p:spTgt spid="16"/>
+                                        </p:tgtEl>
+                                        <p:attrNameLst>
+                                          <p:attrName>style.visibility</p:attrName>
+                                        </p:attrNameLst>
+                                      </p:cBhvr>
+                                      <p:to>
+                                        <p:strVal val="visible"/>
+                                      </p:to>
+                                    </p:set>
+                                    <p:anim calcmode="lin" valueType="num">
+                                      <p:cBhvr additive="base">
+                                        <p:cTn id="59" dur="400"/>
+                                        <p:tgtEl>
+                                          <p:spTgt spid="16"/>
+                                        </p:tgtEl>
+                                        <p:attrNameLst>
+                                          <p:attrName>ppt_x</p:attrName>
+                                        </p:attrNameLst>
+                                      </p:cBhvr>
+                                      <p:tavLst>
+                                        <p:tav tm="0">
+                                          <p:val>
+                                            <p:strVal val="#ppt_x"/>
+                                          </p:val>
+                                        </p:tav>
+                                        <p:tav tm="100000">
+                                          <p:val>
+                                            <p:strVal val="#ppt_x"/>
+                                          </p:val>
+                                        </p:tav>
+                                      </p:tavLst>
+                                    </p:anim>
+                                    <p:anim calcmode="lin" valueType="num">
+                                      <p:cBhvr additive="base">
+                                        <p:cTn id="60" dur="400"/>
+                                        <p:tgtEl>
+                                          <p:spTgt spid="16"/>
+                                        </p:tgtEl>
+                                        <p:attrNameLst>
+                                          <p:attrName>ppt_y</p:attrName>
+                                        </p:attrNameLst>
+                                      </p:cBhvr>
+                                      <p:tavLst>
+                                        <p:tav tm="0">
+                                          <p:val>
+                                            <p:strVal val="1+#ppt_h/2"/>
+                                          </p:val>
+                                        </p:tav>
+                                        <p:tav tm="100000">
+                                          <p:val>
+                                            <p:strVal val="#ppt_y"/>
+                                          </p:val>
+                                        </p:tav>
+                                      </p:tavLst>
+                                    </p:anim>
+                                  </p:childTnLst>
+                                </p:cTn>
+                              </p:par>
+                              <p:par>
+                                <p:cTn id="61" presetID="2" presetClass="entr" presetSubtype="4" fill="hold" grpId="0" nodeType="afterEffect">
+                                  <p:stCondLst>
+                                    <p:cond delay="18200"/>
+                                  </p:stCondLst>
+                                  <p:childTnLst>
+                                    <p:set>
+                                      <p:cBhvr>
+                                        <p:cTn id="62" dur="1"/>
+                                        <p:tgtEl>
+                                          <p:spTgt spid="17"/>
+                                        </p:tgtEl>
+                                        <p:attrNameLst>
+                                          <p:attrName>style.visibility</p:attrName>
+                                        </p:attrNameLst>
+                                      </p:cBhvr>
+                                      <p:to>
+                                        <p:strVal val="visible"/>
+                                      </p:to>
+                                    </p:set>
+                                    <p:anim calcmode="lin" valueType="num">
+                                      <p:cBhvr additive="base">
+                                        <p:cTn id="63" dur="400"/>
+                                        <p:tgtEl>
+                                          <p:spTgt spid="17"/>
+                                        </p:tgtEl>
+                                        <p:attrNameLst>
+                                          <p:attrName>ppt_x</p:attrName>
+                                        </p:attrNameLst>
+                                      </p:cBhvr>
+                                      <p:tavLst>
+                                        <p:tav tm="0">
+                                          <p:val>
+                                            <p:strVal val="#ppt_x"/>
+                                          </p:val>
+                                        </p:tav>
+                                        <p:tav tm="100000">
+                                          <p:val>
+                                            <p:strVal val="#ppt_x"/>
+                                          </p:val>
+                                        </p:tav>
+                                      </p:tavLst>
+                                    </p:anim>
+                                    <p:anim calcmode="lin" valueType="num">
+                                      <p:cBhvr additive="base">
+                                        <p:cTn id="64" dur="400"/>
+                                        <p:tgtEl>
+                                          <p:spTgt spid="17"/>
+                                        </p:tgtEl>
+                                        <p:attrNameLst>
+                                          <p:attrName>ppt_y</p:attrName>
+                                        </p:attrNameLst>
+                                      </p:cBhvr>
+                                      <p:tavLst>
+                                        <p:tav tm="0">
+                                          <p:val>
+                                            <p:strVal val="1+#ppt_h/2"/>
+                                          </p:val>
+                                        </p:tav>
+                                        <p:tav tm="100000">
+                                          <p:val>
+                                            <p:strVal val="#ppt_y"/>
+                                          </p:val>
+                                        </p:tav>
+                                      </p:tavLst>
+                                    </p:anim>
+                                  </p:childTnLst>
+                                </p:cTn>
+                              </p:par>
+                              <p:par>
+                                <p:cTn id="65" presetID="2" presetClass="entr" presetSubtype="4" fill="hold" grpId="0" nodeType="afterEffect">
+                                  <p:stCondLst>
+                                    <p:cond delay="20400"/>
+                                  </p:stCondLst>
+                                  <p:childTnLst>
+                                    <p:set>
+                                      <p:cBhvr>
+                                        <p:cTn id="66" dur="1"/>
+                                        <p:tgtEl>
+                                          <p:spTgt spid="18"/>
+                                        </p:tgtEl>
+                                        <p:attrNameLst>
+                                          <p:attrName>style.visibility</p:attrName>
+                                        </p:attrNameLst>
+                                      </p:cBhvr>
+                                      <p:to>
+                                        <p:strVal val="visible"/>
+                                      </p:to>
+                                    </p:set>
+                                    <p:anim calcmode="lin" valueType="num">
+                                      <p:cBhvr additive="base">
+                                        <p:cTn id="67" dur="400"/>
+                                        <p:tgtEl>
+                                          <p:spTgt spid="18"/>
+                                        </p:tgtEl>
+                                        <p:attrNameLst>
+                                          <p:attrName>ppt_x</p:attrName>
+                                        </p:attrNameLst>
+                                      </p:cBhvr>
+                                      <p:tavLst>
+                                        <p:tav tm="0">
+                                          <p:val>
+                                            <p:strVal val="#ppt_x"/>
+                                          </p:val>
+                                        </p:tav>
+                                        <p:tav tm="100000">
+                                          <p:val>
+                                            <p:strVal val="#ppt_x"/>
+                                          </p:val>
+                                        </p:tav>
+                                      </p:tavLst>
+                                    </p:anim>
+                                    <p:anim calcmode="lin" valueType="num">
+                                      <p:cBhvr additive="base">
+                                        <p:cTn id="68" dur="400"/>
+                                        <p:tgtEl>
+                                          <p:spTgt spid="18"/>
+                                        </p:tgtEl>
+                                        <p:attrNameLst>
+                                          <p:attrName>ppt_y</p:attrName>
+                                        </p:attrNameLst>
+                                      </p:cBhvr>
+                                      <p:tavLst>
+                                        <p:tav tm="0">
+                                          <p:val>
+                                            <p:strVal val="1+#ppt_h/2"/>
+                                          </p:val>
+                                        </p:tav>
+                                        <p:tav tm="100000">
+                                          <p:val>
+                                            <p:strVal val="#ppt_y"/>
+                                          </p:val>
+                                        </p:tav>
+                                      </p:tavLst>
+                                    </p:anim>
+                                  </p:childTnLst>
+                                </p:cTn>
+                              </p:par>
+                            </p:childTnLst>
+                          </p:cTn>
+                        </p:par>
+                      </p:childTnLst>
+                    </p:cTn>
+                  </p:par>
+                </p:childTnLst>
+              </p:cTn>
+              <p:prevCondLst>
+                <p:cond evt="onPrev" delay="0">
+                  <p:tgtEl>
+                    <p:sldTgt/>
+                  </p:tgtEl>
+                </p:cond>
+              </p:prevCondLst>
+              <p:nextCondLst>
+                <p:cond evt="onNext" delay="0">
+                  <p:tgtEl>
+                    <p:sldTgt/>
+                  </p:tgtEl>
+                </p:cond>
+              </p:nextCondLst>
+            </p:seq>
+          </p:childTnLst>
+        </p:cTn>
+      </p:par>
+    </p:tnLst>
+    <p:bldLst>
+      <p:bldP spid="2" grpId="0"/>
+      <p:bldP spid="3" grpId="0"/>
+      <p:bldP spid="5" grpId="0"/>
+      <p:bldP spid="6" grpId="0"/>
+      <p:bldP spid="9" grpId="0"/>
+      <p:bldP spid="10" grpId="0"/>
+      <p:bldP spid="13" grpId="0"/>
+      <p:bldP spid="14" grpId="0"/>
+      <p:bldP spid="7" grpId="0"/>
+      <p:bldP spid="11" grpId="0"/>
+      <p:bldP spid="15" grpId="0"/>
+      <p:bldP spid="8" grpId="0"/>
+      <p:bldP spid="12" grpId="0"/>
+      <p:bldP spid="16" grpId="0"/>
+      <p:bldP spid="17" grpId="0"/>
+      <p:bldP spid="18" grpId="0"/>
+    </p:bldLst>
+  </p:timing>
 </p:sld>
 </file>
 

--- a/examples/pitch-lingxi/灵犀会议机-天使轮路演.pptx
+++ b/examples/pitch-lingxi/灵犀会议机-天使轮路演.pptx
@@ -2354,10 +2354,7 @@
                   <p:par>
                     <p:cTn id="3" fill="hold">
                       <p:stCondLst>
-                        <p:cond delay="indefinite"/>
-                        <p:cond evt="onBegin" delay="0">
-                          <p:tn val="2"/>
-                        </p:cond>
+                        <p:cond delay="0"/>
                       </p:stCondLst>
                       <p:childTnLst>
                         <p:par>
@@ -2367,14 +2364,18 @@
                             </p:stCondLst>
                             <p:childTnLst>
                               <p:par>
-                                <p:cTn id="5" presetID="10" presetClass="entr" presetSubtype="0" fill="hold" grpId="0" nodeType="afterEffect">
+                                <p:cTn presetID="10" presetClass="entr" presetSubtype="0" fill="hold" grpId="0" nodeType="afterEffect">
                                   <p:stCondLst>
                                     <p:cond delay="0"/>
                                   </p:stCondLst>
                                   <p:childTnLst>
                                     <p:set>
                                       <p:cBhvr>
-                                        <p:cTn id="6" dur="1"/>
+                                        <p:cTn id="5" dur="1" fill="hold">
+                                          <p:stCondLst>
+                                            <p:cond delay="0"/>
+                                          </p:stCondLst>
+                                        </p:cTn>
                                         <p:tgtEl>
                                           <p:spTgt spid="2"/>
                                         </p:tgtEl>
@@ -2388,7 +2389,7 @@
                                     </p:set>
                                     <p:animEffect transition="in" filter="fade">
                                       <p:cBhvr>
-                                        <p:cTn id="7" dur="500"/>
+                                        <p:cTn id="6" dur="500"/>
                                         <p:tgtEl>
                                           <p:spTgt spid="2"/>
                                         </p:tgtEl>
@@ -2397,15 +2398,28 @@
                                   </p:childTnLst>
                                 </p:cTn>
                               </p:par>
+                            </p:childTnLst>
+                          </p:cTn>
+                        </p:par>
+                        <p:par>
+                          <p:cTn id="7" fill="hold">
+                            <p:stCondLst>
+                              <p:cond delay="700"/>
+                            </p:stCondLst>
+                            <p:childTnLst>
                               <p:par>
-                                <p:cTn id="8" presetID="10" presetClass="entr" presetSubtype="0" fill="hold" grpId="0" nodeType="afterEffect">
+                                <p:cTn presetID="10" presetClass="entr" presetSubtype="0" fill="hold" grpId="0" nodeType="afterEffect">
                                   <p:stCondLst>
-                                    <p:cond delay="700"/>
+                                    <p:cond delay="0"/>
                                   </p:stCondLst>
                                   <p:childTnLst>
                                     <p:set>
                                       <p:cBhvr>
-                                        <p:cTn id="9" dur="1"/>
+                                        <p:cTn id="8" dur="1" fill="hold">
+                                          <p:stCondLst>
+                                            <p:cond delay="0"/>
+                                          </p:stCondLst>
+                                        </p:cTn>
                                         <p:tgtEl>
                                           <p:spTgt spid="4"/>
                                         </p:tgtEl>
@@ -2419,7 +2433,7 @@
                                     </p:set>
                                     <p:animEffect transition="in" filter="fade">
                                       <p:cBhvr>
-                                        <p:cTn id="10" dur="500"/>
+                                        <p:cTn id="9" dur="500"/>
                                         <p:tgtEl>
                                           <p:spTgt spid="4"/>
                                         </p:tgtEl>
@@ -2428,15 +2442,28 @@
                                   </p:childTnLst>
                                 </p:cTn>
                               </p:par>
+                            </p:childTnLst>
+                          </p:cTn>
+                        </p:par>
+                        <p:par>
+                          <p:cTn id="10" fill="hold">
+                            <p:stCondLst>
+                              <p:cond delay="1600"/>
+                            </p:stCondLst>
+                            <p:childTnLst>
                               <p:par>
-                                <p:cTn id="11" presetID="10" presetClass="entr" presetSubtype="0" fill="hold" grpId="0" nodeType="afterEffect">
+                                <p:cTn presetID="10" presetClass="entr" presetSubtype="0" fill="hold" grpId="0" nodeType="afterEffect">
                                   <p:stCondLst>
-                                    <p:cond delay="1600"/>
+                                    <p:cond delay="0"/>
                                   </p:stCondLst>
                                   <p:childTnLst>
                                     <p:set>
                                       <p:cBhvr>
-                                        <p:cTn id="12" dur="1"/>
+                                        <p:cTn id="11" dur="1" fill="hold">
+                                          <p:stCondLst>
+                                            <p:cond delay="0"/>
+                                          </p:stCondLst>
+                                        </p:cTn>
                                         <p:tgtEl>
                                           <p:spTgt spid="5"/>
                                         </p:tgtEl>
@@ -2450,7 +2477,7 @@
                                     </p:set>
                                     <p:animEffect transition="in" filter="fade">
                                       <p:cBhvr>
-                                        <p:cTn id="13" dur="500"/>
+                                        <p:cTn id="12" dur="500"/>
                                         <p:tgtEl>
                                           <p:spTgt spid="5"/>
                                         </p:tgtEl>
@@ -2459,15 +2486,28 @@
                                   </p:childTnLst>
                                 </p:cTn>
                               </p:par>
+                            </p:childTnLst>
+                          </p:cTn>
+                        </p:par>
+                        <p:par>
+                          <p:cTn id="13" fill="hold">
+                            <p:stCondLst>
+                              <p:cond delay="2700"/>
+                            </p:stCondLst>
+                            <p:childTnLst>
                               <p:par>
-                                <p:cTn id="14" presetID="10" presetClass="entr" presetSubtype="0" fill="hold" grpId="0" nodeType="afterEffect">
+                                <p:cTn presetID="10" presetClass="entr" presetSubtype="0" fill="hold" grpId="0" nodeType="afterEffect">
                                   <p:stCondLst>
-                                    <p:cond delay="2700"/>
+                                    <p:cond delay="0"/>
                                   </p:stCondLst>
                                   <p:childTnLst>
                                     <p:set>
                                       <p:cBhvr>
-                                        <p:cTn id="15" dur="1"/>
+                                        <p:cTn id="14" dur="1" fill="hold">
+                                          <p:stCondLst>
+                                            <p:cond delay="0"/>
+                                          </p:stCondLst>
+                                        </p:cTn>
                                         <p:tgtEl>
                                           <p:spTgt spid="6"/>
                                         </p:tgtEl>
@@ -2481,7 +2521,7 @@
                                     </p:set>
                                     <p:animEffect transition="in" filter="fade">
                                       <p:cBhvr>
-                                        <p:cTn id="16" dur="500"/>
+                                        <p:cTn id="15" dur="500"/>
                                         <p:tgtEl>
                                           <p:spTgt spid="6"/>
                                         </p:tgtEl>
@@ -2490,15 +2530,28 @@
                                   </p:childTnLst>
                                 </p:cTn>
                               </p:par>
+                            </p:childTnLst>
+                          </p:cTn>
+                        </p:par>
+                        <p:par>
+                          <p:cTn id="16" fill="hold">
+                            <p:stCondLst>
+                              <p:cond delay="4000"/>
+                            </p:stCondLst>
+                            <p:childTnLst>
                               <p:par>
-                                <p:cTn id="17" presetID="10" presetClass="entr" presetSubtype="0" fill="hold" grpId="0" nodeType="afterEffect">
+                                <p:cTn presetID="10" presetClass="entr" presetSubtype="0" fill="hold" grpId="0" nodeType="afterEffect">
                                   <p:stCondLst>
-                                    <p:cond delay="4000"/>
+                                    <p:cond delay="0"/>
                                   </p:stCondLst>
                                   <p:childTnLst>
                                     <p:set>
                                       <p:cBhvr>
-                                        <p:cTn id="18" dur="1"/>
+                                        <p:cTn id="17" dur="1" fill="hold">
+                                          <p:stCondLst>
+                                            <p:cond delay="0"/>
+                                          </p:stCondLst>
+                                        </p:cTn>
                                         <p:tgtEl>
                                           <p:spTgt spid="3"/>
                                         </p:tgtEl>
@@ -2512,7 +2565,7 @@
                                     </p:set>
                                     <p:animEffect transition="in" filter="fade">
                                       <p:cBhvr>
-                                        <p:cTn id="19" dur="500"/>
+                                        <p:cTn id="18" dur="500"/>
                                         <p:tgtEl>
                                           <p:spTgt spid="3"/>
                                         </p:tgtEl>
@@ -2521,15 +2574,28 @@
                                   </p:childTnLst>
                                 </p:cTn>
                               </p:par>
+                            </p:childTnLst>
+                          </p:cTn>
+                        </p:par>
+                        <p:par>
+                          <p:cTn id="19" fill="hold">
+                            <p:stCondLst>
+                              <p:cond delay="5500"/>
+                            </p:stCondLst>
+                            <p:childTnLst>
                               <p:par>
-                                <p:cTn id="20" presetID="10" presetClass="entr" presetSubtype="0" fill="hold" grpId="0" nodeType="afterEffect">
+                                <p:cTn presetID="10" presetClass="entr" presetSubtype="0" fill="hold" grpId="0" nodeType="afterEffect">
                                   <p:stCondLst>
-                                    <p:cond delay="5500"/>
+                                    <p:cond delay="0"/>
                                   </p:stCondLst>
                                   <p:childTnLst>
                                     <p:set>
                                       <p:cBhvr>
-                                        <p:cTn id="21" dur="1"/>
+                                        <p:cTn id="20" dur="1" fill="hold">
+                                          <p:stCondLst>
+                                            <p:cond delay="0"/>
+                                          </p:stCondLst>
+                                        </p:cTn>
                                         <p:tgtEl>
                                           <p:spTgt spid="7"/>
                                         </p:tgtEl>
@@ -2543,7 +2609,7 @@
                                     </p:set>
                                     <p:animEffect transition="in" filter="fade">
                                       <p:cBhvr>
-                                        <p:cTn id="22" dur="500"/>
+                                        <p:cTn id="21" dur="500"/>
                                         <p:tgtEl>
                                           <p:spTgt spid="7"/>
                                         </p:tgtEl>
@@ -3361,10 +3427,7 @@
                   <p:par>
                     <p:cTn id="3" fill="hold">
                       <p:stCondLst>
-                        <p:cond delay="indefinite"/>
-                        <p:cond evt="onBegin" delay="0">
-                          <p:tn val="2"/>
-                        </p:cond>
+                        <p:cond delay="0"/>
                       </p:stCondLst>
                       <p:childTnLst>
                         <p:par>
@@ -3374,14 +3437,18 @@
                             </p:stCondLst>
                             <p:childTnLst>
                               <p:par>
-                                <p:cTn id="5" presetID="2" presetClass="entr" presetSubtype="8" fill="hold" grpId="0" nodeType="afterEffect">
+                                <p:cTn presetID="2" presetClass="entr" presetSubtype="8" fill="hold" grpId="0" nodeType="afterEffect">
                                   <p:stCondLst>
                                     <p:cond delay="0"/>
                                   </p:stCondLst>
                                   <p:childTnLst>
                                     <p:set>
                                       <p:cBhvr>
-                                        <p:cTn id="6" dur="1"/>
+                                        <p:cTn id="5" dur="1" fill="hold">
+                                          <p:stCondLst>
+                                            <p:cond delay="0"/>
+                                          </p:stCondLst>
+                                        </p:cTn>
                                         <p:tgtEl>
                                           <p:spTgt spid="2"/>
                                         </p:tgtEl>
@@ -3395,7 +3462,7 @@
                                     </p:set>
                                     <p:anim calcmode="lin" valueType="num">
                                       <p:cBhvr additive="base">
-                                        <p:cTn id="7" dur="400"/>
+                                        <p:cTn id="6" dur="400"/>
                                         <p:tgtEl>
                                           <p:spTgt spid="2"/>
                                         </p:tgtEl>
@@ -3418,7 +3485,7 @@
                                     </p:anim>
                                     <p:anim calcmode="lin" valueType="num">
                                       <p:cBhvr additive="base">
-                                        <p:cTn id="8" dur="400"/>
+                                        <p:cTn id="7" dur="400"/>
                                         <p:tgtEl>
                                           <p:spTgt spid="2"/>
                                         </p:tgtEl>
@@ -3442,15 +3509,28 @@
                                   </p:childTnLst>
                                 </p:cTn>
                               </p:par>
+                            </p:childTnLst>
+                          </p:cTn>
+                        </p:par>
+                        <p:par>
+                          <p:cTn id="8" fill="hold">
+                            <p:stCondLst>
+                              <p:cond delay="520"/>
+                            </p:stCondLst>
+                            <p:childTnLst>
                               <p:par>
-                                <p:cTn id="9" presetID="2" presetClass="entr" presetSubtype="8" fill="hold" grpId="0" nodeType="afterEffect">
+                                <p:cTn presetID="2" presetClass="entr" presetSubtype="8" fill="hold" grpId="0" nodeType="afterEffect">
                                   <p:stCondLst>
-                                    <p:cond delay="520"/>
+                                    <p:cond delay="0"/>
                                   </p:stCondLst>
                                   <p:childTnLst>
                                     <p:set>
                                       <p:cBhvr>
-                                        <p:cTn id="10" dur="1"/>
+                                        <p:cTn id="9" dur="1" fill="hold">
+                                          <p:stCondLst>
+                                            <p:cond delay="0"/>
+                                          </p:stCondLst>
+                                        </p:cTn>
                                         <p:tgtEl>
                                           <p:spTgt spid="3"/>
                                         </p:tgtEl>
@@ -3464,7 +3544,7 @@
                                     </p:set>
                                     <p:anim calcmode="lin" valueType="num">
                                       <p:cBhvr additive="base">
-                                        <p:cTn id="11" dur="400"/>
+                                        <p:cTn id="10" dur="400"/>
                                         <p:tgtEl>
                                           <p:spTgt spid="3"/>
                                         </p:tgtEl>
@@ -3487,7 +3567,7 @@
                                     </p:anim>
                                     <p:anim calcmode="lin" valueType="num">
                                       <p:cBhvr additive="base">
-                                        <p:cTn id="12" dur="400"/>
+                                        <p:cTn id="11" dur="400"/>
                                         <p:tgtEl>
                                           <p:spTgt spid="3"/>
                                         </p:tgtEl>
@@ -3511,15 +3591,28 @@
                                   </p:childTnLst>
                                 </p:cTn>
                               </p:par>
+                            </p:childTnLst>
+                          </p:cTn>
+                        </p:par>
+                        <p:par>
+                          <p:cTn id="12" fill="hold">
+                            <p:stCondLst>
+                              <p:cond delay="1160"/>
+                            </p:stCondLst>
+                            <p:childTnLst>
                               <p:par>
-                                <p:cTn id="13" presetID="2" presetClass="entr" presetSubtype="8" fill="hold" grpId="0" nodeType="afterEffect">
+                                <p:cTn presetID="2" presetClass="entr" presetSubtype="8" fill="hold" grpId="0" nodeType="afterEffect">
                                   <p:stCondLst>
-                                    <p:cond delay="1160"/>
+                                    <p:cond delay="0"/>
                                   </p:stCondLst>
                                   <p:childTnLst>
                                     <p:set>
                                       <p:cBhvr>
-                                        <p:cTn id="14" dur="1"/>
+                                        <p:cTn id="13" dur="1" fill="hold">
+                                          <p:stCondLst>
+                                            <p:cond delay="0"/>
+                                          </p:stCondLst>
+                                        </p:cTn>
                                         <p:tgtEl>
                                           <p:spTgt spid="7"/>
                                         </p:tgtEl>
@@ -3533,7 +3626,7 @@
                                     </p:set>
                                     <p:anim calcmode="lin" valueType="num">
                                       <p:cBhvr additive="base">
-                                        <p:cTn id="15" dur="400"/>
+                                        <p:cTn id="14" dur="400"/>
                                         <p:tgtEl>
                                           <p:spTgt spid="7"/>
                                         </p:tgtEl>
@@ -3556,7 +3649,7 @@
                                     </p:anim>
                                     <p:anim calcmode="lin" valueType="num">
                                       <p:cBhvr additive="base">
-                                        <p:cTn id="16" dur="400"/>
+                                        <p:cTn id="15" dur="400"/>
                                         <p:tgtEl>
                                           <p:spTgt spid="7"/>
                                         </p:tgtEl>
@@ -3580,15 +3673,28 @@
                                   </p:childTnLst>
                                 </p:cTn>
                               </p:par>
+                            </p:childTnLst>
+                          </p:cTn>
+                        </p:par>
+                        <p:par>
+                          <p:cTn id="16" fill="hold">
+                            <p:stCondLst>
+                              <p:cond delay="1920"/>
+                            </p:stCondLst>
+                            <p:childTnLst>
                               <p:par>
-                                <p:cTn id="17" presetID="2" presetClass="entr" presetSubtype="8" fill="hold" grpId="0" nodeType="afterEffect">
+                                <p:cTn presetID="2" presetClass="entr" presetSubtype="8" fill="hold" grpId="0" nodeType="afterEffect">
                                   <p:stCondLst>
-                                    <p:cond delay="1920"/>
+                                    <p:cond delay="0"/>
                                   </p:stCondLst>
                                   <p:childTnLst>
                                     <p:set>
                                       <p:cBhvr>
-                                        <p:cTn id="18" dur="1"/>
+                                        <p:cTn id="17" dur="1" fill="hold">
+                                          <p:stCondLst>
+                                            <p:cond delay="0"/>
+                                          </p:stCondLst>
+                                        </p:cTn>
                                         <p:tgtEl>
                                           <p:spTgt spid="11"/>
                                         </p:tgtEl>
@@ -3602,7 +3708,7 @@
                                     </p:set>
                                     <p:anim calcmode="lin" valueType="num">
                                       <p:cBhvr additive="base">
-                                        <p:cTn id="19" dur="400"/>
+                                        <p:cTn id="18" dur="400"/>
                                         <p:tgtEl>
                                           <p:spTgt spid="11"/>
                                         </p:tgtEl>
@@ -3625,7 +3731,7 @@
                                     </p:anim>
                                     <p:anim calcmode="lin" valueType="num">
                                       <p:cBhvr additive="base">
-                                        <p:cTn id="20" dur="400"/>
+                                        <p:cTn id="19" dur="400"/>
                                         <p:tgtEl>
                                           <p:spTgt spid="11"/>
                                         </p:tgtEl>
@@ -3649,15 +3755,28 @@
                                   </p:childTnLst>
                                 </p:cTn>
                               </p:par>
+                            </p:childTnLst>
+                          </p:cTn>
+                        </p:par>
+                        <p:par>
+                          <p:cTn id="20" fill="hold">
+                            <p:stCondLst>
+                              <p:cond delay="2800"/>
+                            </p:stCondLst>
+                            <p:childTnLst>
                               <p:par>
-                                <p:cTn id="21" presetID="2" presetClass="entr" presetSubtype="8" fill="hold" grpId="0" nodeType="afterEffect">
+                                <p:cTn presetID="2" presetClass="entr" presetSubtype="8" fill="hold" grpId="0" nodeType="afterEffect">
                                   <p:stCondLst>
-                                    <p:cond delay="2800"/>
+                                    <p:cond delay="0"/>
                                   </p:stCondLst>
                                   <p:childTnLst>
                                     <p:set>
                                       <p:cBhvr>
-                                        <p:cTn id="22" dur="1"/>
+                                        <p:cTn id="21" dur="1" fill="hold">
+                                          <p:stCondLst>
+                                            <p:cond delay="0"/>
+                                          </p:stCondLst>
+                                        </p:cTn>
                                         <p:tgtEl>
                                           <p:spTgt spid="15"/>
                                         </p:tgtEl>
@@ -3671,7 +3790,7 @@
                                     </p:set>
                                     <p:anim calcmode="lin" valueType="num">
                                       <p:cBhvr additive="base">
-                                        <p:cTn id="23" dur="400"/>
+                                        <p:cTn id="22" dur="400"/>
                                         <p:tgtEl>
                                           <p:spTgt spid="15"/>
                                         </p:tgtEl>
@@ -3694,7 +3813,7 @@
                                     </p:anim>
                                     <p:anim calcmode="lin" valueType="num">
                                       <p:cBhvr additive="base">
-                                        <p:cTn id="24" dur="400"/>
+                                        <p:cTn id="23" dur="400"/>
                                         <p:tgtEl>
                                           <p:spTgt spid="15"/>
                                         </p:tgtEl>
@@ -3718,15 +3837,28 @@
                                   </p:childTnLst>
                                 </p:cTn>
                               </p:par>
+                            </p:childTnLst>
+                          </p:cTn>
+                        </p:par>
+                        <p:par>
+                          <p:cTn id="24" fill="hold">
+                            <p:stCondLst>
+                              <p:cond delay="3800"/>
+                            </p:stCondLst>
+                            <p:childTnLst>
                               <p:par>
-                                <p:cTn id="25" presetID="2" presetClass="entr" presetSubtype="8" fill="hold" grpId="0" nodeType="afterEffect">
+                                <p:cTn presetID="2" presetClass="entr" presetSubtype="8" fill="hold" grpId="0" nodeType="afterEffect">
                                   <p:stCondLst>
-                                    <p:cond delay="3800"/>
+                                    <p:cond delay="0"/>
                                   </p:stCondLst>
                                   <p:childTnLst>
                                     <p:set>
                                       <p:cBhvr>
-                                        <p:cTn id="26" dur="1"/>
+                                        <p:cTn id="25" dur="1" fill="hold">
+                                          <p:stCondLst>
+                                            <p:cond delay="0"/>
+                                          </p:stCondLst>
+                                        </p:cTn>
                                         <p:tgtEl>
                                           <p:spTgt spid="19"/>
                                         </p:tgtEl>
@@ -3740,7 +3872,7 @@
                                     </p:set>
                                     <p:anim calcmode="lin" valueType="num">
                                       <p:cBhvr additive="base">
-                                        <p:cTn id="27" dur="400"/>
+                                        <p:cTn id="26" dur="400"/>
                                         <p:tgtEl>
                                           <p:spTgt spid="19"/>
                                         </p:tgtEl>
@@ -3763,7 +3895,7 @@
                                     </p:anim>
                                     <p:anim calcmode="lin" valueType="num">
                                       <p:cBhvr additive="base">
-                                        <p:cTn id="28" dur="400"/>
+                                        <p:cTn id="27" dur="400"/>
                                         <p:tgtEl>
                                           <p:spTgt spid="19"/>
                                         </p:tgtEl>
@@ -3787,15 +3919,28 @@
                                   </p:childTnLst>
                                 </p:cTn>
                               </p:par>
+                            </p:childTnLst>
+                          </p:cTn>
+                        </p:par>
+                        <p:par>
+                          <p:cTn id="28" fill="hold">
+                            <p:stCondLst>
+                              <p:cond delay="4920"/>
+                            </p:stCondLst>
+                            <p:childTnLst>
                               <p:par>
-                                <p:cTn id="29" presetID="2" presetClass="entr" presetSubtype="8" fill="hold" grpId="0" nodeType="afterEffect">
+                                <p:cTn presetID="2" presetClass="entr" presetSubtype="8" fill="hold" grpId="0" nodeType="afterEffect">
                                   <p:stCondLst>
-                                    <p:cond delay="4920"/>
+                                    <p:cond delay="0"/>
                                   </p:stCondLst>
                                   <p:childTnLst>
                                     <p:set>
                                       <p:cBhvr>
-                                        <p:cTn id="30" dur="1"/>
+                                        <p:cTn id="29" dur="1" fill="hold">
+                                          <p:stCondLst>
+                                            <p:cond delay="0"/>
+                                          </p:stCondLst>
+                                        </p:cTn>
                                         <p:tgtEl>
                                           <p:spTgt spid="6"/>
                                         </p:tgtEl>
@@ -3809,7 +3954,7 @@
                                     </p:set>
                                     <p:anim calcmode="lin" valueType="num">
                                       <p:cBhvr additive="base">
-                                        <p:cTn id="31" dur="400"/>
+                                        <p:cTn id="30" dur="400"/>
                                         <p:tgtEl>
                                           <p:spTgt spid="6"/>
                                         </p:tgtEl>
@@ -3832,7 +3977,7 @@
                                     </p:anim>
                                     <p:anim calcmode="lin" valueType="num">
                                       <p:cBhvr additive="base">
-                                        <p:cTn id="32" dur="400"/>
+                                        <p:cTn id="31" dur="400"/>
                                         <p:tgtEl>
                                           <p:spTgt spid="6"/>
                                         </p:tgtEl>
@@ -3856,15 +4001,28 @@
                                   </p:childTnLst>
                                 </p:cTn>
                               </p:par>
+                            </p:childTnLst>
+                          </p:cTn>
+                        </p:par>
+                        <p:par>
+                          <p:cTn id="32" fill="hold">
+                            <p:stCondLst>
+                              <p:cond delay="6160"/>
+                            </p:stCondLst>
+                            <p:childTnLst>
                               <p:par>
-                                <p:cTn id="33" presetID="2" presetClass="entr" presetSubtype="8" fill="hold" grpId="0" nodeType="afterEffect">
+                                <p:cTn presetID="2" presetClass="entr" presetSubtype="8" fill="hold" grpId="0" nodeType="afterEffect">
                                   <p:stCondLst>
-                                    <p:cond delay="6160"/>
+                                    <p:cond delay="0"/>
                                   </p:stCondLst>
                                   <p:childTnLst>
                                     <p:set>
                                       <p:cBhvr>
-                                        <p:cTn id="34" dur="1"/>
+                                        <p:cTn id="33" dur="1" fill="hold">
+                                          <p:stCondLst>
+                                            <p:cond delay="0"/>
+                                          </p:stCondLst>
+                                        </p:cTn>
                                         <p:tgtEl>
                                           <p:spTgt spid="10"/>
                                         </p:tgtEl>
@@ -3878,7 +4036,7 @@
                                     </p:set>
                                     <p:anim calcmode="lin" valueType="num">
                                       <p:cBhvr additive="base">
-                                        <p:cTn id="35" dur="400"/>
+                                        <p:cTn id="34" dur="400"/>
                                         <p:tgtEl>
                                           <p:spTgt spid="10"/>
                                         </p:tgtEl>
@@ -3901,7 +4059,7 @@
                                     </p:anim>
                                     <p:anim calcmode="lin" valueType="num">
                                       <p:cBhvr additive="base">
-                                        <p:cTn id="36" dur="400"/>
+                                        <p:cTn id="35" dur="400"/>
                                         <p:tgtEl>
                                           <p:spTgt spid="10"/>
                                         </p:tgtEl>
@@ -3925,15 +4083,28 @@
                                   </p:childTnLst>
                                 </p:cTn>
                               </p:par>
+                            </p:childTnLst>
+                          </p:cTn>
+                        </p:par>
+                        <p:par>
+                          <p:cTn id="36" fill="hold">
+                            <p:stCondLst>
+                              <p:cond delay="7520"/>
+                            </p:stCondLst>
+                            <p:childTnLst>
                               <p:par>
-                                <p:cTn id="37" presetID="2" presetClass="entr" presetSubtype="8" fill="hold" grpId="0" nodeType="afterEffect">
+                                <p:cTn presetID="2" presetClass="entr" presetSubtype="8" fill="hold" grpId="0" nodeType="afterEffect">
                                   <p:stCondLst>
-                                    <p:cond delay="7520"/>
+                                    <p:cond delay="0"/>
                                   </p:stCondLst>
                                   <p:childTnLst>
                                     <p:set>
                                       <p:cBhvr>
-                                        <p:cTn id="38" dur="1"/>
+                                        <p:cTn id="37" dur="1" fill="hold">
+                                          <p:stCondLst>
+                                            <p:cond delay="0"/>
+                                          </p:stCondLst>
+                                        </p:cTn>
                                         <p:tgtEl>
                                           <p:spTgt spid="14"/>
                                         </p:tgtEl>
@@ -3947,7 +4118,7 @@
                                     </p:set>
                                     <p:anim calcmode="lin" valueType="num">
                                       <p:cBhvr additive="base">
-                                        <p:cTn id="39" dur="400"/>
+                                        <p:cTn id="38" dur="400"/>
                                         <p:tgtEl>
                                           <p:spTgt spid="14"/>
                                         </p:tgtEl>
@@ -3970,7 +4141,7 @@
                                     </p:anim>
                                     <p:anim calcmode="lin" valueType="num">
                                       <p:cBhvr additive="base">
-                                        <p:cTn id="40" dur="400"/>
+                                        <p:cTn id="39" dur="400"/>
                                         <p:tgtEl>
                                           <p:spTgt spid="14"/>
                                         </p:tgtEl>
@@ -3994,15 +4165,28 @@
                                   </p:childTnLst>
                                 </p:cTn>
                               </p:par>
+                            </p:childTnLst>
+                          </p:cTn>
+                        </p:par>
+                        <p:par>
+                          <p:cTn id="40" fill="hold">
+                            <p:stCondLst>
+                              <p:cond delay="9000"/>
+                            </p:stCondLst>
+                            <p:childTnLst>
                               <p:par>
-                                <p:cTn id="41" presetID="2" presetClass="entr" presetSubtype="8" fill="hold" grpId="0" nodeType="afterEffect">
+                                <p:cTn presetID="2" presetClass="entr" presetSubtype="8" fill="hold" grpId="0" nodeType="afterEffect">
                                   <p:stCondLst>
-                                    <p:cond delay="9000"/>
+                                    <p:cond delay="0"/>
                                   </p:stCondLst>
                                   <p:childTnLst>
                                     <p:set>
                                       <p:cBhvr>
-                                        <p:cTn id="42" dur="1"/>
+                                        <p:cTn id="41" dur="1" fill="hold">
+                                          <p:stCondLst>
+                                            <p:cond delay="0"/>
+                                          </p:stCondLst>
+                                        </p:cTn>
                                         <p:tgtEl>
                                           <p:spTgt spid="18"/>
                                         </p:tgtEl>
@@ -4016,7 +4200,7 @@
                                     </p:set>
                                     <p:anim calcmode="lin" valueType="num">
                                       <p:cBhvr additive="base">
-                                        <p:cTn id="43" dur="400"/>
+                                        <p:cTn id="42" dur="400"/>
                                         <p:tgtEl>
                                           <p:spTgt spid="18"/>
                                         </p:tgtEl>
@@ -4039,7 +4223,7 @@
                                     </p:anim>
                                     <p:anim calcmode="lin" valueType="num">
                                       <p:cBhvr additive="base">
-                                        <p:cTn id="44" dur="400"/>
+                                        <p:cTn id="43" dur="400"/>
                                         <p:tgtEl>
                                           <p:spTgt spid="18"/>
                                         </p:tgtEl>
@@ -4063,15 +4247,28 @@
                                   </p:childTnLst>
                                 </p:cTn>
                               </p:par>
+                            </p:childTnLst>
+                          </p:cTn>
+                        </p:par>
+                        <p:par>
+                          <p:cTn id="44" fill="hold">
+                            <p:stCondLst>
+                              <p:cond delay="10600"/>
+                            </p:stCondLst>
+                            <p:childTnLst>
                               <p:par>
-                                <p:cTn id="45" presetID="2" presetClass="entr" presetSubtype="8" fill="hold" grpId="0" nodeType="afterEffect">
+                                <p:cTn presetID="2" presetClass="entr" presetSubtype="8" fill="hold" grpId="0" nodeType="afterEffect">
                                   <p:stCondLst>
-                                    <p:cond delay="10600"/>
+                                    <p:cond delay="0"/>
                                   </p:stCondLst>
                                   <p:childTnLst>
                                     <p:set>
                                       <p:cBhvr>
-                                        <p:cTn id="46" dur="1"/>
+                                        <p:cTn id="45" dur="1" fill="hold">
+                                          <p:stCondLst>
+                                            <p:cond delay="0"/>
+                                          </p:stCondLst>
+                                        </p:cTn>
                                         <p:tgtEl>
                                           <p:spTgt spid="5"/>
                                         </p:tgtEl>
@@ -4085,7 +4282,7 @@
                                     </p:set>
                                     <p:anim calcmode="lin" valueType="num">
                                       <p:cBhvr additive="base">
-                                        <p:cTn id="47" dur="400"/>
+                                        <p:cTn id="46" dur="400"/>
                                         <p:tgtEl>
                                           <p:spTgt spid="5"/>
                                         </p:tgtEl>
@@ -4108,7 +4305,7 @@
                                     </p:anim>
                                     <p:anim calcmode="lin" valueType="num">
                                       <p:cBhvr additive="base">
-                                        <p:cTn id="48" dur="400"/>
+                                        <p:cTn id="47" dur="400"/>
                                         <p:tgtEl>
                                           <p:spTgt spid="5"/>
                                         </p:tgtEl>
@@ -4132,15 +4329,28 @@
                                   </p:childTnLst>
                                 </p:cTn>
                               </p:par>
+                            </p:childTnLst>
+                          </p:cTn>
+                        </p:par>
+                        <p:par>
+                          <p:cTn id="48" fill="hold">
+                            <p:stCondLst>
+                              <p:cond delay="12320"/>
+                            </p:stCondLst>
+                            <p:childTnLst>
                               <p:par>
-                                <p:cTn id="49" presetID="2" presetClass="entr" presetSubtype="8" fill="hold" grpId="0" nodeType="afterEffect">
+                                <p:cTn presetID="2" presetClass="entr" presetSubtype="8" fill="hold" grpId="0" nodeType="afterEffect">
                                   <p:stCondLst>
-                                    <p:cond delay="12320"/>
+                                    <p:cond delay="0"/>
                                   </p:stCondLst>
                                   <p:childTnLst>
                                     <p:set>
                                       <p:cBhvr>
-                                        <p:cTn id="50" dur="1"/>
+                                        <p:cTn id="49" dur="1" fill="hold">
+                                          <p:stCondLst>
+                                            <p:cond delay="0"/>
+                                          </p:stCondLst>
+                                        </p:cTn>
                                         <p:tgtEl>
                                           <p:spTgt spid="8"/>
                                         </p:tgtEl>
@@ -4154,7 +4364,7 @@
                                     </p:set>
                                     <p:anim calcmode="lin" valueType="num">
                                       <p:cBhvr additive="base">
-                                        <p:cTn id="51" dur="400"/>
+                                        <p:cTn id="50" dur="400"/>
                                         <p:tgtEl>
                                           <p:spTgt spid="8"/>
                                         </p:tgtEl>
@@ -4177,7 +4387,7 @@
                                     </p:anim>
                                     <p:anim calcmode="lin" valueType="num">
                                       <p:cBhvr additive="base">
-                                        <p:cTn id="52" dur="400"/>
+                                        <p:cTn id="51" dur="400"/>
                                         <p:tgtEl>
                                           <p:spTgt spid="8"/>
                                         </p:tgtEl>
@@ -4201,15 +4411,28 @@
                                   </p:childTnLst>
                                 </p:cTn>
                               </p:par>
+                            </p:childTnLst>
+                          </p:cTn>
+                        </p:par>
+                        <p:par>
+                          <p:cTn id="52" fill="hold">
+                            <p:stCondLst>
+                              <p:cond delay="14160"/>
+                            </p:stCondLst>
+                            <p:childTnLst>
                               <p:par>
-                                <p:cTn id="53" presetID="2" presetClass="entr" presetSubtype="8" fill="hold" grpId="0" nodeType="afterEffect">
+                                <p:cTn presetID="2" presetClass="entr" presetSubtype="8" fill="hold" grpId="0" nodeType="afterEffect">
                                   <p:stCondLst>
-                                    <p:cond delay="14160"/>
+                                    <p:cond delay="0"/>
                                   </p:stCondLst>
                                   <p:childTnLst>
                                     <p:set>
                                       <p:cBhvr>
-                                        <p:cTn id="54" dur="1"/>
+                                        <p:cTn id="53" dur="1" fill="hold">
+                                          <p:stCondLst>
+                                            <p:cond delay="0"/>
+                                          </p:stCondLst>
+                                        </p:cTn>
                                         <p:tgtEl>
                                           <p:spTgt spid="12"/>
                                         </p:tgtEl>
@@ -4223,7 +4446,7 @@
                                     </p:set>
                                     <p:anim calcmode="lin" valueType="num">
                                       <p:cBhvr additive="base">
-                                        <p:cTn id="55" dur="400"/>
+                                        <p:cTn id="54" dur="400"/>
                                         <p:tgtEl>
                                           <p:spTgt spid="12"/>
                                         </p:tgtEl>
@@ -4246,7 +4469,7 @@
                                     </p:anim>
                                     <p:anim calcmode="lin" valueType="num">
                                       <p:cBhvr additive="base">
-                                        <p:cTn id="56" dur="400"/>
+                                        <p:cTn id="55" dur="400"/>
                                         <p:tgtEl>
                                           <p:spTgt spid="12"/>
                                         </p:tgtEl>
@@ -4270,15 +4493,28 @@
                                   </p:childTnLst>
                                 </p:cTn>
                               </p:par>
+                            </p:childTnLst>
+                          </p:cTn>
+                        </p:par>
+                        <p:par>
+                          <p:cTn id="56" fill="hold">
+                            <p:stCondLst>
+                              <p:cond delay="16120"/>
+                            </p:stCondLst>
+                            <p:childTnLst>
                               <p:par>
-                                <p:cTn id="57" presetID="2" presetClass="entr" presetSubtype="8" fill="hold" grpId="0" nodeType="afterEffect">
+                                <p:cTn presetID="2" presetClass="entr" presetSubtype="8" fill="hold" grpId="0" nodeType="afterEffect">
                                   <p:stCondLst>
-                                    <p:cond delay="16120"/>
+                                    <p:cond delay="0"/>
                                   </p:stCondLst>
                                   <p:childTnLst>
                                     <p:set>
                                       <p:cBhvr>
-                                        <p:cTn id="58" dur="1"/>
+                                        <p:cTn id="57" dur="1" fill="hold">
+                                          <p:stCondLst>
+                                            <p:cond delay="0"/>
+                                          </p:stCondLst>
+                                        </p:cTn>
                                         <p:tgtEl>
                                           <p:spTgt spid="16"/>
                                         </p:tgtEl>
@@ -4292,7 +4528,7 @@
                                     </p:set>
                                     <p:anim calcmode="lin" valueType="num">
                                       <p:cBhvr additive="base">
-                                        <p:cTn id="59" dur="400"/>
+                                        <p:cTn id="58" dur="400"/>
                                         <p:tgtEl>
                                           <p:spTgt spid="16"/>
                                         </p:tgtEl>
@@ -4315,7 +4551,7 @@
                                     </p:anim>
                                     <p:anim calcmode="lin" valueType="num">
                                       <p:cBhvr additive="base">
-                                        <p:cTn id="60" dur="400"/>
+                                        <p:cTn id="59" dur="400"/>
                                         <p:tgtEl>
                                           <p:spTgt spid="16"/>
                                         </p:tgtEl>
@@ -4339,15 +4575,28 @@
                                   </p:childTnLst>
                                 </p:cTn>
                               </p:par>
+                            </p:childTnLst>
+                          </p:cTn>
+                        </p:par>
+                        <p:par>
+                          <p:cTn id="60" fill="hold">
+                            <p:stCondLst>
+                              <p:cond delay="18200"/>
+                            </p:stCondLst>
+                            <p:childTnLst>
                               <p:par>
-                                <p:cTn id="61" presetID="2" presetClass="entr" presetSubtype="8" fill="hold" grpId="0" nodeType="afterEffect">
+                                <p:cTn presetID="2" presetClass="entr" presetSubtype="8" fill="hold" grpId="0" nodeType="afterEffect">
                                   <p:stCondLst>
-                                    <p:cond delay="18200"/>
+                                    <p:cond delay="0"/>
                                   </p:stCondLst>
                                   <p:childTnLst>
                                     <p:set>
                                       <p:cBhvr>
-                                        <p:cTn id="62" dur="1"/>
+                                        <p:cTn id="61" dur="1" fill="hold">
+                                          <p:stCondLst>
+                                            <p:cond delay="0"/>
+                                          </p:stCondLst>
+                                        </p:cTn>
                                         <p:tgtEl>
                                           <p:spTgt spid="20"/>
                                         </p:tgtEl>
@@ -4361,7 +4610,7 @@
                                     </p:set>
                                     <p:anim calcmode="lin" valueType="num">
                                       <p:cBhvr additive="base">
-                                        <p:cTn id="63" dur="400"/>
+                                        <p:cTn id="62" dur="400"/>
                                         <p:tgtEl>
                                           <p:spTgt spid="20"/>
                                         </p:tgtEl>
@@ -4384,7 +4633,7 @@
                                     </p:anim>
                                     <p:anim calcmode="lin" valueType="num">
                                       <p:cBhvr additive="base">
-                                        <p:cTn id="64" dur="400"/>
+                                        <p:cTn id="63" dur="400"/>
                                         <p:tgtEl>
                                           <p:spTgt spid="20"/>
                                         </p:tgtEl>
@@ -4408,15 +4657,28 @@
                                   </p:childTnLst>
                                 </p:cTn>
                               </p:par>
+                            </p:childTnLst>
+                          </p:cTn>
+                        </p:par>
+                        <p:par>
+                          <p:cTn id="64" fill="hold">
+                            <p:stCondLst>
+                              <p:cond delay="20400"/>
+                            </p:stCondLst>
+                            <p:childTnLst>
                               <p:par>
-                                <p:cTn id="65" presetID="2" presetClass="entr" presetSubtype="8" fill="hold" grpId="0" nodeType="afterEffect">
+                                <p:cTn presetID="2" presetClass="entr" presetSubtype="8" fill="hold" grpId="0" nodeType="afterEffect">
                                   <p:stCondLst>
-                                    <p:cond delay="20400"/>
+                                    <p:cond delay="0"/>
                                   </p:stCondLst>
                                   <p:childTnLst>
                                     <p:set>
                                       <p:cBhvr>
-                                        <p:cTn id="66" dur="1"/>
+                                        <p:cTn id="65" dur="1" fill="hold">
+                                          <p:stCondLst>
+                                            <p:cond delay="0"/>
+                                          </p:stCondLst>
+                                        </p:cTn>
                                         <p:tgtEl>
                                           <p:spTgt spid="9"/>
                                         </p:tgtEl>
@@ -4430,7 +4692,7 @@
                                     </p:set>
                                     <p:anim calcmode="lin" valueType="num">
                                       <p:cBhvr additive="base">
-                                        <p:cTn id="67" dur="400"/>
+                                        <p:cTn id="66" dur="400"/>
                                         <p:tgtEl>
                                           <p:spTgt spid="9"/>
                                         </p:tgtEl>
@@ -4453,7 +4715,7 @@
                                     </p:anim>
                                     <p:anim calcmode="lin" valueType="num">
                                       <p:cBhvr additive="base">
-                                        <p:cTn id="68" dur="400"/>
+                                        <p:cTn id="67" dur="400"/>
                                         <p:tgtEl>
                                           <p:spTgt spid="9"/>
                                         </p:tgtEl>
@@ -4477,15 +4739,28 @@
                                   </p:childTnLst>
                                 </p:cTn>
                               </p:par>
+                            </p:childTnLst>
+                          </p:cTn>
+                        </p:par>
+                        <p:par>
+                          <p:cTn id="68" fill="hold">
+                            <p:stCondLst>
+                              <p:cond delay="22720"/>
+                            </p:stCondLst>
+                            <p:childTnLst>
                               <p:par>
-                                <p:cTn id="69" presetID="2" presetClass="entr" presetSubtype="8" fill="hold" grpId="0" nodeType="afterEffect">
+                                <p:cTn presetID="2" presetClass="entr" presetSubtype="8" fill="hold" grpId="0" nodeType="afterEffect">
                                   <p:stCondLst>
-                                    <p:cond delay="22720"/>
+                                    <p:cond delay="0"/>
                                   </p:stCondLst>
                                   <p:childTnLst>
                                     <p:set>
                                       <p:cBhvr>
-                                        <p:cTn id="70" dur="1"/>
+                                        <p:cTn id="69" dur="1" fill="hold">
+                                          <p:stCondLst>
+                                            <p:cond delay="0"/>
+                                          </p:stCondLst>
+                                        </p:cTn>
                                         <p:tgtEl>
                                           <p:spTgt spid="13"/>
                                         </p:tgtEl>
@@ -4499,7 +4774,7 @@
                                     </p:set>
                                     <p:anim calcmode="lin" valueType="num">
                                       <p:cBhvr additive="base">
-                                        <p:cTn id="71" dur="400"/>
+                                        <p:cTn id="70" dur="400"/>
                                         <p:tgtEl>
                                           <p:spTgt spid="13"/>
                                         </p:tgtEl>
@@ -4522,7 +4797,7 @@
                                     </p:anim>
                                     <p:anim calcmode="lin" valueType="num">
                                       <p:cBhvr additive="base">
-                                        <p:cTn id="72" dur="400"/>
+                                        <p:cTn id="71" dur="400"/>
                                         <p:tgtEl>
                                           <p:spTgt spid="13"/>
                                         </p:tgtEl>
@@ -4546,15 +4821,28 @@
                                   </p:childTnLst>
                                 </p:cTn>
                               </p:par>
+                            </p:childTnLst>
+                          </p:cTn>
+                        </p:par>
+                        <p:par>
+                          <p:cTn id="72" fill="hold">
+                            <p:stCondLst>
+                              <p:cond delay="25160"/>
+                            </p:stCondLst>
+                            <p:childTnLst>
                               <p:par>
-                                <p:cTn id="73" presetID="2" presetClass="entr" presetSubtype="8" fill="hold" grpId="0" nodeType="afterEffect">
+                                <p:cTn presetID="2" presetClass="entr" presetSubtype="8" fill="hold" grpId="0" nodeType="afterEffect">
                                   <p:stCondLst>
-                                    <p:cond delay="25160"/>
+                                    <p:cond delay="0"/>
                                   </p:stCondLst>
                                   <p:childTnLst>
                                     <p:set>
                                       <p:cBhvr>
-                                        <p:cTn id="74" dur="1"/>
+                                        <p:cTn id="73" dur="1" fill="hold">
+                                          <p:stCondLst>
+                                            <p:cond delay="0"/>
+                                          </p:stCondLst>
+                                        </p:cTn>
                                         <p:tgtEl>
                                           <p:spTgt spid="17"/>
                                         </p:tgtEl>
@@ -4568,7 +4856,7 @@
                                     </p:set>
                                     <p:anim calcmode="lin" valueType="num">
                                       <p:cBhvr additive="base">
-                                        <p:cTn id="75" dur="400"/>
+                                        <p:cTn id="74" dur="400"/>
                                         <p:tgtEl>
                                           <p:spTgt spid="17"/>
                                         </p:tgtEl>
@@ -4591,7 +4879,7 @@
                                     </p:anim>
                                     <p:anim calcmode="lin" valueType="num">
                                       <p:cBhvr additive="base">
-                                        <p:cTn id="76" dur="400"/>
+                                        <p:cTn id="75" dur="400"/>
                                         <p:tgtEl>
                                           <p:spTgt spid="17"/>
                                         </p:tgtEl>
@@ -4615,15 +4903,28 @@
                                   </p:childTnLst>
                                 </p:cTn>
                               </p:par>
+                            </p:childTnLst>
+                          </p:cTn>
+                        </p:par>
+                        <p:par>
+                          <p:cTn id="76" fill="hold">
+                            <p:stCondLst>
+                              <p:cond delay="27720"/>
+                            </p:stCondLst>
+                            <p:childTnLst>
                               <p:par>
-                                <p:cTn id="77" presetID="2" presetClass="entr" presetSubtype="8" fill="hold" grpId="0" nodeType="afterEffect">
+                                <p:cTn presetID="2" presetClass="entr" presetSubtype="8" fill="hold" grpId="0" nodeType="afterEffect">
                                   <p:stCondLst>
-                                    <p:cond delay="27720"/>
+                                    <p:cond delay="0"/>
                                   </p:stCondLst>
                                   <p:childTnLst>
                                     <p:set>
                                       <p:cBhvr>
-                                        <p:cTn id="78" dur="1"/>
+                                        <p:cTn id="77" dur="1" fill="hold">
+                                          <p:stCondLst>
+                                            <p:cond delay="0"/>
+                                          </p:stCondLst>
+                                        </p:cTn>
                                         <p:tgtEl>
                                           <p:spTgt spid="21"/>
                                         </p:tgtEl>
@@ -4637,7 +4938,7 @@
                                     </p:set>
                                     <p:anim calcmode="lin" valueType="num">
                                       <p:cBhvr additive="base">
-                                        <p:cTn id="79" dur="400"/>
+                                        <p:cTn id="78" dur="400"/>
                                         <p:tgtEl>
                                           <p:spTgt spid="21"/>
                                         </p:tgtEl>
@@ -4660,7 +4961,7 @@
                                     </p:anim>
                                     <p:anim calcmode="lin" valueType="num">
                                       <p:cBhvr additive="base">
-                                        <p:cTn id="80" dur="400"/>
+                                        <p:cTn id="79" dur="400"/>
                                         <p:tgtEl>
                                           <p:spTgt spid="21"/>
                                         </p:tgtEl>
@@ -4684,15 +4985,28 @@
                                   </p:childTnLst>
                                 </p:cTn>
                               </p:par>
+                            </p:childTnLst>
+                          </p:cTn>
+                        </p:par>
+                        <p:par>
+                          <p:cTn id="80" fill="hold">
+                            <p:stCondLst>
+                              <p:cond delay="30400"/>
+                            </p:stCondLst>
+                            <p:childTnLst>
                               <p:par>
-                                <p:cTn id="81" presetID="2" presetClass="entr" presetSubtype="8" fill="hold" grpId="0" nodeType="afterEffect">
+                                <p:cTn presetID="2" presetClass="entr" presetSubtype="8" fill="hold" grpId="0" nodeType="afterEffect">
                                   <p:stCondLst>
-                                    <p:cond delay="30400"/>
+                                    <p:cond delay="0"/>
                                   </p:stCondLst>
                                   <p:childTnLst>
                                     <p:set>
                                       <p:cBhvr>
-                                        <p:cTn id="82" dur="1"/>
+                                        <p:cTn id="81" dur="1" fill="hold">
+                                          <p:stCondLst>
+                                            <p:cond delay="0"/>
+                                          </p:stCondLst>
+                                        </p:cTn>
                                         <p:tgtEl>
                                           <p:spTgt spid="22"/>
                                         </p:tgtEl>
@@ -4706,7 +5020,7 @@
                                     </p:set>
                                     <p:anim calcmode="lin" valueType="num">
                                       <p:cBhvr additive="base">
-                                        <p:cTn id="83" dur="400"/>
+                                        <p:cTn id="82" dur="400"/>
                                         <p:tgtEl>
                                           <p:spTgt spid="22"/>
                                         </p:tgtEl>
@@ -4729,7 +5043,7 @@
                                     </p:anim>
                                     <p:anim calcmode="lin" valueType="num">
                                       <p:cBhvr additive="base">
-                                        <p:cTn id="84" dur="400"/>
+                                        <p:cTn id="83" dur="400"/>
                                         <p:tgtEl>
                                           <p:spTgt spid="22"/>
                                         </p:tgtEl>
@@ -4753,15 +5067,28 @@
                                   </p:childTnLst>
                                 </p:cTn>
                               </p:par>
+                            </p:childTnLst>
+                          </p:cTn>
+                        </p:par>
+                        <p:par>
+                          <p:cTn id="84" fill="hold">
+                            <p:stCondLst>
+                              <p:cond delay="33200"/>
+                            </p:stCondLst>
+                            <p:childTnLst>
                               <p:par>
-                                <p:cTn id="85" presetID="2" presetClass="entr" presetSubtype="8" fill="hold" grpId="0" nodeType="afterEffect">
+                                <p:cTn presetID="2" presetClass="entr" presetSubtype="8" fill="hold" grpId="0" nodeType="afterEffect">
                                   <p:stCondLst>
-                                    <p:cond delay="33200"/>
+                                    <p:cond delay="0"/>
                                   </p:stCondLst>
                                   <p:childTnLst>
                                     <p:set>
                                       <p:cBhvr>
-                                        <p:cTn id="86" dur="1"/>
+                                        <p:cTn id="85" dur="1" fill="hold">
+                                          <p:stCondLst>
+                                            <p:cond delay="0"/>
+                                          </p:stCondLst>
+                                        </p:cTn>
                                         <p:tgtEl>
                                           <p:spTgt spid="23"/>
                                         </p:tgtEl>
@@ -4775,7 +5102,7 @@
                                     </p:set>
                                     <p:anim calcmode="lin" valueType="num">
                                       <p:cBhvr additive="base">
-                                        <p:cTn id="87" dur="400"/>
+                                        <p:cTn id="86" dur="400"/>
                                         <p:tgtEl>
                                           <p:spTgt spid="23"/>
                                         </p:tgtEl>
@@ -4798,7 +5125,7 @@
                                     </p:anim>
                                     <p:anim calcmode="lin" valueType="num">
                                       <p:cBhvr additive="base">
-                                        <p:cTn id="88" dur="400"/>
+                                        <p:cTn id="87" dur="400"/>
                                         <p:tgtEl>
                                           <p:spTgt spid="23"/>
                                         </p:tgtEl>
@@ -5208,10 +5535,7 @@
                   <p:par>
                     <p:cTn id="3" fill="hold">
                       <p:stCondLst>
-                        <p:cond delay="indefinite"/>
-                        <p:cond evt="onBegin" delay="0">
-                          <p:tn val="2"/>
-                        </p:cond>
+                        <p:cond delay="0"/>
                       </p:stCondLst>
                       <p:childTnLst>
                         <p:par>
@@ -5221,14 +5545,18 @@
                             </p:stCondLst>
                             <p:childTnLst>
                               <p:par>
-                                <p:cTn id="5" presetID="10" presetClass="entr" presetSubtype="0" fill="hold" grpId="0" nodeType="afterEffect">
+                                <p:cTn presetID="10" presetClass="entr" presetSubtype="0" fill="hold" grpId="0" nodeType="afterEffect">
                                   <p:stCondLst>
                                     <p:cond delay="0"/>
                                   </p:stCondLst>
                                   <p:childTnLst>
                                     <p:set>
                                       <p:cBhvr>
-                                        <p:cTn id="6" dur="1"/>
+                                        <p:cTn id="5" dur="1" fill="hold">
+                                          <p:stCondLst>
+                                            <p:cond delay="0"/>
+                                          </p:stCondLst>
+                                        </p:cTn>
                                         <p:tgtEl>
                                           <p:spTgt spid="8"/>
                                         </p:tgtEl>
@@ -5242,7 +5570,7 @@
                                     </p:set>
                                     <p:animEffect transition="in" filter="fade">
                                       <p:cBhvr>
-                                        <p:cTn id="7" dur="450"/>
+                                        <p:cTn id="6" dur="450"/>
                                         <p:tgtEl>
                                           <p:spTgt spid="8"/>
                                         </p:tgtEl>
@@ -5251,15 +5579,28 @@
                                   </p:childTnLst>
                                 </p:cTn>
                               </p:par>
+                            </p:childTnLst>
+                          </p:cTn>
+                        </p:par>
+                        <p:par>
+                          <p:cTn id="7" fill="hold">
+                            <p:stCondLst>
+                              <p:cond delay="600"/>
+                            </p:stCondLst>
+                            <p:childTnLst>
                               <p:par>
-                                <p:cTn id="8" presetID="10" presetClass="entr" presetSubtype="0" fill="hold" grpId="0" nodeType="afterEffect">
+                                <p:cTn presetID="10" presetClass="entr" presetSubtype="0" fill="hold" grpId="0" nodeType="afterEffect">
                                   <p:stCondLst>
-                                    <p:cond delay="600"/>
+                                    <p:cond delay="0"/>
                                   </p:stCondLst>
                                   <p:childTnLst>
                                     <p:set>
                                       <p:cBhvr>
-                                        <p:cTn id="9" dur="1"/>
+                                        <p:cTn id="8" dur="1" fill="hold">
+                                          <p:stCondLst>
+                                            <p:cond delay="0"/>
+                                          </p:stCondLst>
+                                        </p:cTn>
                                         <p:tgtEl>
                                           <p:spTgt spid="2"/>
                                         </p:tgtEl>
@@ -5273,7 +5614,7 @@
                                     </p:set>
                                     <p:animEffect transition="in" filter="fade">
                                       <p:cBhvr>
-                                        <p:cTn id="10" dur="450"/>
+                                        <p:cTn id="9" dur="450"/>
                                         <p:tgtEl>
                                           <p:spTgt spid="2"/>
                                         </p:tgtEl>
@@ -5282,15 +5623,28 @@
                                   </p:childTnLst>
                                 </p:cTn>
                               </p:par>
+                            </p:childTnLst>
+                          </p:cTn>
+                        </p:par>
+                        <p:par>
+                          <p:cTn id="10" fill="hold">
+                            <p:stCondLst>
+                              <p:cond delay="1350"/>
+                            </p:stCondLst>
+                            <p:childTnLst>
                               <p:par>
-                                <p:cTn id="11" presetID="10" presetClass="entr" presetSubtype="0" fill="hold" grpId="0" nodeType="afterEffect">
+                                <p:cTn presetID="10" presetClass="entr" presetSubtype="0" fill="hold" grpId="0" nodeType="afterEffect">
                                   <p:stCondLst>
-                                    <p:cond delay="1350"/>
+                                    <p:cond delay="0"/>
                                   </p:stCondLst>
                                   <p:childTnLst>
                                     <p:set>
                                       <p:cBhvr>
-                                        <p:cTn id="12" dur="1"/>
+                                        <p:cTn id="11" dur="1" fill="hold">
+                                          <p:stCondLst>
+                                            <p:cond delay="0"/>
+                                          </p:stCondLst>
+                                        </p:cTn>
                                         <p:tgtEl>
                                           <p:spTgt spid="3"/>
                                         </p:tgtEl>
@@ -5304,7 +5658,7 @@
                                     </p:set>
                                     <p:animEffect transition="in" filter="fade">
                                       <p:cBhvr>
-                                        <p:cTn id="13" dur="450"/>
+                                        <p:cTn id="12" dur="450"/>
                                         <p:tgtEl>
                                           <p:spTgt spid="3"/>
                                         </p:tgtEl>
@@ -5313,15 +5667,28 @@
                                   </p:childTnLst>
                                 </p:cTn>
                               </p:par>
+                            </p:childTnLst>
+                          </p:cTn>
+                        </p:par>
+                        <p:par>
+                          <p:cTn id="13" fill="hold">
+                            <p:stCondLst>
+                              <p:cond delay="2250"/>
+                            </p:stCondLst>
+                            <p:childTnLst>
                               <p:par>
-                                <p:cTn id="14" presetID="10" presetClass="entr" presetSubtype="0" fill="hold" grpId="0" nodeType="afterEffect">
+                                <p:cTn presetID="10" presetClass="entr" presetSubtype="0" fill="hold" grpId="0" nodeType="afterEffect">
                                   <p:stCondLst>
-                                    <p:cond delay="2250"/>
+                                    <p:cond delay="0"/>
                                   </p:stCondLst>
                                   <p:childTnLst>
                                     <p:set>
                                       <p:cBhvr>
-                                        <p:cTn id="15" dur="1"/>
+                                        <p:cTn id="14" dur="1" fill="hold">
+                                          <p:stCondLst>
+                                            <p:cond delay="0"/>
+                                          </p:stCondLst>
+                                        </p:cTn>
                                         <p:tgtEl>
                                           <p:spTgt spid="5"/>
                                         </p:tgtEl>
@@ -5335,7 +5702,7 @@
                                     </p:set>
                                     <p:animEffect transition="in" filter="fade">
                                       <p:cBhvr>
-                                        <p:cTn id="16" dur="450"/>
+                                        <p:cTn id="15" dur="450"/>
                                         <p:tgtEl>
                                           <p:spTgt spid="5"/>
                                         </p:tgtEl>
@@ -5344,15 +5711,28 @@
                                   </p:childTnLst>
                                 </p:cTn>
                               </p:par>
+                            </p:childTnLst>
+                          </p:cTn>
+                        </p:par>
+                        <p:par>
+                          <p:cTn id="16" fill="hold">
+                            <p:stCondLst>
+                              <p:cond delay="3300"/>
+                            </p:stCondLst>
+                            <p:childTnLst>
                               <p:par>
-                                <p:cTn id="17" presetID="10" presetClass="entr" presetSubtype="0" fill="hold" grpId="0" nodeType="afterEffect">
+                                <p:cTn presetID="10" presetClass="entr" presetSubtype="0" fill="hold" grpId="0" nodeType="afterEffect">
                                   <p:stCondLst>
-                                    <p:cond delay="3300"/>
+                                    <p:cond delay="0"/>
                                   </p:stCondLst>
                                   <p:childTnLst>
                                     <p:set>
                                       <p:cBhvr>
-                                        <p:cTn id="18" dur="1"/>
+                                        <p:cTn id="17" dur="1" fill="hold">
+                                          <p:stCondLst>
+                                            <p:cond delay="0"/>
+                                          </p:stCondLst>
+                                        </p:cTn>
                                         <p:tgtEl>
                                           <p:spTgt spid="6"/>
                                         </p:tgtEl>
@@ -5366,7 +5746,7 @@
                                     </p:set>
                                     <p:animEffect transition="in" filter="fade">
                                       <p:cBhvr>
-                                        <p:cTn id="19" dur="450"/>
+                                        <p:cTn id="18" dur="450"/>
                                         <p:tgtEl>
                                           <p:spTgt spid="6"/>
                                         </p:tgtEl>
@@ -5375,15 +5755,28 @@
                                   </p:childTnLst>
                                 </p:cTn>
                               </p:par>
+                            </p:childTnLst>
+                          </p:cTn>
+                        </p:par>
+                        <p:par>
+                          <p:cTn id="19" fill="hold">
+                            <p:stCondLst>
+                              <p:cond delay="4500"/>
+                            </p:stCondLst>
+                            <p:childTnLst>
                               <p:par>
-                                <p:cTn id="20" presetID="10" presetClass="entr" presetSubtype="0" fill="hold" grpId="0" nodeType="afterEffect">
+                                <p:cTn presetID="10" presetClass="entr" presetSubtype="0" fill="hold" grpId="0" nodeType="afterEffect">
                                   <p:stCondLst>
-                                    <p:cond delay="4500"/>
+                                    <p:cond delay="0"/>
                                   </p:stCondLst>
                                   <p:childTnLst>
                                     <p:set>
                                       <p:cBhvr>
-                                        <p:cTn id="21" dur="1"/>
+                                        <p:cTn id="20" dur="1" fill="hold">
+                                          <p:stCondLst>
+                                            <p:cond delay="0"/>
+                                          </p:stCondLst>
+                                        </p:cTn>
                                         <p:tgtEl>
                                           <p:spTgt spid="7"/>
                                         </p:tgtEl>
@@ -5397,7 +5790,7 @@
                                     </p:set>
                                     <p:animEffect transition="in" filter="fade">
                                       <p:cBhvr>
-                                        <p:cTn id="22" dur="450"/>
+                                        <p:cTn id="21" dur="450"/>
                                         <p:tgtEl>
                                           <p:spTgt spid="7"/>
                                         </p:tgtEl>
@@ -5406,15 +5799,28 @@
                                   </p:childTnLst>
                                 </p:cTn>
                               </p:par>
+                            </p:childTnLst>
+                          </p:cTn>
+                        </p:par>
+                        <p:par>
+                          <p:cTn id="22" fill="hold">
+                            <p:stCondLst>
+                              <p:cond delay="5850"/>
+                            </p:stCondLst>
+                            <p:childTnLst>
                               <p:par>
-                                <p:cTn id="23" presetID="10" presetClass="entr" presetSubtype="0" fill="hold" grpId="0" nodeType="afterEffect">
+                                <p:cTn presetID="10" presetClass="entr" presetSubtype="0" fill="hold" grpId="0" nodeType="afterEffect">
                                   <p:stCondLst>
-                                    <p:cond delay="5850"/>
+                                    <p:cond delay="0"/>
                                   </p:stCondLst>
                                   <p:childTnLst>
                                     <p:set>
                                       <p:cBhvr>
-                                        <p:cTn id="24" dur="1"/>
+                                        <p:cTn id="23" dur="1" fill="hold">
+                                          <p:stCondLst>
+                                            <p:cond delay="0"/>
+                                          </p:stCondLst>
+                                        </p:cTn>
                                         <p:tgtEl>
                                           <p:spTgt spid="9"/>
                                         </p:tgtEl>
@@ -5428,7 +5834,7 @@
                                     </p:set>
                                     <p:animEffect transition="in" filter="fade">
                                       <p:cBhvr>
-                                        <p:cTn id="25" dur="450"/>
+                                        <p:cTn id="24" dur="450"/>
                                         <p:tgtEl>
                                           <p:spTgt spid="9"/>
                                         </p:tgtEl>
@@ -5437,15 +5843,28 @@
                                   </p:childTnLst>
                                 </p:cTn>
                               </p:par>
+                            </p:childTnLst>
+                          </p:cTn>
+                        </p:par>
+                        <p:par>
+                          <p:cTn id="25" fill="hold">
+                            <p:stCondLst>
+                              <p:cond delay="7350"/>
+                            </p:stCondLst>
+                            <p:childTnLst>
                               <p:par>
-                                <p:cTn id="26" presetID="10" presetClass="entr" presetSubtype="0" fill="hold" grpId="0" nodeType="afterEffect">
+                                <p:cTn presetID="10" presetClass="entr" presetSubtype="0" fill="hold" grpId="0" nodeType="afterEffect">
                                   <p:stCondLst>
-                                    <p:cond delay="7350"/>
+                                    <p:cond delay="0"/>
                                   </p:stCondLst>
                                   <p:childTnLst>
                                     <p:set>
                                       <p:cBhvr>
-                                        <p:cTn id="27" dur="1"/>
+                                        <p:cTn id="26" dur="1" fill="hold">
+                                          <p:stCondLst>
+                                            <p:cond delay="0"/>
+                                          </p:stCondLst>
+                                        </p:cTn>
                                         <p:tgtEl>
                                           <p:spTgt spid="10"/>
                                         </p:tgtEl>
@@ -5459,7 +5878,7 @@
                                     </p:set>
                                     <p:animEffect transition="in" filter="fade">
                                       <p:cBhvr>
-                                        <p:cTn id="28" dur="450"/>
+                                        <p:cTn id="27" dur="450"/>
                                         <p:tgtEl>
                                           <p:spTgt spid="10"/>
                                         </p:tgtEl>
@@ -5496,9 +5915,7 @@
       </p:par>
     </p:tnLst>
     <p:bldLst>
-      <p:bldGraphic spid="8" grpId="0">
-        <p:bldAsOne/>
-      </p:bldGraphic>
+      <p:bldP spid="8" grpId="0"/>
       <p:bldP spid="2" grpId="0"/>
       <p:bldP spid="3" grpId="0"/>
       <p:bldP spid="5" grpId="0"/>
@@ -6169,10 +6586,7 @@
                   <p:par>
                     <p:cTn id="3" fill="hold">
                       <p:stCondLst>
-                        <p:cond delay="indefinite"/>
-                        <p:cond evt="onBegin" delay="0">
-                          <p:tn val="2"/>
-                        </p:cond>
+                        <p:cond delay="0"/>
                       </p:stCondLst>
                       <p:childTnLst>
                         <p:par>
@@ -6182,14 +6596,18 @@
                             </p:stCondLst>
                             <p:childTnLst>
                               <p:par>
-                                <p:cTn id="5" presetID="2" presetClass="entr" presetSubtype="8" fill="hold" grpId="0" nodeType="afterEffect">
+                                <p:cTn presetID="2" presetClass="entr" presetSubtype="8" fill="hold" grpId="0" nodeType="afterEffect">
                                   <p:stCondLst>
                                     <p:cond delay="0"/>
                                   </p:stCondLst>
                                   <p:childTnLst>
                                     <p:set>
                                       <p:cBhvr>
-                                        <p:cTn id="6" dur="1"/>
+                                        <p:cTn id="5" dur="1" fill="hold">
+                                          <p:stCondLst>
+                                            <p:cond delay="0"/>
+                                          </p:stCondLst>
+                                        </p:cTn>
                                         <p:tgtEl>
                                           <p:spTgt spid="2"/>
                                         </p:tgtEl>
@@ -6203,7 +6621,7 @@
                                     </p:set>
                                     <p:anim calcmode="lin" valueType="num">
                                       <p:cBhvr additive="base">
-                                        <p:cTn id="7" dur="400"/>
+                                        <p:cTn id="6" dur="400"/>
                                         <p:tgtEl>
                                           <p:spTgt spid="2"/>
                                         </p:tgtEl>
@@ -6226,7 +6644,7 @@
                                     </p:anim>
                                     <p:anim calcmode="lin" valueType="num">
                                       <p:cBhvr additive="base">
-                                        <p:cTn id="8" dur="400"/>
+                                        <p:cTn id="7" dur="400"/>
                                         <p:tgtEl>
                                           <p:spTgt spid="2"/>
                                         </p:tgtEl>
@@ -6250,15 +6668,28 @@
                                   </p:childTnLst>
                                 </p:cTn>
                               </p:par>
+                            </p:childTnLst>
+                          </p:cTn>
+                        </p:par>
+                        <p:par>
+                          <p:cTn id="8" fill="hold">
+                            <p:stCondLst>
+                              <p:cond delay="550"/>
+                            </p:stCondLst>
+                            <p:childTnLst>
                               <p:par>
-                                <p:cTn id="9" presetID="2" presetClass="entr" presetSubtype="8" fill="hold" grpId="0" nodeType="afterEffect">
+                                <p:cTn presetID="2" presetClass="entr" presetSubtype="8" fill="hold" grpId="0" nodeType="afterEffect">
                                   <p:stCondLst>
-                                    <p:cond delay="550"/>
+                                    <p:cond delay="0"/>
                                   </p:stCondLst>
                                   <p:childTnLst>
                                     <p:set>
                                       <p:cBhvr>
-                                        <p:cTn id="10" dur="1"/>
+                                        <p:cTn id="9" dur="1" fill="hold">
+                                          <p:stCondLst>
+                                            <p:cond delay="0"/>
+                                          </p:stCondLst>
+                                        </p:cTn>
                                         <p:tgtEl>
                                           <p:spTgt spid="3"/>
                                         </p:tgtEl>
@@ -6272,7 +6703,7 @@
                                     </p:set>
                                     <p:anim calcmode="lin" valueType="num">
                                       <p:cBhvr additive="base">
-                                        <p:cTn id="11" dur="400"/>
+                                        <p:cTn id="10" dur="400"/>
                                         <p:tgtEl>
                                           <p:spTgt spid="3"/>
                                         </p:tgtEl>
@@ -6295,7 +6726,7 @@
                                     </p:anim>
                                     <p:anim calcmode="lin" valueType="num">
                                       <p:cBhvr additive="base">
-                                        <p:cTn id="12" dur="400"/>
+                                        <p:cTn id="11" dur="400"/>
                                         <p:tgtEl>
                                           <p:spTgt spid="3"/>
                                         </p:tgtEl>
@@ -6319,15 +6750,28 @@
                                   </p:childTnLst>
                                 </p:cTn>
                               </p:par>
+                            </p:childTnLst>
+                          </p:cTn>
+                        </p:par>
+                        <p:par>
+                          <p:cTn id="12" fill="hold">
+                            <p:stCondLst>
+                              <p:cond delay="1250"/>
+                            </p:stCondLst>
+                            <p:childTnLst>
                               <p:par>
-                                <p:cTn id="13" presetID="2" presetClass="entr" presetSubtype="8" fill="hold" grpId="0" nodeType="afterEffect">
+                                <p:cTn presetID="2" presetClass="entr" presetSubtype="8" fill="hold" grpId="0" nodeType="afterEffect">
                                   <p:stCondLst>
-                                    <p:cond delay="1250"/>
+                                    <p:cond delay="0"/>
                                   </p:stCondLst>
                                   <p:childTnLst>
                                     <p:set>
                                       <p:cBhvr>
-                                        <p:cTn id="14" dur="1"/>
+                                        <p:cTn id="13" dur="1" fill="hold">
+                                          <p:stCondLst>
+                                            <p:cond delay="0"/>
+                                          </p:stCondLst>
+                                        </p:cTn>
                                         <p:tgtEl>
                                           <p:spTgt spid="5"/>
                                         </p:tgtEl>
@@ -6341,7 +6785,7 @@
                                     </p:set>
                                     <p:anim calcmode="lin" valueType="num">
                                       <p:cBhvr additive="base">
-                                        <p:cTn id="15" dur="400"/>
+                                        <p:cTn id="14" dur="400"/>
                                         <p:tgtEl>
                                           <p:spTgt spid="5"/>
                                         </p:tgtEl>
@@ -6364,7 +6808,7 @@
                                     </p:anim>
                                     <p:anim calcmode="lin" valueType="num">
                                       <p:cBhvr additive="base">
-                                        <p:cTn id="16" dur="400"/>
+                                        <p:cTn id="15" dur="400"/>
                                         <p:tgtEl>
                                           <p:spTgt spid="5"/>
                                         </p:tgtEl>
@@ -6388,15 +6832,28 @@
                                   </p:childTnLst>
                                 </p:cTn>
                               </p:par>
+                            </p:childTnLst>
+                          </p:cTn>
+                        </p:par>
+                        <p:par>
+                          <p:cTn id="16" fill="hold">
+                            <p:stCondLst>
+                              <p:cond delay="2100"/>
+                            </p:stCondLst>
+                            <p:childTnLst>
                               <p:par>
-                                <p:cTn id="17" presetID="2" presetClass="entr" presetSubtype="8" fill="hold" grpId="0" nodeType="afterEffect">
+                                <p:cTn presetID="2" presetClass="entr" presetSubtype="8" fill="hold" grpId="0" nodeType="afterEffect">
                                   <p:stCondLst>
-                                    <p:cond delay="2100"/>
+                                    <p:cond delay="0"/>
                                   </p:stCondLst>
                                   <p:childTnLst>
                                     <p:set>
                                       <p:cBhvr>
-                                        <p:cTn id="18" dur="1"/>
+                                        <p:cTn id="17" dur="1" fill="hold">
+                                          <p:stCondLst>
+                                            <p:cond delay="0"/>
+                                          </p:stCondLst>
+                                        </p:cTn>
                                         <p:tgtEl>
                                           <p:spTgt spid="8"/>
                                         </p:tgtEl>
@@ -6410,7 +6867,7 @@
                                     </p:set>
                                     <p:anim calcmode="lin" valueType="num">
                                       <p:cBhvr additive="base">
-                                        <p:cTn id="19" dur="400"/>
+                                        <p:cTn id="18" dur="400"/>
                                         <p:tgtEl>
                                           <p:spTgt spid="8"/>
                                         </p:tgtEl>
@@ -6433,7 +6890,7 @@
                                     </p:anim>
                                     <p:anim calcmode="lin" valueType="num">
                                       <p:cBhvr additive="base">
-                                        <p:cTn id="20" dur="400"/>
+                                        <p:cTn id="19" dur="400"/>
                                         <p:tgtEl>
                                           <p:spTgt spid="8"/>
                                         </p:tgtEl>
@@ -6457,15 +6914,28 @@
                                   </p:childTnLst>
                                 </p:cTn>
                               </p:par>
+                            </p:childTnLst>
+                          </p:cTn>
+                        </p:par>
+                        <p:par>
+                          <p:cTn id="20" fill="hold">
+                            <p:stCondLst>
+                              <p:cond delay="3100"/>
+                            </p:stCondLst>
+                            <p:childTnLst>
                               <p:par>
-                                <p:cTn id="21" presetID="2" presetClass="entr" presetSubtype="8" fill="hold" grpId="0" nodeType="afterEffect">
+                                <p:cTn presetID="2" presetClass="entr" presetSubtype="8" fill="hold" grpId="0" nodeType="afterEffect">
                                   <p:stCondLst>
-                                    <p:cond delay="3100"/>
+                                    <p:cond delay="0"/>
                                   </p:stCondLst>
                                   <p:childTnLst>
                                     <p:set>
                                       <p:cBhvr>
-                                        <p:cTn id="22" dur="1"/>
+                                        <p:cTn id="21" dur="1" fill="hold">
+                                          <p:stCondLst>
+                                            <p:cond delay="0"/>
+                                          </p:stCondLst>
+                                        </p:cTn>
                                         <p:tgtEl>
                                           <p:spTgt spid="11"/>
                                         </p:tgtEl>
@@ -6479,7 +6949,7 @@
                                     </p:set>
                                     <p:anim calcmode="lin" valueType="num">
                                       <p:cBhvr additive="base">
-                                        <p:cTn id="23" dur="400"/>
+                                        <p:cTn id="22" dur="400"/>
                                         <p:tgtEl>
                                           <p:spTgt spid="11"/>
                                         </p:tgtEl>
@@ -6502,7 +6972,7 @@
                                     </p:anim>
                                     <p:anim calcmode="lin" valueType="num">
                                       <p:cBhvr additive="base">
-                                        <p:cTn id="24" dur="400"/>
+                                        <p:cTn id="23" dur="400"/>
                                         <p:tgtEl>
                                           <p:spTgt spid="11"/>
                                         </p:tgtEl>
@@ -6526,15 +6996,28 @@
                                   </p:childTnLst>
                                 </p:cTn>
                               </p:par>
+                            </p:childTnLst>
+                          </p:cTn>
+                        </p:par>
+                        <p:par>
+                          <p:cTn id="24" fill="hold">
+                            <p:stCondLst>
+                              <p:cond delay="4250"/>
+                            </p:stCondLst>
+                            <p:childTnLst>
                               <p:par>
-                                <p:cTn id="25" presetID="2" presetClass="entr" presetSubtype="8" fill="hold" grpId="0" nodeType="afterEffect">
+                                <p:cTn presetID="2" presetClass="entr" presetSubtype="8" fill="hold" grpId="0" nodeType="afterEffect">
                                   <p:stCondLst>
-                                    <p:cond delay="4250"/>
+                                    <p:cond delay="0"/>
                                   </p:stCondLst>
                                   <p:childTnLst>
                                     <p:set>
                                       <p:cBhvr>
-                                        <p:cTn id="26" dur="1"/>
+                                        <p:cTn id="25" dur="1" fill="hold">
+                                          <p:stCondLst>
+                                            <p:cond delay="0"/>
+                                          </p:stCondLst>
+                                        </p:cTn>
                                         <p:tgtEl>
                                           <p:spTgt spid="7"/>
                                         </p:tgtEl>
@@ -6548,7 +7031,7 @@
                                     </p:set>
                                     <p:anim calcmode="lin" valueType="num">
                                       <p:cBhvr additive="base">
-                                        <p:cTn id="27" dur="400"/>
+                                        <p:cTn id="26" dur="400"/>
                                         <p:tgtEl>
                                           <p:spTgt spid="7"/>
                                         </p:tgtEl>
@@ -6571,7 +7054,7 @@
                                     </p:anim>
                                     <p:anim calcmode="lin" valueType="num">
                                       <p:cBhvr additive="base">
-                                        <p:cTn id="28" dur="400"/>
+                                        <p:cTn id="27" dur="400"/>
                                         <p:tgtEl>
                                           <p:spTgt spid="7"/>
                                         </p:tgtEl>
@@ -6595,15 +7078,28 @@
                                   </p:childTnLst>
                                 </p:cTn>
                               </p:par>
+                            </p:childTnLst>
+                          </p:cTn>
+                        </p:par>
+                        <p:par>
+                          <p:cTn id="28" fill="hold">
+                            <p:stCondLst>
+                              <p:cond delay="5550"/>
+                            </p:stCondLst>
+                            <p:childTnLst>
                               <p:par>
-                                <p:cTn id="29" presetID="2" presetClass="entr" presetSubtype="8" fill="hold" grpId="0" nodeType="afterEffect">
+                                <p:cTn presetID="2" presetClass="entr" presetSubtype="8" fill="hold" grpId="0" nodeType="afterEffect">
                                   <p:stCondLst>
-                                    <p:cond delay="5550"/>
+                                    <p:cond delay="0"/>
                                   </p:stCondLst>
                                   <p:childTnLst>
                                     <p:set>
                                       <p:cBhvr>
-                                        <p:cTn id="30" dur="1"/>
+                                        <p:cTn id="29" dur="1" fill="hold">
+                                          <p:stCondLst>
+                                            <p:cond delay="0"/>
+                                          </p:stCondLst>
+                                        </p:cTn>
                                         <p:tgtEl>
                                           <p:spTgt spid="10"/>
                                         </p:tgtEl>
@@ -6617,7 +7113,7 @@
                                     </p:set>
                                     <p:anim calcmode="lin" valueType="num">
                                       <p:cBhvr additive="base">
-                                        <p:cTn id="31" dur="400"/>
+                                        <p:cTn id="30" dur="400"/>
                                         <p:tgtEl>
                                           <p:spTgt spid="10"/>
                                         </p:tgtEl>
@@ -6640,7 +7136,7 @@
                                     </p:anim>
                                     <p:anim calcmode="lin" valueType="num">
                                       <p:cBhvr additive="base">
-                                        <p:cTn id="32" dur="400"/>
+                                        <p:cTn id="31" dur="400"/>
                                         <p:tgtEl>
                                           <p:spTgt spid="10"/>
                                         </p:tgtEl>
@@ -6664,15 +7160,28 @@
                                   </p:childTnLst>
                                 </p:cTn>
                               </p:par>
+                            </p:childTnLst>
+                          </p:cTn>
+                        </p:par>
+                        <p:par>
+                          <p:cTn id="32" fill="hold">
+                            <p:stCondLst>
+                              <p:cond delay="7000"/>
+                            </p:stCondLst>
+                            <p:childTnLst>
                               <p:par>
-                                <p:cTn id="33" presetID="2" presetClass="entr" presetSubtype="8" fill="hold" grpId="0" nodeType="afterEffect">
+                                <p:cTn presetID="2" presetClass="entr" presetSubtype="8" fill="hold" grpId="0" nodeType="afterEffect">
                                   <p:stCondLst>
-                                    <p:cond delay="7000"/>
+                                    <p:cond delay="0"/>
                                   </p:stCondLst>
                                   <p:childTnLst>
                                     <p:set>
                                       <p:cBhvr>
-                                        <p:cTn id="34" dur="1"/>
+                                        <p:cTn id="33" dur="1" fill="hold">
+                                          <p:stCondLst>
+                                            <p:cond delay="0"/>
+                                          </p:stCondLst>
+                                        </p:cTn>
                                         <p:tgtEl>
                                           <p:spTgt spid="6"/>
                                         </p:tgtEl>
@@ -6686,7 +7195,7 @@
                                     </p:set>
                                     <p:anim calcmode="lin" valueType="num">
                                       <p:cBhvr additive="base">
-                                        <p:cTn id="35" dur="400"/>
+                                        <p:cTn id="34" dur="400"/>
                                         <p:tgtEl>
                                           <p:spTgt spid="6"/>
                                         </p:tgtEl>
@@ -6709,7 +7218,7 @@
                                     </p:anim>
                                     <p:anim calcmode="lin" valueType="num">
                                       <p:cBhvr additive="base">
-                                        <p:cTn id="36" dur="400"/>
+                                        <p:cTn id="35" dur="400"/>
                                         <p:tgtEl>
                                           <p:spTgt spid="6"/>
                                         </p:tgtEl>
@@ -6733,15 +7242,28 @@
                                   </p:childTnLst>
                                 </p:cTn>
                               </p:par>
+                            </p:childTnLst>
+                          </p:cTn>
+                        </p:par>
+                        <p:par>
+                          <p:cTn id="36" fill="hold">
+                            <p:stCondLst>
+                              <p:cond delay="8600"/>
+                            </p:stCondLst>
+                            <p:childTnLst>
                               <p:par>
-                                <p:cTn id="37" presetID="2" presetClass="entr" presetSubtype="8" fill="hold" grpId="0" nodeType="afterEffect">
+                                <p:cTn presetID="2" presetClass="entr" presetSubtype="8" fill="hold" grpId="0" nodeType="afterEffect">
                                   <p:stCondLst>
-                                    <p:cond delay="8600"/>
+                                    <p:cond delay="0"/>
                                   </p:stCondLst>
                                   <p:childTnLst>
                                     <p:set>
                                       <p:cBhvr>
-                                        <p:cTn id="38" dur="1"/>
+                                        <p:cTn id="37" dur="1" fill="hold">
+                                          <p:stCondLst>
+                                            <p:cond delay="0"/>
+                                          </p:stCondLst>
+                                        </p:cTn>
                                         <p:tgtEl>
                                           <p:spTgt spid="9"/>
                                         </p:tgtEl>
@@ -6755,7 +7277,7 @@
                                     </p:set>
                                     <p:anim calcmode="lin" valueType="num">
                                       <p:cBhvr additive="base">
-                                        <p:cTn id="39" dur="400"/>
+                                        <p:cTn id="38" dur="400"/>
                                         <p:tgtEl>
                                           <p:spTgt spid="9"/>
                                         </p:tgtEl>
@@ -6778,7 +7300,7 @@
                                     </p:anim>
                                     <p:anim calcmode="lin" valueType="num">
                                       <p:cBhvr additive="base">
-                                        <p:cTn id="40" dur="400"/>
+                                        <p:cTn id="39" dur="400"/>
                                         <p:tgtEl>
                                           <p:spTgt spid="9"/>
                                         </p:tgtEl>
@@ -6802,15 +7324,28 @@
                                   </p:childTnLst>
                                 </p:cTn>
                               </p:par>
+                            </p:childTnLst>
+                          </p:cTn>
+                        </p:par>
+                        <p:par>
+                          <p:cTn id="40" fill="hold">
+                            <p:stCondLst>
+                              <p:cond delay="10350"/>
+                            </p:stCondLst>
+                            <p:childTnLst>
                               <p:par>
-                                <p:cTn id="41" presetID="2" presetClass="entr" presetSubtype="8" fill="hold" grpId="0" nodeType="afterEffect">
+                                <p:cTn presetID="2" presetClass="entr" presetSubtype="8" fill="hold" grpId="0" nodeType="afterEffect">
                                   <p:stCondLst>
-                                    <p:cond delay="10350"/>
+                                    <p:cond delay="0"/>
                                   </p:stCondLst>
                                   <p:childTnLst>
                                     <p:set>
                                       <p:cBhvr>
-                                        <p:cTn id="42" dur="1"/>
+                                        <p:cTn id="41" dur="1" fill="hold">
+                                          <p:stCondLst>
+                                            <p:cond delay="0"/>
+                                          </p:stCondLst>
+                                        </p:cTn>
                                         <p:tgtEl>
                                           <p:spTgt spid="12"/>
                                         </p:tgtEl>
@@ -6824,7 +7359,7 @@
                                     </p:set>
                                     <p:anim calcmode="lin" valueType="num">
                                       <p:cBhvr additive="base">
-                                        <p:cTn id="43" dur="400"/>
+                                        <p:cTn id="42" dur="400"/>
                                         <p:tgtEl>
                                           <p:spTgt spid="12"/>
                                         </p:tgtEl>
@@ -6847,7 +7382,7 @@
                                     </p:anim>
                                     <p:anim calcmode="lin" valueType="num">
                                       <p:cBhvr additive="base">
-                                        <p:cTn id="44" dur="400"/>
+                                        <p:cTn id="43" dur="400"/>
                                         <p:tgtEl>
                                           <p:spTgt spid="12"/>
                                         </p:tgtEl>
@@ -6871,15 +7406,28 @@
                                   </p:childTnLst>
                                 </p:cTn>
                               </p:par>
+                            </p:childTnLst>
+                          </p:cTn>
+                        </p:par>
+                        <p:par>
+                          <p:cTn id="44" fill="hold">
+                            <p:stCondLst>
+                              <p:cond delay="12250"/>
+                            </p:stCondLst>
+                            <p:childTnLst>
                               <p:par>
-                                <p:cTn id="45" presetID="2" presetClass="entr" presetSubtype="8" fill="hold" grpId="0" nodeType="afterEffect">
+                                <p:cTn presetID="2" presetClass="entr" presetSubtype="8" fill="hold" grpId="0" nodeType="afterEffect">
                                   <p:stCondLst>
-                                    <p:cond delay="12250"/>
+                                    <p:cond delay="0"/>
                                   </p:stCondLst>
                                   <p:childTnLst>
                                     <p:set>
                                       <p:cBhvr>
-                                        <p:cTn id="46" dur="1"/>
+                                        <p:cTn id="45" dur="1" fill="hold">
+                                          <p:stCondLst>
+                                            <p:cond delay="0"/>
+                                          </p:stCondLst>
+                                        </p:cTn>
                                         <p:tgtEl>
                                           <p:spTgt spid="13"/>
                                         </p:tgtEl>
@@ -6893,7 +7441,7 @@
                                     </p:set>
                                     <p:anim calcmode="lin" valueType="num">
                                       <p:cBhvr additive="base">
-                                        <p:cTn id="47" dur="400"/>
+                                        <p:cTn id="46" dur="400"/>
                                         <p:tgtEl>
                                           <p:spTgt spid="13"/>
                                         </p:tgtEl>
@@ -6916,7 +7464,7 @@
                                     </p:anim>
                                     <p:anim calcmode="lin" valueType="num">
                                       <p:cBhvr additive="base">
-                                        <p:cTn id="48" dur="400"/>
+                                        <p:cTn id="47" dur="400"/>
                                         <p:tgtEl>
                                           <p:spTgt spid="13"/>
                                         </p:tgtEl>
@@ -6940,15 +7488,28 @@
                                   </p:childTnLst>
                                 </p:cTn>
                               </p:par>
+                            </p:childTnLst>
+                          </p:cTn>
+                        </p:par>
+                        <p:par>
+                          <p:cTn id="48" fill="hold">
+                            <p:stCondLst>
+                              <p:cond delay="14300"/>
+                            </p:stCondLst>
+                            <p:childTnLst>
                               <p:par>
-                                <p:cTn id="49" presetID="2" presetClass="entr" presetSubtype="8" fill="hold" grpId="0" nodeType="afterEffect">
+                                <p:cTn presetID="2" presetClass="entr" presetSubtype="8" fill="hold" grpId="0" nodeType="afterEffect">
                                   <p:stCondLst>
-                                    <p:cond delay="14300"/>
+                                    <p:cond delay="0"/>
                                   </p:stCondLst>
                                   <p:childTnLst>
                                     <p:set>
                                       <p:cBhvr>
-                                        <p:cTn id="50" dur="1"/>
+                                        <p:cTn id="49" dur="1" fill="hold">
+                                          <p:stCondLst>
+                                            <p:cond delay="0"/>
+                                          </p:stCondLst>
+                                        </p:cTn>
                                         <p:tgtEl>
                                           <p:spTgt spid="14"/>
                                         </p:tgtEl>
@@ -6962,7 +7523,7 @@
                                     </p:set>
                                     <p:anim calcmode="lin" valueType="num">
                                       <p:cBhvr additive="base">
-                                        <p:cTn id="51" dur="400"/>
+                                        <p:cTn id="50" dur="400"/>
                                         <p:tgtEl>
                                           <p:spTgt spid="14"/>
                                         </p:tgtEl>
@@ -6985,7 +7546,7 @@
                                     </p:anim>
                                     <p:anim calcmode="lin" valueType="num">
                                       <p:cBhvr additive="base">
-                                        <p:cTn id="52" dur="400"/>
+                                        <p:cTn id="51" dur="400"/>
                                         <p:tgtEl>
                                           <p:spTgt spid="14"/>
                                         </p:tgtEl>
@@ -7009,15 +7570,28 @@
                                   </p:childTnLst>
                                 </p:cTn>
                               </p:par>
+                            </p:childTnLst>
+                          </p:cTn>
+                        </p:par>
+                        <p:par>
+                          <p:cTn id="52" fill="hold">
+                            <p:stCondLst>
+                              <p:cond delay="16500"/>
+                            </p:stCondLst>
+                            <p:childTnLst>
                               <p:par>
-                                <p:cTn id="53" presetID="2" presetClass="entr" presetSubtype="8" fill="hold" grpId="0" nodeType="afterEffect">
+                                <p:cTn presetID="2" presetClass="entr" presetSubtype="8" fill="hold" grpId="0" nodeType="afterEffect">
                                   <p:stCondLst>
-                                    <p:cond delay="16500"/>
+                                    <p:cond delay="0"/>
                                   </p:stCondLst>
                                   <p:childTnLst>
                                     <p:set>
                                       <p:cBhvr>
-                                        <p:cTn id="54" dur="1"/>
+                                        <p:cTn id="53" dur="1" fill="hold">
+                                          <p:stCondLst>
+                                            <p:cond delay="0"/>
+                                          </p:stCondLst>
+                                        </p:cTn>
                                         <p:tgtEl>
                                           <p:spTgt spid="15"/>
                                         </p:tgtEl>
@@ -7031,7 +7605,7 @@
                                     </p:set>
                                     <p:anim calcmode="lin" valueType="num">
                                       <p:cBhvr additive="base">
-                                        <p:cTn id="55" dur="400"/>
+                                        <p:cTn id="54" dur="400"/>
                                         <p:tgtEl>
                                           <p:spTgt spid="15"/>
                                         </p:tgtEl>
@@ -7054,7 +7628,7 @@
                                     </p:anim>
                                     <p:anim calcmode="lin" valueType="num">
                                       <p:cBhvr additive="base">
-                                        <p:cTn id="56" dur="400"/>
+                                        <p:cTn id="55" dur="400"/>
                                         <p:tgtEl>
                                           <p:spTgt spid="15"/>
                                         </p:tgtEl>
@@ -8055,10 +8629,7 @@
                   <p:par>
                     <p:cTn id="3" fill="hold">
                       <p:stCondLst>
-                        <p:cond delay="indefinite"/>
-                        <p:cond evt="onBegin" delay="0">
-                          <p:tn val="2"/>
-                        </p:cond>
+                        <p:cond delay="0"/>
                       </p:stCondLst>
                       <p:childTnLst>
                         <p:par>
@@ -8068,14 +8639,18 @@
                             </p:stCondLst>
                             <p:childTnLst>
                               <p:par>
-                                <p:cTn id="5" presetID="2" presetClass="entr" presetSubtype="8" fill="hold" grpId="0" nodeType="afterEffect">
+                                <p:cTn presetID="2" presetClass="entr" presetSubtype="8" fill="hold" grpId="0" nodeType="afterEffect">
                                   <p:stCondLst>
                                     <p:cond delay="0"/>
                                   </p:stCondLst>
                                   <p:childTnLst>
                                     <p:set>
                                       <p:cBhvr>
-                                        <p:cTn id="6" dur="1"/>
+                                        <p:cTn id="5" dur="1" fill="hold">
+                                          <p:stCondLst>
+                                            <p:cond delay="0"/>
+                                          </p:stCondLst>
+                                        </p:cTn>
                                         <p:tgtEl>
                                           <p:spTgt spid="2"/>
                                         </p:tgtEl>
@@ -8089,7 +8664,7 @@
                                     </p:set>
                                     <p:anim calcmode="lin" valueType="num">
                                       <p:cBhvr additive="base">
-                                        <p:cTn id="7" dur="400"/>
+                                        <p:cTn id="6" dur="400"/>
                                         <p:tgtEl>
                                           <p:spTgt spid="2"/>
                                         </p:tgtEl>
@@ -8112,7 +8687,7 @@
                                     </p:anim>
                                     <p:anim calcmode="lin" valueType="num">
                                       <p:cBhvr additive="base">
-                                        <p:cTn id="8" dur="400"/>
+                                        <p:cTn id="7" dur="400"/>
                                         <p:tgtEl>
                                           <p:spTgt spid="2"/>
                                         </p:tgtEl>
@@ -8136,15 +8711,28 @@
                                   </p:childTnLst>
                                 </p:cTn>
                               </p:par>
+                            </p:childTnLst>
+                          </p:cTn>
+                        </p:par>
+                        <p:par>
+                          <p:cTn id="8" fill="hold">
+                            <p:stCondLst>
+                              <p:cond delay="520"/>
+                            </p:stCondLst>
+                            <p:childTnLst>
                               <p:par>
-                                <p:cTn id="9" presetID="2" presetClass="entr" presetSubtype="8" fill="hold" grpId="0" nodeType="afterEffect">
+                                <p:cTn presetID="2" presetClass="entr" presetSubtype="8" fill="hold" grpId="0" nodeType="afterEffect">
                                   <p:stCondLst>
-                                    <p:cond delay="520"/>
+                                    <p:cond delay="0"/>
                                   </p:stCondLst>
                                   <p:childTnLst>
                                     <p:set>
                                       <p:cBhvr>
-                                        <p:cTn id="10" dur="1"/>
+                                        <p:cTn id="9" dur="1" fill="hold">
+                                          <p:stCondLst>
+                                            <p:cond delay="0"/>
+                                          </p:stCondLst>
+                                        </p:cTn>
                                         <p:tgtEl>
                                           <p:spTgt spid="3"/>
                                         </p:tgtEl>
@@ -8158,7 +8746,7 @@
                                     </p:set>
                                     <p:anim calcmode="lin" valueType="num">
                                       <p:cBhvr additive="base">
-                                        <p:cTn id="11" dur="400"/>
+                                        <p:cTn id="10" dur="400"/>
                                         <p:tgtEl>
                                           <p:spTgt spid="3"/>
                                         </p:tgtEl>
@@ -8181,7 +8769,7 @@
                                     </p:anim>
                                     <p:anim calcmode="lin" valueType="num">
                                       <p:cBhvr additive="base">
-                                        <p:cTn id="12" dur="400"/>
+                                        <p:cTn id="11" dur="400"/>
                                         <p:tgtEl>
                                           <p:spTgt spid="3"/>
                                         </p:tgtEl>
@@ -8205,15 +8793,28 @@
                                   </p:childTnLst>
                                 </p:cTn>
                               </p:par>
+                            </p:childTnLst>
+                          </p:cTn>
+                        </p:par>
+                        <p:par>
+                          <p:cTn id="12" fill="hold">
+                            <p:stCondLst>
+                              <p:cond delay="1160"/>
+                            </p:stCondLst>
+                            <p:childTnLst>
                               <p:par>
-                                <p:cTn id="13" presetID="2" presetClass="entr" presetSubtype="8" fill="hold" grpId="0" nodeType="afterEffect">
+                                <p:cTn presetID="2" presetClass="entr" presetSubtype="8" fill="hold" grpId="0" nodeType="afterEffect">
                                   <p:stCondLst>
-                                    <p:cond delay="1160"/>
+                                    <p:cond delay="0"/>
                                   </p:stCondLst>
                                   <p:childTnLst>
                                     <p:set>
                                       <p:cBhvr>
-                                        <p:cTn id="14" dur="1"/>
+                                        <p:cTn id="13" dur="1" fill="hold">
+                                          <p:stCondLst>
+                                            <p:cond delay="0"/>
+                                          </p:stCondLst>
+                                        </p:cTn>
                                         <p:tgtEl>
                                           <p:spTgt spid="5"/>
                                         </p:tgtEl>
@@ -8227,7 +8828,7 @@
                                     </p:set>
                                     <p:anim calcmode="lin" valueType="num">
                                       <p:cBhvr additive="base">
-                                        <p:cTn id="15" dur="400"/>
+                                        <p:cTn id="14" dur="400"/>
                                         <p:tgtEl>
                                           <p:spTgt spid="5"/>
                                         </p:tgtEl>
@@ -8250,7 +8851,7 @@
                                     </p:anim>
                                     <p:anim calcmode="lin" valueType="num">
                                       <p:cBhvr additive="base">
-                                        <p:cTn id="16" dur="400"/>
+                                        <p:cTn id="15" dur="400"/>
                                         <p:tgtEl>
                                           <p:spTgt spid="5"/>
                                         </p:tgtEl>
@@ -8274,15 +8875,28 @@
                                   </p:childTnLst>
                                 </p:cTn>
                               </p:par>
+                            </p:childTnLst>
+                          </p:cTn>
+                        </p:par>
+                        <p:par>
+                          <p:cTn id="16" fill="hold">
+                            <p:stCondLst>
+                              <p:cond delay="1920"/>
+                            </p:stCondLst>
+                            <p:childTnLst>
                               <p:par>
-                                <p:cTn id="17" presetID="2" presetClass="entr" presetSubtype="8" fill="hold" grpId="0" nodeType="afterEffect">
+                                <p:cTn presetID="2" presetClass="entr" presetSubtype="8" fill="hold" grpId="0" nodeType="afterEffect">
                                   <p:stCondLst>
-                                    <p:cond delay="1920"/>
+                                    <p:cond delay="0"/>
                                   </p:stCondLst>
                                   <p:childTnLst>
                                     <p:set>
                                       <p:cBhvr>
-                                        <p:cTn id="18" dur="1"/>
+                                        <p:cTn id="17" dur="1" fill="hold">
+                                          <p:stCondLst>
+                                            <p:cond delay="0"/>
+                                          </p:stCondLst>
+                                        </p:cTn>
                                         <p:tgtEl>
                                           <p:spTgt spid="10"/>
                                         </p:tgtEl>
@@ -8296,7 +8910,7 @@
                                     </p:set>
                                     <p:anim calcmode="lin" valueType="num">
                                       <p:cBhvr additive="base">
-                                        <p:cTn id="19" dur="400"/>
+                                        <p:cTn id="18" dur="400"/>
                                         <p:tgtEl>
                                           <p:spTgt spid="10"/>
                                         </p:tgtEl>
@@ -8319,7 +8933,7 @@
                                     </p:anim>
                                     <p:anim calcmode="lin" valueType="num">
                                       <p:cBhvr additive="base">
-                                        <p:cTn id="20" dur="400"/>
+                                        <p:cTn id="19" dur="400"/>
                                         <p:tgtEl>
                                           <p:spTgt spid="10"/>
                                         </p:tgtEl>
@@ -8343,15 +8957,28 @@
                                   </p:childTnLst>
                                 </p:cTn>
                               </p:par>
+                            </p:childTnLst>
+                          </p:cTn>
+                        </p:par>
+                        <p:par>
+                          <p:cTn id="20" fill="hold">
+                            <p:stCondLst>
+                              <p:cond delay="2800"/>
+                            </p:stCondLst>
+                            <p:childTnLst>
                               <p:par>
-                                <p:cTn id="21" presetID="2" presetClass="entr" presetSubtype="8" fill="hold" grpId="0" nodeType="afterEffect">
+                                <p:cTn presetID="2" presetClass="entr" presetSubtype="8" fill="hold" grpId="0" nodeType="afterEffect">
                                   <p:stCondLst>
-                                    <p:cond delay="2800"/>
+                                    <p:cond delay="0"/>
                                   </p:stCondLst>
                                   <p:childTnLst>
                                     <p:set>
                                       <p:cBhvr>
-                                        <p:cTn id="22" dur="1"/>
+                                        <p:cTn id="21" dur="1" fill="hold">
+                                          <p:stCondLst>
+                                            <p:cond delay="0"/>
+                                          </p:stCondLst>
+                                        </p:cTn>
                                         <p:tgtEl>
                                           <p:spTgt spid="15"/>
                                         </p:tgtEl>
@@ -8365,7 +8992,7 @@
                                     </p:set>
                                     <p:anim calcmode="lin" valueType="num">
                                       <p:cBhvr additive="base">
-                                        <p:cTn id="23" dur="400"/>
+                                        <p:cTn id="22" dur="400"/>
                                         <p:tgtEl>
                                           <p:spTgt spid="15"/>
                                         </p:tgtEl>
@@ -8388,7 +9015,7 @@
                                     </p:anim>
                                     <p:anim calcmode="lin" valueType="num">
                                       <p:cBhvr additive="base">
-                                        <p:cTn id="24" dur="400"/>
+                                        <p:cTn id="23" dur="400"/>
                                         <p:tgtEl>
                                           <p:spTgt spid="15"/>
                                         </p:tgtEl>
@@ -8412,15 +9039,28 @@
                                   </p:childTnLst>
                                 </p:cTn>
                               </p:par>
+                            </p:childTnLst>
+                          </p:cTn>
+                        </p:par>
+                        <p:par>
+                          <p:cTn id="24" fill="hold">
+                            <p:stCondLst>
+                              <p:cond delay="3800"/>
+                            </p:stCondLst>
+                            <p:childTnLst>
                               <p:par>
-                                <p:cTn id="25" presetID="2" presetClass="entr" presetSubtype="8" fill="hold" grpId="0" nodeType="afterEffect">
+                                <p:cTn presetID="2" presetClass="entr" presetSubtype="8" fill="hold" grpId="0" nodeType="afterEffect">
                                   <p:stCondLst>
-                                    <p:cond delay="3800"/>
+                                    <p:cond delay="0"/>
                                   </p:stCondLst>
                                   <p:childTnLst>
                                     <p:set>
                                       <p:cBhvr>
-                                        <p:cTn id="26" dur="1"/>
+                                        <p:cTn id="25" dur="1" fill="hold">
+                                          <p:stCondLst>
+                                            <p:cond delay="0"/>
+                                          </p:stCondLst>
+                                        </p:cTn>
                                         <p:tgtEl>
                                           <p:spTgt spid="20"/>
                                         </p:tgtEl>
@@ -8434,7 +9074,7 @@
                                     </p:set>
                                     <p:anim calcmode="lin" valueType="num">
                                       <p:cBhvr additive="base">
-                                        <p:cTn id="27" dur="400"/>
+                                        <p:cTn id="26" dur="400"/>
                                         <p:tgtEl>
                                           <p:spTgt spid="20"/>
                                         </p:tgtEl>
@@ -8457,7 +9097,7 @@
                                     </p:anim>
                                     <p:anim calcmode="lin" valueType="num">
                                       <p:cBhvr additive="base">
-                                        <p:cTn id="28" dur="400"/>
+                                        <p:cTn id="27" dur="400"/>
                                         <p:tgtEl>
                                           <p:spTgt spid="20"/>
                                         </p:tgtEl>
@@ -8481,15 +9121,28 @@
                                   </p:childTnLst>
                                 </p:cTn>
                               </p:par>
+                            </p:childTnLst>
+                          </p:cTn>
+                        </p:par>
+                        <p:par>
+                          <p:cTn id="28" fill="hold">
+                            <p:stCondLst>
+                              <p:cond delay="4920"/>
+                            </p:stCondLst>
+                            <p:childTnLst>
                               <p:par>
-                                <p:cTn id="29" presetID="2" presetClass="entr" presetSubtype="8" fill="hold" grpId="0" nodeType="afterEffect">
+                                <p:cTn presetID="2" presetClass="entr" presetSubtype="8" fill="hold" grpId="0" nodeType="afterEffect">
                                   <p:stCondLst>
-                                    <p:cond delay="4920"/>
+                                    <p:cond delay="0"/>
                                   </p:stCondLst>
                                   <p:childTnLst>
                                     <p:set>
                                       <p:cBhvr>
-                                        <p:cTn id="30" dur="1"/>
+                                        <p:cTn id="29" dur="1" fill="hold">
+                                          <p:stCondLst>
+                                            <p:cond delay="0"/>
+                                          </p:stCondLst>
+                                        </p:cTn>
                                         <p:tgtEl>
                                           <p:spTgt spid="6"/>
                                         </p:tgtEl>
@@ -8503,7 +9156,7 @@
                                     </p:set>
                                     <p:anim calcmode="lin" valueType="num">
                                       <p:cBhvr additive="base">
-                                        <p:cTn id="31" dur="400"/>
+                                        <p:cTn id="30" dur="400"/>
                                         <p:tgtEl>
                                           <p:spTgt spid="6"/>
                                         </p:tgtEl>
@@ -8526,7 +9179,7 @@
                                     </p:anim>
                                     <p:anim calcmode="lin" valueType="num">
                                       <p:cBhvr additive="base">
-                                        <p:cTn id="32" dur="400"/>
+                                        <p:cTn id="31" dur="400"/>
                                         <p:tgtEl>
                                           <p:spTgt spid="6"/>
                                         </p:tgtEl>
@@ -8550,15 +9203,28 @@
                                   </p:childTnLst>
                                 </p:cTn>
                               </p:par>
+                            </p:childTnLst>
+                          </p:cTn>
+                        </p:par>
+                        <p:par>
+                          <p:cTn id="32" fill="hold">
+                            <p:stCondLst>
+                              <p:cond delay="6160"/>
+                            </p:stCondLst>
+                            <p:childTnLst>
                               <p:par>
-                                <p:cTn id="33" presetID="2" presetClass="entr" presetSubtype="8" fill="hold" grpId="0" nodeType="afterEffect">
+                                <p:cTn presetID="2" presetClass="entr" presetSubtype="8" fill="hold" grpId="0" nodeType="afterEffect">
                                   <p:stCondLst>
-                                    <p:cond delay="6160"/>
+                                    <p:cond delay="0"/>
                                   </p:stCondLst>
                                   <p:childTnLst>
                                     <p:set>
                                       <p:cBhvr>
-                                        <p:cTn id="34" dur="1"/>
+                                        <p:cTn id="33" dur="1" fill="hold">
+                                          <p:stCondLst>
+                                            <p:cond delay="0"/>
+                                          </p:stCondLst>
+                                        </p:cTn>
                                         <p:tgtEl>
                                           <p:spTgt spid="11"/>
                                         </p:tgtEl>
@@ -8572,7 +9238,7 @@
                                     </p:set>
                                     <p:anim calcmode="lin" valueType="num">
                                       <p:cBhvr additive="base">
-                                        <p:cTn id="35" dur="400"/>
+                                        <p:cTn id="34" dur="400"/>
                                         <p:tgtEl>
                                           <p:spTgt spid="11"/>
                                         </p:tgtEl>
@@ -8595,7 +9261,7 @@
                                     </p:anim>
                                     <p:anim calcmode="lin" valueType="num">
                                       <p:cBhvr additive="base">
-                                        <p:cTn id="36" dur="400"/>
+                                        <p:cTn id="35" dur="400"/>
                                         <p:tgtEl>
                                           <p:spTgt spid="11"/>
                                         </p:tgtEl>
@@ -8619,15 +9285,28 @@
                                   </p:childTnLst>
                                 </p:cTn>
                               </p:par>
+                            </p:childTnLst>
+                          </p:cTn>
+                        </p:par>
+                        <p:par>
+                          <p:cTn id="36" fill="hold">
+                            <p:stCondLst>
+                              <p:cond delay="7520"/>
+                            </p:stCondLst>
+                            <p:childTnLst>
                               <p:par>
-                                <p:cTn id="37" presetID="2" presetClass="entr" presetSubtype="8" fill="hold" grpId="0" nodeType="afterEffect">
+                                <p:cTn presetID="2" presetClass="entr" presetSubtype="8" fill="hold" grpId="0" nodeType="afterEffect">
                                   <p:stCondLst>
-                                    <p:cond delay="7520"/>
+                                    <p:cond delay="0"/>
                                   </p:stCondLst>
                                   <p:childTnLst>
                                     <p:set>
                                       <p:cBhvr>
-                                        <p:cTn id="38" dur="1"/>
+                                        <p:cTn id="37" dur="1" fill="hold">
+                                          <p:stCondLst>
+                                            <p:cond delay="0"/>
+                                          </p:stCondLst>
+                                        </p:cTn>
                                         <p:tgtEl>
                                           <p:spTgt spid="16"/>
                                         </p:tgtEl>
@@ -8641,7 +9320,7 @@
                                     </p:set>
                                     <p:anim calcmode="lin" valueType="num">
                                       <p:cBhvr additive="base">
-                                        <p:cTn id="39" dur="400"/>
+                                        <p:cTn id="38" dur="400"/>
                                         <p:tgtEl>
                                           <p:spTgt spid="16"/>
                                         </p:tgtEl>
@@ -8664,7 +9343,7 @@
                                     </p:anim>
                                     <p:anim calcmode="lin" valueType="num">
                                       <p:cBhvr additive="base">
-                                        <p:cTn id="40" dur="400"/>
+                                        <p:cTn id="39" dur="400"/>
                                         <p:tgtEl>
                                           <p:spTgt spid="16"/>
                                         </p:tgtEl>
@@ -8688,15 +9367,28 @@
                                   </p:childTnLst>
                                 </p:cTn>
                               </p:par>
+                            </p:childTnLst>
+                          </p:cTn>
+                        </p:par>
+                        <p:par>
+                          <p:cTn id="40" fill="hold">
+                            <p:stCondLst>
+                              <p:cond delay="9000"/>
+                            </p:stCondLst>
+                            <p:childTnLst>
                               <p:par>
-                                <p:cTn id="41" presetID="2" presetClass="entr" presetSubtype="8" fill="hold" grpId="0" nodeType="afterEffect">
+                                <p:cTn presetID="2" presetClass="entr" presetSubtype="8" fill="hold" grpId="0" nodeType="afterEffect">
                                   <p:stCondLst>
-                                    <p:cond delay="9000"/>
+                                    <p:cond delay="0"/>
                                   </p:stCondLst>
                                   <p:childTnLst>
                                     <p:set>
                                       <p:cBhvr>
-                                        <p:cTn id="42" dur="1"/>
+                                        <p:cTn id="41" dur="1" fill="hold">
+                                          <p:stCondLst>
+                                            <p:cond delay="0"/>
+                                          </p:stCondLst>
+                                        </p:cTn>
                                         <p:tgtEl>
                                           <p:spTgt spid="21"/>
                                         </p:tgtEl>
@@ -8710,7 +9402,7 @@
                                     </p:set>
                                     <p:anim calcmode="lin" valueType="num">
                                       <p:cBhvr additive="base">
-                                        <p:cTn id="43" dur="400"/>
+                                        <p:cTn id="42" dur="400"/>
                                         <p:tgtEl>
                                           <p:spTgt spid="21"/>
                                         </p:tgtEl>
@@ -8733,7 +9425,7 @@
                                     </p:anim>
                                     <p:anim calcmode="lin" valueType="num">
                                       <p:cBhvr additive="base">
-                                        <p:cTn id="44" dur="400"/>
+                                        <p:cTn id="43" dur="400"/>
                                         <p:tgtEl>
                                           <p:spTgt spid="21"/>
                                         </p:tgtEl>
@@ -8757,15 +9449,28 @@
                                   </p:childTnLst>
                                 </p:cTn>
                               </p:par>
+                            </p:childTnLst>
+                          </p:cTn>
+                        </p:par>
+                        <p:par>
+                          <p:cTn id="44" fill="hold">
+                            <p:stCondLst>
+                              <p:cond delay="10600"/>
+                            </p:stCondLst>
+                            <p:childTnLst>
                               <p:par>
-                                <p:cTn id="45" presetID="2" presetClass="entr" presetSubtype="8" fill="hold" grpId="0" nodeType="afterEffect">
+                                <p:cTn presetID="2" presetClass="entr" presetSubtype="8" fill="hold" grpId="0" nodeType="afterEffect">
                                   <p:stCondLst>
-                                    <p:cond delay="10600"/>
+                                    <p:cond delay="0"/>
                                   </p:stCondLst>
                                   <p:childTnLst>
                                     <p:set>
                                       <p:cBhvr>
-                                        <p:cTn id="46" dur="1"/>
+                                        <p:cTn id="45" dur="1" fill="hold">
+                                          <p:stCondLst>
+                                            <p:cond delay="0"/>
+                                          </p:stCondLst>
+                                        </p:cTn>
                                         <p:tgtEl>
                                           <p:spTgt spid="7"/>
                                         </p:tgtEl>
@@ -8779,7 +9484,7 @@
                                     </p:set>
                                     <p:anim calcmode="lin" valueType="num">
                                       <p:cBhvr additive="base">
-                                        <p:cTn id="47" dur="400"/>
+                                        <p:cTn id="46" dur="400"/>
                                         <p:tgtEl>
                                           <p:spTgt spid="7"/>
                                         </p:tgtEl>
@@ -8802,7 +9507,7 @@
                                     </p:anim>
                                     <p:anim calcmode="lin" valueType="num">
                                       <p:cBhvr additive="base">
-                                        <p:cTn id="48" dur="400"/>
+                                        <p:cTn id="47" dur="400"/>
                                         <p:tgtEl>
                                           <p:spTgt spid="7"/>
                                         </p:tgtEl>
@@ -8826,15 +9531,28 @@
                                   </p:childTnLst>
                                 </p:cTn>
                               </p:par>
+                            </p:childTnLst>
+                          </p:cTn>
+                        </p:par>
+                        <p:par>
+                          <p:cTn id="48" fill="hold">
+                            <p:stCondLst>
+                              <p:cond delay="12320"/>
+                            </p:stCondLst>
+                            <p:childTnLst>
                               <p:par>
-                                <p:cTn id="49" presetID="2" presetClass="entr" presetSubtype="8" fill="hold" grpId="0" nodeType="afterEffect">
+                                <p:cTn presetID="2" presetClass="entr" presetSubtype="8" fill="hold" grpId="0" nodeType="afterEffect">
                                   <p:stCondLst>
-                                    <p:cond delay="12320"/>
+                                    <p:cond delay="0"/>
                                   </p:stCondLst>
                                   <p:childTnLst>
                                     <p:set>
                                       <p:cBhvr>
-                                        <p:cTn id="50" dur="1"/>
+                                        <p:cTn id="49" dur="1" fill="hold">
+                                          <p:stCondLst>
+                                            <p:cond delay="0"/>
+                                          </p:stCondLst>
+                                        </p:cTn>
                                         <p:tgtEl>
                                           <p:spTgt spid="12"/>
                                         </p:tgtEl>
@@ -8848,7 +9566,7 @@
                                     </p:set>
                                     <p:anim calcmode="lin" valueType="num">
                                       <p:cBhvr additive="base">
-                                        <p:cTn id="51" dur="400"/>
+                                        <p:cTn id="50" dur="400"/>
                                         <p:tgtEl>
                                           <p:spTgt spid="12"/>
                                         </p:tgtEl>
@@ -8871,7 +9589,7 @@
                                     </p:anim>
                                     <p:anim calcmode="lin" valueType="num">
                                       <p:cBhvr additive="base">
-                                        <p:cTn id="52" dur="400"/>
+                                        <p:cTn id="51" dur="400"/>
                                         <p:tgtEl>
                                           <p:spTgt spid="12"/>
                                         </p:tgtEl>
@@ -8895,15 +9613,28 @@
                                   </p:childTnLst>
                                 </p:cTn>
                               </p:par>
+                            </p:childTnLst>
+                          </p:cTn>
+                        </p:par>
+                        <p:par>
+                          <p:cTn id="52" fill="hold">
+                            <p:stCondLst>
+                              <p:cond delay="14160"/>
+                            </p:stCondLst>
+                            <p:childTnLst>
                               <p:par>
-                                <p:cTn id="53" presetID="2" presetClass="entr" presetSubtype="8" fill="hold" grpId="0" nodeType="afterEffect">
+                                <p:cTn presetID="2" presetClass="entr" presetSubtype="8" fill="hold" grpId="0" nodeType="afterEffect">
                                   <p:stCondLst>
-                                    <p:cond delay="14160"/>
+                                    <p:cond delay="0"/>
                                   </p:stCondLst>
                                   <p:childTnLst>
                                     <p:set>
                                       <p:cBhvr>
-                                        <p:cTn id="54" dur="1"/>
+                                        <p:cTn id="53" dur="1" fill="hold">
+                                          <p:stCondLst>
+                                            <p:cond delay="0"/>
+                                          </p:stCondLst>
+                                        </p:cTn>
                                         <p:tgtEl>
                                           <p:spTgt spid="17"/>
                                         </p:tgtEl>
@@ -8917,7 +9648,7 @@
                                     </p:set>
                                     <p:anim calcmode="lin" valueType="num">
                                       <p:cBhvr additive="base">
-                                        <p:cTn id="55" dur="400"/>
+                                        <p:cTn id="54" dur="400"/>
                                         <p:tgtEl>
                                           <p:spTgt spid="17"/>
                                         </p:tgtEl>
@@ -8940,7 +9671,7 @@
                                     </p:anim>
                                     <p:anim calcmode="lin" valueType="num">
                                       <p:cBhvr additive="base">
-                                        <p:cTn id="56" dur="400"/>
+                                        <p:cTn id="55" dur="400"/>
                                         <p:tgtEl>
                                           <p:spTgt spid="17"/>
                                         </p:tgtEl>
@@ -8964,15 +9695,28 @@
                                   </p:childTnLst>
                                 </p:cTn>
                               </p:par>
+                            </p:childTnLst>
+                          </p:cTn>
+                        </p:par>
+                        <p:par>
+                          <p:cTn id="56" fill="hold">
+                            <p:stCondLst>
+                              <p:cond delay="16120"/>
+                            </p:stCondLst>
+                            <p:childTnLst>
                               <p:par>
-                                <p:cTn id="57" presetID="2" presetClass="entr" presetSubtype="8" fill="hold" grpId="0" nodeType="afterEffect">
+                                <p:cTn presetID="2" presetClass="entr" presetSubtype="8" fill="hold" grpId="0" nodeType="afterEffect">
                                   <p:stCondLst>
-                                    <p:cond delay="16120"/>
+                                    <p:cond delay="0"/>
                                   </p:stCondLst>
                                   <p:childTnLst>
                                     <p:set>
                                       <p:cBhvr>
-                                        <p:cTn id="58" dur="1"/>
+                                        <p:cTn id="57" dur="1" fill="hold">
+                                          <p:stCondLst>
+                                            <p:cond delay="0"/>
+                                          </p:stCondLst>
+                                        </p:cTn>
                                         <p:tgtEl>
                                           <p:spTgt spid="22"/>
                                         </p:tgtEl>
@@ -8986,7 +9730,7 @@
                                     </p:set>
                                     <p:anim calcmode="lin" valueType="num">
                                       <p:cBhvr additive="base">
-                                        <p:cTn id="59" dur="400"/>
+                                        <p:cTn id="58" dur="400"/>
                                         <p:tgtEl>
                                           <p:spTgt spid="22"/>
                                         </p:tgtEl>
@@ -9009,7 +9753,7 @@
                                     </p:anim>
                                     <p:anim calcmode="lin" valueType="num">
                                       <p:cBhvr additive="base">
-                                        <p:cTn id="60" dur="400"/>
+                                        <p:cTn id="59" dur="400"/>
                                         <p:tgtEl>
                                           <p:spTgt spid="22"/>
                                         </p:tgtEl>
@@ -9033,15 +9777,28 @@
                                   </p:childTnLst>
                                 </p:cTn>
                               </p:par>
+                            </p:childTnLst>
+                          </p:cTn>
+                        </p:par>
+                        <p:par>
+                          <p:cTn id="60" fill="hold">
+                            <p:stCondLst>
+                              <p:cond delay="18200"/>
+                            </p:stCondLst>
+                            <p:childTnLst>
                               <p:par>
-                                <p:cTn id="61" presetID="2" presetClass="entr" presetSubtype="8" fill="hold" grpId="0" nodeType="afterEffect">
+                                <p:cTn presetID="2" presetClass="entr" presetSubtype="8" fill="hold" grpId="0" nodeType="afterEffect">
                                   <p:stCondLst>
-                                    <p:cond delay="18200"/>
+                                    <p:cond delay="0"/>
                                   </p:stCondLst>
                                   <p:childTnLst>
                                     <p:set>
                                       <p:cBhvr>
-                                        <p:cTn id="62" dur="1"/>
+                                        <p:cTn id="61" dur="1" fill="hold">
+                                          <p:stCondLst>
+                                            <p:cond delay="0"/>
+                                          </p:stCondLst>
+                                        </p:cTn>
                                         <p:tgtEl>
                                           <p:spTgt spid="9"/>
                                         </p:tgtEl>
@@ -9055,7 +9812,7 @@
                                     </p:set>
                                     <p:anim calcmode="lin" valueType="num">
                                       <p:cBhvr additive="base">
-                                        <p:cTn id="63" dur="400"/>
+                                        <p:cTn id="62" dur="400"/>
                                         <p:tgtEl>
                                           <p:spTgt spid="9"/>
                                         </p:tgtEl>
@@ -9078,7 +9835,7 @@
                                     </p:anim>
                                     <p:anim calcmode="lin" valueType="num">
                                       <p:cBhvr additive="base">
-                                        <p:cTn id="64" dur="400"/>
+                                        <p:cTn id="63" dur="400"/>
                                         <p:tgtEl>
                                           <p:spTgt spid="9"/>
                                         </p:tgtEl>
@@ -9102,15 +9859,28 @@
                                   </p:childTnLst>
                                 </p:cTn>
                               </p:par>
+                            </p:childTnLst>
+                          </p:cTn>
+                        </p:par>
+                        <p:par>
+                          <p:cTn id="64" fill="hold">
+                            <p:stCondLst>
+                              <p:cond delay="20400"/>
+                            </p:stCondLst>
+                            <p:childTnLst>
                               <p:par>
-                                <p:cTn id="65" presetID="2" presetClass="entr" presetSubtype="8" fill="hold" grpId="0" nodeType="afterEffect">
+                                <p:cTn presetID="2" presetClass="entr" presetSubtype="8" fill="hold" grpId="0" nodeType="afterEffect">
                                   <p:stCondLst>
-                                    <p:cond delay="20400"/>
+                                    <p:cond delay="0"/>
                                   </p:stCondLst>
                                   <p:childTnLst>
                                     <p:set>
                                       <p:cBhvr>
-                                        <p:cTn id="66" dur="1"/>
+                                        <p:cTn id="65" dur="1" fill="hold">
+                                          <p:stCondLst>
+                                            <p:cond delay="0"/>
+                                          </p:stCondLst>
+                                        </p:cTn>
                                         <p:tgtEl>
                                           <p:spTgt spid="14"/>
                                         </p:tgtEl>
@@ -9124,7 +9894,7 @@
                                     </p:set>
                                     <p:anim calcmode="lin" valueType="num">
                                       <p:cBhvr additive="base">
-                                        <p:cTn id="67" dur="400"/>
+                                        <p:cTn id="66" dur="400"/>
                                         <p:tgtEl>
                                           <p:spTgt spid="14"/>
                                         </p:tgtEl>
@@ -9147,7 +9917,7 @@
                                     </p:anim>
                                     <p:anim calcmode="lin" valueType="num">
                                       <p:cBhvr additive="base">
-                                        <p:cTn id="68" dur="400"/>
+                                        <p:cTn id="67" dur="400"/>
                                         <p:tgtEl>
                                           <p:spTgt spid="14"/>
                                         </p:tgtEl>
@@ -9171,15 +9941,28 @@
                                   </p:childTnLst>
                                 </p:cTn>
                               </p:par>
+                            </p:childTnLst>
+                          </p:cTn>
+                        </p:par>
+                        <p:par>
+                          <p:cTn id="68" fill="hold">
+                            <p:stCondLst>
+                              <p:cond delay="22720"/>
+                            </p:stCondLst>
+                            <p:childTnLst>
                               <p:par>
-                                <p:cTn id="69" presetID="2" presetClass="entr" presetSubtype="8" fill="hold" grpId="0" nodeType="afterEffect">
+                                <p:cTn presetID="2" presetClass="entr" presetSubtype="8" fill="hold" grpId="0" nodeType="afterEffect">
                                   <p:stCondLst>
-                                    <p:cond delay="22720"/>
+                                    <p:cond delay="0"/>
                                   </p:stCondLst>
                                   <p:childTnLst>
                                     <p:set>
                                       <p:cBhvr>
-                                        <p:cTn id="70" dur="1"/>
+                                        <p:cTn id="69" dur="1" fill="hold">
+                                          <p:stCondLst>
+                                            <p:cond delay="0"/>
+                                          </p:stCondLst>
+                                        </p:cTn>
                                         <p:tgtEl>
                                           <p:spTgt spid="19"/>
                                         </p:tgtEl>
@@ -9193,7 +9976,7 @@
                                     </p:set>
                                     <p:anim calcmode="lin" valueType="num">
                                       <p:cBhvr additive="base">
-                                        <p:cTn id="71" dur="400"/>
+                                        <p:cTn id="70" dur="400"/>
                                         <p:tgtEl>
                                           <p:spTgt spid="19"/>
                                         </p:tgtEl>
@@ -9216,7 +9999,7 @@
                                     </p:anim>
                                     <p:anim calcmode="lin" valueType="num">
                                       <p:cBhvr additive="base">
-                                        <p:cTn id="72" dur="400"/>
+                                        <p:cTn id="71" dur="400"/>
                                         <p:tgtEl>
                                           <p:spTgt spid="19"/>
                                         </p:tgtEl>
@@ -9240,15 +10023,28 @@
                                   </p:childTnLst>
                                 </p:cTn>
                               </p:par>
+                            </p:childTnLst>
+                          </p:cTn>
+                        </p:par>
+                        <p:par>
+                          <p:cTn id="72" fill="hold">
+                            <p:stCondLst>
+                              <p:cond delay="25160"/>
+                            </p:stCondLst>
+                            <p:childTnLst>
                               <p:par>
-                                <p:cTn id="73" presetID="2" presetClass="entr" presetSubtype="8" fill="hold" grpId="0" nodeType="afterEffect">
+                                <p:cTn presetID="2" presetClass="entr" presetSubtype="8" fill="hold" grpId="0" nodeType="afterEffect">
                                   <p:stCondLst>
-                                    <p:cond delay="25160"/>
+                                    <p:cond delay="0"/>
                                   </p:stCondLst>
                                   <p:childTnLst>
                                     <p:set>
                                       <p:cBhvr>
-                                        <p:cTn id="74" dur="1"/>
+                                        <p:cTn id="73" dur="1" fill="hold">
+                                          <p:stCondLst>
+                                            <p:cond delay="0"/>
+                                          </p:stCondLst>
+                                        </p:cTn>
                                         <p:tgtEl>
                                           <p:spTgt spid="8"/>
                                         </p:tgtEl>
@@ -9262,7 +10058,7 @@
                                     </p:set>
                                     <p:anim calcmode="lin" valueType="num">
                                       <p:cBhvr additive="base">
-                                        <p:cTn id="75" dur="400"/>
+                                        <p:cTn id="74" dur="400"/>
                                         <p:tgtEl>
                                           <p:spTgt spid="8"/>
                                         </p:tgtEl>
@@ -9285,7 +10081,7 @@
                                     </p:anim>
                                     <p:anim calcmode="lin" valueType="num">
                                       <p:cBhvr additive="base">
-                                        <p:cTn id="76" dur="400"/>
+                                        <p:cTn id="75" dur="400"/>
                                         <p:tgtEl>
                                           <p:spTgt spid="8"/>
                                         </p:tgtEl>
@@ -9309,15 +10105,28 @@
                                   </p:childTnLst>
                                 </p:cTn>
                               </p:par>
+                            </p:childTnLst>
+                          </p:cTn>
+                        </p:par>
+                        <p:par>
+                          <p:cTn id="76" fill="hold">
+                            <p:stCondLst>
+                              <p:cond delay="27720"/>
+                            </p:stCondLst>
+                            <p:childTnLst>
                               <p:par>
-                                <p:cTn id="77" presetID="2" presetClass="entr" presetSubtype="8" fill="hold" grpId="0" nodeType="afterEffect">
+                                <p:cTn presetID="2" presetClass="entr" presetSubtype="8" fill="hold" grpId="0" nodeType="afterEffect">
                                   <p:stCondLst>
-                                    <p:cond delay="27720"/>
+                                    <p:cond delay="0"/>
                                   </p:stCondLst>
                                   <p:childTnLst>
                                     <p:set>
                                       <p:cBhvr>
-                                        <p:cTn id="78" dur="1"/>
+                                        <p:cTn id="77" dur="1" fill="hold">
+                                          <p:stCondLst>
+                                            <p:cond delay="0"/>
+                                          </p:stCondLst>
+                                        </p:cTn>
                                         <p:tgtEl>
                                           <p:spTgt spid="13"/>
                                         </p:tgtEl>
@@ -9331,7 +10140,7 @@
                                     </p:set>
                                     <p:anim calcmode="lin" valueType="num">
                                       <p:cBhvr additive="base">
-                                        <p:cTn id="79" dur="400"/>
+                                        <p:cTn id="78" dur="400"/>
                                         <p:tgtEl>
                                           <p:spTgt spid="13"/>
                                         </p:tgtEl>
@@ -9354,7 +10163,7 @@
                                     </p:anim>
                                     <p:anim calcmode="lin" valueType="num">
                                       <p:cBhvr additive="base">
-                                        <p:cTn id="80" dur="400"/>
+                                        <p:cTn id="79" dur="400"/>
                                         <p:tgtEl>
                                           <p:spTgt spid="13"/>
                                         </p:tgtEl>
@@ -9378,15 +10187,28 @@
                                   </p:childTnLst>
                                 </p:cTn>
                               </p:par>
+                            </p:childTnLst>
+                          </p:cTn>
+                        </p:par>
+                        <p:par>
+                          <p:cTn id="80" fill="hold">
+                            <p:stCondLst>
+                              <p:cond delay="30400"/>
+                            </p:stCondLst>
+                            <p:childTnLst>
                               <p:par>
-                                <p:cTn id="81" presetID="2" presetClass="entr" presetSubtype="8" fill="hold" grpId="0" nodeType="afterEffect">
+                                <p:cTn presetID="2" presetClass="entr" presetSubtype="8" fill="hold" grpId="0" nodeType="afterEffect">
                                   <p:stCondLst>
-                                    <p:cond delay="30400"/>
+                                    <p:cond delay="0"/>
                                   </p:stCondLst>
                                   <p:childTnLst>
                                     <p:set>
                                       <p:cBhvr>
-                                        <p:cTn id="82" dur="1"/>
+                                        <p:cTn id="81" dur="1" fill="hold">
+                                          <p:stCondLst>
+                                            <p:cond delay="0"/>
+                                          </p:stCondLst>
+                                        </p:cTn>
                                         <p:tgtEl>
                                           <p:spTgt spid="18"/>
                                         </p:tgtEl>
@@ -9400,7 +10222,7 @@
                                     </p:set>
                                     <p:anim calcmode="lin" valueType="num">
                                       <p:cBhvr additive="base">
-                                        <p:cTn id="83" dur="400"/>
+                                        <p:cTn id="82" dur="400"/>
                                         <p:tgtEl>
                                           <p:spTgt spid="18"/>
                                         </p:tgtEl>
@@ -9423,7 +10245,7 @@
                                     </p:anim>
                                     <p:anim calcmode="lin" valueType="num">
                                       <p:cBhvr additive="base">
-                                        <p:cTn id="84" dur="400"/>
+                                        <p:cTn id="83" dur="400"/>
                                         <p:tgtEl>
                                           <p:spTgt spid="18"/>
                                         </p:tgtEl>
@@ -9447,15 +10269,28 @@
                                   </p:childTnLst>
                                 </p:cTn>
                               </p:par>
+                            </p:childTnLst>
+                          </p:cTn>
+                        </p:par>
+                        <p:par>
+                          <p:cTn id="84" fill="hold">
+                            <p:stCondLst>
+                              <p:cond delay="33200"/>
+                            </p:stCondLst>
+                            <p:childTnLst>
                               <p:par>
-                                <p:cTn id="85" presetID="2" presetClass="entr" presetSubtype="8" fill="hold" grpId="0" nodeType="afterEffect">
+                                <p:cTn presetID="2" presetClass="entr" presetSubtype="8" fill="hold" grpId="0" nodeType="afterEffect">
                                   <p:stCondLst>
-                                    <p:cond delay="33200"/>
+                                    <p:cond delay="0"/>
                                   </p:stCondLst>
                                   <p:childTnLst>
                                     <p:set>
                                       <p:cBhvr>
-                                        <p:cTn id="86" dur="1"/>
+                                        <p:cTn id="85" dur="1" fill="hold">
+                                          <p:stCondLst>
+                                            <p:cond delay="0"/>
+                                          </p:stCondLst>
+                                        </p:cTn>
                                         <p:tgtEl>
                                           <p:spTgt spid="23"/>
                                         </p:tgtEl>
@@ -9469,7 +10304,7 @@
                                     </p:set>
                                     <p:anim calcmode="lin" valueType="num">
                                       <p:cBhvr additive="base">
-                                        <p:cTn id="87" dur="400"/>
+                                        <p:cTn id="86" dur="400"/>
                                         <p:tgtEl>
                                           <p:spTgt spid="23"/>
                                         </p:tgtEl>
@@ -9492,7 +10327,7 @@
                                     </p:anim>
                                     <p:anim calcmode="lin" valueType="num">
                                       <p:cBhvr additive="base">
-                                        <p:cTn id="88" dur="400"/>
+                                        <p:cTn id="87" dur="400"/>
                                         <p:tgtEl>
                                           <p:spTgt spid="23"/>
                                         </p:tgtEl>
@@ -9516,15 +10351,28 @@
                                   </p:childTnLst>
                                 </p:cTn>
                               </p:par>
+                            </p:childTnLst>
+                          </p:cTn>
+                        </p:par>
+                        <p:par>
+                          <p:cTn id="88" fill="hold">
+                            <p:stCondLst>
+                              <p:cond delay="36120"/>
+                            </p:stCondLst>
+                            <p:childTnLst>
                               <p:par>
-                                <p:cTn id="89" presetID="2" presetClass="entr" presetSubtype="8" fill="hold" grpId="0" nodeType="afterEffect">
+                                <p:cTn presetID="2" presetClass="entr" presetSubtype="8" fill="hold" grpId="0" nodeType="afterEffect">
                                   <p:stCondLst>
-                                    <p:cond delay="36120"/>
+                                    <p:cond delay="0"/>
                                   </p:stCondLst>
                                   <p:childTnLst>
                                     <p:set>
                                       <p:cBhvr>
-                                        <p:cTn id="90" dur="1"/>
+                                        <p:cTn id="89" dur="1" fill="hold">
+                                          <p:stCondLst>
+                                            <p:cond delay="0"/>
+                                          </p:stCondLst>
+                                        </p:cTn>
                                         <p:tgtEl>
                                           <p:spTgt spid="24"/>
                                         </p:tgtEl>
@@ -9538,7 +10386,7 @@
                                     </p:set>
                                     <p:anim calcmode="lin" valueType="num">
                                       <p:cBhvr additive="base">
-                                        <p:cTn id="91" dur="400"/>
+                                        <p:cTn id="90" dur="400"/>
                                         <p:tgtEl>
                                           <p:spTgt spid="24"/>
                                         </p:tgtEl>
@@ -9561,7 +10409,7 @@
                                     </p:anim>
                                     <p:anim calcmode="lin" valueType="num">
                                       <p:cBhvr additive="base">
-                                        <p:cTn id="92" dur="400"/>
+                                        <p:cTn id="91" dur="400"/>
                                         <p:tgtEl>
                                           <p:spTgt spid="24"/>
                                         </p:tgtEl>
@@ -9585,15 +10433,28 @@
                                   </p:childTnLst>
                                 </p:cTn>
                               </p:par>
+                            </p:childTnLst>
+                          </p:cTn>
+                        </p:par>
+                        <p:par>
+                          <p:cTn id="92" fill="hold">
+                            <p:stCondLst>
+                              <p:cond delay="39160"/>
+                            </p:stCondLst>
+                            <p:childTnLst>
                               <p:par>
-                                <p:cTn id="93" presetID="2" presetClass="entr" presetSubtype="8" fill="hold" grpId="0" nodeType="afterEffect">
+                                <p:cTn presetID="2" presetClass="entr" presetSubtype="8" fill="hold" grpId="0" nodeType="afterEffect">
                                   <p:stCondLst>
-                                    <p:cond delay="39160"/>
+                                    <p:cond delay="0"/>
                                   </p:stCondLst>
                                   <p:childTnLst>
                                     <p:set>
                                       <p:cBhvr>
-                                        <p:cTn id="94" dur="1"/>
+                                        <p:cTn id="93" dur="1" fill="hold">
+                                          <p:stCondLst>
+                                            <p:cond delay="0"/>
+                                          </p:stCondLst>
+                                        </p:cTn>
                                         <p:tgtEl>
                                           <p:spTgt spid="25"/>
                                         </p:tgtEl>
@@ -9607,7 +10468,7 @@
                                     </p:set>
                                     <p:anim calcmode="lin" valueType="num">
                                       <p:cBhvr additive="base">
-                                        <p:cTn id="95" dur="400"/>
+                                        <p:cTn id="94" dur="400"/>
                                         <p:tgtEl>
                                           <p:spTgt spid="25"/>
                                         </p:tgtEl>
@@ -9630,7 +10491,7 @@
                                     </p:anim>
                                     <p:anim calcmode="lin" valueType="num">
                                       <p:cBhvr additive="base">
-                                        <p:cTn id="96" dur="400"/>
+                                        <p:cTn id="95" dur="400"/>
                                         <p:tgtEl>
                                           <p:spTgt spid="25"/>
                                         </p:tgtEl>
@@ -9654,15 +10515,28 @@
                                   </p:childTnLst>
                                 </p:cTn>
                               </p:par>
+                            </p:childTnLst>
+                          </p:cTn>
+                        </p:par>
+                        <p:par>
+                          <p:cTn id="96" fill="hold">
+                            <p:stCondLst>
+                              <p:cond delay="42320"/>
+                            </p:stCondLst>
+                            <p:childTnLst>
                               <p:par>
-                                <p:cTn id="97" presetID="2" presetClass="entr" presetSubtype="8" fill="hold" grpId="0" nodeType="afterEffect">
+                                <p:cTn presetID="2" presetClass="entr" presetSubtype="8" fill="hold" grpId="0" nodeType="afterEffect">
                                   <p:stCondLst>
-                                    <p:cond delay="42320"/>
+                                    <p:cond delay="0"/>
                                   </p:stCondLst>
                                   <p:childTnLst>
                                     <p:set>
                                       <p:cBhvr>
-                                        <p:cTn id="98" dur="1"/>
+                                        <p:cTn id="97" dur="1" fill="hold">
+                                          <p:stCondLst>
+                                            <p:cond delay="0"/>
+                                          </p:stCondLst>
+                                        </p:cTn>
                                         <p:tgtEl>
                                           <p:spTgt spid="26"/>
                                         </p:tgtEl>
@@ -9676,7 +10550,7 @@
                                     </p:set>
                                     <p:anim calcmode="lin" valueType="num">
                                       <p:cBhvr additive="base">
-                                        <p:cTn id="99" dur="400"/>
+                                        <p:cTn id="98" dur="400"/>
                                         <p:tgtEl>
                                           <p:spTgt spid="26"/>
                                         </p:tgtEl>
@@ -9699,7 +10573,7 @@
                                     </p:anim>
                                     <p:anim calcmode="lin" valueType="num">
                                       <p:cBhvr additive="base">
-                                        <p:cTn id="100" dur="400"/>
+                                        <p:cTn id="99" dur="400"/>
                                         <p:tgtEl>
                                           <p:spTgt spid="26"/>
                                         </p:tgtEl>
@@ -10479,10 +11353,7 @@
                   <p:par>
                     <p:cTn id="3" fill="hold">
                       <p:stCondLst>
-                        <p:cond delay="indefinite"/>
-                        <p:cond evt="onBegin" delay="0">
-                          <p:tn val="2"/>
-                        </p:cond>
+                        <p:cond delay="0"/>
                       </p:stCondLst>
                       <p:childTnLst>
                         <p:par>
@@ -10492,14 +11363,18 @@
                             </p:stCondLst>
                             <p:childTnLst>
                               <p:par>
-                                <p:cTn id="5" presetID="22" presetClass="entr" presetSubtype="1" fill="hold" grpId="0" nodeType="afterEffect">
+                                <p:cTn presetID="22" presetClass="entr" presetSubtype="1" fill="hold" grpId="0" nodeType="afterEffect">
                                   <p:stCondLst>
                                     <p:cond delay="0"/>
                                   </p:stCondLst>
                                   <p:childTnLst>
                                     <p:set>
                                       <p:cBhvr>
-                                        <p:cTn id="6" dur="1"/>
+                                        <p:cTn id="5" dur="1" fill="hold">
+                                          <p:stCondLst>
+                                            <p:cond delay="0"/>
+                                          </p:stCondLst>
+                                        </p:cTn>
                                         <p:tgtEl>
                                           <p:spTgt spid="2"/>
                                         </p:tgtEl>
@@ -10513,7 +11388,7 @@
                                     </p:set>
                                     <p:animEffect transition="in" filter="wipe(down)">
                                       <p:cBhvr>
-                                        <p:cTn id="7" dur="500"/>
+                                        <p:cTn id="6" dur="500"/>
                                         <p:tgtEl>
                                           <p:spTgt spid="2"/>
                                         </p:tgtEl>
@@ -10522,15 +11397,28 @@
                                   </p:childTnLst>
                                 </p:cTn>
                               </p:par>
+                            </p:childTnLst>
+                          </p:cTn>
+                        </p:par>
+                        <p:par>
+                          <p:cTn id="7" fill="hold">
+                            <p:stCondLst>
+                              <p:cond delay="650"/>
+                            </p:stCondLst>
+                            <p:childTnLst>
                               <p:par>
-                                <p:cTn id="8" presetID="22" presetClass="entr" presetSubtype="1" fill="hold" grpId="0" nodeType="afterEffect">
+                                <p:cTn presetID="22" presetClass="entr" presetSubtype="1" fill="hold" grpId="0" nodeType="afterEffect">
                                   <p:stCondLst>
-                                    <p:cond delay="650"/>
+                                    <p:cond delay="0"/>
                                   </p:stCondLst>
                                   <p:childTnLst>
                                     <p:set>
                                       <p:cBhvr>
-                                        <p:cTn id="9" dur="1"/>
+                                        <p:cTn id="8" dur="1" fill="hold">
+                                          <p:stCondLst>
+                                            <p:cond delay="0"/>
+                                          </p:stCondLst>
+                                        </p:cTn>
                                         <p:tgtEl>
                                           <p:spTgt spid="3"/>
                                         </p:tgtEl>
@@ -10544,7 +11432,7 @@
                                     </p:set>
                                     <p:animEffect transition="in" filter="wipe(down)">
                                       <p:cBhvr>
-                                        <p:cTn id="10" dur="500"/>
+                                        <p:cTn id="9" dur="500"/>
                                         <p:tgtEl>
                                           <p:spTgt spid="3"/>
                                         </p:tgtEl>
@@ -10553,15 +11441,28 @@
                                   </p:childTnLst>
                                 </p:cTn>
                               </p:par>
+                            </p:childTnLst>
+                          </p:cTn>
+                        </p:par>
+                        <p:par>
+                          <p:cTn id="10" fill="hold">
+                            <p:stCondLst>
+                              <p:cond delay="1450"/>
+                            </p:stCondLst>
+                            <p:childTnLst>
                               <p:par>
-                                <p:cTn id="11" presetID="22" presetClass="entr" presetSubtype="1" fill="hold" grpId="0" nodeType="afterEffect">
+                                <p:cTn presetID="22" presetClass="entr" presetSubtype="1" fill="hold" grpId="0" nodeType="afterEffect">
                                   <p:stCondLst>
-                                    <p:cond delay="1450"/>
+                                    <p:cond delay="0"/>
                                   </p:stCondLst>
                                   <p:childTnLst>
                                     <p:set>
                                       <p:cBhvr>
-                                        <p:cTn id="12" dur="1"/>
+                                        <p:cTn id="11" dur="1" fill="hold">
+                                          <p:stCondLst>
+                                            <p:cond delay="0"/>
+                                          </p:stCondLst>
+                                        </p:cTn>
                                         <p:tgtEl>
                                           <p:spTgt spid="5"/>
                                         </p:tgtEl>
@@ -10575,7 +11476,7 @@
                                     </p:set>
                                     <p:animEffect transition="in" filter="wipe(down)">
                                       <p:cBhvr>
-                                        <p:cTn id="13" dur="500"/>
+                                        <p:cTn id="12" dur="500"/>
                                         <p:tgtEl>
                                           <p:spTgt spid="5"/>
                                         </p:tgtEl>
@@ -10584,15 +11485,28 @@
                                   </p:childTnLst>
                                 </p:cTn>
                               </p:par>
+                            </p:childTnLst>
+                          </p:cTn>
+                        </p:par>
+                        <p:par>
+                          <p:cTn id="13" fill="hold">
+                            <p:stCondLst>
+                              <p:cond delay="2400"/>
+                            </p:stCondLst>
+                            <p:childTnLst>
                               <p:par>
-                                <p:cTn id="14" presetID="22" presetClass="entr" presetSubtype="1" fill="hold" grpId="0" nodeType="afterEffect">
+                                <p:cTn presetID="22" presetClass="entr" presetSubtype="1" fill="hold" grpId="0" nodeType="afterEffect">
                                   <p:stCondLst>
-                                    <p:cond delay="2400"/>
+                                    <p:cond delay="0"/>
                                   </p:stCondLst>
                                   <p:childTnLst>
                                     <p:set>
                                       <p:cBhvr>
-                                        <p:cTn id="15" dur="1"/>
+                                        <p:cTn id="14" dur="1" fill="hold">
+                                          <p:stCondLst>
+                                            <p:cond delay="0"/>
+                                          </p:stCondLst>
+                                        </p:cTn>
                                         <p:tgtEl>
                                           <p:spTgt spid="8"/>
                                         </p:tgtEl>
@@ -10606,7 +11520,7 @@
                                     </p:set>
                                     <p:animEffect transition="in" filter="wipe(down)">
                                       <p:cBhvr>
-                                        <p:cTn id="16" dur="500"/>
+                                        <p:cTn id="15" dur="500"/>
                                         <p:tgtEl>
                                           <p:spTgt spid="8"/>
                                         </p:tgtEl>
@@ -10615,15 +11529,28 @@
                                   </p:childTnLst>
                                 </p:cTn>
                               </p:par>
+                            </p:childTnLst>
+                          </p:cTn>
+                        </p:par>
+                        <p:par>
+                          <p:cTn id="16" fill="hold">
+                            <p:stCondLst>
+                              <p:cond delay="3500"/>
+                            </p:stCondLst>
+                            <p:childTnLst>
                               <p:par>
-                                <p:cTn id="17" presetID="22" presetClass="entr" presetSubtype="1" fill="hold" grpId="0" nodeType="afterEffect">
+                                <p:cTn presetID="22" presetClass="entr" presetSubtype="1" fill="hold" grpId="0" nodeType="afterEffect">
                                   <p:stCondLst>
-                                    <p:cond delay="3500"/>
+                                    <p:cond delay="0"/>
                                   </p:stCondLst>
                                   <p:childTnLst>
                                     <p:set>
                                       <p:cBhvr>
-                                        <p:cTn id="18" dur="1"/>
+                                        <p:cTn id="17" dur="1" fill="hold">
+                                          <p:stCondLst>
+                                            <p:cond delay="0"/>
+                                          </p:stCondLst>
+                                        </p:cTn>
                                         <p:tgtEl>
                                           <p:spTgt spid="12"/>
                                         </p:tgtEl>
@@ -10637,7 +11564,7 @@
                                     </p:set>
                                     <p:animEffect transition="in" filter="wipe(down)">
                                       <p:cBhvr>
-                                        <p:cTn id="19" dur="500"/>
+                                        <p:cTn id="18" dur="500"/>
                                         <p:tgtEl>
                                           <p:spTgt spid="12"/>
                                         </p:tgtEl>
@@ -10646,15 +11573,28 @@
                                   </p:childTnLst>
                                 </p:cTn>
                               </p:par>
+                            </p:childTnLst>
+                          </p:cTn>
+                        </p:par>
+                        <p:par>
+                          <p:cTn id="19" fill="hold">
+                            <p:stCondLst>
+                              <p:cond delay="4750"/>
+                            </p:stCondLst>
+                            <p:childTnLst>
                               <p:par>
-                                <p:cTn id="20" presetID="22" presetClass="entr" presetSubtype="1" fill="hold" grpId="0" nodeType="afterEffect">
+                                <p:cTn presetID="22" presetClass="entr" presetSubtype="1" fill="hold" grpId="0" nodeType="afterEffect">
                                   <p:stCondLst>
-                                    <p:cond delay="4750"/>
+                                    <p:cond delay="0"/>
                                   </p:stCondLst>
                                   <p:childTnLst>
                                     <p:set>
                                       <p:cBhvr>
-                                        <p:cTn id="21" dur="1"/>
+                                        <p:cTn id="20" dur="1" fill="hold">
+                                          <p:stCondLst>
+                                            <p:cond delay="0"/>
+                                          </p:stCondLst>
+                                        </p:cTn>
                                         <p:tgtEl>
                                           <p:spTgt spid="11"/>
                                         </p:tgtEl>
@@ -10668,7 +11608,7 @@
                                     </p:set>
                                     <p:animEffect transition="in" filter="wipe(down)">
                                       <p:cBhvr>
-                                        <p:cTn id="22" dur="500"/>
+                                        <p:cTn id="21" dur="500"/>
                                         <p:tgtEl>
                                           <p:spTgt spid="11"/>
                                         </p:tgtEl>
@@ -10677,15 +11617,28 @@
                                   </p:childTnLst>
                                 </p:cTn>
                               </p:par>
+                            </p:childTnLst>
+                          </p:cTn>
+                        </p:par>
+                        <p:par>
+                          <p:cTn id="22" fill="hold">
+                            <p:stCondLst>
+                              <p:cond delay="6150"/>
+                            </p:stCondLst>
+                            <p:childTnLst>
                               <p:par>
-                                <p:cTn id="23" presetID="22" presetClass="entr" presetSubtype="1" fill="hold" grpId="0" nodeType="afterEffect">
+                                <p:cTn presetID="22" presetClass="entr" presetSubtype="1" fill="hold" grpId="0" nodeType="afterEffect">
                                   <p:stCondLst>
-                                    <p:cond delay="6150"/>
+                                    <p:cond delay="0"/>
                                   </p:stCondLst>
                                   <p:childTnLst>
                                     <p:set>
                                       <p:cBhvr>
-                                        <p:cTn id="24" dur="1"/>
+                                        <p:cTn id="23" dur="1" fill="hold">
+                                          <p:stCondLst>
+                                            <p:cond delay="0"/>
+                                          </p:stCondLst>
+                                        </p:cTn>
                                         <p:tgtEl>
                                           <p:spTgt spid="13"/>
                                         </p:tgtEl>
@@ -10699,7 +11652,7 @@
                                     </p:set>
                                     <p:animEffect transition="in" filter="wipe(down)">
                                       <p:cBhvr>
-                                        <p:cTn id="25" dur="500"/>
+                                        <p:cTn id="24" dur="500"/>
                                         <p:tgtEl>
                                           <p:spTgt spid="13"/>
                                         </p:tgtEl>
@@ -10708,15 +11661,28 @@
                                   </p:childTnLst>
                                 </p:cTn>
                               </p:par>
+                            </p:childTnLst>
+                          </p:cTn>
+                        </p:par>
+                        <p:par>
+                          <p:cTn id="25" fill="hold">
+                            <p:stCondLst>
+                              <p:cond delay="7700"/>
+                            </p:stCondLst>
+                            <p:childTnLst>
                               <p:par>
-                                <p:cTn id="26" presetID="22" presetClass="entr" presetSubtype="1" fill="hold" grpId="0" nodeType="afterEffect">
+                                <p:cTn presetID="22" presetClass="entr" presetSubtype="1" fill="hold" grpId="0" nodeType="afterEffect">
                                   <p:stCondLst>
-                                    <p:cond delay="7700"/>
+                                    <p:cond delay="0"/>
                                   </p:stCondLst>
                                   <p:childTnLst>
                                     <p:set>
                                       <p:cBhvr>
-                                        <p:cTn id="27" dur="1"/>
+                                        <p:cTn id="26" dur="1" fill="hold">
+                                          <p:stCondLst>
+                                            <p:cond delay="0"/>
+                                          </p:stCondLst>
+                                        </p:cTn>
                                         <p:tgtEl>
                                           <p:spTgt spid="6"/>
                                         </p:tgtEl>
@@ -10730,7 +11696,7 @@
                                     </p:set>
                                     <p:animEffect transition="in" filter="wipe(down)">
                                       <p:cBhvr>
-                                        <p:cTn id="28" dur="500"/>
+                                        <p:cTn id="27" dur="500"/>
                                         <p:tgtEl>
                                           <p:spTgt spid="6"/>
                                         </p:tgtEl>
@@ -10739,15 +11705,28 @@
                                   </p:childTnLst>
                                 </p:cTn>
                               </p:par>
+                            </p:childTnLst>
+                          </p:cTn>
+                        </p:par>
+                        <p:par>
+                          <p:cTn id="28" fill="hold">
+                            <p:stCondLst>
+                              <p:cond delay="9400"/>
+                            </p:stCondLst>
+                            <p:childTnLst>
                               <p:par>
-                                <p:cTn id="29" presetID="22" presetClass="entr" presetSubtype="1" fill="hold" grpId="0" nodeType="afterEffect">
+                                <p:cTn presetID="22" presetClass="entr" presetSubtype="1" fill="hold" grpId="0" nodeType="afterEffect">
                                   <p:stCondLst>
-                                    <p:cond delay="9400"/>
+                                    <p:cond delay="0"/>
                                   </p:stCondLst>
                                   <p:childTnLst>
                                     <p:set>
                                       <p:cBhvr>
-                                        <p:cTn id="30" dur="1"/>
+                                        <p:cTn id="29" dur="1" fill="hold">
+                                          <p:stCondLst>
+                                            <p:cond delay="0"/>
+                                          </p:stCondLst>
+                                        </p:cTn>
                                         <p:tgtEl>
                                           <p:spTgt spid="9"/>
                                         </p:tgtEl>
@@ -10761,7 +11740,7 @@
                                     </p:set>
                                     <p:animEffect transition="in" filter="wipe(down)">
                                       <p:cBhvr>
-                                        <p:cTn id="31" dur="500"/>
+                                        <p:cTn id="30" dur="500"/>
                                         <p:tgtEl>
                                           <p:spTgt spid="9"/>
                                         </p:tgtEl>
@@ -10770,15 +11749,28 @@
                                   </p:childTnLst>
                                 </p:cTn>
                               </p:par>
+                            </p:childTnLst>
+                          </p:cTn>
+                        </p:par>
+                        <p:par>
+                          <p:cTn id="31" fill="hold">
+                            <p:stCondLst>
+                              <p:cond delay="11250"/>
+                            </p:stCondLst>
+                            <p:childTnLst>
                               <p:par>
-                                <p:cTn id="32" presetID="22" presetClass="entr" presetSubtype="1" fill="hold" grpId="0" nodeType="afterEffect">
+                                <p:cTn presetID="22" presetClass="entr" presetSubtype="1" fill="hold" grpId="0" nodeType="afterEffect">
                                   <p:stCondLst>
-                                    <p:cond delay="11250"/>
+                                    <p:cond delay="0"/>
                                   </p:stCondLst>
                                   <p:childTnLst>
                                     <p:set>
                                       <p:cBhvr>
-                                        <p:cTn id="33" dur="1"/>
+                                        <p:cTn id="32" dur="1" fill="hold">
+                                          <p:stCondLst>
+                                            <p:cond delay="0"/>
+                                          </p:stCondLst>
+                                        </p:cTn>
                                         <p:tgtEl>
                                           <p:spTgt spid="7"/>
                                         </p:tgtEl>
@@ -10792,7 +11784,7 @@
                                     </p:set>
                                     <p:animEffect transition="in" filter="wipe(down)">
                                       <p:cBhvr>
-                                        <p:cTn id="34" dur="500"/>
+                                        <p:cTn id="33" dur="500"/>
                                         <p:tgtEl>
                                           <p:spTgt spid="7"/>
                                         </p:tgtEl>
@@ -10801,15 +11793,28 @@
                                   </p:childTnLst>
                                 </p:cTn>
                               </p:par>
+                            </p:childTnLst>
+                          </p:cTn>
+                        </p:par>
+                        <p:par>
+                          <p:cTn id="34" fill="hold">
+                            <p:stCondLst>
+                              <p:cond delay="13250"/>
+                            </p:stCondLst>
+                            <p:childTnLst>
                               <p:par>
-                                <p:cTn id="35" presetID="22" presetClass="entr" presetSubtype="1" fill="hold" grpId="0" nodeType="afterEffect">
+                                <p:cTn presetID="22" presetClass="entr" presetSubtype="1" fill="hold" grpId="0" nodeType="afterEffect">
                                   <p:stCondLst>
-                                    <p:cond delay="13250"/>
+                                    <p:cond delay="0"/>
                                   </p:stCondLst>
                                   <p:childTnLst>
                                     <p:set>
                                       <p:cBhvr>
-                                        <p:cTn id="36" dur="1"/>
+                                        <p:cTn id="35" dur="1" fill="hold">
+                                          <p:stCondLst>
+                                            <p:cond delay="0"/>
+                                          </p:stCondLst>
+                                        </p:cTn>
                                         <p:tgtEl>
                                           <p:spTgt spid="10"/>
                                         </p:tgtEl>
@@ -10823,7 +11828,7 @@
                                     </p:set>
                                     <p:animEffect transition="in" filter="wipe(down)">
                                       <p:cBhvr>
-                                        <p:cTn id="37" dur="500"/>
+                                        <p:cTn id="36" dur="500"/>
                                         <p:tgtEl>
                                           <p:spTgt spid="10"/>
                                         </p:tgtEl>
@@ -10832,15 +11837,28 @@
                                   </p:childTnLst>
                                 </p:cTn>
                               </p:par>
+                            </p:childTnLst>
+                          </p:cTn>
+                        </p:par>
+                        <p:par>
+                          <p:cTn id="37" fill="hold">
+                            <p:stCondLst>
+                              <p:cond delay="15400"/>
+                            </p:stCondLst>
+                            <p:childTnLst>
                               <p:par>
-                                <p:cTn id="38" presetID="22" presetClass="entr" presetSubtype="1" fill="hold" grpId="0" nodeType="afterEffect">
+                                <p:cTn presetID="22" presetClass="entr" presetSubtype="1" fill="hold" grpId="0" nodeType="afterEffect">
                                   <p:stCondLst>
-                                    <p:cond delay="15400"/>
+                                    <p:cond delay="0"/>
                                   </p:stCondLst>
                                   <p:childTnLst>
                                     <p:set>
                                       <p:cBhvr>
-                                        <p:cTn id="39" dur="1"/>
+                                        <p:cTn id="38" dur="1" fill="hold">
+                                          <p:stCondLst>
+                                            <p:cond delay="0"/>
+                                          </p:stCondLst>
+                                        </p:cTn>
                                         <p:tgtEl>
                                           <p:spTgt spid="15"/>
                                         </p:tgtEl>
@@ -10854,7 +11872,7 @@
                                     </p:set>
                                     <p:animEffect transition="in" filter="wipe(down)">
                                       <p:cBhvr>
-                                        <p:cTn id="40" dur="500"/>
+                                        <p:cTn id="39" dur="500"/>
                                         <p:tgtEl>
                                           <p:spTgt spid="15"/>
                                         </p:tgtEl>
@@ -10863,15 +11881,28 @@
                                   </p:childTnLst>
                                 </p:cTn>
                               </p:par>
+                            </p:childTnLst>
+                          </p:cTn>
+                        </p:par>
+                        <p:par>
+                          <p:cTn id="40" fill="hold">
+                            <p:stCondLst>
+                              <p:cond delay="17700"/>
+                            </p:stCondLst>
+                            <p:childTnLst>
                               <p:par>
-                                <p:cTn id="41" presetID="22" presetClass="entr" presetSubtype="1" fill="hold" grpId="0" nodeType="afterEffect">
+                                <p:cTn presetID="22" presetClass="entr" presetSubtype="1" fill="hold" grpId="0" nodeType="afterEffect">
                                   <p:stCondLst>
-                                    <p:cond delay="17700"/>
+                                    <p:cond delay="0"/>
                                   </p:stCondLst>
                                   <p:childTnLst>
                                     <p:set>
                                       <p:cBhvr>
-                                        <p:cTn id="42" dur="1"/>
+                                        <p:cTn id="41" dur="1" fill="hold">
+                                          <p:stCondLst>
+                                            <p:cond delay="0"/>
+                                          </p:stCondLst>
+                                        </p:cTn>
                                         <p:tgtEl>
                                           <p:spTgt spid="14"/>
                                         </p:tgtEl>
@@ -10885,7 +11916,7 @@
                                     </p:set>
                                     <p:animEffect transition="in" filter="wipe(down)">
                                       <p:cBhvr>
-                                        <p:cTn id="43" dur="500"/>
+                                        <p:cTn id="42" dur="500"/>
                                         <p:tgtEl>
                                           <p:spTgt spid="14"/>
                                         </p:tgtEl>
@@ -10894,15 +11925,28 @@
                                   </p:childTnLst>
                                 </p:cTn>
                               </p:par>
+                            </p:childTnLst>
+                          </p:cTn>
+                        </p:par>
+                        <p:par>
+                          <p:cTn id="43" fill="hold">
+                            <p:stCondLst>
+                              <p:cond delay="20150"/>
+                            </p:stCondLst>
+                            <p:childTnLst>
                               <p:par>
-                                <p:cTn id="44" presetID="22" presetClass="entr" presetSubtype="1" fill="hold" grpId="0" nodeType="afterEffect">
+                                <p:cTn presetID="22" presetClass="entr" presetSubtype="1" fill="hold" grpId="0" nodeType="afterEffect">
                                   <p:stCondLst>
-                                    <p:cond delay="20150"/>
+                                    <p:cond delay="0"/>
                                   </p:stCondLst>
                                   <p:childTnLst>
                                     <p:set>
                                       <p:cBhvr>
-                                        <p:cTn id="45" dur="1"/>
+                                        <p:cTn id="44" dur="1" fill="hold">
+                                          <p:stCondLst>
+                                            <p:cond delay="0"/>
+                                          </p:stCondLst>
+                                        </p:cTn>
                                         <p:tgtEl>
                                           <p:spTgt spid="16"/>
                                         </p:tgtEl>
@@ -10916,7 +11960,7 @@
                                     </p:set>
                                     <p:animEffect transition="in" filter="wipe(down)">
                                       <p:cBhvr>
-                                        <p:cTn id="46" dur="500"/>
+                                        <p:cTn id="45" dur="500"/>
                                         <p:tgtEl>
                                           <p:spTgt spid="16"/>
                                         </p:tgtEl>
@@ -10925,15 +11969,28 @@
                                   </p:childTnLst>
                                 </p:cTn>
                               </p:par>
+                            </p:childTnLst>
+                          </p:cTn>
+                        </p:par>
+                        <p:par>
+                          <p:cTn id="46" fill="hold">
+                            <p:stCondLst>
+                              <p:cond delay="22750"/>
+                            </p:stCondLst>
+                            <p:childTnLst>
                               <p:par>
-                                <p:cTn id="47" presetID="22" presetClass="entr" presetSubtype="1" fill="hold" grpId="0" nodeType="afterEffect">
+                                <p:cTn presetID="22" presetClass="entr" presetSubtype="1" fill="hold" grpId="0" nodeType="afterEffect">
                                   <p:stCondLst>
-                                    <p:cond delay="22750"/>
+                                    <p:cond delay="0"/>
                                   </p:stCondLst>
                                   <p:childTnLst>
                                     <p:set>
                                       <p:cBhvr>
-                                        <p:cTn id="48" dur="1"/>
+                                        <p:cTn id="47" dur="1" fill="hold">
+                                          <p:stCondLst>
+                                            <p:cond delay="0"/>
+                                          </p:stCondLst>
+                                        </p:cTn>
                                         <p:tgtEl>
                                           <p:spTgt spid="18"/>
                                         </p:tgtEl>
@@ -10947,7 +12004,7 @@
                                     </p:set>
                                     <p:animEffect transition="in" filter="wipe(down)">
                                       <p:cBhvr>
-                                        <p:cTn id="49" dur="500"/>
+                                        <p:cTn id="48" dur="500"/>
                                         <p:tgtEl>
                                           <p:spTgt spid="18"/>
                                         </p:tgtEl>
@@ -10956,15 +12013,28 @@
                                   </p:childTnLst>
                                 </p:cTn>
                               </p:par>
+                            </p:childTnLst>
+                          </p:cTn>
+                        </p:par>
+                        <p:par>
+                          <p:cTn id="49" fill="hold">
+                            <p:stCondLst>
+                              <p:cond delay="25500"/>
+                            </p:stCondLst>
+                            <p:childTnLst>
                               <p:par>
-                                <p:cTn id="50" presetID="22" presetClass="entr" presetSubtype="1" fill="hold" grpId="0" nodeType="afterEffect">
+                                <p:cTn presetID="22" presetClass="entr" presetSubtype="1" fill="hold" grpId="0" nodeType="afterEffect">
                                   <p:stCondLst>
-                                    <p:cond delay="25500"/>
+                                    <p:cond delay="0"/>
                                   </p:stCondLst>
                                   <p:childTnLst>
                                     <p:set>
                                       <p:cBhvr>
-                                        <p:cTn id="51" dur="1"/>
+                                        <p:cTn id="50" dur="1" fill="hold">
+                                          <p:stCondLst>
+                                            <p:cond delay="0"/>
+                                          </p:stCondLst>
+                                        </p:cTn>
                                         <p:tgtEl>
                                           <p:spTgt spid="17"/>
                                         </p:tgtEl>
@@ -10978,7 +12048,7 @@
                                     </p:set>
                                     <p:animEffect transition="in" filter="wipe(down)">
                                       <p:cBhvr>
-                                        <p:cTn id="52" dur="500"/>
+                                        <p:cTn id="51" dur="500"/>
                                         <p:tgtEl>
                                           <p:spTgt spid="17"/>
                                         </p:tgtEl>
@@ -10987,15 +12057,28 @@
                                   </p:childTnLst>
                                 </p:cTn>
                               </p:par>
+                            </p:childTnLst>
+                          </p:cTn>
+                        </p:par>
+                        <p:par>
+                          <p:cTn id="52" fill="hold">
+                            <p:stCondLst>
+                              <p:cond delay="28400"/>
+                            </p:stCondLst>
+                            <p:childTnLst>
                               <p:par>
-                                <p:cTn id="53" presetID="22" presetClass="entr" presetSubtype="1" fill="hold" grpId="0" nodeType="afterEffect">
+                                <p:cTn presetID="22" presetClass="entr" presetSubtype="1" fill="hold" grpId="0" nodeType="afterEffect">
                                   <p:stCondLst>
-                                    <p:cond delay="28400"/>
+                                    <p:cond delay="0"/>
                                   </p:stCondLst>
                                   <p:childTnLst>
                                     <p:set>
                                       <p:cBhvr>
-                                        <p:cTn id="54" dur="1"/>
+                                        <p:cTn id="53" dur="1" fill="hold">
+                                          <p:stCondLst>
+                                            <p:cond delay="0"/>
+                                          </p:stCondLst>
+                                        </p:cTn>
                                         <p:tgtEl>
                                           <p:spTgt spid="19"/>
                                         </p:tgtEl>
@@ -11009,7 +12092,7 @@
                                     </p:set>
                                     <p:animEffect transition="in" filter="wipe(down)">
                                       <p:cBhvr>
-                                        <p:cTn id="55" dur="500"/>
+                                        <p:cTn id="54" dur="500"/>
                                         <p:tgtEl>
                                           <p:spTgt spid="19"/>
                                         </p:tgtEl>
@@ -11018,15 +12101,28 @@
                                   </p:childTnLst>
                                 </p:cTn>
                               </p:par>
+                            </p:childTnLst>
+                          </p:cTn>
+                        </p:par>
+                        <p:par>
+                          <p:cTn id="55" fill="hold">
+                            <p:stCondLst>
+                              <p:cond delay="31450"/>
+                            </p:stCondLst>
+                            <p:childTnLst>
                               <p:par>
-                                <p:cTn id="56" presetID="22" presetClass="entr" presetSubtype="1" fill="hold" grpId="0" nodeType="afterEffect">
+                                <p:cTn presetID="22" presetClass="entr" presetSubtype="1" fill="hold" grpId="0" nodeType="afterEffect">
                                   <p:stCondLst>
-                                    <p:cond delay="31450"/>
+                                    <p:cond delay="0"/>
                                   </p:stCondLst>
                                   <p:childTnLst>
                                     <p:set>
                                       <p:cBhvr>
-                                        <p:cTn id="57" dur="1"/>
+                                        <p:cTn id="56" dur="1" fill="hold">
+                                          <p:stCondLst>
+                                            <p:cond delay="0"/>
+                                          </p:stCondLst>
+                                        </p:cTn>
                                         <p:tgtEl>
                                           <p:spTgt spid="20"/>
                                         </p:tgtEl>
@@ -11040,7 +12136,7 @@
                                     </p:set>
                                     <p:animEffect transition="in" filter="wipe(down)">
                                       <p:cBhvr>
-                                        <p:cTn id="58" dur="500"/>
+                                        <p:cTn id="57" dur="500"/>
                                         <p:tgtEl>
                                           <p:spTgt spid="20"/>
                                         </p:tgtEl>
@@ -11049,15 +12145,28 @@
                                   </p:childTnLst>
                                 </p:cTn>
                               </p:par>
+                            </p:childTnLst>
+                          </p:cTn>
+                        </p:par>
+                        <p:par>
+                          <p:cTn id="58" fill="hold">
+                            <p:stCondLst>
+                              <p:cond delay="34650"/>
+                            </p:stCondLst>
+                            <p:childTnLst>
                               <p:par>
-                                <p:cTn id="59" presetID="22" presetClass="entr" presetSubtype="1" fill="hold" grpId="0" nodeType="afterEffect">
+                                <p:cTn presetID="22" presetClass="entr" presetSubtype="1" fill="hold" grpId="0" nodeType="afterEffect">
                                   <p:stCondLst>
-                                    <p:cond delay="34650"/>
+                                    <p:cond delay="0"/>
                                   </p:stCondLst>
                                   <p:childTnLst>
                                     <p:set>
                                       <p:cBhvr>
-                                        <p:cTn id="60" dur="1"/>
+                                        <p:cTn id="59" dur="1" fill="hold">
+                                          <p:stCondLst>
+                                            <p:cond delay="0"/>
+                                          </p:stCondLst>
+                                        </p:cTn>
                                         <p:tgtEl>
                                           <p:spTgt spid="21"/>
                                         </p:tgtEl>
@@ -11071,7 +12180,7 @@
                                     </p:set>
                                     <p:animEffect transition="in" filter="wipe(down)">
                                       <p:cBhvr>
-                                        <p:cTn id="61" dur="500"/>
+                                        <p:cTn id="60" dur="500"/>
                                         <p:tgtEl>
                                           <p:spTgt spid="21"/>
                                         </p:tgtEl>
@@ -11658,10 +12767,7 @@
                   <p:par>
                     <p:cTn id="3" fill="hold">
                       <p:stCondLst>
-                        <p:cond delay="indefinite"/>
-                        <p:cond evt="onBegin" delay="0">
-                          <p:tn val="2"/>
-                        </p:cond>
+                        <p:cond delay="0"/>
                       </p:stCondLst>
                       <p:childTnLst>
                         <p:par>
@@ -11671,14 +12777,18 @@
                             </p:stCondLst>
                             <p:childTnLst>
                               <p:par>
-                                <p:cTn id="5" presetID="10" presetClass="entr" presetSubtype="0" fill="hold" grpId="0" nodeType="afterEffect">
+                                <p:cTn presetID="10" presetClass="entr" presetSubtype="0" fill="hold" grpId="0" nodeType="afterEffect">
                                   <p:stCondLst>
                                     <p:cond delay="0"/>
                                   </p:stCondLst>
                                   <p:childTnLst>
                                     <p:set>
                                       <p:cBhvr>
-                                        <p:cTn id="6" dur="1"/>
+                                        <p:cTn id="5" dur="1" fill="hold">
+                                          <p:stCondLst>
+                                            <p:cond delay="0"/>
+                                          </p:stCondLst>
+                                        </p:cTn>
                                         <p:tgtEl>
                                           <p:spTgt spid="2"/>
                                         </p:tgtEl>
@@ -11692,7 +12802,7 @@
                                     </p:set>
                                     <p:animEffect transition="in" filter="fade">
                                       <p:cBhvr>
-                                        <p:cTn id="7" dur="400"/>
+                                        <p:cTn id="6" dur="400"/>
                                         <p:tgtEl>
                                           <p:spTgt spid="2"/>
                                         </p:tgtEl>
@@ -11701,15 +12811,28 @@
                                   </p:childTnLst>
                                 </p:cTn>
                               </p:par>
+                            </p:childTnLst>
+                          </p:cTn>
+                        </p:par>
+                        <p:par>
+                          <p:cTn id="7" fill="hold">
+                            <p:stCondLst>
+                              <p:cond delay="550"/>
+                            </p:stCondLst>
+                            <p:childTnLst>
                               <p:par>
-                                <p:cTn id="8" presetID="10" presetClass="entr" presetSubtype="0" fill="hold" grpId="0" nodeType="afterEffect">
+                                <p:cTn presetID="10" presetClass="entr" presetSubtype="0" fill="hold" grpId="0" nodeType="afterEffect">
                                   <p:stCondLst>
-                                    <p:cond delay="550"/>
+                                    <p:cond delay="0"/>
                                   </p:stCondLst>
                                   <p:childTnLst>
                                     <p:set>
                                       <p:cBhvr>
-                                        <p:cTn id="9" dur="1"/>
+                                        <p:cTn id="8" dur="1" fill="hold">
+                                          <p:stCondLst>
+                                            <p:cond delay="0"/>
+                                          </p:stCondLst>
+                                        </p:cTn>
                                         <p:tgtEl>
                                           <p:spTgt spid="3"/>
                                         </p:tgtEl>
@@ -11723,7 +12846,7 @@
                                     </p:set>
                                     <p:animEffect transition="in" filter="fade">
                                       <p:cBhvr>
-                                        <p:cTn id="10" dur="400"/>
+                                        <p:cTn id="9" dur="400"/>
                                         <p:tgtEl>
                                           <p:spTgt spid="3"/>
                                         </p:tgtEl>
@@ -11732,15 +12855,28 @@
                                   </p:childTnLst>
                                 </p:cTn>
                               </p:par>
+                            </p:childTnLst>
+                          </p:cTn>
+                        </p:par>
+                        <p:par>
+                          <p:cTn id="10" fill="hold">
+                            <p:stCondLst>
+                              <p:cond delay="1250"/>
+                            </p:stCondLst>
+                            <p:childTnLst>
                               <p:par>
-                                <p:cTn id="11" presetID="10" presetClass="entr" presetSubtype="0" fill="hold" grpId="0" nodeType="afterEffect">
+                                <p:cTn presetID="10" presetClass="entr" presetSubtype="0" fill="hold" grpId="0" nodeType="afterEffect">
                                   <p:stCondLst>
-                                    <p:cond delay="1250"/>
+                                    <p:cond delay="0"/>
                                   </p:stCondLst>
                                   <p:childTnLst>
                                     <p:set>
                                       <p:cBhvr>
-                                        <p:cTn id="12" dur="1"/>
+                                        <p:cTn id="11" dur="1" fill="hold">
+                                          <p:stCondLst>
+                                            <p:cond delay="0"/>
+                                          </p:stCondLst>
+                                        </p:cTn>
                                         <p:tgtEl>
                                           <p:spTgt spid="5"/>
                                         </p:tgtEl>
@@ -11754,7 +12890,7 @@
                                     </p:set>
                                     <p:animEffect transition="in" filter="fade">
                                       <p:cBhvr>
-                                        <p:cTn id="13" dur="400"/>
+                                        <p:cTn id="12" dur="400"/>
                                         <p:tgtEl>
                                           <p:spTgt spid="5"/>
                                         </p:tgtEl>
@@ -11763,15 +12899,28 @@
                                   </p:childTnLst>
                                 </p:cTn>
                               </p:par>
+                            </p:childTnLst>
+                          </p:cTn>
+                        </p:par>
+                        <p:par>
+                          <p:cTn id="13" fill="hold">
+                            <p:stCondLst>
+                              <p:cond delay="2100"/>
+                            </p:stCondLst>
+                            <p:childTnLst>
                               <p:par>
-                                <p:cTn id="14" presetID="10" presetClass="entr" presetSubtype="0" fill="hold" grpId="0" nodeType="afterEffect">
+                                <p:cTn presetID="10" presetClass="entr" presetSubtype="0" fill="hold" grpId="0" nodeType="afterEffect">
                                   <p:stCondLst>
-                                    <p:cond delay="2100"/>
+                                    <p:cond delay="0"/>
                                   </p:stCondLst>
                                   <p:childTnLst>
                                     <p:set>
                                       <p:cBhvr>
-                                        <p:cTn id="15" dur="1"/>
+                                        <p:cTn id="14" dur="1" fill="hold">
+                                          <p:stCondLst>
+                                            <p:cond delay="0"/>
+                                          </p:stCondLst>
+                                        </p:cTn>
                                         <p:tgtEl>
                                           <p:spTgt spid="9"/>
                                         </p:tgtEl>
@@ -11785,7 +12934,7 @@
                                     </p:set>
                                     <p:animEffect transition="in" filter="fade">
                                       <p:cBhvr>
-                                        <p:cTn id="16" dur="400"/>
+                                        <p:cTn id="15" dur="400"/>
                                         <p:tgtEl>
                                           <p:spTgt spid="9"/>
                                         </p:tgtEl>
@@ -11794,15 +12943,28 @@
                                   </p:childTnLst>
                                 </p:cTn>
                               </p:par>
+                            </p:childTnLst>
+                          </p:cTn>
+                        </p:par>
+                        <p:par>
+                          <p:cTn id="16" fill="hold">
+                            <p:stCondLst>
+                              <p:cond delay="3100"/>
+                            </p:stCondLst>
+                            <p:childTnLst>
                               <p:par>
-                                <p:cTn id="17" presetID="10" presetClass="entr" presetSubtype="0" fill="hold" grpId="0" nodeType="afterEffect">
+                                <p:cTn presetID="10" presetClass="entr" presetSubtype="0" fill="hold" grpId="0" nodeType="afterEffect">
                                   <p:stCondLst>
-                                    <p:cond delay="3100"/>
+                                    <p:cond delay="0"/>
                                   </p:stCondLst>
                                   <p:childTnLst>
                                     <p:set>
                                       <p:cBhvr>
-                                        <p:cTn id="18" dur="1"/>
+                                        <p:cTn id="17" dur="1" fill="hold">
+                                          <p:stCondLst>
+                                            <p:cond delay="0"/>
+                                          </p:stCondLst>
+                                        </p:cTn>
                                         <p:tgtEl>
                                           <p:spTgt spid="6"/>
                                         </p:tgtEl>
@@ -11816,7 +12978,7 @@
                                     </p:set>
                                     <p:animEffect transition="in" filter="fade">
                                       <p:cBhvr>
-                                        <p:cTn id="19" dur="400"/>
+                                        <p:cTn id="18" dur="400"/>
                                         <p:tgtEl>
                                           <p:spTgt spid="6"/>
                                         </p:tgtEl>
@@ -11825,15 +12987,28 @@
                                   </p:childTnLst>
                                 </p:cTn>
                               </p:par>
+                            </p:childTnLst>
+                          </p:cTn>
+                        </p:par>
+                        <p:par>
+                          <p:cTn id="19" fill="hold">
+                            <p:stCondLst>
+                              <p:cond delay="4250"/>
+                            </p:stCondLst>
+                            <p:childTnLst>
                               <p:par>
-                                <p:cTn id="20" presetID="10" presetClass="entr" presetSubtype="0" fill="hold" grpId="0" nodeType="afterEffect">
+                                <p:cTn presetID="10" presetClass="entr" presetSubtype="0" fill="hold" grpId="0" nodeType="afterEffect">
                                   <p:stCondLst>
-                                    <p:cond delay="4250"/>
+                                    <p:cond delay="0"/>
                                   </p:stCondLst>
                                   <p:childTnLst>
                                     <p:set>
                                       <p:cBhvr>
-                                        <p:cTn id="21" dur="1"/>
+                                        <p:cTn id="20" dur="1" fill="hold">
+                                          <p:stCondLst>
+                                            <p:cond delay="0"/>
+                                          </p:stCondLst>
+                                        </p:cTn>
                                         <p:tgtEl>
                                           <p:spTgt spid="10"/>
                                         </p:tgtEl>
@@ -11847,7 +13022,7 @@
                                     </p:set>
                                     <p:animEffect transition="in" filter="fade">
                                       <p:cBhvr>
-                                        <p:cTn id="22" dur="400"/>
+                                        <p:cTn id="21" dur="400"/>
                                         <p:tgtEl>
                                           <p:spTgt spid="10"/>
                                         </p:tgtEl>
@@ -11856,15 +13031,28 @@
                                   </p:childTnLst>
                                 </p:cTn>
                               </p:par>
+                            </p:childTnLst>
+                          </p:cTn>
+                        </p:par>
+                        <p:par>
+                          <p:cTn id="22" fill="hold">
+                            <p:stCondLst>
+                              <p:cond delay="5550"/>
+                            </p:stCondLst>
+                            <p:childTnLst>
                               <p:par>
-                                <p:cTn id="23" presetID="10" presetClass="entr" presetSubtype="0" fill="hold" grpId="0" nodeType="afterEffect">
+                                <p:cTn presetID="10" presetClass="entr" presetSubtype="0" fill="hold" grpId="0" nodeType="afterEffect">
                                   <p:stCondLst>
-                                    <p:cond delay="5550"/>
+                                    <p:cond delay="0"/>
                                   </p:stCondLst>
                                   <p:childTnLst>
                                     <p:set>
                                       <p:cBhvr>
-                                        <p:cTn id="24" dur="1"/>
+                                        <p:cTn id="23" dur="1" fill="hold">
+                                          <p:stCondLst>
+                                            <p:cond delay="0"/>
+                                          </p:stCondLst>
+                                        </p:cTn>
                                         <p:tgtEl>
                                           <p:spTgt spid="7"/>
                                         </p:tgtEl>
@@ -11878,7 +13066,7 @@
                                     </p:set>
                                     <p:animEffect transition="in" filter="fade">
                                       <p:cBhvr>
-                                        <p:cTn id="25" dur="400"/>
+                                        <p:cTn id="24" dur="400"/>
                                         <p:tgtEl>
                                           <p:spTgt spid="7"/>
                                         </p:tgtEl>
@@ -11887,15 +13075,28 @@
                                   </p:childTnLst>
                                 </p:cTn>
                               </p:par>
+                            </p:childTnLst>
+                          </p:cTn>
+                        </p:par>
+                        <p:par>
+                          <p:cTn id="25" fill="hold">
+                            <p:stCondLst>
+                              <p:cond delay="7000"/>
+                            </p:stCondLst>
+                            <p:childTnLst>
                               <p:par>
-                                <p:cTn id="26" presetID="10" presetClass="entr" presetSubtype="0" fill="hold" grpId="0" nodeType="afterEffect">
+                                <p:cTn presetID="10" presetClass="entr" presetSubtype="0" fill="hold" grpId="0" nodeType="afterEffect">
                                   <p:stCondLst>
-                                    <p:cond delay="7000"/>
+                                    <p:cond delay="0"/>
                                   </p:stCondLst>
                                   <p:childTnLst>
                                     <p:set>
                                       <p:cBhvr>
-                                        <p:cTn id="27" dur="1"/>
+                                        <p:cTn id="26" dur="1" fill="hold">
+                                          <p:stCondLst>
+                                            <p:cond delay="0"/>
+                                          </p:stCondLst>
+                                        </p:cTn>
                                         <p:tgtEl>
                                           <p:spTgt spid="11"/>
                                         </p:tgtEl>
@@ -11909,7 +13110,7 @@
                                     </p:set>
                                     <p:animEffect transition="in" filter="fade">
                                       <p:cBhvr>
-                                        <p:cTn id="28" dur="400"/>
+                                        <p:cTn id="27" dur="400"/>
                                         <p:tgtEl>
                                           <p:spTgt spid="11"/>
                                         </p:tgtEl>
@@ -11918,15 +13119,28 @@
                                   </p:childTnLst>
                                 </p:cTn>
                               </p:par>
+                            </p:childTnLst>
+                          </p:cTn>
+                        </p:par>
+                        <p:par>
+                          <p:cTn id="28" fill="hold">
+                            <p:stCondLst>
+                              <p:cond delay="8600"/>
+                            </p:stCondLst>
+                            <p:childTnLst>
                               <p:par>
-                                <p:cTn id="29" presetID="10" presetClass="entr" presetSubtype="0" fill="hold" grpId="0" nodeType="afterEffect">
+                                <p:cTn presetID="10" presetClass="entr" presetSubtype="0" fill="hold" grpId="0" nodeType="afterEffect">
                                   <p:stCondLst>
-                                    <p:cond delay="8600"/>
+                                    <p:cond delay="0"/>
                                   </p:stCondLst>
                                   <p:childTnLst>
                                     <p:set>
                                       <p:cBhvr>
-                                        <p:cTn id="30" dur="1"/>
+                                        <p:cTn id="29" dur="1" fill="hold">
+                                          <p:stCondLst>
+                                            <p:cond delay="0"/>
+                                          </p:stCondLst>
+                                        </p:cTn>
                                         <p:tgtEl>
                                           <p:spTgt spid="8"/>
                                         </p:tgtEl>
@@ -11940,7 +13154,7 @@
                                     </p:set>
                                     <p:animEffect transition="in" filter="fade">
                                       <p:cBhvr>
-                                        <p:cTn id="31" dur="400"/>
+                                        <p:cTn id="30" dur="400"/>
                                         <p:tgtEl>
                                           <p:spTgt spid="8"/>
                                         </p:tgtEl>
@@ -11949,15 +13163,28 @@
                                   </p:childTnLst>
                                 </p:cTn>
                               </p:par>
+                            </p:childTnLst>
+                          </p:cTn>
+                        </p:par>
+                        <p:par>
+                          <p:cTn id="31" fill="hold">
+                            <p:stCondLst>
+                              <p:cond delay="10350"/>
+                            </p:stCondLst>
+                            <p:childTnLst>
                               <p:par>
-                                <p:cTn id="32" presetID="10" presetClass="entr" presetSubtype="0" fill="hold" grpId="0" nodeType="afterEffect">
+                                <p:cTn presetID="10" presetClass="entr" presetSubtype="0" fill="hold" grpId="0" nodeType="afterEffect">
                                   <p:stCondLst>
-                                    <p:cond delay="10350"/>
+                                    <p:cond delay="0"/>
                                   </p:stCondLst>
                                   <p:childTnLst>
                                     <p:set>
                                       <p:cBhvr>
-                                        <p:cTn id="33" dur="1"/>
+                                        <p:cTn id="32" dur="1" fill="hold">
+                                          <p:stCondLst>
+                                            <p:cond delay="0"/>
+                                          </p:stCondLst>
+                                        </p:cTn>
                                         <p:tgtEl>
                                           <p:spTgt spid="12"/>
                                         </p:tgtEl>
@@ -11971,7 +13198,7 @@
                                     </p:set>
                                     <p:animEffect transition="in" filter="fade">
                                       <p:cBhvr>
-                                        <p:cTn id="34" dur="400"/>
+                                        <p:cTn id="33" dur="400"/>
                                         <p:tgtEl>
                                           <p:spTgt spid="12"/>
                                         </p:tgtEl>
@@ -11980,15 +13207,28 @@
                                   </p:childTnLst>
                                 </p:cTn>
                               </p:par>
+                            </p:childTnLst>
+                          </p:cTn>
+                        </p:par>
+                        <p:par>
+                          <p:cTn id="34" fill="hold">
+                            <p:stCondLst>
+                              <p:cond delay="12250"/>
+                            </p:stCondLst>
+                            <p:childTnLst>
                               <p:par>
-                                <p:cTn id="35" presetID="10" presetClass="entr" presetSubtype="0" fill="hold" grpId="0" nodeType="afterEffect">
+                                <p:cTn presetID="10" presetClass="entr" presetSubtype="0" fill="hold" grpId="0" nodeType="afterEffect">
                                   <p:stCondLst>
-                                    <p:cond delay="12250"/>
+                                    <p:cond delay="0"/>
                                   </p:stCondLst>
                                   <p:childTnLst>
                                     <p:set>
                                       <p:cBhvr>
-                                        <p:cTn id="36" dur="1"/>
+                                        <p:cTn id="35" dur="1" fill="hold">
+                                          <p:stCondLst>
+                                            <p:cond delay="0"/>
+                                          </p:stCondLst>
+                                        </p:cTn>
                                         <p:tgtEl>
                                           <p:spTgt spid="13"/>
                                         </p:tgtEl>
@@ -12002,7 +13242,7 @@
                                     </p:set>
                                     <p:animEffect transition="in" filter="fade">
                                       <p:cBhvr>
-                                        <p:cTn id="37" dur="400"/>
+                                        <p:cTn id="36" dur="400"/>
                                         <p:tgtEl>
                                           <p:spTgt spid="13"/>
                                         </p:tgtEl>
@@ -12011,15 +13251,28 @@
                                   </p:childTnLst>
                                 </p:cTn>
                               </p:par>
+                            </p:childTnLst>
+                          </p:cTn>
+                        </p:par>
+                        <p:par>
+                          <p:cTn id="37" fill="hold">
+                            <p:stCondLst>
+                              <p:cond delay="14300"/>
+                            </p:stCondLst>
+                            <p:childTnLst>
                               <p:par>
-                                <p:cTn id="38" presetID="10" presetClass="entr" presetSubtype="0" fill="hold" grpId="0" nodeType="afterEffect">
+                                <p:cTn presetID="10" presetClass="entr" presetSubtype="0" fill="hold" grpId="0" nodeType="afterEffect">
                                   <p:stCondLst>
-                                    <p:cond delay="14300"/>
+                                    <p:cond delay="0"/>
                                   </p:stCondLst>
                                   <p:childTnLst>
                                     <p:set>
                                       <p:cBhvr>
-                                        <p:cTn id="39" dur="1"/>
+                                        <p:cTn id="38" dur="1" fill="hold">
+                                          <p:stCondLst>
+                                            <p:cond delay="0"/>
+                                          </p:stCondLst>
+                                        </p:cTn>
                                         <p:tgtEl>
                                           <p:spTgt spid="14"/>
                                         </p:tgtEl>
@@ -12033,7 +13286,7 @@
                                     </p:set>
                                     <p:animEffect transition="in" filter="fade">
                                       <p:cBhvr>
-                                        <p:cTn id="40" dur="400"/>
+                                        <p:cTn id="39" dur="400"/>
                                         <p:tgtEl>
                                           <p:spTgt spid="14"/>
                                         </p:tgtEl>
@@ -12042,15 +13295,28 @@
                                   </p:childTnLst>
                                 </p:cTn>
                               </p:par>
+                            </p:childTnLst>
+                          </p:cTn>
+                        </p:par>
+                        <p:par>
+                          <p:cTn id="40" fill="hold">
+                            <p:stCondLst>
+                              <p:cond delay="16500"/>
+                            </p:stCondLst>
+                            <p:childTnLst>
                               <p:par>
-                                <p:cTn id="41" presetID="10" presetClass="entr" presetSubtype="0" fill="hold" grpId="0" nodeType="afterEffect">
+                                <p:cTn presetID="10" presetClass="entr" presetSubtype="0" fill="hold" grpId="0" nodeType="afterEffect">
                                   <p:stCondLst>
-                                    <p:cond delay="16500"/>
+                                    <p:cond delay="0"/>
                                   </p:stCondLst>
                                   <p:childTnLst>
                                     <p:set>
                                       <p:cBhvr>
-                                        <p:cTn id="42" dur="1"/>
+                                        <p:cTn id="41" dur="1" fill="hold">
+                                          <p:stCondLst>
+                                            <p:cond delay="0"/>
+                                          </p:stCondLst>
+                                        </p:cTn>
                                         <p:tgtEl>
                                           <p:spTgt spid="15"/>
                                         </p:tgtEl>
@@ -12064,7 +13330,7 @@
                                     </p:set>
                                     <p:animEffect transition="in" filter="fade">
                                       <p:cBhvr>
-                                        <p:cTn id="43" dur="400"/>
+                                        <p:cTn id="42" dur="400"/>
                                         <p:tgtEl>
                                           <p:spTgt spid="15"/>
                                         </p:tgtEl>
@@ -12764,10 +14030,7 @@
                   <p:par>
                     <p:cTn id="3" fill="hold">
                       <p:stCondLst>
-                        <p:cond delay="indefinite"/>
-                        <p:cond evt="onBegin" delay="0">
-                          <p:tn val="2"/>
-                        </p:cond>
+                        <p:cond delay="0"/>
                       </p:stCondLst>
                       <p:childTnLst>
                         <p:par>
@@ -12777,14 +14040,18 @@
                             </p:stCondLst>
                             <p:childTnLst>
                               <p:par>
-                                <p:cTn id="5" presetID="22" presetClass="entr" presetSubtype="8" fill="hold" grpId="0" nodeType="afterEffect">
+                                <p:cTn presetID="22" presetClass="entr" presetSubtype="8" fill="hold" grpId="0" nodeType="afterEffect">
                                   <p:stCondLst>
                                     <p:cond delay="0"/>
                                   </p:stCondLst>
                                   <p:childTnLst>
                                     <p:set>
                                       <p:cBhvr>
-                                        <p:cTn id="6" dur="1"/>
+                                        <p:cTn id="5" dur="1" fill="hold">
+                                          <p:stCondLst>
+                                            <p:cond delay="0"/>
+                                          </p:stCondLst>
+                                        </p:cTn>
                                         <p:tgtEl>
                                           <p:spTgt spid="2"/>
                                         </p:tgtEl>
@@ -12798,7 +14065,7 @@
                                     </p:set>
                                     <p:animEffect transition="in" filter="wipe(right)">
                                       <p:cBhvr>
-                                        <p:cTn id="7" dur="450"/>
+                                        <p:cTn id="6" dur="450"/>
                                         <p:tgtEl>
                                           <p:spTgt spid="2"/>
                                         </p:tgtEl>
@@ -12807,15 +14074,28 @@
                                   </p:childTnLst>
                                 </p:cTn>
                               </p:par>
+                            </p:childTnLst>
+                          </p:cTn>
+                        </p:par>
+                        <p:par>
+                          <p:cTn id="7" fill="hold">
+                            <p:stCondLst>
+                              <p:cond delay="570"/>
+                            </p:stCondLst>
+                            <p:childTnLst>
                               <p:par>
-                                <p:cTn id="8" presetID="22" presetClass="entr" presetSubtype="8" fill="hold" grpId="0" nodeType="afterEffect">
+                                <p:cTn presetID="22" presetClass="entr" presetSubtype="8" fill="hold" grpId="0" nodeType="afterEffect">
                                   <p:stCondLst>
-                                    <p:cond delay="570"/>
+                                    <p:cond delay="0"/>
                                   </p:stCondLst>
                                   <p:childTnLst>
                                     <p:set>
                                       <p:cBhvr>
-                                        <p:cTn id="9" dur="1"/>
+                                        <p:cTn id="8" dur="1" fill="hold">
+                                          <p:stCondLst>
+                                            <p:cond delay="0"/>
+                                          </p:stCondLst>
+                                        </p:cTn>
                                         <p:tgtEl>
                                           <p:spTgt spid="3"/>
                                         </p:tgtEl>
@@ -12829,7 +14109,7 @@
                                     </p:set>
                                     <p:animEffect transition="in" filter="wipe(right)">
                                       <p:cBhvr>
-                                        <p:cTn id="10" dur="450"/>
+                                        <p:cTn id="9" dur="450"/>
                                         <p:tgtEl>
                                           <p:spTgt spid="3"/>
                                         </p:tgtEl>
@@ -12838,15 +14118,28 @@
                                   </p:childTnLst>
                                 </p:cTn>
                               </p:par>
+                            </p:childTnLst>
+                          </p:cTn>
+                        </p:par>
+                        <p:par>
+                          <p:cTn id="10" fill="hold">
+                            <p:stCondLst>
+                              <p:cond delay="1260"/>
+                            </p:stCondLst>
+                            <p:childTnLst>
                               <p:par>
-                                <p:cTn id="11" presetID="22" presetClass="entr" presetSubtype="8" fill="hold" grpId="0" nodeType="afterEffect">
+                                <p:cTn presetID="22" presetClass="entr" presetSubtype="8" fill="hold" grpId="0" nodeType="afterEffect">
                                   <p:stCondLst>
-                                    <p:cond delay="1260"/>
+                                    <p:cond delay="0"/>
                                   </p:stCondLst>
                                   <p:childTnLst>
                                     <p:set>
                                       <p:cBhvr>
-                                        <p:cTn id="12" dur="1"/>
+                                        <p:cTn id="11" dur="1" fill="hold">
+                                          <p:stCondLst>
+                                            <p:cond delay="0"/>
+                                          </p:stCondLst>
+                                        </p:cTn>
                                         <p:tgtEl>
                                           <p:spTgt spid="5"/>
                                         </p:tgtEl>
@@ -12860,7 +14153,7 @@
                                     </p:set>
                                     <p:animEffect transition="in" filter="wipe(right)">
                                       <p:cBhvr>
-                                        <p:cTn id="13" dur="450"/>
+                                        <p:cTn id="12" dur="450"/>
                                         <p:tgtEl>
                                           <p:spTgt spid="5"/>
                                         </p:tgtEl>
@@ -12869,15 +14162,28 @@
                                   </p:childTnLst>
                                 </p:cTn>
                               </p:par>
+                            </p:childTnLst>
+                          </p:cTn>
+                        </p:par>
+                        <p:par>
+                          <p:cTn id="13" fill="hold">
+                            <p:stCondLst>
+                              <p:cond delay="2070"/>
+                            </p:stCondLst>
+                            <p:childTnLst>
                               <p:par>
-                                <p:cTn id="14" presetID="22" presetClass="entr" presetSubtype="8" fill="hold" grpId="0" nodeType="afterEffect">
+                                <p:cTn presetID="22" presetClass="entr" presetSubtype="8" fill="hold" grpId="0" nodeType="afterEffect">
                                   <p:stCondLst>
-                                    <p:cond delay="2070"/>
+                                    <p:cond delay="0"/>
                                   </p:stCondLst>
                                   <p:childTnLst>
                                     <p:set>
                                       <p:cBhvr>
-                                        <p:cTn id="15" dur="1"/>
+                                        <p:cTn id="14" dur="1" fill="hold">
+                                          <p:stCondLst>
+                                            <p:cond delay="0"/>
+                                          </p:stCondLst>
+                                        </p:cTn>
                                         <p:tgtEl>
                                           <p:spTgt spid="6"/>
                                         </p:tgtEl>
@@ -12891,7 +14197,7 @@
                                     </p:set>
                                     <p:animEffect transition="in" filter="wipe(right)">
                                       <p:cBhvr>
-                                        <p:cTn id="16" dur="450"/>
+                                        <p:cTn id="15" dur="450"/>
                                         <p:tgtEl>
                                           <p:spTgt spid="6"/>
                                         </p:tgtEl>
@@ -12900,15 +14206,28 @@
                                   </p:childTnLst>
                                 </p:cTn>
                               </p:par>
+                            </p:childTnLst>
+                          </p:cTn>
+                        </p:par>
+                        <p:par>
+                          <p:cTn id="16" fill="hold">
+                            <p:stCondLst>
+                              <p:cond delay="3000"/>
+                            </p:stCondLst>
+                            <p:childTnLst>
                               <p:par>
-                                <p:cTn id="17" presetID="22" presetClass="entr" presetSubtype="8" fill="hold" grpId="0" nodeType="afterEffect">
+                                <p:cTn presetID="22" presetClass="entr" presetSubtype="8" fill="hold" grpId="0" nodeType="afterEffect">
                                   <p:stCondLst>
-                                    <p:cond delay="3000"/>
+                                    <p:cond delay="0"/>
                                   </p:stCondLst>
                                   <p:childTnLst>
                                     <p:set>
                                       <p:cBhvr>
-                                        <p:cTn id="18" dur="1"/>
+                                        <p:cTn id="17" dur="1" fill="hold">
+                                          <p:stCondLst>
+                                            <p:cond delay="0"/>
+                                          </p:stCondLst>
+                                        </p:cTn>
                                         <p:tgtEl>
                                           <p:spTgt spid="7"/>
                                         </p:tgtEl>
@@ -12922,7 +14241,7 @@
                                     </p:set>
                                     <p:animEffect transition="in" filter="wipe(right)">
                                       <p:cBhvr>
-                                        <p:cTn id="19" dur="450"/>
+                                        <p:cTn id="18" dur="450"/>
                                         <p:tgtEl>
                                           <p:spTgt spid="7"/>
                                         </p:tgtEl>
@@ -12931,15 +14250,28 @@
                                   </p:childTnLst>
                                 </p:cTn>
                               </p:par>
+                            </p:childTnLst>
+                          </p:cTn>
+                        </p:par>
+                        <p:par>
+                          <p:cTn id="19" fill="hold">
+                            <p:stCondLst>
+                              <p:cond delay="4050"/>
+                            </p:stCondLst>
+                            <p:childTnLst>
                               <p:par>
-                                <p:cTn id="20" presetID="22" presetClass="entr" presetSubtype="8" fill="hold" grpId="0" nodeType="afterEffect">
+                                <p:cTn presetID="22" presetClass="entr" presetSubtype="8" fill="hold" grpId="0" nodeType="afterEffect">
                                   <p:stCondLst>
-                                    <p:cond delay="4050"/>
+                                    <p:cond delay="0"/>
                                   </p:stCondLst>
                                   <p:childTnLst>
                                     <p:set>
                                       <p:cBhvr>
-                                        <p:cTn id="21" dur="1"/>
+                                        <p:cTn id="20" dur="1" fill="hold">
+                                          <p:stCondLst>
+                                            <p:cond delay="0"/>
+                                          </p:stCondLst>
+                                        </p:cTn>
                                         <p:tgtEl>
                                           <p:spTgt spid="8"/>
                                         </p:tgtEl>
@@ -12953,7 +14285,7 @@
                                     </p:set>
                                     <p:animEffect transition="in" filter="wipe(right)">
                                       <p:cBhvr>
-                                        <p:cTn id="22" dur="450"/>
+                                        <p:cTn id="21" dur="450"/>
                                         <p:tgtEl>
                                           <p:spTgt spid="8"/>
                                         </p:tgtEl>
@@ -12962,15 +14294,28 @@
                                   </p:childTnLst>
                                 </p:cTn>
                               </p:par>
+                            </p:childTnLst>
+                          </p:cTn>
+                        </p:par>
+                        <p:par>
+                          <p:cTn id="22" fill="hold">
+                            <p:stCondLst>
+                              <p:cond delay="5220"/>
+                            </p:stCondLst>
+                            <p:childTnLst>
                               <p:par>
-                                <p:cTn id="23" presetID="22" presetClass="entr" presetSubtype="8" fill="hold" grpId="0" nodeType="afterEffect">
+                                <p:cTn presetID="22" presetClass="entr" presetSubtype="8" fill="hold" grpId="0" nodeType="afterEffect">
                                   <p:stCondLst>
-                                    <p:cond delay="5220"/>
+                                    <p:cond delay="0"/>
                                   </p:stCondLst>
                                   <p:childTnLst>
                                     <p:set>
                                       <p:cBhvr>
-                                        <p:cTn id="24" dur="1"/>
+                                        <p:cTn id="23" dur="1" fill="hold">
+                                          <p:stCondLst>
+                                            <p:cond delay="0"/>
+                                          </p:stCondLst>
+                                        </p:cTn>
                                         <p:tgtEl>
                                           <p:spTgt spid="9"/>
                                         </p:tgtEl>
@@ -12984,7 +14329,7 @@
                                     </p:set>
                                     <p:animEffect transition="in" filter="wipe(right)">
                                       <p:cBhvr>
-                                        <p:cTn id="25" dur="450"/>
+                                        <p:cTn id="24" dur="450"/>
                                         <p:tgtEl>
                                           <p:spTgt spid="9"/>
                                         </p:tgtEl>
@@ -12993,15 +14338,28 @@
                                   </p:childTnLst>
                                 </p:cTn>
                               </p:par>
+                            </p:childTnLst>
+                          </p:cTn>
+                        </p:par>
+                        <p:par>
+                          <p:cTn id="25" fill="hold">
+                            <p:stCondLst>
+                              <p:cond delay="6510"/>
+                            </p:stCondLst>
+                            <p:childTnLst>
                               <p:par>
-                                <p:cTn id="26" presetID="22" presetClass="entr" presetSubtype="8" fill="hold" grpId="0" nodeType="afterEffect">
+                                <p:cTn presetID="22" presetClass="entr" presetSubtype="8" fill="hold" grpId="0" nodeType="afterEffect">
                                   <p:stCondLst>
-                                    <p:cond delay="6510"/>
+                                    <p:cond delay="0"/>
                                   </p:stCondLst>
                                   <p:childTnLst>
                                     <p:set>
                                       <p:cBhvr>
-                                        <p:cTn id="27" dur="1"/>
+                                        <p:cTn id="26" dur="1" fill="hold">
+                                          <p:stCondLst>
+                                            <p:cond delay="0"/>
+                                          </p:stCondLst>
+                                        </p:cTn>
                                         <p:tgtEl>
                                           <p:spTgt spid="10"/>
                                         </p:tgtEl>
@@ -13015,7 +14373,7 @@
                                     </p:set>
                                     <p:animEffect transition="in" filter="wipe(right)">
                                       <p:cBhvr>
-                                        <p:cTn id="28" dur="450"/>
+                                        <p:cTn id="27" dur="450"/>
                                         <p:tgtEl>
                                           <p:spTgt spid="10"/>
                                         </p:tgtEl>
@@ -13024,15 +14382,28 @@
                                   </p:childTnLst>
                                 </p:cTn>
                               </p:par>
+                            </p:childTnLst>
+                          </p:cTn>
+                        </p:par>
+                        <p:par>
+                          <p:cTn id="28" fill="hold">
+                            <p:stCondLst>
+                              <p:cond delay="7920"/>
+                            </p:stCondLst>
+                            <p:childTnLst>
                               <p:par>
-                                <p:cTn id="29" presetID="22" presetClass="entr" presetSubtype="8" fill="hold" grpId="0" nodeType="afterEffect">
+                                <p:cTn presetID="22" presetClass="entr" presetSubtype="8" fill="hold" grpId="0" nodeType="afterEffect">
                                   <p:stCondLst>
-                                    <p:cond delay="7920"/>
+                                    <p:cond delay="0"/>
                                   </p:stCondLst>
                                   <p:childTnLst>
                                     <p:set>
                                       <p:cBhvr>
-                                        <p:cTn id="30" dur="1"/>
+                                        <p:cTn id="29" dur="1" fill="hold">
+                                          <p:stCondLst>
+                                            <p:cond delay="0"/>
+                                          </p:stCondLst>
+                                        </p:cTn>
                                         <p:tgtEl>
                                           <p:spTgt spid="11"/>
                                         </p:tgtEl>
@@ -13046,7 +14417,7 @@
                                     </p:set>
                                     <p:animEffect transition="in" filter="wipe(right)">
                                       <p:cBhvr>
-                                        <p:cTn id="31" dur="450"/>
+                                        <p:cTn id="30" dur="450"/>
                                         <p:tgtEl>
                                           <p:spTgt spid="11"/>
                                         </p:tgtEl>
@@ -13055,15 +14426,28 @@
                                   </p:childTnLst>
                                 </p:cTn>
                               </p:par>
+                            </p:childTnLst>
+                          </p:cTn>
+                        </p:par>
+                        <p:par>
+                          <p:cTn id="31" fill="hold">
+                            <p:stCondLst>
+                              <p:cond delay="9450"/>
+                            </p:stCondLst>
+                            <p:childTnLst>
                               <p:par>
-                                <p:cTn id="32" presetID="22" presetClass="entr" presetSubtype="8" fill="hold" grpId="0" nodeType="afterEffect">
+                                <p:cTn presetID="22" presetClass="entr" presetSubtype="8" fill="hold" grpId="0" nodeType="afterEffect">
                                   <p:stCondLst>
-                                    <p:cond delay="9450"/>
+                                    <p:cond delay="0"/>
                                   </p:stCondLst>
                                   <p:childTnLst>
                                     <p:set>
                                       <p:cBhvr>
-                                        <p:cTn id="33" dur="1"/>
+                                        <p:cTn id="32" dur="1" fill="hold">
+                                          <p:stCondLst>
+                                            <p:cond delay="0"/>
+                                          </p:stCondLst>
+                                        </p:cTn>
                                         <p:tgtEl>
                                           <p:spTgt spid="13"/>
                                         </p:tgtEl>
@@ -13077,7 +14461,7 @@
                                     </p:set>
                                     <p:animEffect transition="in" filter="wipe(right)">
                                       <p:cBhvr>
-                                        <p:cTn id="34" dur="450"/>
+                                        <p:cTn id="33" dur="450"/>
                                         <p:tgtEl>
                                           <p:spTgt spid="13"/>
                                         </p:tgtEl>
@@ -13086,15 +14470,28 @@
                                   </p:childTnLst>
                                 </p:cTn>
                               </p:par>
+                            </p:childTnLst>
+                          </p:cTn>
+                        </p:par>
+                        <p:par>
+                          <p:cTn id="34" fill="hold">
+                            <p:stCondLst>
+                              <p:cond delay="11100"/>
+                            </p:stCondLst>
+                            <p:childTnLst>
                               <p:par>
-                                <p:cTn id="35" presetID="22" presetClass="entr" presetSubtype="8" fill="hold" grpId="0" nodeType="afterEffect">
+                                <p:cTn presetID="22" presetClass="entr" presetSubtype="8" fill="hold" grpId="0" nodeType="afterEffect">
                                   <p:stCondLst>
-                                    <p:cond delay="11100"/>
+                                    <p:cond delay="0"/>
                                   </p:stCondLst>
                                   <p:childTnLst>
                                     <p:set>
                                       <p:cBhvr>
-                                        <p:cTn id="36" dur="1"/>
+                                        <p:cTn id="35" dur="1" fill="hold">
+                                          <p:stCondLst>
+                                            <p:cond delay="0"/>
+                                          </p:stCondLst>
+                                        </p:cTn>
                                         <p:tgtEl>
                                           <p:spTgt spid="15"/>
                                         </p:tgtEl>
@@ -13108,7 +14505,7 @@
                                     </p:set>
                                     <p:animEffect transition="in" filter="wipe(right)">
                                       <p:cBhvr>
-                                        <p:cTn id="37" dur="450"/>
+                                        <p:cTn id="36" dur="450"/>
                                         <p:tgtEl>
                                           <p:spTgt spid="15"/>
                                         </p:tgtEl>
@@ -13117,15 +14514,28 @@
                                   </p:childTnLst>
                                 </p:cTn>
                               </p:par>
+                            </p:childTnLst>
+                          </p:cTn>
+                        </p:par>
+                        <p:par>
+                          <p:cTn id="37" fill="hold">
+                            <p:stCondLst>
+                              <p:cond delay="12870"/>
+                            </p:stCondLst>
+                            <p:childTnLst>
                               <p:par>
-                                <p:cTn id="38" presetID="22" presetClass="entr" presetSubtype="8" fill="hold" grpId="0" nodeType="afterEffect">
+                                <p:cTn presetID="22" presetClass="entr" presetSubtype="8" fill="hold" grpId="0" nodeType="afterEffect">
                                   <p:stCondLst>
-                                    <p:cond delay="12870"/>
+                                    <p:cond delay="0"/>
                                   </p:stCondLst>
                                   <p:childTnLst>
                                     <p:set>
                                       <p:cBhvr>
-                                        <p:cTn id="39" dur="1"/>
+                                        <p:cTn id="38" dur="1" fill="hold">
+                                          <p:stCondLst>
+                                            <p:cond delay="0"/>
+                                          </p:stCondLst>
+                                        </p:cTn>
                                         <p:tgtEl>
                                           <p:spTgt spid="12"/>
                                         </p:tgtEl>
@@ -13139,7 +14549,7 @@
                                     </p:set>
                                     <p:animEffect transition="in" filter="wipe(right)">
                                       <p:cBhvr>
-                                        <p:cTn id="40" dur="450"/>
+                                        <p:cTn id="39" dur="450"/>
                                         <p:tgtEl>
                                           <p:spTgt spid="12"/>
                                         </p:tgtEl>
@@ -13148,15 +14558,28 @@
                                   </p:childTnLst>
                                 </p:cTn>
                               </p:par>
+                            </p:childTnLst>
+                          </p:cTn>
+                        </p:par>
+                        <p:par>
+                          <p:cTn id="40" fill="hold">
+                            <p:stCondLst>
+                              <p:cond delay="14760"/>
+                            </p:stCondLst>
+                            <p:childTnLst>
                               <p:par>
-                                <p:cTn id="41" presetID="22" presetClass="entr" presetSubtype="8" fill="hold" grpId="0" nodeType="afterEffect">
+                                <p:cTn presetID="22" presetClass="entr" presetSubtype="8" fill="hold" grpId="0" nodeType="afterEffect">
                                   <p:stCondLst>
-                                    <p:cond delay="14760"/>
+                                    <p:cond delay="0"/>
                                   </p:stCondLst>
                                   <p:childTnLst>
                                     <p:set>
                                       <p:cBhvr>
-                                        <p:cTn id="42" dur="1"/>
+                                        <p:cTn id="41" dur="1" fill="hold">
+                                          <p:stCondLst>
+                                            <p:cond delay="0"/>
+                                          </p:stCondLst>
+                                        </p:cTn>
                                         <p:tgtEl>
                                           <p:spTgt spid="14"/>
                                         </p:tgtEl>
@@ -13170,7 +14593,7 @@
                                     </p:set>
                                     <p:animEffect transition="in" filter="wipe(right)">
                                       <p:cBhvr>
-                                        <p:cTn id="43" dur="450"/>
+                                        <p:cTn id="42" dur="450"/>
                                         <p:tgtEl>
                                           <p:spTgt spid="14"/>
                                         </p:tgtEl>
@@ -13179,15 +14602,28 @@
                                   </p:childTnLst>
                                 </p:cTn>
                               </p:par>
+                            </p:childTnLst>
+                          </p:cTn>
+                        </p:par>
+                        <p:par>
+                          <p:cTn id="43" fill="hold">
+                            <p:stCondLst>
+                              <p:cond delay="16770"/>
+                            </p:stCondLst>
+                            <p:childTnLst>
                               <p:par>
-                                <p:cTn id="44" presetID="22" presetClass="entr" presetSubtype="8" fill="hold" grpId="0" nodeType="afterEffect">
+                                <p:cTn presetID="22" presetClass="entr" presetSubtype="8" fill="hold" grpId="0" nodeType="afterEffect">
                                   <p:stCondLst>
-                                    <p:cond delay="16770"/>
+                                    <p:cond delay="0"/>
                                   </p:stCondLst>
                                   <p:childTnLst>
                                     <p:set>
                                       <p:cBhvr>
-                                        <p:cTn id="45" dur="1"/>
+                                        <p:cTn id="44" dur="1" fill="hold">
+                                          <p:stCondLst>
+                                            <p:cond delay="0"/>
+                                          </p:stCondLst>
+                                        </p:cTn>
                                         <p:tgtEl>
                                           <p:spTgt spid="16"/>
                                         </p:tgtEl>
@@ -13201,7 +14637,7 @@
                                     </p:set>
                                     <p:animEffect transition="in" filter="wipe(right)">
                                       <p:cBhvr>
-                                        <p:cTn id="46" dur="450"/>
+                                        <p:cTn id="45" dur="450"/>
                                         <p:tgtEl>
                                           <p:spTgt spid="16"/>
                                         </p:tgtEl>
@@ -13210,15 +14646,28 @@
                                   </p:childTnLst>
                                 </p:cTn>
                               </p:par>
+                            </p:childTnLst>
+                          </p:cTn>
+                        </p:par>
+                        <p:par>
+                          <p:cTn id="46" fill="hold">
+                            <p:stCondLst>
+                              <p:cond delay="18900"/>
+                            </p:stCondLst>
+                            <p:childTnLst>
                               <p:par>
-                                <p:cTn id="47" presetID="22" presetClass="entr" presetSubtype="8" fill="hold" grpId="0" nodeType="afterEffect">
+                                <p:cTn presetID="22" presetClass="entr" presetSubtype="8" fill="hold" grpId="0" nodeType="afterEffect">
                                   <p:stCondLst>
-                                    <p:cond delay="18900"/>
+                                    <p:cond delay="0"/>
                                   </p:stCondLst>
                                   <p:childTnLst>
                                     <p:set>
                                       <p:cBhvr>
-                                        <p:cTn id="48" dur="1"/>
+                                        <p:cTn id="47" dur="1" fill="hold">
+                                          <p:stCondLst>
+                                            <p:cond delay="0"/>
+                                          </p:stCondLst>
+                                        </p:cTn>
                                         <p:tgtEl>
                                           <p:spTgt spid="17"/>
                                         </p:tgtEl>
@@ -13232,7 +14681,7 @@
                                     </p:set>
                                     <p:animEffect transition="in" filter="wipe(right)">
                                       <p:cBhvr>
-                                        <p:cTn id="49" dur="450"/>
+                                        <p:cTn id="48" dur="450"/>
                                         <p:tgtEl>
                                           <p:spTgt spid="17"/>
                                         </p:tgtEl>
@@ -13241,15 +14690,28 @@
                                   </p:childTnLst>
                                 </p:cTn>
                               </p:par>
+                            </p:childTnLst>
+                          </p:cTn>
+                        </p:par>
+                        <p:par>
+                          <p:cTn id="49" fill="hold">
+                            <p:stCondLst>
+                              <p:cond delay="21150"/>
+                            </p:stCondLst>
+                            <p:childTnLst>
                               <p:par>
-                                <p:cTn id="50" presetID="22" presetClass="entr" presetSubtype="8" fill="hold" grpId="0" nodeType="afterEffect">
+                                <p:cTn presetID="22" presetClass="entr" presetSubtype="8" fill="hold" grpId="0" nodeType="afterEffect">
                                   <p:stCondLst>
-                                    <p:cond delay="21150"/>
+                                    <p:cond delay="0"/>
                                   </p:stCondLst>
                                   <p:childTnLst>
                                     <p:set>
                                       <p:cBhvr>
-                                        <p:cTn id="51" dur="1"/>
+                                        <p:cTn id="50" dur="1" fill="hold">
+                                          <p:stCondLst>
+                                            <p:cond delay="0"/>
+                                          </p:stCondLst>
+                                        </p:cTn>
                                         <p:tgtEl>
                                           <p:spTgt spid="18"/>
                                         </p:tgtEl>
@@ -13263,7 +14725,7 @@
                                     </p:set>
                                     <p:animEffect transition="in" filter="wipe(right)">
                                       <p:cBhvr>
-                                        <p:cTn id="52" dur="450"/>
+                                        <p:cTn id="51" dur="450"/>
                                         <p:tgtEl>
                                           <p:spTgt spid="18"/>
                                         </p:tgtEl>
@@ -14687,10 +16149,7 @@
                   <p:par>
                     <p:cTn id="3" fill="hold">
                       <p:stCondLst>
-                        <p:cond delay="indefinite"/>
-                        <p:cond evt="onBegin" delay="0">
-                          <p:tn val="2"/>
-                        </p:cond>
+                        <p:cond delay="0"/>
                       </p:stCondLst>
                       <p:childTnLst>
                         <p:par>
@@ -14700,14 +16159,18 @@
                             </p:stCondLst>
                             <p:childTnLst>
                               <p:par>
-                                <p:cTn id="5" presetID="10" presetClass="entr" presetSubtype="0" fill="hold" grpId="0" nodeType="afterEffect">
+                                <p:cTn presetID="10" presetClass="entr" presetSubtype="0" fill="hold" grpId="0" nodeType="afterEffect">
                                   <p:stCondLst>
                                     <p:cond delay="0"/>
                                   </p:stCondLst>
                                   <p:childTnLst>
                                     <p:set>
                                       <p:cBhvr>
-                                        <p:cTn id="6" dur="1"/>
+                                        <p:cTn id="5" dur="1" fill="hold">
+                                          <p:stCondLst>
+                                            <p:cond delay="0"/>
+                                          </p:stCondLst>
+                                        </p:cTn>
                                         <p:tgtEl>
                                           <p:spTgt spid="8"/>
                                         </p:tgtEl>
@@ -14721,7 +16184,7 @@
                                     </p:set>
                                     <p:animEffect transition="in" filter="fade">
                                       <p:cBhvr>
-                                        <p:cTn id="7" dur="400"/>
+                                        <p:cTn id="6" dur="400"/>
                                         <p:tgtEl>
                                           <p:spTgt spid="8"/>
                                         </p:tgtEl>
@@ -14730,15 +16193,28 @@
                                   </p:childTnLst>
                                 </p:cTn>
                               </p:par>
+                            </p:childTnLst>
+                          </p:cTn>
+                        </p:par>
+                        <p:par>
+                          <p:cTn id="7" fill="hold">
+                            <p:stCondLst>
+                              <p:cond delay="500"/>
+                            </p:stCondLst>
+                            <p:childTnLst>
                               <p:par>
-                                <p:cTn id="8" presetID="10" presetClass="entr" presetSubtype="0" fill="hold" grpId="0" nodeType="afterEffect">
+                                <p:cTn presetID="10" presetClass="entr" presetSubtype="0" fill="hold" grpId="0" nodeType="afterEffect">
                                   <p:stCondLst>
-                                    <p:cond delay="500"/>
+                                    <p:cond delay="0"/>
                                   </p:stCondLst>
                                   <p:childTnLst>
                                     <p:set>
                                       <p:cBhvr>
-                                        <p:cTn id="9" dur="1"/>
+                                        <p:cTn id="8" dur="1" fill="hold">
+                                          <p:stCondLst>
+                                            <p:cond delay="0"/>
+                                          </p:stCondLst>
+                                        </p:cTn>
                                         <p:tgtEl>
                                           <p:spTgt spid="2"/>
                                         </p:tgtEl>
@@ -14752,7 +16228,7 @@
                                     </p:set>
                                     <p:animEffect transition="in" filter="fade">
                                       <p:cBhvr>
-                                        <p:cTn id="10" dur="400"/>
+                                        <p:cTn id="9" dur="400"/>
                                         <p:tgtEl>
                                           <p:spTgt spid="2"/>
                                         </p:tgtEl>
@@ -14761,15 +16237,28 @@
                                   </p:childTnLst>
                                 </p:cTn>
                               </p:par>
+                            </p:childTnLst>
+                          </p:cTn>
+                        </p:par>
+                        <p:par>
+                          <p:cTn id="10" fill="hold">
+                            <p:stCondLst>
+                              <p:cond delay="1100"/>
+                            </p:stCondLst>
+                            <p:childTnLst>
                               <p:par>
-                                <p:cTn id="11" presetID="10" presetClass="entr" presetSubtype="0" fill="hold" grpId="0" nodeType="afterEffect">
+                                <p:cTn presetID="10" presetClass="entr" presetSubtype="0" fill="hold" grpId="0" nodeType="afterEffect">
                                   <p:stCondLst>
-                                    <p:cond delay="1100"/>
+                                    <p:cond delay="0"/>
                                   </p:stCondLst>
                                   <p:childTnLst>
                                     <p:set>
                                       <p:cBhvr>
-                                        <p:cTn id="12" dur="1"/>
+                                        <p:cTn id="11" dur="1" fill="hold">
+                                          <p:stCondLst>
+                                            <p:cond delay="0"/>
+                                          </p:stCondLst>
+                                        </p:cTn>
                                         <p:tgtEl>
                                           <p:spTgt spid="3"/>
                                         </p:tgtEl>
@@ -14783,7 +16272,7 @@
                                     </p:set>
                                     <p:animEffect transition="in" filter="fade">
                                       <p:cBhvr>
-                                        <p:cTn id="13" dur="400"/>
+                                        <p:cTn id="12" dur="400"/>
                                         <p:tgtEl>
                                           <p:spTgt spid="3"/>
                                         </p:tgtEl>
@@ -14792,15 +16281,28 @@
                                   </p:childTnLst>
                                 </p:cTn>
                               </p:par>
+                            </p:childTnLst>
+                          </p:cTn>
+                        </p:par>
+                        <p:par>
+                          <p:cTn id="13" fill="hold">
+                            <p:stCondLst>
+                              <p:cond delay="1800"/>
+                            </p:stCondLst>
+                            <p:childTnLst>
                               <p:par>
-                                <p:cTn id="14" presetID="10" presetClass="entr" presetSubtype="0" fill="hold" grpId="0" nodeType="afterEffect">
+                                <p:cTn presetID="10" presetClass="entr" presetSubtype="0" fill="hold" grpId="0" nodeType="afterEffect">
                                   <p:stCondLst>
-                                    <p:cond delay="1800"/>
+                                    <p:cond delay="0"/>
                                   </p:stCondLst>
                                   <p:childTnLst>
                                     <p:set>
                                       <p:cBhvr>
-                                        <p:cTn id="15" dur="1"/>
+                                        <p:cTn id="14" dur="1" fill="hold">
+                                          <p:stCondLst>
+                                            <p:cond delay="0"/>
+                                          </p:stCondLst>
+                                        </p:cTn>
                                         <p:tgtEl>
                                           <p:spTgt spid="6"/>
                                         </p:tgtEl>
@@ -14814,7 +16316,7 @@
                                     </p:set>
                                     <p:animEffect transition="in" filter="fade">
                                       <p:cBhvr>
-                                        <p:cTn id="16" dur="400"/>
+                                        <p:cTn id="15" dur="400"/>
                                         <p:tgtEl>
                                           <p:spTgt spid="6"/>
                                         </p:tgtEl>
@@ -14823,15 +16325,28 @@
                                   </p:childTnLst>
                                 </p:cTn>
                               </p:par>
+                            </p:childTnLst>
+                          </p:cTn>
+                        </p:par>
+                        <p:par>
+                          <p:cTn id="16" fill="hold">
+                            <p:stCondLst>
+                              <p:cond delay="2600"/>
+                            </p:stCondLst>
+                            <p:childTnLst>
                               <p:par>
-                                <p:cTn id="17" presetID="10" presetClass="entr" presetSubtype="0" fill="hold" grpId="0" nodeType="afterEffect">
+                                <p:cTn presetID="10" presetClass="entr" presetSubtype="0" fill="hold" grpId="0" nodeType="afterEffect">
                                   <p:stCondLst>
-                                    <p:cond delay="2600"/>
+                                    <p:cond delay="0"/>
                                   </p:stCondLst>
                                   <p:childTnLst>
                                     <p:set>
                                       <p:cBhvr>
-                                        <p:cTn id="18" dur="1"/>
+                                        <p:cTn id="17" dur="1" fill="hold">
+                                          <p:stCondLst>
+                                            <p:cond delay="0"/>
+                                          </p:stCondLst>
+                                        </p:cTn>
                                         <p:tgtEl>
                                           <p:spTgt spid="7"/>
                                         </p:tgtEl>
@@ -14845,7 +16360,7 @@
                                     </p:set>
                                     <p:animEffect transition="in" filter="fade">
                                       <p:cBhvr>
-                                        <p:cTn id="19" dur="400"/>
+                                        <p:cTn id="18" dur="400"/>
                                         <p:tgtEl>
                                           <p:spTgt spid="7"/>
                                         </p:tgtEl>
@@ -14854,15 +16369,28 @@
                                   </p:childTnLst>
                                 </p:cTn>
                               </p:par>
+                            </p:childTnLst>
+                          </p:cTn>
+                        </p:par>
+                        <p:par>
+                          <p:cTn id="19" fill="hold">
+                            <p:stCondLst>
+                              <p:cond delay="3500"/>
+                            </p:stCondLst>
+                            <p:childTnLst>
                               <p:par>
-                                <p:cTn id="20" presetID="10" presetClass="entr" presetSubtype="0" fill="hold" grpId="0" nodeType="afterEffect">
+                                <p:cTn presetID="10" presetClass="entr" presetSubtype="0" fill="hold" grpId="0" nodeType="afterEffect">
                                   <p:stCondLst>
-                                    <p:cond delay="3500"/>
+                                    <p:cond delay="0"/>
                                   </p:stCondLst>
                                   <p:childTnLst>
                                     <p:set>
                                       <p:cBhvr>
-                                        <p:cTn id="21" dur="1"/>
+                                        <p:cTn id="20" dur="1" fill="hold">
+                                          <p:stCondLst>
+                                            <p:cond delay="0"/>
+                                          </p:stCondLst>
+                                        </p:cTn>
                                         <p:tgtEl>
                                           <p:spTgt spid="8"/>
                                         </p:tgtEl>
@@ -14876,7 +16404,7 @@
                                     </p:set>
                                     <p:animEffect transition="in" filter="fade">
                                       <p:cBhvr>
-                                        <p:cTn id="22" dur="400"/>
+                                        <p:cTn id="21" dur="400"/>
                                         <p:tgtEl>
                                           <p:spTgt spid="8"/>
                                         </p:tgtEl>
@@ -14918,7 +16446,6 @@
       <p:bldP spid="3" grpId="0"/>
       <p:bldP spid="6" grpId="0"/>
       <p:bldP spid="7" grpId="0"/>
-      <p:bldP spid="8" grpId="0"/>
     </p:bldLst>
   </p:timing>
 </p:sld>
@@ -15555,10 +17082,7 @@
                   <p:par>
                     <p:cTn id="3" fill="hold">
                       <p:stCondLst>
-                        <p:cond delay="indefinite"/>
-                        <p:cond evt="onBegin" delay="0">
-                          <p:tn val="2"/>
-                        </p:cond>
+                        <p:cond delay="0"/>
                       </p:stCondLst>
                       <p:childTnLst>
                         <p:par>
@@ -15568,14 +17092,18 @@
                             </p:stCondLst>
                             <p:childTnLst>
                               <p:par>
-                                <p:cTn id="5" presetID="10" presetClass="entr" presetSubtype="0" fill="hold" grpId="0" nodeType="afterEffect">
+                                <p:cTn presetID="10" presetClass="entr" presetSubtype="0" fill="hold" grpId="0" nodeType="afterEffect">
                                   <p:stCondLst>
                                     <p:cond delay="0"/>
                                   </p:stCondLst>
                                   <p:childTnLst>
                                     <p:set>
                                       <p:cBhvr>
-                                        <p:cTn id="6" dur="1"/>
+                                        <p:cTn id="5" dur="1" fill="hold">
+                                          <p:stCondLst>
+                                            <p:cond delay="0"/>
+                                          </p:stCondLst>
+                                        </p:cTn>
                                         <p:tgtEl>
                                           <p:spTgt spid="2"/>
                                         </p:tgtEl>
@@ -15589,7 +17117,7 @@
                                     </p:set>
                                     <p:animEffect transition="in" filter="fade">
                                       <p:cBhvr>
-                                        <p:cTn id="7" dur="400"/>
+                                        <p:cTn id="6" dur="400"/>
                                         <p:tgtEl>
                                           <p:spTgt spid="2"/>
                                         </p:tgtEl>
@@ -15598,15 +17126,28 @@
                                   </p:childTnLst>
                                 </p:cTn>
                               </p:par>
+                            </p:childTnLst>
+                          </p:cTn>
+                        </p:par>
+                        <p:par>
+                          <p:cTn id="7" fill="hold">
+                            <p:stCondLst>
+                              <p:cond delay="520"/>
+                            </p:stCondLst>
+                            <p:childTnLst>
                               <p:par>
-                                <p:cTn id="8" presetID="10" presetClass="entr" presetSubtype="0" fill="hold" grpId="0" nodeType="afterEffect">
+                                <p:cTn presetID="10" presetClass="entr" presetSubtype="0" fill="hold" grpId="0" nodeType="afterEffect">
                                   <p:stCondLst>
-                                    <p:cond delay="520"/>
+                                    <p:cond delay="0"/>
                                   </p:stCondLst>
                                   <p:childTnLst>
                                     <p:set>
                                       <p:cBhvr>
-                                        <p:cTn id="9" dur="1"/>
+                                        <p:cTn id="8" dur="1" fill="hold">
+                                          <p:stCondLst>
+                                            <p:cond delay="0"/>
+                                          </p:stCondLst>
+                                        </p:cTn>
                                         <p:tgtEl>
                                           <p:spTgt spid="3"/>
                                         </p:tgtEl>
@@ -15620,7 +17161,7 @@
                                     </p:set>
                                     <p:animEffect transition="in" filter="fade">
                                       <p:cBhvr>
-                                        <p:cTn id="10" dur="400"/>
+                                        <p:cTn id="9" dur="400"/>
                                         <p:tgtEl>
                                           <p:spTgt spid="3"/>
                                         </p:tgtEl>
@@ -15629,15 +17170,28 @@
                                   </p:childTnLst>
                                 </p:cTn>
                               </p:par>
+                            </p:childTnLst>
+                          </p:cTn>
+                        </p:par>
+                        <p:par>
+                          <p:cTn id="10" fill="hold">
+                            <p:stCondLst>
+                              <p:cond delay="1160"/>
+                            </p:stCondLst>
+                            <p:childTnLst>
                               <p:par>
-                                <p:cTn id="11" presetID="10" presetClass="entr" presetSubtype="0" fill="hold" grpId="0" nodeType="afterEffect">
+                                <p:cTn presetID="10" presetClass="entr" presetSubtype="0" fill="hold" grpId="0" nodeType="afterEffect">
                                   <p:stCondLst>
-                                    <p:cond delay="1160"/>
+                                    <p:cond delay="0"/>
                                   </p:stCondLst>
                                   <p:childTnLst>
                                     <p:set>
                                       <p:cBhvr>
-                                        <p:cTn id="12" dur="1"/>
+                                        <p:cTn id="11" dur="1" fill="hold">
+                                          <p:stCondLst>
+                                            <p:cond delay="0"/>
+                                          </p:stCondLst>
+                                        </p:cTn>
                                         <p:tgtEl>
                                           <p:spTgt spid="5"/>
                                         </p:tgtEl>
@@ -15651,7 +17205,7 @@
                                     </p:set>
                                     <p:animEffect transition="in" filter="fade">
                                       <p:cBhvr>
-                                        <p:cTn id="13" dur="400"/>
+                                        <p:cTn id="12" dur="400"/>
                                         <p:tgtEl>
                                           <p:spTgt spid="5"/>
                                         </p:tgtEl>
@@ -15660,15 +17214,28 @@
                                   </p:childTnLst>
                                 </p:cTn>
                               </p:par>
+                            </p:childTnLst>
+                          </p:cTn>
+                        </p:par>
+                        <p:par>
+                          <p:cTn id="13" fill="hold">
+                            <p:stCondLst>
+                              <p:cond delay="1920"/>
+                            </p:stCondLst>
+                            <p:childTnLst>
                               <p:par>
-                                <p:cTn id="14" presetID="10" presetClass="entr" presetSubtype="0" fill="hold" grpId="0" nodeType="afterEffect">
+                                <p:cTn presetID="10" presetClass="entr" presetSubtype="0" fill="hold" grpId="0" nodeType="afterEffect">
                                   <p:stCondLst>
-                                    <p:cond delay="1920"/>
+                                    <p:cond delay="0"/>
                                   </p:stCondLst>
                                   <p:childTnLst>
                                     <p:set>
                                       <p:cBhvr>
-                                        <p:cTn id="15" dur="1"/>
+                                        <p:cTn id="14" dur="1" fill="hold">
+                                          <p:stCondLst>
+                                            <p:cond delay="0"/>
+                                          </p:stCondLst>
+                                        </p:cTn>
                                         <p:tgtEl>
                                           <p:spTgt spid="9"/>
                                         </p:tgtEl>
@@ -15682,7 +17249,7 @@
                                     </p:set>
                                     <p:animEffect transition="in" filter="fade">
                                       <p:cBhvr>
-                                        <p:cTn id="16" dur="400"/>
+                                        <p:cTn id="15" dur="400"/>
                                         <p:tgtEl>
                                           <p:spTgt spid="9"/>
                                         </p:tgtEl>
@@ -15691,15 +17258,28 @@
                                   </p:childTnLst>
                                 </p:cTn>
                               </p:par>
+                            </p:childTnLst>
+                          </p:cTn>
+                        </p:par>
+                        <p:par>
+                          <p:cTn id="16" fill="hold">
+                            <p:stCondLst>
+                              <p:cond delay="2800"/>
+                            </p:stCondLst>
+                            <p:childTnLst>
                               <p:par>
-                                <p:cTn id="17" presetID="10" presetClass="entr" presetSubtype="0" fill="hold" grpId="0" nodeType="afterEffect">
+                                <p:cTn presetID="10" presetClass="entr" presetSubtype="0" fill="hold" grpId="0" nodeType="afterEffect">
                                   <p:stCondLst>
-                                    <p:cond delay="2800"/>
+                                    <p:cond delay="0"/>
                                   </p:stCondLst>
                                   <p:childTnLst>
                                     <p:set>
                                       <p:cBhvr>
-                                        <p:cTn id="18" dur="1"/>
+                                        <p:cTn id="17" dur="1" fill="hold">
+                                          <p:stCondLst>
+                                            <p:cond delay="0"/>
+                                          </p:stCondLst>
+                                        </p:cTn>
                                         <p:tgtEl>
                                           <p:spTgt spid="13"/>
                                         </p:tgtEl>
@@ -15713,7 +17293,7 @@
                                     </p:set>
                                     <p:animEffect transition="in" filter="fade">
                                       <p:cBhvr>
-                                        <p:cTn id="19" dur="400"/>
+                                        <p:cTn id="18" dur="400"/>
                                         <p:tgtEl>
                                           <p:spTgt spid="13"/>
                                         </p:tgtEl>
@@ -15722,15 +17302,28 @@
                                   </p:childTnLst>
                                 </p:cTn>
                               </p:par>
+                            </p:childTnLst>
+                          </p:cTn>
+                        </p:par>
+                        <p:par>
+                          <p:cTn id="19" fill="hold">
+                            <p:stCondLst>
+                              <p:cond delay="3800"/>
+                            </p:stCondLst>
+                            <p:childTnLst>
                               <p:par>
-                                <p:cTn id="20" presetID="10" presetClass="entr" presetSubtype="0" fill="hold" grpId="0" nodeType="afterEffect">
+                                <p:cTn presetID="10" presetClass="entr" presetSubtype="0" fill="hold" grpId="0" nodeType="afterEffect">
                                   <p:stCondLst>
-                                    <p:cond delay="3800"/>
+                                    <p:cond delay="0"/>
                                   </p:stCondLst>
                                   <p:childTnLst>
                                     <p:set>
                                       <p:cBhvr>
-                                        <p:cTn id="21" dur="1"/>
+                                        <p:cTn id="20" dur="1" fill="hold">
+                                          <p:stCondLst>
+                                            <p:cond delay="0"/>
+                                          </p:stCondLst>
+                                        </p:cTn>
                                         <p:tgtEl>
                                           <p:spTgt spid="6"/>
                                         </p:tgtEl>
@@ -15744,7 +17337,7 @@
                                     </p:set>
                                     <p:animEffect transition="in" filter="fade">
                                       <p:cBhvr>
-                                        <p:cTn id="22" dur="400"/>
+                                        <p:cTn id="21" dur="400"/>
                                         <p:tgtEl>
                                           <p:spTgt spid="6"/>
                                         </p:tgtEl>
@@ -15753,15 +17346,28 @@
                                   </p:childTnLst>
                                 </p:cTn>
                               </p:par>
+                            </p:childTnLst>
+                          </p:cTn>
+                        </p:par>
+                        <p:par>
+                          <p:cTn id="22" fill="hold">
+                            <p:stCondLst>
+                              <p:cond delay="4920"/>
+                            </p:stCondLst>
+                            <p:childTnLst>
                               <p:par>
-                                <p:cTn id="23" presetID="10" presetClass="entr" presetSubtype="0" fill="hold" grpId="0" nodeType="afterEffect">
+                                <p:cTn presetID="10" presetClass="entr" presetSubtype="0" fill="hold" grpId="0" nodeType="afterEffect">
                                   <p:stCondLst>
-                                    <p:cond delay="4920"/>
+                                    <p:cond delay="0"/>
                                   </p:stCondLst>
                                   <p:childTnLst>
                                     <p:set>
                                       <p:cBhvr>
-                                        <p:cTn id="24" dur="1"/>
+                                        <p:cTn id="23" dur="1" fill="hold">
+                                          <p:stCondLst>
+                                            <p:cond delay="0"/>
+                                          </p:stCondLst>
+                                        </p:cTn>
                                         <p:tgtEl>
                                           <p:spTgt spid="10"/>
                                         </p:tgtEl>
@@ -15775,7 +17381,7 @@
                                     </p:set>
                                     <p:animEffect transition="in" filter="fade">
                                       <p:cBhvr>
-                                        <p:cTn id="25" dur="400"/>
+                                        <p:cTn id="24" dur="400"/>
                                         <p:tgtEl>
                                           <p:spTgt spid="10"/>
                                         </p:tgtEl>
@@ -15784,15 +17390,28 @@
                                   </p:childTnLst>
                                 </p:cTn>
                               </p:par>
+                            </p:childTnLst>
+                          </p:cTn>
+                        </p:par>
+                        <p:par>
+                          <p:cTn id="25" fill="hold">
+                            <p:stCondLst>
+                              <p:cond delay="6160"/>
+                            </p:stCondLst>
+                            <p:childTnLst>
                               <p:par>
-                                <p:cTn id="26" presetID="10" presetClass="entr" presetSubtype="0" fill="hold" grpId="0" nodeType="afterEffect">
+                                <p:cTn presetID="10" presetClass="entr" presetSubtype="0" fill="hold" grpId="0" nodeType="afterEffect">
                                   <p:stCondLst>
-                                    <p:cond delay="6160"/>
+                                    <p:cond delay="0"/>
                                   </p:stCondLst>
                                   <p:childTnLst>
                                     <p:set>
                                       <p:cBhvr>
-                                        <p:cTn id="27" dur="1"/>
+                                        <p:cTn id="26" dur="1" fill="hold">
+                                          <p:stCondLst>
+                                            <p:cond delay="0"/>
+                                          </p:stCondLst>
+                                        </p:cTn>
                                         <p:tgtEl>
                                           <p:spTgt spid="14"/>
                                         </p:tgtEl>
@@ -15806,7 +17425,7 @@
                                     </p:set>
                                     <p:animEffect transition="in" filter="fade">
                                       <p:cBhvr>
-                                        <p:cTn id="28" dur="400"/>
+                                        <p:cTn id="27" dur="400"/>
                                         <p:tgtEl>
                                           <p:spTgt spid="14"/>
                                         </p:tgtEl>
@@ -15815,15 +17434,28 @@
                                   </p:childTnLst>
                                 </p:cTn>
                               </p:par>
+                            </p:childTnLst>
+                          </p:cTn>
+                        </p:par>
+                        <p:par>
+                          <p:cTn id="28" fill="hold">
+                            <p:stCondLst>
+                              <p:cond delay="7520"/>
+                            </p:stCondLst>
+                            <p:childTnLst>
                               <p:par>
-                                <p:cTn id="29" presetID="10" presetClass="entr" presetSubtype="0" fill="hold" grpId="0" nodeType="afterEffect">
+                                <p:cTn presetID="10" presetClass="entr" presetSubtype="0" fill="hold" grpId="0" nodeType="afterEffect">
                                   <p:stCondLst>
-                                    <p:cond delay="7520"/>
+                                    <p:cond delay="0"/>
                                   </p:stCondLst>
                                   <p:childTnLst>
                                     <p:set>
                                       <p:cBhvr>
-                                        <p:cTn id="30" dur="1"/>
+                                        <p:cTn id="29" dur="1" fill="hold">
+                                          <p:stCondLst>
+                                            <p:cond delay="0"/>
+                                          </p:stCondLst>
+                                        </p:cTn>
                                         <p:tgtEl>
                                           <p:spTgt spid="7"/>
                                         </p:tgtEl>
@@ -15837,7 +17469,7 @@
                                     </p:set>
                                     <p:animEffect transition="in" filter="fade">
                                       <p:cBhvr>
-                                        <p:cTn id="31" dur="400"/>
+                                        <p:cTn id="30" dur="400"/>
                                         <p:tgtEl>
                                           <p:spTgt spid="7"/>
                                         </p:tgtEl>
@@ -15846,15 +17478,28 @@
                                   </p:childTnLst>
                                 </p:cTn>
                               </p:par>
+                            </p:childTnLst>
+                          </p:cTn>
+                        </p:par>
+                        <p:par>
+                          <p:cTn id="31" fill="hold">
+                            <p:stCondLst>
+                              <p:cond delay="9000"/>
+                            </p:stCondLst>
+                            <p:childTnLst>
                               <p:par>
-                                <p:cTn id="32" presetID="10" presetClass="entr" presetSubtype="0" fill="hold" grpId="0" nodeType="afterEffect">
+                                <p:cTn presetID="10" presetClass="entr" presetSubtype="0" fill="hold" grpId="0" nodeType="afterEffect">
                                   <p:stCondLst>
-                                    <p:cond delay="9000"/>
+                                    <p:cond delay="0"/>
                                   </p:stCondLst>
                                   <p:childTnLst>
                                     <p:set>
                                       <p:cBhvr>
-                                        <p:cTn id="33" dur="1"/>
+                                        <p:cTn id="32" dur="1" fill="hold">
+                                          <p:stCondLst>
+                                            <p:cond delay="0"/>
+                                          </p:stCondLst>
+                                        </p:cTn>
                                         <p:tgtEl>
                                           <p:spTgt spid="11"/>
                                         </p:tgtEl>
@@ -15868,7 +17513,7 @@
                                     </p:set>
                                     <p:animEffect transition="in" filter="fade">
                                       <p:cBhvr>
-                                        <p:cTn id="34" dur="400"/>
+                                        <p:cTn id="33" dur="400"/>
                                         <p:tgtEl>
                                           <p:spTgt spid="11"/>
                                         </p:tgtEl>
@@ -15877,15 +17522,28 @@
                                   </p:childTnLst>
                                 </p:cTn>
                               </p:par>
+                            </p:childTnLst>
+                          </p:cTn>
+                        </p:par>
+                        <p:par>
+                          <p:cTn id="34" fill="hold">
+                            <p:stCondLst>
+                              <p:cond delay="10600"/>
+                            </p:stCondLst>
+                            <p:childTnLst>
                               <p:par>
-                                <p:cTn id="35" presetID="10" presetClass="entr" presetSubtype="0" fill="hold" grpId="0" nodeType="afterEffect">
+                                <p:cTn presetID="10" presetClass="entr" presetSubtype="0" fill="hold" grpId="0" nodeType="afterEffect">
                                   <p:stCondLst>
-                                    <p:cond delay="10600"/>
+                                    <p:cond delay="0"/>
                                   </p:stCondLst>
                                   <p:childTnLst>
                                     <p:set>
                                       <p:cBhvr>
-                                        <p:cTn id="36" dur="1"/>
+                                        <p:cTn id="35" dur="1" fill="hold">
+                                          <p:stCondLst>
+                                            <p:cond delay="0"/>
+                                          </p:stCondLst>
+                                        </p:cTn>
                                         <p:tgtEl>
                                           <p:spTgt spid="15"/>
                                         </p:tgtEl>
@@ -15899,7 +17557,7 @@
                                     </p:set>
                                     <p:animEffect transition="in" filter="fade">
                                       <p:cBhvr>
-                                        <p:cTn id="37" dur="400"/>
+                                        <p:cTn id="36" dur="400"/>
                                         <p:tgtEl>
                                           <p:spTgt spid="15"/>
                                         </p:tgtEl>
@@ -15908,15 +17566,28 @@
                                   </p:childTnLst>
                                 </p:cTn>
                               </p:par>
+                            </p:childTnLst>
+                          </p:cTn>
+                        </p:par>
+                        <p:par>
+                          <p:cTn id="37" fill="hold">
+                            <p:stCondLst>
+                              <p:cond delay="12320"/>
+                            </p:stCondLst>
+                            <p:childTnLst>
                               <p:par>
-                                <p:cTn id="38" presetID="10" presetClass="entr" presetSubtype="0" fill="hold" grpId="0" nodeType="afterEffect">
+                                <p:cTn presetID="10" presetClass="entr" presetSubtype="0" fill="hold" grpId="0" nodeType="afterEffect">
                                   <p:stCondLst>
-                                    <p:cond delay="12320"/>
+                                    <p:cond delay="0"/>
                                   </p:stCondLst>
                                   <p:childTnLst>
                                     <p:set>
                                       <p:cBhvr>
-                                        <p:cTn id="39" dur="1"/>
+                                        <p:cTn id="38" dur="1" fill="hold">
+                                          <p:stCondLst>
+                                            <p:cond delay="0"/>
+                                          </p:stCondLst>
+                                        </p:cTn>
                                         <p:tgtEl>
                                           <p:spTgt spid="8"/>
                                         </p:tgtEl>
@@ -15930,7 +17601,7 @@
                                     </p:set>
                                     <p:animEffect transition="in" filter="fade">
                                       <p:cBhvr>
-                                        <p:cTn id="40" dur="400"/>
+                                        <p:cTn id="39" dur="400"/>
                                         <p:tgtEl>
                                           <p:spTgt spid="8"/>
                                         </p:tgtEl>
@@ -15939,15 +17610,28 @@
                                   </p:childTnLst>
                                 </p:cTn>
                               </p:par>
+                            </p:childTnLst>
+                          </p:cTn>
+                        </p:par>
+                        <p:par>
+                          <p:cTn id="40" fill="hold">
+                            <p:stCondLst>
+                              <p:cond delay="14160"/>
+                            </p:stCondLst>
+                            <p:childTnLst>
                               <p:par>
-                                <p:cTn id="41" presetID="10" presetClass="entr" presetSubtype="0" fill="hold" grpId="0" nodeType="afterEffect">
+                                <p:cTn presetID="10" presetClass="entr" presetSubtype="0" fill="hold" grpId="0" nodeType="afterEffect">
                                   <p:stCondLst>
-                                    <p:cond delay="14160"/>
+                                    <p:cond delay="0"/>
                                   </p:stCondLst>
                                   <p:childTnLst>
                                     <p:set>
                                       <p:cBhvr>
-                                        <p:cTn id="42" dur="1"/>
+                                        <p:cTn id="41" dur="1" fill="hold">
+                                          <p:stCondLst>
+                                            <p:cond delay="0"/>
+                                          </p:stCondLst>
+                                        </p:cTn>
                                         <p:tgtEl>
                                           <p:spTgt spid="12"/>
                                         </p:tgtEl>
@@ -15961,7 +17645,7 @@
                                     </p:set>
                                     <p:animEffect transition="in" filter="fade">
                                       <p:cBhvr>
-                                        <p:cTn id="43" dur="400"/>
+                                        <p:cTn id="42" dur="400"/>
                                         <p:tgtEl>
                                           <p:spTgt spid="12"/>
                                         </p:tgtEl>
@@ -15970,15 +17654,28 @@
                                   </p:childTnLst>
                                 </p:cTn>
                               </p:par>
+                            </p:childTnLst>
+                          </p:cTn>
+                        </p:par>
+                        <p:par>
+                          <p:cTn id="43" fill="hold">
+                            <p:stCondLst>
+                              <p:cond delay="16120"/>
+                            </p:stCondLst>
+                            <p:childTnLst>
                               <p:par>
-                                <p:cTn id="44" presetID="10" presetClass="entr" presetSubtype="0" fill="hold" grpId="0" nodeType="afterEffect">
+                                <p:cTn presetID="10" presetClass="entr" presetSubtype="0" fill="hold" grpId="0" nodeType="afterEffect">
                                   <p:stCondLst>
-                                    <p:cond delay="16120"/>
+                                    <p:cond delay="0"/>
                                   </p:stCondLst>
                                   <p:childTnLst>
                                     <p:set>
                                       <p:cBhvr>
-                                        <p:cTn id="45" dur="1"/>
+                                        <p:cTn id="44" dur="1" fill="hold">
+                                          <p:stCondLst>
+                                            <p:cond delay="0"/>
+                                          </p:stCondLst>
+                                        </p:cTn>
                                         <p:tgtEl>
                                           <p:spTgt spid="16"/>
                                         </p:tgtEl>
@@ -15992,7 +17689,7 @@
                                     </p:set>
                                     <p:animEffect transition="in" filter="fade">
                                       <p:cBhvr>
-                                        <p:cTn id="46" dur="400"/>
+                                        <p:cTn id="45" dur="400"/>
                                         <p:tgtEl>
                                           <p:spTgt spid="16"/>
                                         </p:tgtEl>
@@ -16001,15 +17698,28 @@
                                   </p:childTnLst>
                                 </p:cTn>
                               </p:par>
+                            </p:childTnLst>
+                          </p:cTn>
+                        </p:par>
+                        <p:par>
+                          <p:cTn id="46" fill="hold">
+                            <p:stCondLst>
+                              <p:cond delay="18200"/>
+                            </p:stCondLst>
+                            <p:childTnLst>
                               <p:par>
-                                <p:cTn id="47" presetID="10" presetClass="entr" presetSubtype="0" fill="hold" grpId="0" nodeType="afterEffect">
+                                <p:cTn presetID="10" presetClass="entr" presetSubtype="0" fill="hold" grpId="0" nodeType="afterEffect">
                                   <p:stCondLst>
-                                    <p:cond delay="18200"/>
+                                    <p:cond delay="0"/>
                                   </p:stCondLst>
                                   <p:childTnLst>
                                     <p:set>
                                       <p:cBhvr>
-                                        <p:cTn id="48" dur="1"/>
+                                        <p:cTn id="47" dur="1" fill="hold">
+                                          <p:stCondLst>
+                                            <p:cond delay="0"/>
+                                          </p:stCondLst>
+                                        </p:cTn>
                                         <p:tgtEl>
                                           <p:spTgt spid="17"/>
                                         </p:tgtEl>
@@ -16023,7 +17733,7 @@
                                     </p:set>
                                     <p:animEffect transition="in" filter="fade">
                                       <p:cBhvr>
-                                        <p:cTn id="49" dur="400"/>
+                                        <p:cTn id="48" dur="400"/>
                                         <p:tgtEl>
                                           <p:spTgt spid="17"/>
                                         </p:tgtEl>
@@ -16032,15 +17742,28 @@
                                   </p:childTnLst>
                                 </p:cTn>
                               </p:par>
+                            </p:childTnLst>
+                          </p:cTn>
+                        </p:par>
+                        <p:par>
+                          <p:cTn id="49" fill="hold">
+                            <p:stCondLst>
+                              <p:cond delay="20400"/>
+                            </p:stCondLst>
+                            <p:childTnLst>
                               <p:par>
-                                <p:cTn id="50" presetID="10" presetClass="entr" presetSubtype="0" fill="hold" grpId="0" nodeType="afterEffect">
+                                <p:cTn presetID="10" presetClass="entr" presetSubtype="0" fill="hold" grpId="0" nodeType="afterEffect">
                                   <p:stCondLst>
-                                    <p:cond delay="20400"/>
+                                    <p:cond delay="0"/>
                                   </p:stCondLst>
                                   <p:childTnLst>
                                     <p:set>
                                       <p:cBhvr>
-                                        <p:cTn id="51" dur="1"/>
+                                        <p:cTn id="50" dur="1" fill="hold">
+                                          <p:stCondLst>
+                                            <p:cond delay="0"/>
+                                          </p:stCondLst>
+                                        </p:cTn>
                                         <p:tgtEl>
                                           <p:spTgt spid="18"/>
                                         </p:tgtEl>
@@ -16054,7 +17777,7 @@
                                     </p:set>
                                     <p:animEffect transition="in" filter="fade">
                                       <p:cBhvr>
-                                        <p:cTn id="52" dur="400"/>
+                                        <p:cTn id="51" dur="400"/>
                                         <p:tgtEl>
                                           <p:spTgt spid="18"/>
                                         </p:tgtEl>
@@ -16722,10 +18445,7 @@
                   <p:par>
                     <p:cTn id="3" fill="hold">
                       <p:stCondLst>
-                        <p:cond delay="indefinite"/>
-                        <p:cond evt="onBegin" delay="0">
-                          <p:tn val="2"/>
-                        </p:cond>
+                        <p:cond delay="0"/>
                       </p:stCondLst>
                       <p:childTnLst>
                         <p:par>
@@ -16735,14 +18455,18 @@
                             </p:stCondLst>
                             <p:childTnLst>
                               <p:par>
-                                <p:cTn id="5" presetID="2" presetClass="entr" presetSubtype="4" fill="hold" grpId="0" nodeType="afterEffect">
+                                <p:cTn presetID="2" presetClass="entr" presetSubtype="4" fill="hold" grpId="0" nodeType="afterEffect">
                                   <p:stCondLst>
                                     <p:cond delay="0"/>
                                   </p:stCondLst>
                                   <p:childTnLst>
                                     <p:set>
                                       <p:cBhvr>
-                                        <p:cTn id="6" dur="1"/>
+                                        <p:cTn id="5" dur="1" fill="hold">
+                                          <p:stCondLst>
+                                            <p:cond delay="0"/>
+                                          </p:stCondLst>
+                                        </p:cTn>
                                         <p:tgtEl>
                                           <p:spTgt spid="2"/>
                                         </p:tgtEl>
@@ -16756,7 +18480,7 @@
                                     </p:set>
                                     <p:anim calcmode="lin" valueType="num">
                                       <p:cBhvr additive="base">
-                                        <p:cTn id="7" dur="400"/>
+                                        <p:cTn id="6" dur="400"/>
                                         <p:tgtEl>
                                           <p:spTgt spid="2"/>
                                         </p:tgtEl>
@@ -16779,7 +18503,7 @@
                                     </p:anim>
                                     <p:anim calcmode="lin" valueType="num">
                                       <p:cBhvr additive="base">
-                                        <p:cTn id="8" dur="400"/>
+                                        <p:cTn id="7" dur="400"/>
                                         <p:tgtEl>
                                           <p:spTgt spid="2"/>
                                         </p:tgtEl>
@@ -16803,15 +18527,28 @@
                                   </p:childTnLst>
                                 </p:cTn>
                               </p:par>
+                            </p:childTnLst>
+                          </p:cTn>
+                        </p:par>
+                        <p:par>
+                          <p:cTn id="8" fill="hold">
+                            <p:stCondLst>
+                              <p:cond delay="520"/>
+                            </p:stCondLst>
+                            <p:childTnLst>
                               <p:par>
-                                <p:cTn id="9" presetID="2" presetClass="entr" presetSubtype="4" fill="hold" grpId="0" nodeType="afterEffect">
+                                <p:cTn presetID="2" presetClass="entr" presetSubtype="4" fill="hold" grpId="0" nodeType="afterEffect">
                                   <p:stCondLst>
-                                    <p:cond delay="520"/>
+                                    <p:cond delay="0"/>
                                   </p:stCondLst>
                                   <p:childTnLst>
                                     <p:set>
                                       <p:cBhvr>
-                                        <p:cTn id="10" dur="1"/>
+                                        <p:cTn id="9" dur="1" fill="hold">
+                                          <p:stCondLst>
+                                            <p:cond delay="0"/>
+                                          </p:stCondLst>
+                                        </p:cTn>
                                         <p:tgtEl>
                                           <p:spTgt spid="3"/>
                                         </p:tgtEl>
@@ -16825,7 +18562,7 @@
                                     </p:set>
                                     <p:anim calcmode="lin" valueType="num">
                                       <p:cBhvr additive="base">
-                                        <p:cTn id="11" dur="400"/>
+                                        <p:cTn id="10" dur="400"/>
                                         <p:tgtEl>
                                           <p:spTgt spid="3"/>
                                         </p:tgtEl>
@@ -16848,7 +18585,7 @@
                                     </p:anim>
                                     <p:anim calcmode="lin" valueType="num">
                                       <p:cBhvr additive="base">
-                                        <p:cTn id="12" dur="400"/>
+                                        <p:cTn id="11" dur="400"/>
                                         <p:tgtEl>
                                           <p:spTgt spid="3"/>
                                         </p:tgtEl>
@@ -16872,15 +18609,28 @@
                                   </p:childTnLst>
                                 </p:cTn>
                               </p:par>
+                            </p:childTnLst>
+                          </p:cTn>
+                        </p:par>
+                        <p:par>
+                          <p:cTn id="12" fill="hold">
+                            <p:stCondLst>
+                              <p:cond delay="1160"/>
+                            </p:stCondLst>
+                            <p:childTnLst>
                               <p:par>
-                                <p:cTn id="13" presetID="2" presetClass="entr" presetSubtype="4" fill="hold" grpId="0" nodeType="afterEffect">
+                                <p:cTn presetID="2" presetClass="entr" presetSubtype="4" fill="hold" grpId="0" nodeType="afterEffect">
                                   <p:stCondLst>
-                                    <p:cond delay="1160"/>
+                                    <p:cond delay="0"/>
                                   </p:stCondLst>
                                   <p:childTnLst>
                                     <p:set>
                                       <p:cBhvr>
-                                        <p:cTn id="14" dur="1"/>
+                                        <p:cTn id="13" dur="1" fill="hold">
+                                          <p:stCondLst>
+                                            <p:cond delay="0"/>
+                                          </p:stCondLst>
+                                        </p:cTn>
                                         <p:tgtEl>
                                           <p:spTgt spid="5"/>
                                         </p:tgtEl>
@@ -16894,7 +18644,7 @@
                                     </p:set>
                                     <p:anim calcmode="lin" valueType="num">
                                       <p:cBhvr additive="base">
-                                        <p:cTn id="15" dur="400"/>
+                                        <p:cTn id="14" dur="400"/>
                                         <p:tgtEl>
                                           <p:spTgt spid="5"/>
                                         </p:tgtEl>
@@ -16917,7 +18667,7 @@
                                     </p:anim>
                                     <p:anim calcmode="lin" valueType="num">
                                       <p:cBhvr additive="base">
-                                        <p:cTn id="16" dur="400"/>
+                                        <p:cTn id="15" dur="400"/>
                                         <p:tgtEl>
                                           <p:spTgt spid="5"/>
                                         </p:tgtEl>
@@ -16941,15 +18691,28 @@
                                   </p:childTnLst>
                                 </p:cTn>
                               </p:par>
+                            </p:childTnLst>
+                          </p:cTn>
+                        </p:par>
+                        <p:par>
+                          <p:cTn id="16" fill="hold">
+                            <p:stCondLst>
+                              <p:cond delay="1920"/>
+                            </p:stCondLst>
+                            <p:childTnLst>
                               <p:par>
-                                <p:cTn id="17" presetID="2" presetClass="entr" presetSubtype="4" fill="hold" grpId="0" nodeType="afterEffect">
+                                <p:cTn presetID="2" presetClass="entr" presetSubtype="4" fill="hold" grpId="0" nodeType="afterEffect">
                                   <p:stCondLst>
-                                    <p:cond delay="1920"/>
+                                    <p:cond delay="0"/>
                                   </p:stCondLst>
                                   <p:childTnLst>
                                     <p:set>
                                       <p:cBhvr>
-                                        <p:cTn id="18" dur="1"/>
+                                        <p:cTn id="17" dur="1" fill="hold">
+                                          <p:stCondLst>
+                                            <p:cond delay="0"/>
+                                          </p:stCondLst>
+                                        </p:cTn>
                                         <p:tgtEl>
                                           <p:spTgt spid="6"/>
                                         </p:tgtEl>
@@ -16963,7 +18726,7 @@
                                     </p:set>
                                     <p:anim calcmode="lin" valueType="num">
                                       <p:cBhvr additive="base">
-                                        <p:cTn id="19" dur="400"/>
+                                        <p:cTn id="18" dur="400"/>
                                         <p:tgtEl>
                                           <p:spTgt spid="6"/>
                                         </p:tgtEl>
@@ -16986,7 +18749,7 @@
                                     </p:anim>
                                     <p:anim calcmode="lin" valueType="num">
                                       <p:cBhvr additive="base">
-                                        <p:cTn id="20" dur="400"/>
+                                        <p:cTn id="19" dur="400"/>
                                         <p:tgtEl>
                                           <p:spTgt spid="6"/>
                                         </p:tgtEl>
@@ -17010,15 +18773,28 @@
                                   </p:childTnLst>
                                 </p:cTn>
                               </p:par>
+                            </p:childTnLst>
+                          </p:cTn>
+                        </p:par>
+                        <p:par>
+                          <p:cTn id="20" fill="hold">
+                            <p:stCondLst>
+                              <p:cond delay="2800"/>
+                            </p:stCondLst>
+                            <p:childTnLst>
                               <p:par>
-                                <p:cTn id="21" presetID="2" presetClass="entr" presetSubtype="4" fill="hold" grpId="0" nodeType="afterEffect">
+                                <p:cTn presetID="2" presetClass="entr" presetSubtype="4" fill="hold" grpId="0" nodeType="afterEffect">
                                   <p:stCondLst>
-                                    <p:cond delay="2800"/>
+                                    <p:cond delay="0"/>
                                   </p:stCondLst>
                                   <p:childTnLst>
                                     <p:set>
                                       <p:cBhvr>
-                                        <p:cTn id="22" dur="1"/>
+                                        <p:cTn id="21" dur="1" fill="hold">
+                                          <p:stCondLst>
+                                            <p:cond delay="0"/>
+                                          </p:stCondLst>
+                                        </p:cTn>
                                         <p:tgtEl>
                                           <p:spTgt spid="9"/>
                                         </p:tgtEl>
@@ -17032,7 +18808,7 @@
                                     </p:set>
                                     <p:anim calcmode="lin" valueType="num">
                                       <p:cBhvr additive="base">
-                                        <p:cTn id="23" dur="400"/>
+                                        <p:cTn id="22" dur="400"/>
                                         <p:tgtEl>
                                           <p:spTgt spid="9"/>
                                         </p:tgtEl>
@@ -17055,7 +18831,7 @@
                                     </p:anim>
                                     <p:anim calcmode="lin" valueType="num">
                                       <p:cBhvr additive="base">
-                                        <p:cTn id="24" dur="400"/>
+                                        <p:cTn id="23" dur="400"/>
                                         <p:tgtEl>
                                           <p:spTgt spid="9"/>
                                         </p:tgtEl>
@@ -17079,15 +18855,28 @@
                                   </p:childTnLst>
                                 </p:cTn>
                               </p:par>
+                            </p:childTnLst>
+                          </p:cTn>
+                        </p:par>
+                        <p:par>
+                          <p:cTn id="24" fill="hold">
+                            <p:stCondLst>
+                              <p:cond delay="3800"/>
+                            </p:stCondLst>
+                            <p:childTnLst>
                               <p:par>
-                                <p:cTn id="25" presetID="2" presetClass="entr" presetSubtype="4" fill="hold" grpId="0" nodeType="afterEffect">
+                                <p:cTn presetID="2" presetClass="entr" presetSubtype="4" fill="hold" grpId="0" nodeType="afterEffect">
                                   <p:stCondLst>
-                                    <p:cond delay="3800"/>
+                                    <p:cond delay="0"/>
                                   </p:stCondLst>
                                   <p:childTnLst>
                                     <p:set>
                                       <p:cBhvr>
-                                        <p:cTn id="26" dur="1"/>
+                                        <p:cTn id="25" dur="1" fill="hold">
+                                          <p:stCondLst>
+                                            <p:cond delay="0"/>
+                                          </p:stCondLst>
+                                        </p:cTn>
                                         <p:tgtEl>
                                           <p:spTgt spid="10"/>
                                         </p:tgtEl>
@@ -17101,7 +18890,7 @@
                                     </p:set>
                                     <p:anim calcmode="lin" valueType="num">
                                       <p:cBhvr additive="base">
-                                        <p:cTn id="27" dur="400"/>
+                                        <p:cTn id="26" dur="400"/>
                                         <p:tgtEl>
                                           <p:spTgt spid="10"/>
                                         </p:tgtEl>
@@ -17124,7 +18913,7 @@
                                     </p:anim>
                                     <p:anim calcmode="lin" valueType="num">
                                       <p:cBhvr additive="base">
-                                        <p:cTn id="28" dur="400"/>
+                                        <p:cTn id="27" dur="400"/>
                                         <p:tgtEl>
                                           <p:spTgt spid="10"/>
                                         </p:tgtEl>
@@ -17148,15 +18937,28 @@
                                   </p:childTnLst>
                                 </p:cTn>
                               </p:par>
+                            </p:childTnLst>
+                          </p:cTn>
+                        </p:par>
+                        <p:par>
+                          <p:cTn id="28" fill="hold">
+                            <p:stCondLst>
+                              <p:cond delay="4920"/>
+                            </p:stCondLst>
+                            <p:childTnLst>
                               <p:par>
-                                <p:cTn id="29" presetID="2" presetClass="entr" presetSubtype="4" fill="hold" grpId="0" nodeType="afterEffect">
+                                <p:cTn presetID="2" presetClass="entr" presetSubtype="4" fill="hold" grpId="0" nodeType="afterEffect">
                                   <p:stCondLst>
-                                    <p:cond delay="4920"/>
+                                    <p:cond delay="0"/>
                                   </p:stCondLst>
                                   <p:childTnLst>
                                     <p:set>
                                       <p:cBhvr>
-                                        <p:cTn id="30" dur="1"/>
+                                        <p:cTn id="29" dur="1" fill="hold">
+                                          <p:stCondLst>
+                                            <p:cond delay="0"/>
+                                          </p:stCondLst>
+                                        </p:cTn>
                                         <p:tgtEl>
                                           <p:spTgt spid="13"/>
                                         </p:tgtEl>
@@ -17170,7 +18972,7 @@
                                     </p:set>
                                     <p:anim calcmode="lin" valueType="num">
                                       <p:cBhvr additive="base">
-                                        <p:cTn id="31" dur="400"/>
+                                        <p:cTn id="30" dur="400"/>
                                         <p:tgtEl>
                                           <p:spTgt spid="13"/>
                                         </p:tgtEl>
@@ -17193,7 +18995,7 @@
                                     </p:anim>
                                     <p:anim calcmode="lin" valueType="num">
                                       <p:cBhvr additive="base">
-                                        <p:cTn id="32" dur="400"/>
+                                        <p:cTn id="31" dur="400"/>
                                         <p:tgtEl>
                                           <p:spTgt spid="13"/>
                                         </p:tgtEl>
@@ -17217,15 +19019,28 @@
                                   </p:childTnLst>
                                 </p:cTn>
                               </p:par>
+                            </p:childTnLst>
+                          </p:cTn>
+                        </p:par>
+                        <p:par>
+                          <p:cTn id="32" fill="hold">
+                            <p:stCondLst>
+                              <p:cond delay="6160"/>
+                            </p:stCondLst>
+                            <p:childTnLst>
                               <p:par>
-                                <p:cTn id="33" presetID="2" presetClass="entr" presetSubtype="4" fill="hold" grpId="0" nodeType="afterEffect">
+                                <p:cTn presetID="2" presetClass="entr" presetSubtype="4" fill="hold" grpId="0" nodeType="afterEffect">
                                   <p:stCondLst>
-                                    <p:cond delay="6160"/>
+                                    <p:cond delay="0"/>
                                   </p:stCondLst>
                                   <p:childTnLst>
                                     <p:set>
                                       <p:cBhvr>
-                                        <p:cTn id="34" dur="1"/>
+                                        <p:cTn id="33" dur="1" fill="hold">
+                                          <p:stCondLst>
+                                            <p:cond delay="0"/>
+                                          </p:stCondLst>
+                                        </p:cTn>
                                         <p:tgtEl>
                                           <p:spTgt spid="14"/>
                                         </p:tgtEl>
@@ -17239,7 +19054,7 @@
                                     </p:set>
                                     <p:anim calcmode="lin" valueType="num">
                                       <p:cBhvr additive="base">
-                                        <p:cTn id="35" dur="400"/>
+                                        <p:cTn id="34" dur="400"/>
                                         <p:tgtEl>
                                           <p:spTgt spid="14"/>
                                         </p:tgtEl>
@@ -17262,7 +19077,7 @@
                                     </p:anim>
                                     <p:anim calcmode="lin" valueType="num">
                                       <p:cBhvr additive="base">
-                                        <p:cTn id="36" dur="400"/>
+                                        <p:cTn id="35" dur="400"/>
                                         <p:tgtEl>
                                           <p:spTgt spid="14"/>
                                         </p:tgtEl>
@@ -17286,15 +19101,28 @@
                                   </p:childTnLst>
                                 </p:cTn>
                               </p:par>
+                            </p:childTnLst>
+                          </p:cTn>
+                        </p:par>
+                        <p:par>
+                          <p:cTn id="36" fill="hold">
+                            <p:stCondLst>
+                              <p:cond delay="7520"/>
+                            </p:stCondLst>
+                            <p:childTnLst>
                               <p:par>
-                                <p:cTn id="37" presetID="2" presetClass="entr" presetSubtype="4" fill="hold" grpId="0" nodeType="afterEffect">
+                                <p:cTn presetID="2" presetClass="entr" presetSubtype="4" fill="hold" grpId="0" nodeType="afterEffect">
                                   <p:stCondLst>
-                                    <p:cond delay="7520"/>
+                                    <p:cond delay="0"/>
                                   </p:stCondLst>
                                   <p:childTnLst>
                                     <p:set>
                                       <p:cBhvr>
-                                        <p:cTn id="38" dur="1"/>
+                                        <p:cTn id="37" dur="1" fill="hold">
+                                          <p:stCondLst>
+                                            <p:cond delay="0"/>
+                                          </p:stCondLst>
+                                        </p:cTn>
                                         <p:tgtEl>
                                           <p:spTgt spid="7"/>
                                         </p:tgtEl>
@@ -17308,7 +19136,7 @@
                                     </p:set>
                                     <p:anim calcmode="lin" valueType="num">
                                       <p:cBhvr additive="base">
-                                        <p:cTn id="39" dur="400"/>
+                                        <p:cTn id="38" dur="400"/>
                                         <p:tgtEl>
                                           <p:spTgt spid="7"/>
                                         </p:tgtEl>
@@ -17331,7 +19159,7 @@
                                     </p:anim>
                                     <p:anim calcmode="lin" valueType="num">
                                       <p:cBhvr additive="base">
-                                        <p:cTn id="40" dur="400"/>
+                                        <p:cTn id="39" dur="400"/>
                                         <p:tgtEl>
                                           <p:spTgt spid="7"/>
                                         </p:tgtEl>
@@ -17355,15 +19183,28 @@
                                   </p:childTnLst>
                                 </p:cTn>
                               </p:par>
+                            </p:childTnLst>
+                          </p:cTn>
+                        </p:par>
+                        <p:par>
+                          <p:cTn id="40" fill="hold">
+                            <p:stCondLst>
+                              <p:cond delay="9000"/>
+                            </p:stCondLst>
+                            <p:childTnLst>
                               <p:par>
-                                <p:cTn id="41" presetID="2" presetClass="entr" presetSubtype="4" fill="hold" grpId="0" nodeType="afterEffect">
+                                <p:cTn presetID="2" presetClass="entr" presetSubtype="4" fill="hold" grpId="0" nodeType="afterEffect">
                                   <p:stCondLst>
-                                    <p:cond delay="9000"/>
+                                    <p:cond delay="0"/>
                                   </p:stCondLst>
                                   <p:childTnLst>
                                     <p:set>
                                       <p:cBhvr>
-                                        <p:cTn id="42" dur="1"/>
+                                        <p:cTn id="41" dur="1" fill="hold">
+                                          <p:stCondLst>
+                                            <p:cond delay="0"/>
+                                          </p:stCondLst>
+                                        </p:cTn>
                                         <p:tgtEl>
                                           <p:spTgt spid="11"/>
                                         </p:tgtEl>
@@ -17377,7 +19218,7 @@
                                     </p:set>
                                     <p:anim calcmode="lin" valueType="num">
                                       <p:cBhvr additive="base">
-                                        <p:cTn id="43" dur="400"/>
+                                        <p:cTn id="42" dur="400"/>
                                         <p:tgtEl>
                                           <p:spTgt spid="11"/>
                                         </p:tgtEl>
@@ -17400,7 +19241,7 @@
                                     </p:anim>
                                     <p:anim calcmode="lin" valueType="num">
                                       <p:cBhvr additive="base">
-                                        <p:cTn id="44" dur="400"/>
+                                        <p:cTn id="43" dur="400"/>
                                         <p:tgtEl>
                                           <p:spTgt spid="11"/>
                                         </p:tgtEl>
@@ -17424,15 +19265,28 @@
                                   </p:childTnLst>
                                 </p:cTn>
                               </p:par>
+                            </p:childTnLst>
+                          </p:cTn>
+                        </p:par>
+                        <p:par>
+                          <p:cTn id="44" fill="hold">
+                            <p:stCondLst>
+                              <p:cond delay="10600"/>
+                            </p:stCondLst>
+                            <p:childTnLst>
                               <p:par>
-                                <p:cTn id="45" presetID="2" presetClass="entr" presetSubtype="4" fill="hold" grpId="0" nodeType="afterEffect">
+                                <p:cTn presetID="2" presetClass="entr" presetSubtype="4" fill="hold" grpId="0" nodeType="afterEffect">
                                   <p:stCondLst>
-                                    <p:cond delay="10600"/>
+                                    <p:cond delay="0"/>
                                   </p:stCondLst>
                                   <p:childTnLst>
                                     <p:set>
                                       <p:cBhvr>
-                                        <p:cTn id="46" dur="1"/>
+                                        <p:cTn id="45" dur="1" fill="hold">
+                                          <p:stCondLst>
+                                            <p:cond delay="0"/>
+                                          </p:stCondLst>
+                                        </p:cTn>
                                         <p:tgtEl>
                                           <p:spTgt spid="15"/>
                                         </p:tgtEl>
@@ -17446,7 +19300,7 @@
                                     </p:set>
                                     <p:anim calcmode="lin" valueType="num">
                                       <p:cBhvr additive="base">
-                                        <p:cTn id="47" dur="400"/>
+                                        <p:cTn id="46" dur="400"/>
                                         <p:tgtEl>
                                           <p:spTgt spid="15"/>
                                         </p:tgtEl>
@@ -17469,7 +19323,7 @@
                                     </p:anim>
                                     <p:anim calcmode="lin" valueType="num">
                                       <p:cBhvr additive="base">
-                                        <p:cTn id="48" dur="400"/>
+                                        <p:cTn id="47" dur="400"/>
                                         <p:tgtEl>
                                           <p:spTgt spid="15"/>
                                         </p:tgtEl>
@@ -17493,15 +19347,28 @@
                                   </p:childTnLst>
                                 </p:cTn>
                               </p:par>
+                            </p:childTnLst>
+                          </p:cTn>
+                        </p:par>
+                        <p:par>
+                          <p:cTn id="48" fill="hold">
+                            <p:stCondLst>
+                              <p:cond delay="12320"/>
+                            </p:stCondLst>
+                            <p:childTnLst>
                               <p:par>
-                                <p:cTn id="49" presetID="2" presetClass="entr" presetSubtype="4" fill="hold" grpId="0" nodeType="afterEffect">
+                                <p:cTn presetID="2" presetClass="entr" presetSubtype="4" fill="hold" grpId="0" nodeType="afterEffect">
                                   <p:stCondLst>
-                                    <p:cond delay="12320"/>
+                                    <p:cond delay="0"/>
                                   </p:stCondLst>
                                   <p:childTnLst>
                                     <p:set>
                                       <p:cBhvr>
-                                        <p:cTn id="50" dur="1"/>
+                                        <p:cTn id="49" dur="1" fill="hold">
+                                          <p:stCondLst>
+                                            <p:cond delay="0"/>
+                                          </p:stCondLst>
+                                        </p:cTn>
                                         <p:tgtEl>
                                           <p:spTgt spid="8"/>
                                         </p:tgtEl>
@@ -17515,7 +19382,7 @@
                                     </p:set>
                                     <p:anim calcmode="lin" valueType="num">
                                       <p:cBhvr additive="base">
-                                        <p:cTn id="51" dur="400"/>
+                                        <p:cTn id="50" dur="400"/>
                                         <p:tgtEl>
                                           <p:spTgt spid="8"/>
                                         </p:tgtEl>
@@ -17538,7 +19405,7 @@
                                     </p:anim>
                                     <p:anim calcmode="lin" valueType="num">
                                       <p:cBhvr additive="base">
-                                        <p:cTn id="52" dur="400"/>
+                                        <p:cTn id="51" dur="400"/>
                                         <p:tgtEl>
                                           <p:spTgt spid="8"/>
                                         </p:tgtEl>
@@ -17562,15 +19429,28 @@
                                   </p:childTnLst>
                                 </p:cTn>
                               </p:par>
+                            </p:childTnLst>
+                          </p:cTn>
+                        </p:par>
+                        <p:par>
+                          <p:cTn id="52" fill="hold">
+                            <p:stCondLst>
+                              <p:cond delay="14160"/>
+                            </p:stCondLst>
+                            <p:childTnLst>
                               <p:par>
-                                <p:cTn id="53" presetID="2" presetClass="entr" presetSubtype="4" fill="hold" grpId="0" nodeType="afterEffect">
+                                <p:cTn presetID="2" presetClass="entr" presetSubtype="4" fill="hold" grpId="0" nodeType="afterEffect">
                                   <p:stCondLst>
-                                    <p:cond delay="14160"/>
+                                    <p:cond delay="0"/>
                                   </p:stCondLst>
                                   <p:childTnLst>
                                     <p:set>
                                       <p:cBhvr>
-                                        <p:cTn id="54" dur="1"/>
+                                        <p:cTn id="53" dur="1" fill="hold">
+                                          <p:stCondLst>
+                                            <p:cond delay="0"/>
+                                          </p:stCondLst>
+                                        </p:cTn>
                                         <p:tgtEl>
                                           <p:spTgt spid="12"/>
                                         </p:tgtEl>
@@ -17584,7 +19464,7 @@
                                     </p:set>
                                     <p:anim calcmode="lin" valueType="num">
                                       <p:cBhvr additive="base">
-                                        <p:cTn id="55" dur="400"/>
+                                        <p:cTn id="54" dur="400"/>
                                         <p:tgtEl>
                                           <p:spTgt spid="12"/>
                                         </p:tgtEl>
@@ -17607,7 +19487,7 @@
                                     </p:anim>
                                     <p:anim calcmode="lin" valueType="num">
                                       <p:cBhvr additive="base">
-                                        <p:cTn id="56" dur="400"/>
+                                        <p:cTn id="55" dur="400"/>
                                         <p:tgtEl>
                                           <p:spTgt spid="12"/>
                                         </p:tgtEl>
@@ -17631,15 +19511,28 @@
                                   </p:childTnLst>
                                 </p:cTn>
                               </p:par>
+                            </p:childTnLst>
+                          </p:cTn>
+                        </p:par>
+                        <p:par>
+                          <p:cTn id="56" fill="hold">
+                            <p:stCondLst>
+                              <p:cond delay="16120"/>
+                            </p:stCondLst>
+                            <p:childTnLst>
                               <p:par>
-                                <p:cTn id="57" presetID="2" presetClass="entr" presetSubtype="4" fill="hold" grpId="0" nodeType="afterEffect">
+                                <p:cTn presetID="2" presetClass="entr" presetSubtype="4" fill="hold" grpId="0" nodeType="afterEffect">
                                   <p:stCondLst>
-                                    <p:cond delay="16120"/>
+                                    <p:cond delay="0"/>
                                   </p:stCondLst>
                                   <p:childTnLst>
                                     <p:set>
                                       <p:cBhvr>
-                                        <p:cTn id="58" dur="1"/>
+                                        <p:cTn id="57" dur="1" fill="hold">
+                                          <p:stCondLst>
+                                            <p:cond delay="0"/>
+                                          </p:stCondLst>
+                                        </p:cTn>
                                         <p:tgtEl>
                                           <p:spTgt spid="16"/>
                                         </p:tgtEl>
@@ -17653,7 +19546,7 @@
                                     </p:set>
                                     <p:anim calcmode="lin" valueType="num">
                                       <p:cBhvr additive="base">
-                                        <p:cTn id="59" dur="400"/>
+                                        <p:cTn id="58" dur="400"/>
                                         <p:tgtEl>
                                           <p:spTgt spid="16"/>
                                         </p:tgtEl>
@@ -17676,7 +19569,7 @@
                                     </p:anim>
                                     <p:anim calcmode="lin" valueType="num">
                                       <p:cBhvr additive="base">
-                                        <p:cTn id="60" dur="400"/>
+                                        <p:cTn id="59" dur="400"/>
                                         <p:tgtEl>
                                           <p:spTgt spid="16"/>
                                         </p:tgtEl>
@@ -17700,15 +19593,28 @@
                                   </p:childTnLst>
                                 </p:cTn>
                               </p:par>
+                            </p:childTnLst>
+                          </p:cTn>
+                        </p:par>
+                        <p:par>
+                          <p:cTn id="60" fill="hold">
+                            <p:stCondLst>
+                              <p:cond delay="18200"/>
+                            </p:stCondLst>
+                            <p:childTnLst>
                               <p:par>
-                                <p:cTn id="61" presetID="2" presetClass="entr" presetSubtype="4" fill="hold" grpId="0" nodeType="afterEffect">
+                                <p:cTn presetID="2" presetClass="entr" presetSubtype="4" fill="hold" grpId="0" nodeType="afterEffect">
                                   <p:stCondLst>
-                                    <p:cond delay="18200"/>
+                                    <p:cond delay="0"/>
                                   </p:stCondLst>
                                   <p:childTnLst>
                                     <p:set>
                                       <p:cBhvr>
-                                        <p:cTn id="62" dur="1"/>
+                                        <p:cTn id="61" dur="1" fill="hold">
+                                          <p:stCondLst>
+                                            <p:cond delay="0"/>
+                                          </p:stCondLst>
+                                        </p:cTn>
                                         <p:tgtEl>
                                           <p:spTgt spid="17"/>
                                         </p:tgtEl>
@@ -17722,7 +19628,7 @@
                                     </p:set>
                                     <p:anim calcmode="lin" valueType="num">
                                       <p:cBhvr additive="base">
-                                        <p:cTn id="63" dur="400"/>
+                                        <p:cTn id="62" dur="400"/>
                                         <p:tgtEl>
                                           <p:spTgt spid="17"/>
                                         </p:tgtEl>
@@ -17745,7 +19651,7 @@
                                     </p:anim>
                                     <p:anim calcmode="lin" valueType="num">
                                       <p:cBhvr additive="base">
-                                        <p:cTn id="64" dur="400"/>
+                                        <p:cTn id="63" dur="400"/>
                                         <p:tgtEl>
                                           <p:spTgt spid="17"/>
                                         </p:tgtEl>
@@ -17769,15 +19675,28 @@
                                   </p:childTnLst>
                                 </p:cTn>
                               </p:par>
+                            </p:childTnLst>
+                          </p:cTn>
+                        </p:par>
+                        <p:par>
+                          <p:cTn id="64" fill="hold">
+                            <p:stCondLst>
+                              <p:cond delay="20400"/>
+                            </p:stCondLst>
+                            <p:childTnLst>
                               <p:par>
-                                <p:cTn id="65" presetID="2" presetClass="entr" presetSubtype="4" fill="hold" grpId="0" nodeType="afterEffect">
+                                <p:cTn presetID="2" presetClass="entr" presetSubtype="4" fill="hold" grpId="0" nodeType="afterEffect">
                                   <p:stCondLst>
-                                    <p:cond delay="20400"/>
+                                    <p:cond delay="0"/>
                                   </p:stCondLst>
                                   <p:childTnLst>
                                     <p:set>
                                       <p:cBhvr>
-                                        <p:cTn id="66" dur="1"/>
+                                        <p:cTn id="65" dur="1" fill="hold">
+                                          <p:stCondLst>
+                                            <p:cond delay="0"/>
+                                          </p:stCondLst>
+                                        </p:cTn>
                                         <p:tgtEl>
                                           <p:spTgt spid="18"/>
                                         </p:tgtEl>
@@ -17791,7 +19710,7 @@
                                     </p:set>
                                     <p:anim calcmode="lin" valueType="num">
                                       <p:cBhvr additive="base">
-                                        <p:cTn id="67" dur="400"/>
+                                        <p:cTn id="66" dur="400"/>
                                         <p:tgtEl>
                                           <p:spTgt spid="18"/>
                                         </p:tgtEl>
@@ -17814,7 +19733,7 @@
                                     </p:anim>
                                     <p:anim calcmode="lin" valueType="num">
                                       <p:cBhvr additive="base">
-                                        <p:cTn id="68" dur="400"/>
+                                        <p:cTn id="67" dur="400"/>
                                         <p:tgtEl>
                                           <p:spTgt spid="18"/>
                                         </p:tgtEl>

--- a/examples/pitch-lingxi/灵犀会议机-天使轮路演.pptx
+++ b/examples/pitch-lingxi/灵犀会议机-天使轮路演.pptx
@@ -376,7 +376,9 @@
   </c:chart>
   <c:spPr>
     <a:solidFill>
-      <a:srgbClr val="0B1B33"/>
+      <a:srgbClr val="0B1B33">
+        <a:alpha val="0"/>
+      </a:srgbClr>
     </a:solidFill>
     <a:ln>
       <a:noFill/>
@@ -2106,9 +2108,16 @@
   <p:cSld name="Slide 1">
     <p:bg>
       <p:bgPr>
-        <a:solidFill>
-          <a:srgbClr val="0B1B33"/>
-        </a:solidFill>
+        <a:blipFill dpi="0" rotWithShape="1">
+          <a:blip r:embed="rId1">
+            <a:lum/>
+          </a:blip>
+          <a:srcRect/>
+          <a:stretch>
+            <a:fillRect/>
+          </a:stretch>
+        </a:blipFill>
+        <a:effectLst/>
       </p:bgPr>
     </p:bg>
     <p:spTree>
@@ -2662,9 +2671,16 @@
   <p:cSld name="Slide 10">
     <p:bg>
       <p:bgPr>
-        <a:solidFill>
-          <a:srgbClr val="0B1B33"/>
-        </a:solidFill>
+        <a:blipFill dpi="0" rotWithShape="1">
+          <a:blip r:embed="rId1">
+            <a:lum/>
+          </a:blip>
+          <a:srcRect/>
+          <a:stretch>
+            <a:fillRect/>
+          </a:stretch>
+        </a:blipFill>
+        <a:effectLst/>
       </p:bgPr>
     </p:bg>
     <p:spTree>
@@ -5208,9 +5224,16 @@
   <p:cSld name="Slide 11">
     <p:bg>
       <p:bgPr>
-        <a:solidFill>
-          <a:srgbClr val="0B1B33"/>
-        </a:solidFill>
+        <a:blipFill dpi="0" rotWithShape="1">
+          <a:blip r:embed="rId1">
+            <a:lum/>
+          </a:blip>
+          <a:srcRect/>
+          <a:stretch>
+            <a:fillRect/>
+          </a:stretch>
+        </a:blipFill>
+        <a:effectLst/>
       </p:bgPr>
     </p:bg>
     <p:spTree>
@@ -5305,9 +5328,35 @@
           </a:p>
         </p:txBody>
       </p:sp>
+      <p:pic>
+        <p:nvPicPr>
+          <p:cNvPr id="5" name="Image 0" descr="assets/glow.png">    </p:cNvPr>
+          <p:cNvPicPr>
+            <a:picLocks noChangeAspect="1"/>
+          </p:cNvPicPr>
+          <p:nvPr/>
+        </p:nvPicPr>
+        <p:blipFill>
+          <a:blip r:embed="rId2">
+            <a:alphaModFix amt="60000"/>
+          </a:blip>
+          <a:stretch>
+            <a:fillRect/>
+          </a:stretch>
+        </p:blipFill>
+        <p:spPr>
+          <a:xfrm>
+            <a:off x="-548640" y="822960"/>
+            <a:ext cx="6217920" cy="6217920"/>
+          </a:xfrm>
+          <a:prstGeom prst="rect">
+            <a:avLst/>
+          </a:prstGeom>
+        </p:spPr>
+      </p:pic>
       <p:sp>
         <p:nvSpPr>
-          <p:cNvPr id="5" name="Text 2"/>
+          <p:cNvPr id="6" name="Text 2"/>
           <p:cNvSpPr/>
           <p:nvPr/>
         </p:nvSpPr>
@@ -5346,7 +5395,7 @@
       </p:sp>
       <p:sp>
         <p:nvSpPr>
-          <p:cNvPr id="6" name="Text 3"/>
+          <p:cNvPr id="7" name="Text 3"/>
           <p:cNvSpPr/>
           <p:nvPr/>
         </p:nvSpPr>
@@ -5385,7 +5434,7 @@
       </p:sp>
       <p:sp>
         <p:nvSpPr>
-          <p:cNvPr id="7" name="Text 4"/>
+          <p:cNvPr id="8" name="Text 4"/>
           <p:cNvSpPr/>
           <p:nvPr/>
         </p:nvSpPr>
@@ -5424,7 +5473,7 @@
       </p:sp>
       <p:graphicFrame>
         <p:nvGraphicFramePr>
-          <p:cNvPr id="8" name="Chart 0" descr=""/>
+          <p:cNvPr id="9" name="Chart 0" descr=""/>
           <p:cNvGraphicFramePr/>
           <p:nvPr/>
         </p:nvGraphicFramePr>
@@ -5434,13 +5483,13 @@
         </p:xfrm>
         <a:graphic xmlns:a="http://schemas.openxmlformats.org/drawingml/2006/main">
           <a:graphicData uri="http://schemas.openxmlformats.org/drawingml/2006/chart">
-            <c:chart xmlns:c="http://schemas.openxmlformats.org/drawingml/2006/chart" r:id="rId1"/>
+            <c:chart xmlns:c="http://schemas.openxmlformats.org/drawingml/2006/chart" r:id="rId3"/>
           </a:graphicData>
         </a:graphic>
       </p:graphicFrame>
       <p:sp>
         <p:nvSpPr>
-          <p:cNvPr id="9" name="Text 5"/>
+          <p:cNvPr id="10" name="Text 5"/>
           <p:cNvSpPr/>
           <p:nvPr/>
         </p:nvSpPr>
@@ -5479,7 +5528,7 @@
       </p:sp>
       <p:sp>
         <p:nvSpPr>
-          <p:cNvPr id="10" name="Text 6"/>
+          <p:cNvPr id="11" name="Text 6"/>
           <p:cNvSpPr/>
           <p:nvPr/>
         </p:nvSpPr>
@@ -5541,7 +5590,7 @@
                         <p:par>
                           <p:cTn id="4" fill="hold">
                             <p:stCondLst>
-                              <p:cond delay="0"/>
+                              <p:cond delay="150"/>
                             </p:stCondLst>
                             <p:childTnLst>
                               <p:par>
@@ -5558,7 +5607,7 @@
                                           </p:stCondLst>
                                         </p:cTn>
                                         <p:tgtEl>
-                                          <p:spTgt spid="8"/>
+                                          <p:spTgt spid="2"/>
                                         </p:tgtEl>
                                         <p:attrNameLst>
                                           <p:attrName>style.visibility</p:attrName>
@@ -5572,7 +5621,7 @@
                                       <p:cBhvr>
                                         <p:cTn id="6" dur="450"/>
                                         <p:tgtEl>
-                                          <p:spTgt spid="8"/>
+                                          <p:spTgt spid="2"/>
                                         </p:tgtEl>
                                       </p:cBhvr>
                                     </p:animEffect>
@@ -5585,7 +5634,7 @@
                         <p:par>
                           <p:cTn id="7" fill="hold">
                             <p:stCondLst>
-                              <p:cond delay="600"/>
+                              <p:cond delay="900"/>
                             </p:stCondLst>
                             <p:childTnLst>
                               <p:par>
@@ -5602,7 +5651,7 @@
                                           </p:stCondLst>
                                         </p:cTn>
                                         <p:tgtEl>
-                                          <p:spTgt spid="2"/>
+                                          <p:spTgt spid="5"/>
                                         </p:tgtEl>
                                         <p:attrNameLst>
                                           <p:attrName>style.visibility</p:attrName>
@@ -5616,7 +5665,7 @@
                                       <p:cBhvr>
                                         <p:cTn id="9" dur="450"/>
                                         <p:tgtEl>
-                                          <p:spTgt spid="2"/>
+                                          <p:spTgt spid="5"/>
                                         </p:tgtEl>
                                       </p:cBhvr>
                                     </p:animEffect>
@@ -5629,7 +5678,7 @@
                         <p:par>
                           <p:cTn id="10" fill="hold">
                             <p:stCondLst>
-                              <p:cond delay="1350"/>
+                              <p:cond delay="1800"/>
                             </p:stCondLst>
                             <p:childTnLst>
                               <p:par>
@@ -5673,7 +5722,7 @@
                         <p:par>
                           <p:cTn id="13" fill="hold">
                             <p:stCondLst>
-                              <p:cond delay="2250"/>
+                              <p:cond delay="2850"/>
                             </p:stCondLst>
                             <p:childTnLst>
                               <p:par>
@@ -5690,7 +5739,7 @@
                                           </p:stCondLst>
                                         </p:cTn>
                                         <p:tgtEl>
-                                          <p:spTgt spid="5"/>
+                                          <p:spTgt spid="6"/>
                                         </p:tgtEl>
                                         <p:attrNameLst>
                                           <p:attrName>style.visibility</p:attrName>
@@ -5704,7 +5753,7 @@
                                       <p:cBhvr>
                                         <p:cTn id="15" dur="450"/>
                                         <p:tgtEl>
-                                          <p:spTgt spid="5"/>
+                                          <p:spTgt spid="6"/>
                                         </p:tgtEl>
                                       </p:cBhvr>
                                     </p:animEffect>
@@ -5717,7 +5766,7 @@
                         <p:par>
                           <p:cTn id="16" fill="hold">
                             <p:stCondLst>
-                              <p:cond delay="3300"/>
+                              <p:cond delay="4050"/>
                             </p:stCondLst>
                             <p:childTnLst>
                               <p:par>
@@ -5734,7 +5783,7 @@
                                           </p:stCondLst>
                                         </p:cTn>
                                         <p:tgtEl>
-                                          <p:spTgt spid="6"/>
+                                          <p:spTgt spid="7"/>
                                         </p:tgtEl>
                                         <p:attrNameLst>
                                           <p:attrName>style.visibility</p:attrName>
@@ -5748,7 +5797,7 @@
                                       <p:cBhvr>
                                         <p:cTn id="18" dur="450"/>
                                         <p:tgtEl>
-                                          <p:spTgt spid="6"/>
+                                          <p:spTgt spid="7"/>
                                         </p:tgtEl>
                                       </p:cBhvr>
                                     </p:animEffect>
@@ -5761,7 +5810,7 @@
                         <p:par>
                           <p:cTn id="19" fill="hold">
                             <p:stCondLst>
-                              <p:cond delay="4500"/>
+                              <p:cond delay="5400"/>
                             </p:stCondLst>
                             <p:childTnLst>
                               <p:par>
@@ -5778,7 +5827,7 @@
                                           </p:stCondLst>
                                         </p:cTn>
                                         <p:tgtEl>
-                                          <p:spTgt spid="7"/>
+                                          <p:spTgt spid="8"/>
                                         </p:tgtEl>
                                         <p:attrNameLst>
                                           <p:attrName>style.visibility</p:attrName>
@@ -5792,7 +5841,7 @@
                                       <p:cBhvr>
                                         <p:cTn id="21" dur="450"/>
                                         <p:tgtEl>
-                                          <p:spTgt spid="7"/>
+                                          <p:spTgt spid="8"/>
                                         </p:tgtEl>
                                       </p:cBhvr>
                                     </p:animEffect>
@@ -5805,7 +5854,7 @@
                         <p:par>
                           <p:cTn id="22" fill="hold">
                             <p:stCondLst>
-                              <p:cond delay="5850"/>
+                              <p:cond delay="6900"/>
                             </p:stCondLst>
                             <p:childTnLst>
                               <p:par>
@@ -5822,7 +5871,7 @@
                                           </p:stCondLst>
                                         </p:cTn>
                                         <p:tgtEl>
-                                          <p:spTgt spid="9"/>
+                                          <p:spTgt spid="10"/>
                                         </p:tgtEl>
                                         <p:attrNameLst>
                                           <p:attrName>style.visibility</p:attrName>
@@ -5836,7 +5885,7 @@
                                       <p:cBhvr>
                                         <p:cTn id="24" dur="450"/>
                                         <p:tgtEl>
-                                          <p:spTgt spid="9"/>
+                                          <p:spTgt spid="10"/>
                                         </p:tgtEl>
                                       </p:cBhvr>
                                     </p:animEffect>
@@ -5849,7 +5898,7 @@
                         <p:par>
                           <p:cTn id="25" fill="hold">
                             <p:stCondLst>
-                              <p:cond delay="7350"/>
+                              <p:cond delay="8550"/>
                             </p:stCondLst>
                             <p:childTnLst>
                               <p:par>
@@ -5866,7 +5915,7 @@
                                           </p:stCondLst>
                                         </p:cTn>
                                         <p:tgtEl>
-                                          <p:spTgt spid="10"/>
+                                          <p:spTgt spid="11"/>
                                         </p:tgtEl>
                                         <p:attrNameLst>
                                           <p:attrName>style.visibility</p:attrName>
@@ -5880,7 +5929,7 @@
                                       <p:cBhvr>
                                         <p:cTn id="27" dur="450"/>
                                         <p:tgtEl>
-                                          <p:spTgt spid="10"/>
+                                          <p:spTgt spid="11"/>
                                         </p:tgtEl>
                                       </p:cBhvr>
                                     </p:animEffect>
@@ -5915,14 +5964,14 @@
       </p:par>
     </p:tnLst>
     <p:bldLst>
-      <p:bldP spid="8" grpId="0"/>
       <p:bldP spid="2" grpId="0"/>
+      <p:bldP spid="5" grpId="0"/>
       <p:bldP spid="3" grpId="0"/>
-      <p:bldP spid="5" grpId="0"/>
       <p:bldP spid="6" grpId="0"/>
       <p:bldP spid="7" grpId="0"/>
-      <p:bldP spid="9" grpId="0"/>
+      <p:bldP spid="8" grpId="0"/>
       <p:bldP spid="10" grpId="0"/>
+      <p:bldP spid="11" grpId="0"/>
     </p:bldLst>
   </p:timing>
 </p:sld>
@@ -5933,9 +5982,16 @@
   <p:cSld name="Slide 12">
     <p:bg>
       <p:bgPr>
-        <a:solidFill>
-          <a:srgbClr val="0B1B33"/>
-        </a:solidFill>
+        <a:blipFill dpi="0" rotWithShape="1">
+          <a:blip r:embed="rId1">
+            <a:lum/>
+          </a:blip>
+          <a:srcRect/>
+          <a:stretch>
+            <a:fillRect/>
+          </a:stretch>
+        </a:blipFill>
+        <a:effectLst/>
       </p:bgPr>
     </p:bg>
     <p:spTree>
@@ -6073,9 +6129,16 @@
   <p:cSld name="Slide 2">
     <p:bg>
       <p:bgPr>
-        <a:solidFill>
-          <a:srgbClr val="0B1B33"/>
-        </a:solidFill>
+        <a:blipFill dpi="0" rotWithShape="1">
+          <a:blip r:embed="rId1">
+            <a:lum/>
+          </a:blip>
+          <a:srcRect/>
+          <a:stretch>
+            <a:fillRect/>
+          </a:stretch>
+        </a:blipFill>
+        <a:effectLst/>
       </p:bgPr>
     </p:bg>
     <p:spTree>
@@ -7703,9 +7766,16 @@
   <p:cSld name="Slide 3">
     <p:bg>
       <p:bgPr>
-        <a:solidFill>
-          <a:srgbClr val="0B1B33"/>
-        </a:solidFill>
+        <a:blipFill dpi="0" rotWithShape="1">
+          <a:blip r:embed="rId1">
+            <a:lum/>
+          </a:blip>
+          <a:srcRect/>
+          <a:stretch>
+            <a:fillRect/>
+          </a:stretch>
+        </a:blipFill>
+        <a:effectLst/>
       </p:bgPr>
     </p:bg>
     <p:spTree>
@@ -10659,9 +10729,16 @@
   <p:cSld name="Slide 4">
     <p:bg>
       <p:bgPr>
-        <a:solidFill>
-          <a:srgbClr val="0B1B33"/>
-        </a:solidFill>
+        <a:blipFill dpi="0" rotWithShape="1">
+          <a:blip r:embed="rId1">
+            <a:lum/>
+          </a:blip>
+          <a:srcRect/>
+          <a:stretch>
+            <a:fillRect/>
+          </a:stretch>
+        </a:blipFill>
+        <a:effectLst/>
       </p:bgPr>
     </p:bg>
     <p:spTree>
@@ -12246,9 +12323,16 @@
   <p:cSld name="Slide 5">
     <p:bg>
       <p:bgPr>
-        <a:solidFill>
-          <a:srgbClr val="0B1B33"/>
-        </a:solidFill>
+        <a:blipFill dpi="0" rotWithShape="1">
+          <a:blip r:embed="rId1">
+            <a:lum/>
+          </a:blip>
+          <a:srcRect/>
+          <a:stretch>
+            <a:fillRect/>
+          </a:stretch>
+        </a:blipFill>
+        <a:effectLst/>
       </p:bgPr>
     </p:bg>
     <p:spTree>
@@ -13390,9 +13474,16 @@
   <p:cSld name="Slide 6">
     <p:bg>
       <p:bgPr>
-        <a:solidFill>
-          <a:srgbClr val="0B1B33"/>
-        </a:solidFill>
+        <a:blipFill dpi="0" rotWithShape="1">
+          <a:blip r:embed="rId1">
+            <a:lum/>
+          </a:blip>
+          <a:srcRect/>
+          <a:stretch>
+            <a:fillRect/>
+          </a:stretch>
+        </a:blipFill>
+        <a:effectLst/>
       </p:bgPr>
     </p:bg>
     <p:spTree>
@@ -14788,9 +14879,16 @@
   <p:cSld name="Slide 7">
     <p:bg>
       <p:bgPr>
-        <a:solidFill>
-          <a:srgbClr val="0B1B33"/>
-        </a:solidFill>
+        <a:blipFill dpi="0" rotWithShape="1">
+          <a:blip r:embed="rId1">
+            <a:lum/>
+          </a:blip>
+          <a:srcRect/>
+          <a:stretch>
+            <a:fillRect/>
+          </a:stretch>
+        </a:blipFill>
+        <a:effectLst/>
       </p:bgPr>
     </p:bg>
     <p:spTree>
@@ -16456,9 +16554,16 @@
   <p:cSld name="Slide 8">
     <p:bg>
       <p:bgPr>
-        <a:solidFill>
-          <a:srgbClr val="0B1B33"/>
-        </a:solidFill>
+        <a:blipFill dpi="0" rotWithShape="1">
+          <a:blip r:embed="rId1">
+            <a:lum/>
+          </a:blip>
+          <a:srcRect/>
+          <a:stretch>
+            <a:fillRect/>
+          </a:stretch>
+        </a:blipFill>
+        <a:effectLst/>
       </p:bgPr>
     </p:bg>
     <p:spTree>
@@ -17840,9 +17945,16 @@
   <p:cSld name="Slide 9">
     <p:bg>
       <p:bgPr>
-        <a:solidFill>
-          <a:srgbClr val="0B1B33"/>
-        </a:solidFill>
+        <a:blipFill dpi="0" rotWithShape="1">
+          <a:blip r:embed="rId1">
+            <a:lum/>
+          </a:blip>
+          <a:srcRect/>
+          <a:stretch>
+            <a:fillRect/>
+          </a:stretch>
+        </a:blipFill>
+        <a:effectLst/>
       </p:bgPr>
     </p:bg>
     <p:spTree>
